--- a/library/seminars/sem-08/rendered/sem-08.pptx
+++ b/library/seminars/sem-08/rendered/sem-08.pptx
@@ -1430,7 +1430,7 @@
           <a:lstStyle/>
           <a:p>
             <a:r>
-              <a:t>Разбираем все четыре действия, и не на предположении, а на измерении, которое провели до того, как решать.</a:t>
+              <a:t>Разбираем четыре действия, и не на предположении, а на измерении, которое провели до того, как решать.</a:t>
             </a:r>
           </a:p>
           <a:p/>
@@ -1442,19 +1442,25 @@
           <a:p/>
           <a:p>
             <a:r>
-              <a:t>Действие второе, классический векторный подход — TF-IDF плюс косинусная близость, порог 0,3, — выглядит серьёзнее: есть мера похожести, есть настраиваемый порог, это реалистичный инженерный выбор, а не придуманная для контраста слабая альтернатива. Измерили его на том же наборе, тем же методом. Результат — тоже 15 из 20, ровно то же самое. И это самое важное в разборе: подход не даёт прироста там, где должен бы его дать, — на тех же пяти перефразировках, потому что у большинства этих пар ноль общих слов при полном совпадении смысла. «Оплату» и «оплатить» — разные словоформы, «курс» и «занятие» — разные слова при одном смысле, и мера на основе слов слепа к этому в принципе.</a:t>
+              <a:t>Действие второе, классический векторный подход — TF-IDF плюс косинусная близость, порог 0,3, — выглядит серьёзнее: есть мера похожести, есть настраиваемый порог, это реалистичный инженерный выбор, а не придуманная для контраста слабая альтернатива. Измерили его на том же наборе, тем же методом. Результат — 13 из 20, и это хуже хэша, не наравне с ним. Те же пять перефразировок пропущены по той же причине — «оплату» и «оплатить» разные словоформы, «курс» и «занятие» разные слова при одном смысле, мера на основе слов слепа к этому в принципе. Но вдобавок появились два ложных срабатывания на вопросах близкой темы — «сколько стоит курс по питону» и «сколько стоит курс по аналитике данных» формально разные курсы, но делят почти все слова, и порог 0,3 посчитал их одним вопросом. Хэш на этой же паре не ошибается никогда — разные строки не совпадают по определению. Более серьёзный инструмент здесь заплатил новой категорией ошибок за старую.</a:t>
             </a:r>
           </a:p>
           <a:p/>
           <a:p>
             <a:r>
-              <a:t>Действие третье, дешёвая модель-судья: прямой вопрос «это тот же вопрос, просто сформулированный иначе?», модель gpt-4o-mini. Результат — 19 из 20, все 10 настоящих дублей и 9 из 10 разных вопросов. Но и у неё собственная ошибка: одно ложное срабатывание, и оно показательное — пара про возврат средств за пропущенный урок и про расписание на четверг тематически близки, оба про занятия, но по сути разные вопросы. Модель сказала «да».</a:t>
+              <a:t>Действие третье, дешёвая модель-судья: прямой вопрос «это тот же вопрос, просто сформулированный иначе?», модель gpt-4o-mini. Результат — 17 из 20, все 10 настоящих дублей пойманы. Но три собственных ложных срабатывания, и не все объясняются совпадением слов: одна пара — «сколько длится одно занятие по времени» и «расскажите про группу для продолжающих» — не делит вообще ни одного слова, и модель всё равно сказала «да». Это не ошибка из-за похожих слов, это ошибка суждения о смысле.</a:t>
             </a:r>
           </a:p>
           <a:p/>
           <a:p>
             <a:r>
-              <a:t>И честная находка, которая не очевидна заранее: если понизить порог TF-IDF, чтобы поймать пропущенную перефразировку, один из верно классифицированных «разных вопросов» тут же становится ложным срабатыванием. На этом наборе не существует единого порога, который побил бы хэш, — классический векторный подход здесь не «более умный хэш», а тот же результат другим способом.</a:t>
+              <a:t>Четвёртая схема — внешний сервис jev — на экране без числа, и это не недосмотр. Сервис реальный: подтверждён каталогом моделей OpenRouter, прямым запросом на его endpoint и владельцем. Прогнать его на этих же 20 парах не удалось — рабочий credential n8n, которым уже пользуется модель-судья здесь же, не имеет права на обычный HTTP-вызов, которым устроена эта API. Административный блокер, не технический провал: право включат — прогон пройдёт без правки кода, workflow уже собран и ждёт на стенде.</a:t>
+            </a:r>
+          </a:p>
+          <a:p/>
+          <a:p>
+            <a:r>
+              <a:t>И честная находка, которая не очевидна заранее: поднять порог, чтобы убрать два новых ложных срабатывания, не помогает поймать ни одну перефразировку — лучшее, что даёт настройка порога здесь, это сравняться с хэшем, а не превзойти его.</a:t>
             </a:r>
           </a:p>
           <a:p/>
@@ -1530,7 +1536,7 @@
           <a:lstStyle/>
           <a:p>
             <a:r>
-              <a:t>Вот три схемы, которые мы только что разобрали, теперь рядом, на одном и том же тесте. Хэш и классический векторный подход дают одинаковые 15 из 20 — несмотря на то, что второй выглядит серьёзнее. Модель — 19 из 20, дороже на каждый вызов, но ловит то, к чему механика слепа в принципе.</a:t>
+              <a:t>Вот схемы, которые мы только что разобрали, теперь рядом, на одном и том же тесте. Хэш — 15 из 20, классический векторный подход — 13 из 20, хуже, несмотря на то, что второй выглядит серьёзнее. Модель — 17 из 20, дороже на каждый вызов, но ловит то, к чему механика слепа в принципе.</a:t>
             </a:r>
           </a:p>
           <a:p/>
@@ -1542,7 +1548,7 @@
           <a:p/>
           <a:p>
             <a:r>
-              <a:t>Первый шаг — дешёвый, механический фильтр. Он берёт на себя всё, что решается без модели: все буквальные повторы, и он решает это бесплатно и мгновенно. Классический векторный подход в этот шаг не идёт — измерение только что показало, что он не даёт прироста над самым простым сравнением строк, а значит добавлять его как отдельный шаг — лишняя сложность без выигрыша.</a:t>
+              <a:t>Первый шаг — дешёвый, механический фильтр. Он берёт на себя всё, что решается без модели: все буквальные повторы, и он решает это бесплатно и мгновенно. Классический векторный подход в этот шаг не идёт — измерение только что показало, что он не просто не даёт прироста над самым простым сравнением строк, а измеримо хуже него, а значит добавлять его как отдельный шаг — лишняя сложность без выигрыша и с новым риском.</a:t>
             </a:r>
           </a:p>
           <a:p/>
@@ -1954,7 +1960,7 @@
           <a:p/>
           <a:p>
             <a:r>
-              <a:t>Механическая проверка и проверка смыслом — не конкуренты, и ни одна не является «более совершенной версией» другой. Точное совпадение не ловит переформулировку в принципе: оно сравнивает строки, а не смысл, и иначе работать не умеет. Классический векторный подход выглядел более серьёзной альтернативой — у него есть мера и порог, — но измерение на 20 реальных парах дало ему ровно столько же, сколько простому хэшу: 15 из 20, и ошибается он там же, на тех же перефразировках, просто по другой причине — ноль общих слов при полном совпадении смысла. «Более серьёзный» неязыковой инструмент не гарантирует прироста — это показало измерение на своих данных, не общее свойство метода.</a:t>
+              <a:t>Механическая проверка и проверка смыслом — не конкуренты, и ни одна не является «более совершенной версией» другой. Точное совпадение не ловит переформулировку в принципе: оно сравнивает строки, а не смысл, и иначе работать не умеет. Классический векторный подход выглядел более серьёзной альтернативой — у него есть мера и порог, — но измерение на 20 реальных парах дало ему хуже, чем простому хэшу: 13 из 20 против 15. Он ошибается там же, на тех же перефразировках, по той же причине — ноль общих слов при полном совпадении смысла, — и вдобавок даёт 2 ложных срабатывания там, где хэш не ошибается в принципе. «Более серьёзный» неязыковой инструмент не просто не гарантирует прироста — он может быть измеримо хуже. Это показало измерение на своих данных, не общее свойство метода.</a:t>
             </a:r>
           </a:p>
           <a:p/>
@@ -2054,7 +2060,7 @@
           <a:p/>
           <a:p>
             <a:r>
-              <a:t>Второй — LLM-проверка похожести — частный случай более общей задачи, когда модель выступает судьёй, оценивающим чужой текст. И у неё та же асимметрия ошибок, что у любой модели в роли оценщика: это не предположение, а задокументированный результат — Ватаока, Такахаси и Ри показали на NeurIPS 2024, на воркшопе Safe GenAI, что модель-судья систематически не нейтральна, даже когда формально просто отвечает «да» или «нет» на прямой вопрос. И это не абстрактная ссылка на чужую работу: мы только что увидели ровно это на своём тесте — одно ложное срабатывание из двадцати, не ноль. Проверка смыслом не идеальна, она просто ошибается иначе, чем механика.</a:t>
+              <a:t>Второй — LLM-проверка похожести — частный случай более общей задачи, когда модель выступает судьёй, оценивающим чужой текст. И у неё та же асимметрия ошибок, что у любой модели в роли оценщика: это не предположение, а задокументированный результат — Ватаока, Такахаси и Ри показали на NeurIPS 2024, на воркшопе Safe GenAI, что модель-судья систематически не нейтральна, даже когда формально просто отвечает «да» или «нет» на прямой вопрос. И это не абстрактная ссылка на чужую работу: мы только что увидели ровно это на своём тесте — три ложных срабатывания из двадцати, не ноль, и хотя бы одно из них не объясняется совпадением слов в вопросах — модель ошиблась на паре без единого общего слова. Проверка смыслом не идеальна, она просто ошибается иначе, чем механика.</a:t>
             </a:r>
           </a:p>
           <a:p/>
@@ -2142,13 +2148,13 @@
           <a:p/>
           <a:p>
             <a:r>
-              <a:t>Классический векторный подход не стоит добавлять «на всякий случай», рассчитывая на то, что мера похожести и настраиваемый порог сами по себе дадут прирост. Измерение на 20 реальных парах показало то же самое, что у хэша: его нельзя брать как «более умного хэша» без проверки на своих данных.</a:t>
+              <a:t>Классический векторный подход не стоит добавлять «на всякий случай», рассчитывая на то, что мера похожести и настраиваемый порог сами по себе дадут прирост. Измерение на 20 реальных парах показало результат ХУЖЕ, чем у хэша, — 13 из 20 против 15: его нельзя брать как «более умного хэша» без проверки на своих данных, он может оказаться хуже самого простого варианта.</a:t>
             </a:r>
           </a:p>
           <a:p/>
           <a:p>
             <a:r>
-              <a:t>Проверка смыслом нужна сверху там, где ожидаются именно переформулировки — второй вопрос Бориса, заданный другими словами. Модель нужна там, и важно помнить: её собственная частота ошибок — у нас одно ложное срабатывание из двадцати, пять процентов — это цена, которую вы платите за эту точность, а не ноль. Если цена необнаруженного дубля — повторная работа администратора, повторный звонок, недоверие клиента вроде того, что получил Борис, — выше цены одного лишнего вызова модели на спорные случаи, проверка смыслом себя оправдывает.</a:t>
+              <a:t>Проверка смыслом нужна сверху там, где ожидаются именно переформулировки — второй вопрос Бориса, заданный другими словами. Модель нужна там, и важно помнить: её собственная частота ошибок — у нас три ложных срабатывания из двадцати, пятнадцать процентов — это цена, которую вы платите за эту точность, а не ноль. Если цена необнаруженного дубля — повторная работа администратора, повторный звонок, недоверие клиента вроде того, что получил Борис, — выше цены одного лишнего вызова модели на спорные случаи, проверка смыслом себя оправдывает.</a:t>
             </a:r>
           </a:p>
           <a:p/>
@@ -12612,8 +12618,8 @@
         </p:nvSpPr>
         <p:spPr>
           <a:xfrm>
-            <a:off x="502920" y="960975"/>
-            <a:ext cx="82296" cy="982980"/>
+            <a:off x="502920" y="943356"/>
+            <a:ext cx="82296" cy="731012"/>
           </a:xfrm>
           <a:prstGeom prst="roundRect">
             <a:avLst>
@@ -12658,8 +12664,8 @@
         </p:nvSpPr>
         <p:spPr>
           <a:xfrm>
-            <a:off x="859536" y="1088991"/>
-            <a:ext cx="10643616" cy="726948"/>
+            <a:off x="859536" y="1071372"/>
+            <a:ext cx="10643616" cy="474979"/>
           </a:xfrm>
           <a:prstGeom prst="rect">
             <a:avLst/>
@@ -12674,20 +12680,20 @@
           <a:p>
             <a:pPr algn="l">
               <a:lnSpc>
-                <a:spcPts val="1860"/>
+                <a:spcPts val="1798"/>
               </a:lnSpc>
               <a:spcAft>
                 <a:spcPts val="300"/>
               </a:spcAft>
             </a:pPr>
             <a:r>
-              <a:rPr sz="1500" b="1" i="0">
-                <a:solidFill>
-                  <a:srgbClr val="141B2E"/>
-                </a:solidFill>
-                <a:latin typeface="Arial"/>
-              </a:rPr>
-              <a:t>20 тестовых пар: 10 настоящих дублей (5 буквальных повторов + 5 перефразировок вроде пары Бориса) и 10 заведомо разных вопросов, часть — на близкую тему, для честной проверки ложных срабатываний.</a:t>
+              <a:rPr sz="1450" b="1" i="0">
+                <a:solidFill>
+                  <a:srgbClr val="141B2E"/>
+                </a:solidFill>
+                <a:latin typeface="Arial"/>
+              </a:rPr>
+              <a:t>20 тестовых пар: 10 настоящих дублей (5 буквальных повторов + 5 перефразировок вроде пары Бориса) и 10 заведомо разных вопросов, 3 из них — на близкую тему, для честной проверки ложных срабатываний.</a:t>
             </a:r>
           </a:p>
         </p:txBody>
@@ -12700,12 +12706,12 @@
         </p:nvSpPr>
         <p:spPr>
           <a:xfrm>
-            <a:off x="502920" y="2152594"/>
-            <a:ext cx="11183112" cy="2957004"/>
+            <a:off x="502920" y="1838960"/>
+            <a:ext cx="11183112" cy="3040126"/>
           </a:xfrm>
           <a:prstGeom prst="roundRect">
             <a:avLst>
-              <a:gd name="adj" fmla="val 10307"/>
+              <a:gd name="adj" fmla="val 10025"/>
             </a:avLst>
           </a:prstGeom>
           <a:solidFill>
@@ -12748,8 +12754,8 @@
         </p:nvSpPr>
         <p:spPr>
           <a:xfrm>
-            <a:off x="685800" y="2335474"/>
-            <a:ext cx="2521270" cy="454405"/>
+            <a:off x="685800" y="2021840"/>
+            <a:ext cx="2434898" cy="409447"/>
           </a:xfrm>
           <a:prstGeom prst="rect">
             <a:avLst/>
@@ -12764,14 +12770,14 @@
           <a:p>
             <a:pPr algn="l">
               <a:lnSpc>
-                <a:spcPts val="1265"/>
+                <a:spcPts val="1100"/>
               </a:lnSpc>
               <a:spcAft>
                 <a:spcPts val="0"/>
               </a:spcAft>
             </a:pPr>
             <a:r>
-              <a:rPr sz="1150" b="1" i="0">
+              <a:rPr sz="1000" b="1" i="0">
                 <a:solidFill>
                   <a:srgbClr val="6B7685"/>
                 </a:solidFill>
@@ -12790,8 +12796,8 @@
         </p:nvSpPr>
         <p:spPr>
           <a:xfrm>
-            <a:off x="3353374" y="2335474"/>
-            <a:ext cx="610910" cy="454405"/>
+            <a:off x="3267002" y="2021840"/>
+            <a:ext cx="680059" cy="409447"/>
           </a:xfrm>
           <a:prstGeom prst="rect">
             <a:avLst/>
@@ -12806,14 +12812,14 @@
           <a:p>
             <a:pPr algn="l">
               <a:lnSpc>
-                <a:spcPts val="1265"/>
+                <a:spcPts val="1100"/>
               </a:lnSpc>
               <a:spcAft>
                 <a:spcPts val="0"/>
               </a:spcAft>
             </a:pPr>
             <a:r>
-              <a:rPr sz="1150" b="1" i="0">
+              <a:rPr sz="1000" b="1" i="0">
                 <a:solidFill>
                   <a:srgbClr val="6B7685"/>
                 </a:solidFill>
@@ -12832,8 +12838,8 @@
         </p:nvSpPr>
         <p:spPr>
           <a:xfrm>
-            <a:off x="4110589" y="2335474"/>
-            <a:ext cx="1864181" cy="454405"/>
+            <a:off x="4093365" y="2021840"/>
+            <a:ext cx="1863295" cy="409447"/>
           </a:xfrm>
           <a:prstGeom prst="rect">
             <a:avLst/>
@@ -12848,14 +12854,14 @@
           <a:p>
             <a:pPr algn="l">
               <a:lnSpc>
-                <a:spcPts val="1265"/>
+                <a:spcPts val="1100"/>
               </a:lnSpc>
               <a:spcAft>
                 <a:spcPts val="0"/>
               </a:spcAft>
             </a:pPr>
             <a:r>
-              <a:rPr sz="1150" b="1" i="0">
+              <a:rPr sz="1000" b="1" i="0">
                 <a:solidFill>
                   <a:srgbClr val="6B7685"/>
                 </a:solidFill>
@@ -12874,8 +12880,8 @@
         </p:nvSpPr>
         <p:spPr>
           <a:xfrm>
-            <a:off x="6121074" y="2335474"/>
-            <a:ext cx="5235773" cy="454405"/>
+            <a:off x="6102964" y="2021840"/>
+            <a:ext cx="5253883" cy="409447"/>
           </a:xfrm>
           <a:prstGeom prst="rect">
             <a:avLst/>
@@ -12890,14 +12896,14 @@
           <a:p>
             <a:pPr algn="l">
               <a:lnSpc>
-                <a:spcPts val="1265"/>
+                <a:spcPts val="1100"/>
               </a:lnSpc>
               <a:spcAft>
                 <a:spcPts val="0"/>
               </a:spcAft>
             </a:pPr>
             <a:r>
-              <a:rPr sz="1150" b="1" i="0">
+              <a:rPr sz="1000" b="1" i="0">
                 <a:solidFill>
                   <a:srgbClr val="6B7685"/>
                 </a:solidFill>
@@ -12916,8 +12922,8 @@
         </p:nvSpPr>
         <p:spPr>
           <a:xfrm>
-            <a:off x="685800" y="2789880"/>
-            <a:ext cx="2521270" cy="712279"/>
+            <a:off x="685800" y="2431288"/>
+            <a:ext cx="2434898" cy="602742"/>
           </a:xfrm>
           <a:prstGeom prst="rect">
             <a:avLst/>
@@ -12932,14 +12938,14 @@
           <a:p>
             <a:pPr algn="l">
               <a:lnSpc>
-                <a:spcPts val="1437"/>
+                <a:spcPts val="1150"/>
               </a:lnSpc>
               <a:spcAft>
                 <a:spcPts val="0"/>
               </a:spcAft>
             </a:pPr>
             <a:r>
-              <a:rPr sz="1250" b="1" i="0">
+              <a:rPr sz="1000" b="1" i="0">
                 <a:solidFill>
                   <a:srgbClr val="141B2E"/>
                 </a:solidFill>
@@ -12958,8 +12964,8 @@
         </p:nvSpPr>
         <p:spPr>
           <a:xfrm>
-            <a:off x="3353374" y="2789880"/>
-            <a:ext cx="610910" cy="712279"/>
+            <a:off x="3267002" y="2431288"/>
+            <a:ext cx="680059" cy="602742"/>
           </a:xfrm>
           <a:prstGeom prst="rect">
             <a:avLst/>
@@ -12974,14 +12980,14 @@
           <a:p>
             <a:pPr algn="l">
               <a:lnSpc>
-                <a:spcPts val="1437"/>
+                <a:spcPts val="1150"/>
               </a:lnSpc>
               <a:spcAft>
                 <a:spcPts val="0"/>
               </a:spcAft>
             </a:pPr>
             <a:r>
-              <a:rPr sz="1250" b="1" i="0">
+              <a:rPr sz="1000" b="1" i="0">
                 <a:solidFill>
                   <a:srgbClr val="141B2E"/>
                 </a:solidFill>
@@ -13000,8 +13006,8 @@
         </p:nvSpPr>
         <p:spPr>
           <a:xfrm>
-            <a:off x="4110589" y="2789880"/>
-            <a:ext cx="1864181" cy="712279"/>
+            <a:off x="4093365" y="2431288"/>
+            <a:ext cx="1863295" cy="602742"/>
           </a:xfrm>
           <a:prstGeom prst="rect">
             <a:avLst/>
@@ -13016,14 +13022,14 @@
           <a:p>
             <a:pPr algn="l">
               <a:lnSpc>
-                <a:spcPts val="1437"/>
+                <a:spcPts val="1150"/>
               </a:lnSpc>
               <a:spcAft>
                 <a:spcPts val="0"/>
               </a:spcAft>
             </a:pPr>
             <a:r>
-              <a:rPr sz="1250" b="0" i="0">
+              <a:rPr sz="1000" b="0" i="0">
                 <a:solidFill>
                   <a:srgbClr val="141B2E"/>
                 </a:solidFill>
@@ -13042,8 +13048,8 @@
         </p:nvSpPr>
         <p:spPr>
           <a:xfrm>
-            <a:off x="6121074" y="2789880"/>
-            <a:ext cx="5235773" cy="712279"/>
+            <a:off x="6102964" y="2431288"/>
+            <a:ext cx="5253883" cy="602742"/>
           </a:xfrm>
           <a:prstGeom prst="rect">
             <a:avLst/>
@@ -13058,14 +13064,14 @@
           <a:p>
             <a:pPr algn="l">
               <a:lnSpc>
-                <a:spcPts val="1437"/>
+                <a:spcPts val="1150"/>
               </a:lnSpc>
               <a:spcAft>
                 <a:spcPts val="0"/>
               </a:spcAft>
             </a:pPr>
             <a:r>
-              <a:rPr sz="1250" b="0" i="0">
+              <a:rPr sz="1000" b="0" i="0">
                 <a:solidFill>
                   <a:srgbClr val="141B2E"/>
                 </a:solidFill>
@@ -13084,7 +13090,7 @@
         </p:nvCxnSpPr>
         <p:spPr>
           <a:xfrm>
-            <a:off x="685800" y="3502160"/>
+            <a:off x="685800" y="3034030"/>
             <a:ext cx="10817352" cy="0"/>
           </a:xfrm>
           <a:prstGeom prst="line">
@@ -13119,8 +13125,8 @@
         </p:nvSpPr>
         <p:spPr>
           <a:xfrm>
-            <a:off x="685800" y="3502160"/>
-            <a:ext cx="2521270" cy="712279"/>
+            <a:off x="685800" y="3034030"/>
+            <a:ext cx="2434898" cy="602742"/>
           </a:xfrm>
           <a:prstGeom prst="rect">
             <a:avLst/>
@@ -13135,14 +13141,14 @@
           <a:p>
             <a:pPr algn="l">
               <a:lnSpc>
-                <a:spcPts val="1437"/>
+                <a:spcPts val="1150"/>
               </a:lnSpc>
               <a:spcAft>
                 <a:spcPts val="0"/>
               </a:spcAft>
             </a:pPr>
             <a:r>
-              <a:rPr sz="1250" b="1" i="0">
+              <a:rPr sz="1000" b="1" i="0">
                 <a:solidFill>
                   <a:srgbClr val="141B2E"/>
                 </a:solidFill>
@@ -13151,7 +13157,7 @@
               <a:t>TF-IDF + косинус</a:t>
             </a:r>
             <a:r>
-              <a:rPr sz="1250" b="0" i="0">
+              <a:rPr sz="1000" b="0" i="0">
                 <a:solidFill>
                   <a:srgbClr val="141B2E"/>
                 </a:solidFill>
@@ -13170,8 +13176,8 @@
         </p:nvSpPr>
         <p:spPr>
           <a:xfrm>
-            <a:off x="3353374" y="3502160"/>
-            <a:ext cx="610910" cy="712279"/>
+            <a:off x="3267002" y="3034030"/>
+            <a:ext cx="680059" cy="602742"/>
           </a:xfrm>
           <a:prstGeom prst="rect">
             <a:avLst/>
@@ -13186,20 +13192,29 @@
           <a:p>
             <a:pPr algn="l">
               <a:lnSpc>
-                <a:spcPts val="1437"/>
+                <a:spcPts val="1150"/>
               </a:lnSpc>
               <a:spcAft>
                 <a:spcPts val="0"/>
               </a:spcAft>
             </a:pPr>
             <a:r>
-              <a:rPr sz="1250" b="1" i="0">
-                <a:solidFill>
-                  <a:srgbClr val="141B2E"/>
-                </a:solidFill>
-                <a:latin typeface="Arial"/>
-              </a:rPr>
-              <a:t>15/20</a:t>
+              <a:rPr sz="1000" b="1" i="0">
+                <a:solidFill>
+                  <a:srgbClr val="141B2E"/>
+                </a:solidFill>
+                <a:latin typeface="Arial"/>
+              </a:rPr>
+              <a:t>13/20</a:t>
+            </a:r>
+            <a:r>
+              <a:rPr sz="1000" b="0" i="0">
+                <a:solidFill>
+                  <a:srgbClr val="141B2E"/>
+                </a:solidFill>
+                <a:latin typeface="Arial"/>
+              </a:rPr>
+              <a:t> — хуже хэша</a:t>
             </a:r>
           </a:p>
         </p:txBody>
@@ -13212,8 +13227,8 @@
         </p:nvSpPr>
         <p:spPr>
           <a:xfrm>
-            <a:off x="4110589" y="3502160"/>
-            <a:ext cx="1864181" cy="712279"/>
+            <a:off x="4093365" y="3034030"/>
+            <a:ext cx="1863295" cy="602742"/>
           </a:xfrm>
           <a:prstGeom prst="rect">
             <a:avLst/>
@@ -13228,20 +13243,20 @@
           <a:p>
             <a:pPr algn="l">
               <a:lnSpc>
-                <a:spcPts val="1437"/>
+                <a:spcPts val="1150"/>
               </a:lnSpc>
               <a:spcAft>
                 <a:spcPts val="0"/>
               </a:spcAft>
             </a:pPr>
             <a:r>
-              <a:rPr sz="1250" b="0" i="0">
-                <a:solidFill>
-                  <a:srgbClr val="141B2E"/>
-                </a:solidFill>
-                <a:latin typeface="Arial"/>
-              </a:rPr>
-              <a:t>ровно то же, что хэш</a:t>
+              <a:rPr sz="1000" b="0" i="0">
+                <a:solidFill>
+                  <a:srgbClr val="141B2E"/>
+                </a:solidFill>
+                <a:latin typeface="Arial"/>
+              </a:rPr>
+              <a:t>буквальные повторы, часть разных вопросов</a:t>
             </a:r>
           </a:p>
         </p:txBody>
@@ -13254,8 +13269,8 @@
         </p:nvSpPr>
         <p:spPr>
           <a:xfrm>
-            <a:off x="6121074" y="3502160"/>
-            <a:ext cx="5235773" cy="712279"/>
+            <a:off x="6102964" y="3034030"/>
+            <a:ext cx="5253883" cy="602742"/>
           </a:xfrm>
           <a:prstGeom prst="rect">
             <a:avLst/>
@@ -13270,20 +13285,20 @@
           <a:p>
             <a:pPr algn="l">
               <a:lnSpc>
-                <a:spcPts val="1437"/>
+                <a:spcPts val="1150"/>
               </a:lnSpc>
               <a:spcAft>
                 <a:spcPts val="0"/>
               </a:spcAft>
             </a:pPr>
             <a:r>
-              <a:rPr sz="1250" b="0" i="0">
-                <a:solidFill>
-                  <a:srgbClr val="141B2E"/>
-                </a:solidFill>
-                <a:latin typeface="Arial"/>
-              </a:rPr>
-              <a:t>та же пятёрка перефразировок: у большинства пар ноль общих слов при полном совпадении смысла</a:t>
+              <a:rPr sz="1000" b="0" i="0">
+                <a:solidFill>
+                  <a:srgbClr val="141B2E"/>
+                </a:solidFill>
+                <a:latin typeface="Arial"/>
+              </a:rPr>
+              <a:t>та же пятёрка перефразировок, ПЛЮС 2 ложных срабатывания на вопросах близкой темы — хэш на этих парах не ошибается в принципе</a:t>
             </a:r>
           </a:p>
         </p:txBody>
@@ -13296,7 +13311,7 @@
         </p:nvCxnSpPr>
         <p:spPr>
           <a:xfrm>
-            <a:off x="685800" y="4214439"/>
+            <a:off x="685800" y="3636772"/>
             <a:ext cx="10817352" cy="0"/>
           </a:xfrm>
           <a:prstGeom prst="line">
@@ -13331,8 +13346,8 @@
         </p:nvSpPr>
         <p:spPr>
           <a:xfrm>
-            <a:off x="685800" y="4214439"/>
-            <a:ext cx="2521270" cy="712279"/>
+            <a:off x="685800" y="3636772"/>
+            <a:ext cx="2434898" cy="602742"/>
           </a:xfrm>
           <a:prstGeom prst="rect">
             <a:avLst/>
@@ -13347,14 +13362,14 @@
           <a:p>
             <a:pPr algn="l">
               <a:lnSpc>
-                <a:spcPts val="1437"/>
+                <a:spcPts val="1150"/>
               </a:lnSpc>
               <a:spcAft>
                 <a:spcPts val="0"/>
               </a:spcAft>
             </a:pPr>
             <a:r>
-              <a:rPr sz="1250" b="1" i="0">
+              <a:rPr sz="1000" b="1" i="0">
                 <a:solidFill>
                   <a:srgbClr val="141B2E"/>
                 </a:solidFill>
@@ -13363,7 +13378,7 @@
               <a:t>Дешёвая модель-судья</a:t>
             </a:r>
             <a:r>
-              <a:rPr sz="1250" b="0" i="0">
+              <a:rPr sz="1000" b="0" i="0">
                 <a:solidFill>
                   <a:srgbClr val="141B2E"/>
                 </a:solidFill>
@@ -13382,8 +13397,8 @@
         </p:nvSpPr>
         <p:spPr>
           <a:xfrm>
-            <a:off x="3353374" y="4214439"/>
-            <a:ext cx="610910" cy="712279"/>
+            <a:off x="3267002" y="3636772"/>
+            <a:ext cx="680059" cy="602742"/>
           </a:xfrm>
           <a:prstGeom prst="rect">
             <a:avLst/>
@@ -13398,20 +13413,20 @@
           <a:p>
             <a:pPr algn="l">
               <a:lnSpc>
-                <a:spcPts val="1437"/>
+                <a:spcPts val="1150"/>
               </a:lnSpc>
               <a:spcAft>
                 <a:spcPts val="0"/>
               </a:spcAft>
             </a:pPr>
             <a:r>
-              <a:rPr sz="1250" b="1" i="0">
-                <a:solidFill>
-                  <a:srgbClr val="141B2E"/>
-                </a:solidFill>
-                <a:latin typeface="Arial"/>
-              </a:rPr>
-              <a:t>19/20</a:t>
+              <a:rPr sz="1000" b="1" i="0">
+                <a:solidFill>
+                  <a:srgbClr val="141B2E"/>
+                </a:solidFill>
+                <a:latin typeface="Arial"/>
+              </a:rPr>
+              <a:t>17/20</a:t>
             </a:r>
           </a:p>
         </p:txBody>
@@ -13424,8 +13439,8 @@
         </p:nvSpPr>
         <p:spPr>
           <a:xfrm>
-            <a:off x="4110589" y="4214439"/>
-            <a:ext cx="1864181" cy="712279"/>
+            <a:off x="4093365" y="3636772"/>
+            <a:ext cx="1863295" cy="602742"/>
           </a:xfrm>
           <a:prstGeom prst="rect">
             <a:avLst/>
@@ -13440,20 +13455,20 @@
           <a:p>
             <a:pPr algn="l">
               <a:lnSpc>
-                <a:spcPts val="1437"/>
+                <a:spcPts val="1150"/>
               </a:lnSpc>
               <a:spcAft>
                 <a:spcPts val="0"/>
               </a:spcAft>
             </a:pPr>
             <a:r>
-              <a:rPr sz="1250" b="0" i="0">
-                <a:solidFill>
-                  <a:srgbClr val="141B2E"/>
-                </a:solidFill>
-                <a:latin typeface="Arial"/>
-              </a:rPr>
-              <a:t>все 10 дублей, 9 из 10 разных вопросов</a:t>
+              <a:rPr sz="1000" b="0" i="0">
+                <a:solidFill>
+                  <a:srgbClr val="141B2E"/>
+                </a:solidFill>
+                <a:latin typeface="Arial"/>
+              </a:rPr>
+              <a:t>все 10 дублей</a:t>
             </a:r>
           </a:p>
         </p:txBody>
@@ -13466,8 +13481,8 @@
         </p:nvSpPr>
         <p:spPr>
           <a:xfrm>
-            <a:off x="6121074" y="4214439"/>
-            <a:ext cx="5235773" cy="712279"/>
+            <a:off x="6102964" y="3636772"/>
+            <a:ext cx="5253883" cy="602742"/>
           </a:xfrm>
           <a:prstGeom prst="rect">
             <a:avLst/>
@@ -13482,34 +13497,237 @@
           <a:p>
             <a:pPr algn="l">
               <a:lnSpc>
-                <a:spcPts val="1437"/>
+                <a:spcPts val="1150"/>
               </a:lnSpc>
               <a:spcAft>
                 <a:spcPts val="0"/>
               </a:spcAft>
             </a:pPr>
             <a:r>
-              <a:rPr sz="1250" b="0" i="0">
-                <a:solidFill>
-                  <a:srgbClr val="141B2E"/>
-                </a:solidFill>
-                <a:latin typeface="Arial"/>
-              </a:rPr>
-              <a:t>1 ложное срабатывание: «хочу возврат средств за урок, на который не попал» и «в какое время у нас урок в четверг» — модель сказала «да», хотя вопросы разные</a:t>
-            </a:r>
-          </a:p>
-        </p:txBody>
-      </p:sp>
-      <p:sp>
-        <p:nvSpPr>
-          <p:cNvPr id="24" name="Rounded Rectangle 23"/>
+              <a:rPr sz="1000" b="0" i="0">
+                <a:solidFill>
+                  <a:srgbClr val="141B2E"/>
+                </a:solidFill>
+                <a:latin typeface="Arial"/>
+              </a:rPr>
+              <a:t>3 ложных срабатывания, включая пару без единого общего слова — асимметрия ошибок не объясняется просто совпадением слов</a:t>
+            </a:r>
+          </a:p>
+        </p:txBody>
+      </p:sp>
+      <p:cxnSp>
+        <p:nvCxnSpPr>
+          <p:cNvPr id="24" name="Connector 23"/>
+          <p:cNvCxnSpPr/>
+          <p:nvPr/>
+        </p:nvCxnSpPr>
+        <p:spPr>
+          <a:xfrm>
+            <a:off x="685800" y="4239514"/>
+            <a:ext cx="10817352" cy="0"/>
+          </a:xfrm>
+          <a:prstGeom prst="line">
+            <a:avLst/>
+          </a:prstGeom>
+          <a:ln w="9525">
+            <a:solidFill>
+              <a:srgbClr val="E5EAF0"/>
+            </a:solidFill>
+          </a:ln>
+        </p:spPr>
+        <p:style>
+          <a:lnRef idx="2">
+            <a:schemeClr val="accent1"/>
+          </a:lnRef>
+          <a:fillRef idx="0">
+            <a:schemeClr val="accent1"/>
+          </a:fillRef>
+          <a:effectRef idx="1">
+            <a:schemeClr val="accent1"/>
+          </a:effectRef>
+          <a:fontRef idx="minor">
+            <a:schemeClr val="tx1"/>
+          </a:fontRef>
+        </p:style>
+      </p:cxnSp>
+      <p:sp>
+        <p:nvSpPr>
+          <p:cNvPr id="25" name="TextBox 24"/>
+          <p:cNvSpPr txBox="1"/>
+          <p:nvPr/>
+        </p:nvSpPr>
+        <p:spPr>
+          <a:xfrm>
+            <a:off x="685800" y="4239514"/>
+            <a:ext cx="2434898" cy="456692"/>
+          </a:xfrm>
+          <a:prstGeom prst="rect">
+            <a:avLst/>
+          </a:prstGeom>
+          <a:noFill/>
+        </p:spPr>
+        <p:txBody>
+          <a:bodyPr wrap="square" lIns="0" rIns="0" tIns="0" bIns="0" anchor="ctr">
+            <a:spAutoFit/>
+          </a:bodyPr>
+          <a:lstStyle/>
+          <a:p>
+            <a:pPr algn="l">
+              <a:lnSpc>
+                <a:spcPts val="1150"/>
+              </a:lnSpc>
+              <a:spcAft>
+                <a:spcPts val="0"/>
+              </a:spcAft>
+            </a:pPr>
+            <a:r>
+              <a:rPr sz="1000" b="1" i="0">
+                <a:solidFill>
+                  <a:srgbClr val="141B2E"/>
+                </a:solidFill>
+                <a:latin typeface="Arial"/>
+              </a:rPr>
+              <a:t>Сравнение через внешний сервис (jev)</a:t>
+            </a:r>
+          </a:p>
+        </p:txBody>
+      </p:sp>
+      <p:sp>
+        <p:nvSpPr>
+          <p:cNvPr id="26" name="TextBox 25"/>
+          <p:cNvSpPr txBox="1"/>
+          <p:nvPr/>
+        </p:nvSpPr>
+        <p:spPr>
+          <a:xfrm>
+            <a:off x="3267002" y="4239514"/>
+            <a:ext cx="680059" cy="456692"/>
+          </a:xfrm>
+          <a:prstGeom prst="rect">
+            <a:avLst/>
+          </a:prstGeom>
+          <a:noFill/>
+        </p:spPr>
+        <p:txBody>
+          <a:bodyPr wrap="square" lIns="0" rIns="0" tIns="0" bIns="0" anchor="ctr">
+            <a:spAutoFit/>
+          </a:bodyPr>
+          <a:lstStyle/>
+          <a:p>
+            <a:pPr algn="l">
+              <a:lnSpc>
+                <a:spcPts val="1150"/>
+              </a:lnSpc>
+              <a:spcAft>
+                <a:spcPts val="0"/>
+              </a:spcAft>
+            </a:pPr>
+            <a:r>
+              <a:rPr sz="1000" b="0" i="0">
+                <a:solidFill>
+                  <a:srgbClr val="141B2E"/>
+                </a:solidFill>
+                <a:latin typeface="Arial"/>
+              </a:rPr>
+              <a:t>не измерено</a:t>
+            </a:r>
+          </a:p>
+        </p:txBody>
+      </p:sp>
+      <p:sp>
+        <p:nvSpPr>
+          <p:cNvPr id="27" name="TextBox 26"/>
+          <p:cNvSpPr txBox="1"/>
+          <p:nvPr/>
+        </p:nvSpPr>
+        <p:spPr>
+          <a:xfrm>
+            <a:off x="4093365" y="4239514"/>
+            <a:ext cx="1863295" cy="456692"/>
+          </a:xfrm>
+          <a:prstGeom prst="rect">
+            <a:avLst/>
+          </a:prstGeom>
+          <a:noFill/>
+        </p:spPr>
+        <p:txBody>
+          <a:bodyPr wrap="square" lIns="0" rIns="0" tIns="0" bIns="0" anchor="ctr">
+            <a:spAutoFit/>
+          </a:bodyPr>
+          <a:lstStyle/>
+          <a:p>
+            <a:pPr algn="l">
+              <a:lnSpc>
+                <a:spcPts val="1150"/>
+              </a:lnSpc>
+              <a:spcAft>
+                <a:spcPts val="0"/>
+              </a:spcAft>
+            </a:pPr>
+            <a:r>
+              <a:rPr sz="1000" b="0" i="0">
+                <a:solidFill>
+                  <a:srgbClr val="141B2E"/>
+                </a:solidFill>
+                <a:latin typeface="Arial"/>
+              </a:rPr>
+              <a:t>сервис подтверждён как реальный</a:t>
+            </a:r>
+          </a:p>
+        </p:txBody>
+      </p:sp>
+      <p:sp>
+        <p:nvSpPr>
+          <p:cNvPr id="28" name="TextBox 27"/>
+          <p:cNvSpPr txBox="1"/>
+          <p:nvPr/>
+        </p:nvSpPr>
+        <p:spPr>
+          <a:xfrm>
+            <a:off x="6102964" y="4239514"/>
+            <a:ext cx="5253883" cy="456692"/>
+          </a:xfrm>
+          <a:prstGeom prst="rect">
+            <a:avLst/>
+          </a:prstGeom>
+          <a:noFill/>
+        </p:spPr>
+        <p:txBody>
+          <a:bodyPr wrap="square" lIns="0" rIns="0" tIns="0" bIns="0" anchor="ctr">
+            <a:spAutoFit/>
+          </a:bodyPr>
+          <a:lstStyle/>
+          <a:p>
+            <a:pPr algn="l">
+              <a:lnSpc>
+                <a:spcPts val="1150"/>
+              </a:lnSpc>
+              <a:spcAft>
+                <a:spcPts val="0"/>
+              </a:spcAft>
+            </a:pPr>
+            <a:r>
+              <a:rPr sz="1000" b="0" i="0">
+                <a:solidFill>
+                  <a:srgbClr val="141B2E"/>
+                </a:solidFill>
+                <a:latin typeface="Arial"/>
+              </a:rPr>
+              <a:t>измерение заблокировано правом доступа credential в n8n, не существованием сервиса</a:t>
+            </a:r>
+          </a:p>
+        </p:txBody>
+      </p:sp>
+      <p:sp>
+        <p:nvSpPr>
+          <p:cNvPr id="29" name="Rounded Rectangle 28"/>
           <p:cNvSpPr/>
           <p:nvPr/>
         </p:nvSpPr>
         <p:spPr>
           <a:xfrm>
-            <a:off x="502920" y="5318239"/>
-            <a:ext cx="82296" cy="982980"/>
+            <a:off x="502920" y="5043678"/>
+            <a:ext cx="82296" cy="1061720"/>
           </a:xfrm>
           <a:prstGeom prst="roundRect">
             <a:avLst>
@@ -13548,14 +13766,14 @@
       </p:sp>
       <p:sp>
         <p:nvSpPr>
-          <p:cNvPr id="25" name="TextBox 24"/>
-          <p:cNvSpPr txBox="1"/>
-          <p:nvPr/>
-        </p:nvSpPr>
-        <p:spPr>
-          <a:xfrm>
-            <a:off x="859536" y="5446255"/>
-            <a:ext cx="10643616" cy="726948"/>
+          <p:cNvPr id="30" name="TextBox 29"/>
+          <p:cNvSpPr txBox="1"/>
+          <p:nvPr/>
+        </p:nvSpPr>
+        <p:spPr>
+          <a:xfrm>
+            <a:off x="859536" y="5171694"/>
+            <a:ext cx="10643616" cy="805688"/>
           </a:xfrm>
           <a:prstGeom prst="rect">
             <a:avLst/>
@@ -13570,14 +13788,14 @@
           <a:p>
             <a:pPr algn="l">
               <a:lnSpc>
-                <a:spcPts val="1860"/>
+                <a:spcPts val="1550"/>
               </a:lnSpc>
               <a:spcAft>
                 <a:spcPts val="300"/>
               </a:spcAft>
             </a:pPr>
             <a:r>
-              <a:rPr sz="1500" b="1" i="0">
+              <a:rPr sz="1250" b="1" i="0">
                 <a:solidFill>
                   <a:srgbClr val="141B2E"/>
                 </a:solidFill>
@@ -13586,20 +13804,20 @@
               <a:t>Честная находка.</a:t>
             </a:r>
             <a:r>
-              <a:rPr sz="1500" b="1" i="0">
-                <a:solidFill>
-                  <a:srgbClr val="141B2E"/>
-                </a:solidFill>
-                <a:latin typeface="Arial"/>
-              </a:rPr>
-              <a:t> Попытка занизить порог TF-IDF, чтобы поймать пропущенную перефразировку, тут же превращает один из верно классифицированных «разных вопросов» в ложное срабатывание — на этом наборе нет единого порога, который побил бы хэш.</a:t>
-            </a:r>
-          </a:p>
-        </p:txBody>
-      </p:sp>
-      <p:sp>
-        <p:nvSpPr>
-          <p:cNvPr id="26" name="TextBox 25"/>
+              <a:rPr sz="1250" b="1" i="0">
+                <a:solidFill>
+                  <a:srgbClr val="141B2E"/>
+                </a:solidFill>
+                <a:latin typeface="Arial"/>
+              </a:rPr>
+              <a:t> При пороге 0,3 классический подход не просто не даёт прироста — добавляет 2 ложных срабатывания там, где хэш не ошибается в принципе. Поднять порог до значения, которое убрало бы эти ложные срабатывания, не помогает поймать ни одну перефразировку: лучшее, что даёт настройка порога на этом наборе, — сравняться с хэшем, а не превзойти его.</a:t>
+            </a:r>
+          </a:p>
+        </p:txBody>
+      </p:sp>
+      <p:sp>
+        <p:nvSpPr>
+          <p:cNvPr id="31" name="TextBox 30"/>
           <p:cNvSpPr txBox="1"/>
           <p:nvPr/>
         </p:nvSpPr>
@@ -13702,7 +13920,7 @@
                 </a:solidFill>
                 <a:latin typeface="Arial"/>
               </a:rPr>
-              <a:t>Сравнение трёх схем на одном тесте</a:t>
+              <a:t>Сравнение схем на одном тесте</a:t>
             </a:r>
           </a:p>
         </p:txBody>
@@ -13723,8 +13941,8 @@
         </p:blipFill>
         <p:spPr>
           <a:xfrm>
-            <a:off x="1473044" y="943356"/>
-            <a:ext cx="9242863" cy="3235002"/>
+            <a:off x="1515612" y="943356"/>
+            <a:ext cx="9157727" cy="3319676"/>
           </a:xfrm>
           <a:prstGeom prst="rect">
             <a:avLst/>
@@ -13739,8 +13957,99 @@
         </p:nvSpPr>
         <p:spPr>
           <a:xfrm>
-            <a:off x="502920" y="4342950"/>
-            <a:ext cx="82296" cy="794004"/>
+            <a:off x="502920" y="4427624"/>
+            <a:ext cx="11183112" cy="604012"/>
+          </a:xfrm>
+          <a:prstGeom prst="roundRect">
+            <a:avLst>
+              <a:gd name="adj" fmla="val 25000"/>
+            </a:avLst>
+          </a:prstGeom>
+          <a:solidFill>
+            <a:srgbClr val="E4E9EF"/>
+          </a:solidFill>
+          <a:ln w="15240">
+            <a:solidFill>
+              <a:srgbClr val="6B7685"/>
+            </a:solidFill>
+            <a:prstDash val="dash"/>
+          </a:ln>
+          <a:effectLst/>
+        </p:spPr>
+        <p:style>
+          <a:lnRef idx="1">
+            <a:schemeClr val="accent1"/>
+          </a:lnRef>
+          <a:fillRef idx="3">
+            <a:schemeClr val="accent1"/>
+          </a:fillRef>
+          <a:effectRef idx="2">
+            <a:schemeClr val="accent1"/>
+          </a:effectRef>
+          <a:fontRef idx="minor">
+            <a:schemeClr val="lt1"/>
+          </a:fontRef>
+        </p:style>
+        <p:txBody>
+          <a:bodyPr rtlCol="0" anchor="ctr"/>
+          <a:lstStyle/>
+          <a:p>
+            <a:pPr algn="ctr"/>
+          </a:p>
+        </p:txBody>
+      </p:sp>
+      <p:sp>
+        <p:nvSpPr>
+          <p:cNvPr id="5" name="TextBox 4"/>
+          <p:cNvSpPr txBox="1"/>
+          <p:nvPr/>
+        </p:nvSpPr>
+        <p:spPr>
+          <a:xfrm>
+            <a:off x="740664" y="4564784"/>
+            <a:ext cx="10707624" cy="329692"/>
+          </a:xfrm>
+          <a:prstGeom prst="rect">
+            <a:avLst/>
+          </a:prstGeom>
+          <a:noFill/>
+        </p:spPr>
+        <p:txBody>
+          <a:bodyPr wrap="square" lIns="0" rIns="0" tIns="0" bIns="0" anchor="ctr">
+            <a:spAutoFit/>
+          </a:bodyPr>
+          <a:lstStyle/>
+          <a:p>
+            <a:pPr algn="l">
+              <a:lnSpc>
+                <a:spcPts val="1297"/>
+              </a:lnSpc>
+              <a:spcAft>
+                <a:spcPts val="300"/>
+              </a:spcAft>
+            </a:pPr>
+            <a:r>
+              <a:rPr sz="1100" b="0" i="1">
+                <a:solidFill>
+                  <a:srgbClr val="6B7685"/>
+                </a:solidFill>
+                <a:latin typeface="Arial"/>
+              </a:rPr>
+              <a:t>Фигура: карточки — точное совпадение (хэш) 15/20, классический векторный подход (TF-IDF-косинус) 13/20, дешёвая модель-судья 17/20, внешний сервис (jev) — не измерено, на одних и тех же 20 тестовых парах. Внизу подпись: числа — измерение, не предположение.</a:t>
+            </a:r>
+          </a:p>
+        </p:txBody>
+      </p:sp>
+      <p:sp>
+        <p:nvSpPr>
+          <p:cNvPr id="6" name="Rounded Rectangle 5"/>
+          <p:cNvSpPr/>
+          <p:nvPr/>
+        </p:nvSpPr>
+        <p:spPr>
+          <a:xfrm>
+            <a:off x="502920" y="5196228"/>
+            <a:ext cx="82296" cy="841247"/>
           </a:xfrm>
           <a:prstGeom prst="roundRect">
             <a:avLst>
@@ -13779,101 +14088,13 @@
       </p:sp>
       <p:sp>
         <p:nvSpPr>
-          <p:cNvPr id="5" name="TextBox 4"/>
-          <p:cNvSpPr txBox="1"/>
-          <p:nvPr/>
-        </p:nvSpPr>
-        <p:spPr>
-          <a:xfrm>
-            <a:off x="859536" y="4470966"/>
-            <a:ext cx="10643616" cy="537972"/>
-          </a:xfrm>
-          <a:prstGeom prst="rect">
-            <a:avLst/>
-          </a:prstGeom>
-          <a:noFill/>
-        </p:spPr>
-        <p:txBody>
-          <a:bodyPr wrap="square" lIns="0" rIns="0" tIns="0" bIns="0" anchor="ctr">
-            <a:spAutoFit/>
-          </a:bodyPr>
-          <a:lstStyle/>
-          <a:p>
-            <a:pPr algn="l">
-              <a:lnSpc>
-                <a:spcPts val="1364"/>
-              </a:lnSpc>
-              <a:spcAft>
-                <a:spcPts val="300"/>
-              </a:spcAft>
-            </a:pPr>
-            <a:r>
-              <a:rPr sz="1100" b="1" i="0">
-                <a:solidFill>
-                  <a:srgbClr val="141B2E"/>
-                </a:solidFill>
-                <a:latin typeface="Arial"/>
-              </a:rPr>
-              <a:t>Фигура: три карточки — точное совпадение (хэш) 15/20, классический векторный подход (TF-IDF-косинус) 15/20, дешёвая модель-судья 19/20 — на одних и тех же 20 тестовых парах. Внизу подпись: числа — измерение, не предположение; четвёртая схема (внешний сервис) не реализована.</a:t>
-            </a:r>
-          </a:p>
-        </p:txBody>
-      </p:sp>
-      <p:sp>
-        <p:nvSpPr>
-          <p:cNvPr id="6" name="Rounded Rectangle 5"/>
-          <p:cNvSpPr/>
-          <p:nvPr/>
-        </p:nvSpPr>
-        <p:spPr>
-          <a:xfrm>
-            <a:off x="502920" y="5301546"/>
-            <a:ext cx="82296" cy="841247"/>
-          </a:xfrm>
-          <a:prstGeom prst="roundRect">
-            <a:avLst>
-              <a:gd name="adj" fmla="val 50000"/>
-            </a:avLst>
-          </a:prstGeom>
-          <a:solidFill>
-            <a:srgbClr val="F0AB00"/>
-          </a:solidFill>
-          <a:ln>
-            <a:noFill/>
-          </a:ln>
-          <a:effectLst/>
-        </p:spPr>
-        <p:style>
-          <a:lnRef idx="1">
-            <a:schemeClr val="accent1"/>
-          </a:lnRef>
-          <a:fillRef idx="3">
-            <a:schemeClr val="accent1"/>
-          </a:fillRef>
-          <a:effectRef idx="2">
-            <a:schemeClr val="accent1"/>
-          </a:effectRef>
-          <a:fontRef idx="minor">
-            <a:schemeClr val="lt1"/>
-          </a:fontRef>
-        </p:style>
-        <p:txBody>
-          <a:bodyPr rtlCol="0" anchor="ctr"/>
-          <a:lstStyle/>
-          <a:p>
-            <a:pPr algn="ctr"/>
-          </a:p>
-        </p:txBody>
-      </p:sp>
-      <p:sp>
-        <p:nvSpPr>
           <p:cNvPr id="7" name="TextBox 6"/>
           <p:cNvSpPr txBox="1"/>
           <p:nvPr/>
         </p:nvSpPr>
         <p:spPr>
           <a:xfrm>
-            <a:off x="859536" y="5429562"/>
+            <a:off x="859536" y="5324244"/>
             <a:ext cx="10643616" cy="585215"/>
           </a:xfrm>
           <a:prstGeom prst="rect">
@@ -16021,7 +16242,7 @@
         </p:nvSpPr>
         <p:spPr>
           <a:xfrm>
-            <a:off x="502920" y="1154430"/>
+            <a:off x="502920" y="1120851"/>
             <a:ext cx="11183112" cy="1173861"/>
           </a:xfrm>
           <a:prstGeom prst="roundRect">
@@ -16069,7 +16290,7 @@
         </p:nvSpPr>
         <p:spPr>
           <a:xfrm>
-            <a:off x="722376" y="1373886"/>
+            <a:off x="722376" y="1340307"/>
             <a:ext cx="329184" cy="734949"/>
           </a:xfrm>
           <a:prstGeom prst="rect">
@@ -16111,7 +16332,7 @@
         </p:nvSpPr>
         <p:spPr>
           <a:xfrm>
-            <a:off x="1106424" y="1373886"/>
+            <a:off x="1106424" y="1340307"/>
             <a:ext cx="10360152" cy="734949"/>
           </a:xfrm>
           <a:prstGeom prst="rect">
@@ -16162,12 +16383,12 @@
         </p:nvSpPr>
         <p:spPr>
           <a:xfrm>
-            <a:off x="502920" y="2995803"/>
-            <a:ext cx="11183112" cy="1173861"/>
+            <a:off x="502920" y="2903042"/>
+            <a:ext cx="11183112" cy="1376172"/>
           </a:xfrm>
           <a:prstGeom prst="roundRect">
             <a:avLst>
-              <a:gd name="adj" fmla="val 25000"/>
+              <a:gd name="adj" fmla="val 22148"/>
             </a:avLst>
           </a:prstGeom>
           <a:solidFill>
@@ -16210,8 +16431,8 @@
         </p:nvSpPr>
         <p:spPr>
           <a:xfrm>
-            <a:off x="722376" y="3215259"/>
-            <a:ext cx="329184" cy="734949"/>
+            <a:off x="722376" y="3122498"/>
+            <a:ext cx="329184" cy="937259"/>
           </a:xfrm>
           <a:prstGeom prst="rect">
             <a:avLst/>
@@ -16252,8 +16473,8 @@
         </p:nvSpPr>
         <p:spPr>
           <a:xfrm>
-            <a:off x="1106424" y="3215259"/>
-            <a:ext cx="10360152" cy="734949"/>
+            <a:off x="1106424" y="3122498"/>
+            <a:ext cx="10360152" cy="937259"/>
           </a:xfrm>
           <a:prstGeom prst="rect">
             <a:avLst/>
@@ -16290,7 +16511,7 @@
                 </a:solidFill>
                 <a:latin typeface="Arial"/>
               </a:rPr>
-              <a:t>, не ноль (Wataoka, Takahashi, Ri — NeurIPS 2024 Safe GenAI Workshop, arXiv:2410.21819, self-preference bias): модель-судья систематически не нейтральна, даже отвечая формально «да» или «нет». Наш тест это подтвердил напрямую: 1 ложное срабатывание из 20, не ноль.</a:t>
+              <a:t>, не ноль (Wataoka, Takahashi, Ri — NeurIPS 2024 Safe GenAI Workshop, arXiv:2410.21819, self-preference bias): модель-судья систематически не нейтральна, даже отвечая формально «да» или «нет». Наш тест это подтвердил напрямую: 3 ложных срабатывания из 20, и не все объясняются совпадением слов в вопросах.</a:t>
             </a:r>
           </a:p>
         </p:txBody>
@@ -16303,7 +16524,7 @@
         </p:nvSpPr>
         <p:spPr>
           <a:xfrm>
-            <a:off x="502920" y="4837176"/>
+            <a:off x="502920" y="4887544"/>
             <a:ext cx="11183112" cy="1173861"/>
           </a:xfrm>
           <a:prstGeom prst="roundRect">
@@ -16351,7 +16572,7 @@
         </p:nvSpPr>
         <p:spPr>
           <a:xfrm>
-            <a:off x="722376" y="5056632"/>
+            <a:off x="722376" y="5107000"/>
             <a:ext cx="329184" cy="734949"/>
           </a:xfrm>
           <a:prstGeom prst="rect">
@@ -16393,7 +16614,7 @@
         </p:nvSpPr>
         <p:spPr>
           <a:xfrm>
-            <a:off x="1106424" y="5056632"/>
+            <a:off x="1106424" y="5107000"/>
             <a:ext cx="10360152" cy="734949"/>
           </a:xfrm>
           <a:prstGeom prst="rect">
@@ -16799,7 +17020,7 @@
         <p:spPr>
           <a:xfrm>
             <a:off x="685800" y="2351379"/>
-            <a:ext cx="5088636" cy="490982"/>
+            <a:ext cx="5088636" cy="663321"/>
           </a:xfrm>
           <a:prstGeom prst="rect">
             <a:avLst/>
@@ -16827,7 +17048,7 @@
                 </a:solidFill>
                 <a:latin typeface="Arial"/>
               </a:rPr>
-              <a:t>классический векторный подход не стоит добавлять «на всякий случай» — измерение показало тот же результат, что у хэша</a:t>
+              <a:t>классический векторный подход не стоит добавлять «на всякий случай» — измерение показало результат ХУЖЕ хэша, не тот же самый</a:t>
             </a:r>
           </a:p>
         </p:txBody>
@@ -17113,7 +17334,7 @@
                 </a:solidFill>
                 <a:latin typeface="Arial"/>
               </a:rPr>
-              <a:t>частота ошибок самой модели — измеренная цена (у нас 1 ложное срабатывание из 20), а не ноль, и её тоже нужно закладывать</a:t>
+              <a:t>частота ошибок самой модели — измеренная цена (у нас 3 ложных срабатывания из 20), а не ноль, и её тоже нужно закладывать</a:t>
             </a:r>
           </a:p>
         </p:txBody>

--- a/library/seminars/sem-08/rendered/sem-08.pptx
+++ b/library/seminars/sem-08/rendered/sem-08.pptx
@@ -1454,13 +1454,13 @@
           <a:p/>
           <a:p>
             <a:r>
-              <a:t>Четвёртая схема — внешний сервис jev — на экране без числа, и это не недосмотр. Сервис реальный: подтверждён каталогом моделей OpenRouter, прямым запросом на его endpoint и владельцем. Прогнать его на этих же 20 парах не удалось — рабочий credential n8n, которым уже пользуется модель-судья здесь же, не имеет права на обычный HTTP-вызов, которым устроена эта API. Административный блокер, не технический провал: право включат — прогон пройдёт без правки кода, workflow уже собран и ждёт на стенде.</a:t>
+              <a:t>Четвёртая схема — внешний сервис jev, узкоспециализированный Decisions API — измерена тем же методом. Результат — 20 из 20, без единой ошибки: вероятность дубля 0,70–0,97 на всех десяти дублях, 0,02–0,08 на всех разных вопросах. Разделение чистое, порог 0,5 берёт его с запасом. Лучший результат из четырёх — и это тот самый сервис, что раньше стоял с пометкой «не измерено»: причиной была не проблема доступа, а обычная ошибка конфигурации узла, которую нашли и исправили.</a:t>
             </a:r>
           </a:p>
           <a:p/>
           <a:p>
             <a:r>
-              <a:t>И честная находка, которая не очевидна заранее: поднять порог, чтобы убрать два новых ложных срабатывания, не помогает поймать ни одну перефразировку — лучшее, что даёт настройка порога здесь, это сравняться с хэшем, а не превзойти его.</a:t>
+              <a:t>Главная честная находка: лучший результат дал не самый очевидный кандидат — узкий сервис обошёл универсальную модель-судью. Но одно измерение на 20 парах одной темы — не повод сразу переписывать уже показанную на стенде архитектуру: та же дисциплина, что не дала поверить jev на слово раньше, не даёт поверить и этому числу слепо сейчас.</a:t>
             </a:r>
           </a:p>
           <a:p/>
@@ -1536,7 +1536,7 @@
           <a:lstStyle/>
           <a:p>
             <a:r>
-              <a:t>Вот схемы, которые мы только что разобрали, теперь рядом, на одном и том же тесте. Хэш — 15 из 20, классический векторный подход — 13 из 20, хуже, несмотря на то, что второй выглядит серьёзнее. Модель — 17 из 20, дороже на каждый вызов, но ловит то, к чему механика слепа в принципе.</a:t>
+              <a:t>Вот схемы, которые мы только что разобрали, теперь рядом, на одном и том же тесте. Хэш — 15 из 20, классический векторный подход — 13 из 20, хуже, несмотря на то, что второй выглядит серьёзнее. Модель-судья — 17 из 20, дороже на каждый вызов, но ловит то, к чему механика слепа в принципе. И четвёртая схема, узкий сервис jev, — 20 из 20, без единой ошибки на этом наборе.</a:t>
             </a:r>
           </a:p>
           <a:p/>
@@ -1548,19 +1548,19 @@
           <a:p/>
           <a:p>
             <a:r>
-              <a:t>Первый шаг — дешёвый, механический фильтр. Он берёт на себя всё, что решается без модели: все буквальные повторы, и он решает это бесплатно и мгновенно. Классический векторный подход в этот шаг не идёт — измерение только что показало, что он не просто не даёт прироста над самым простым сравнением строк, а измеримо хуже него, а значит добавлять его как отдельный шаг — лишняя сложность без выигрыша и с новым риском.</a:t>
+              <a:t>Первый шаг — дешёвый, механический фильтр. Он берёт на себя всё, что решается без модели: все буквальные повторы, и решает это бесплатно и мгновенно. Классический векторный подход в этот шаг не идёт — измерение показало, что он не просто не даёт прироста над самым простым сравнением строк, а измеримо хуже него.</a:t>
             </a:r>
           </a:p>
           <a:p/>
           <a:p>
             <a:r>
-              <a:t>Второй шаг — дорогая проверка смыслом, но только на то, что первый шаг не разрешил однозначно. Модель вызывается не на каждое обращение, а на остаток — ровно на те случаи, где механическое сравнение бессильно в принципе, потому что переформулировка на русском языке может не оставить ни одного общего слова при полном совпадении смысла.</a:t>
+              <a:t>Второй шаг — дорогая проверка смыслом, но только на то, что первый шаг не разрешил однозначно. И здесь у нас теперь два измеренных кандидата, а не один: модель-судья, которая реально стоит в собранной цепочке, и jev, который на этом тесте оказался точнее. Мы не меняем архитектуру на основании одного теста на 20 парах одной темы — это слишком тонкое основание, чтобы переписывать уже собранное и прогнанное решение, — но держим в уме, что выбор конкретного инструмента для дорогого шага сам по себе требует проверки, а не выбирается по умолчанию.</a:t>
             </a:r>
           </a:p>
           <a:p/>
           <a:p>
             <a:r>
-              <a:t>Это тот же общий приём, что и в первом кейсе этого занятия, только выглядел он иначе: там решение о том, что писать в уведомлении, убрали у модели целиком, потому что задача оказалась полностью детерминированной. Здесь задача не детерминирована целиком — определить, один ли смысл у двух разных строк, механика не умеет в общем случае, — и поэтому модель не убирается, а сдвигается туда, где она реально нужна: на то, что дешёвый шаг оставил нерешённым.</a:t>
+              <a:t>Это тот же общий приём, что и в первом кейсе этого занятия: модель не убирается, а сдвигается туда, где она реально нужна, — на то, что дешёвый шаг оставил нерешённым.</a:t>
             </a:r>
           </a:p>
           <a:p/>
@@ -12707,11 +12707,11 @@
         <p:spPr>
           <a:xfrm>
             <a:off x="502920" y="1838960"/>
-            <a:ext cx="11183112" cy="3040126"/>
+            <a:ext cx="11183112" cy="2806065"/>
           </a:xfrm>
           <a:prstGeom prst="roundRect">
             <a:avLst>
-              <a:gd name="adj" fmla="val 10025"/>
+              <a:gd name="adj" fmla="val 10862"/>
             </a:avLst>
           </a:prstGeom>
           <a:solidFill>
@@ -12755,7 +12755,7 @@
         <p:spPr>
           <a:xfrm>
             <a:off x="685800" y="2021840"/>
-            <a:ext cx="2434898" cy="409447"/>
+            <a:ext cx="2414760" cy="394462"/>
           </a:xfrm>
           <a:prstGeom prst="rect">
             <a:avLst/>
@@ -12770,14 +12770,14 @@
           <a:p>
             <a:pPr algn="l">
               <a:lnSpc>
-                <a:spcPts val="1100"/>
+                <a:spcPts val="1045"/>
               </a:lnSpc>
               <a:spcAft>
                 <a:spcPts val="0"/>
               </a:spcAft>
             </a:pPr>
             <a:r>
-              <a:rPr sz="1000" b="1" i="0">
+              <a:rPr sz="950" b="1" i="0">
                 <a:solidFill>
                   <a:srgbClr val="6B7685"/>
                 </a:solidFill>
@@ -12796,8 +12796,8 @@
         </p:nvSpPr>
         <p:spPr>
           <a:xfrm>
-            <a:off x="3267002" y="2021840"/>
-            <a:ext cx="680059" cy="409447"/>
+            <a:off x="3246864" y="2021840"/>
+            <a:ext cx="610910" cy="394462"/>
           </a:xfrm>
           <a:prstGeom prst="rect">
             <a:avLst/>
@@ -12812,14 +12812,14 @@
           <a:p>
             <a:pPr algn="l">
               <a:lnSpc>
-                <a:spcPts val="1100"/>
+                <a:spcPts val="1045"/>
               </a:lnSpc>
               <a:spcAft>
                 <a:spcPts val="0"/>
               </a:spcAft>
             </a:pPr>
             <a:r>
-              <a:rPr sz="1000" b="1" i="0">
+              <a:rPr sz="950" b="1" i="0">
                 <a:solidFill>
                   <a:srgbClr val="6B7685"/>
                 </a:solidFill>
@@ -12838,8 +12838,8 @@
         </p:nvSpPr>
         <p:spPr>
           <a:xfrm>
-            <a:off x="4093365" y="2021840"/>
-            <a:ext cx="1863295" cy="409447"/>
+            <a:off x="4004079" y="2021840"/>
+            <a:ext cx="2186532" cy="394462"/>
           </a:xfrm>
           <a:prstGeom prst="rect">
             <a:avLst/>
@@ -12854,14 +12854,14 @@
           <a:p>
             <a:pPr algn="l">
               <a:lnSpc>
-                <a:spcPts val="1100"/>
+                <a:spcPts val="1045"/>
               </a:lnSpc>
               <a:spcAft>
                 <a:spcPts val="0"/>
               </a:spcAft>
             </a:pPr>
             <a:r>
-              <a:rPr sz="1000" b="1" i="0">
+              <a:rPr sz="950" b="1" i="0">
                 <a:solidFill>
                   <a:srgbClr val="6B7685"/>
                 </a:solidFill>
@@ -12880,8 +12880,8 @@
         </p:nvSpPr>
         <p:spPr>
           <a:xfrm>
-            <a:off x="6102964" y="2021840"/>
-            <a:ext cx="5253883" cy="409447"/>
+            <a:off x="6336915" y="2021840"/>
+            <a:ext cx="5019932" cy="394462"/>
           </a:xfrm>
           <a:prstGeom prst="rect">
             <a:avLst/>
@@ -12896,14 +12896,14 @@
           <a:p>
             <a:pPr algn="l">
               <a:lnSpc>
-                <a:spcPts val="1100"/>
+                <a:spcPts val="1045"/>
               </a:lnSpc>
               <a:spcAft>
                 <a:spcPts val="0"/>
               </a:spcAft>
             </a:pPr>
             <a:r>
-              <a:rPr sz="1000" b="1" i="0">
+              <a:rPr sz="950" b="1" i="0">
                 <a:solidFill>
                   <a:srgbClr val="6B7685"/>
                 </a:solidFill>
@@ -12922,8 +12922,8 @@
         </p:nvSpPr>
         <p:spPr>
           <a:xfrm>
-            <a:off x="685800" y="2431288"/>
-            <a:ext cx="2434898" cy="602742"/>
+            <a:off x="685800" y="2416302"/>
+            <a:ext cx="2414760" cy="442087"/>
           </a:xfrm>
           <a:prstGeom prst="rect">
             <a:avLst/>
@@ -12938,14 +12938,14 @@
           <a:p>
             <a:pPr algn="l">
               <a:lnSpc>
-                <a:spcPts val="1150"/>
+                <a:spcPts val="1092"/>
               </a:lnSpc>
               <a:spcAft>
                 <a:spcPts val="0"/>
               </a:spcAft>
             </a:pPr>
             <a:r>
-              <a:rPr sz="1000" b="1" i="0">
+              <a:rPr sz="950" b="1" i="0">
                 <a:solidFill>
                   <a:srgbClr val="141B2E"/>
                 </a:solidFill>
@@ -12964,8 +12964,8 @@
         </p:nvSpPr>
         <p:spPr>
           <a:xfrm>
-            <a:off x="3267002" y="2431288"/>
-            <a:ext cx="680059" cy="602742"/>
+            <a:off x="3246864" y="2416302"/>
+            <a:ext cx="610910" cy="442087"/>
           </a:xfrm>
           <a:prstGeom prst="rect">
             <a:avLst/>
@@ -12980,14 +12980,14 @@
           <a:p>
             <a:pPr algn="l">
               <a:lnSpc>
-                <a:spcPts val="1150"/>
+                <a:spcPts val="1092"/>
               </a:lnSpc>
               <a:spcAft>
                 <a:spcPts val="0"/>
               </a:spcAft>
             </a:pPr>
             <a:r>
-              <a:rPr sz="1000" b="1" i="0">
+              <a:rPr sz="950" b="1" i="0">
                 <a:solidFill>
                   <a:srgbClr val="141B2E"/>
                 </a:solidFill>
@@ -13006,8 +13006,8 @@
         </p:nvSpPr>
         <p:spPr>
           <a:xfrm>
-            <a:off x="4093365" y="2431288"/>
-            <a:ext cx="1863295" cy="602742"/>
+            <a:off x="4004079" y="2416302"/>
+            <a:ext cx="2186532" cy="442087"/>
           </a:xfrm>
           <a:prstGeom prst="rect">
             <a:avLst/>
@@ -13022,14 +13022,14 @@
           <a:p>
             <a:pPr algn="l">
               <a:lnSpc>
-                <a:spcPts val="1150"/>
+                <a:spcPts val="1092"/>
               </a:lnSpc>
               <a:spcAft>
                 <a:spcPts val="0"/>
               </a:spcAft>
             </a:pPr>
             <a:r>
-              <a:rPr sz="1000" b="0" i="0">
+              <a:rPr sz="950" b="0" i="0">
                 <a:solidFill>
                   <a:srgbClr val="141B2E"/>
                 </a:solidFill>
@@ -13048,8 +13048,8 @@
         </p:nvSpPr>
         <p:spPr>
           <a:xfrm>
-            <a:off x="6102964" y="2431288"/>
-            <a:ext cx="5253883" cy="602742"/>
+            <a:off x="6336915" y="2416302"/>
+            <a:ext cx="5019932" cy="442087"/>
           </a:xfrm>
           <a:prstGeom prst="rect">
             <a:avLst/>
@@ -13064,14 +13064,14 @@
           <a:p>
             <a:pPr algn="l">
               <a:lnSpc>
-                <a:spcPts val="1150"/>
+                <a:spcPts val="1092"/>
               </a:lnSpc>
               <a:spcAft>
                 <a:spcPts val="0"/>
               </a:spcAft>
             </a:pPr>
             <a:r>
-              <a:rPr sz="1000" b="0" i="0">
+              <a:rPr sz="950" b="0" i="0">
                 <a:solidFill>
                   <a:srgbClr val="141B2E"/>
                 </a:solidFill>
@@ -13090,7 +13090,7 @@
         </p:nvCxnSpPr>
         <p:spPr>
           <a:xfrm>
-            <a:off x="685800" y="3034030"/>
+            <a:off x="685800" y="2858389"/>
             <a:ext cx="10817352" cy="0"/>
           </a:xfrm>
           <a:prstGeom prst="line">
@@ -13125,8 +13125,8 @@
         </p:nvSpPr>
         <p:spPr>
           <a:xfrm>
-            <a:off x="685800" y="3034030"/>
-            <a:ext cx="2434898" cy="602742"/>
+            <a:off x="685800" y="2858389"/>
+            <a:ext cx="2414760" cy="580834"/>
           </a:xfrm>
           <a:prstGeom prst="rect">
             <a:avLst/>
@@ -13141,14 +13141,14 @@
           <a:p>
             <a:pPr algn="l">
               <a:lnSpc>
-                <a:spcPts val="1150"/>
+                <a:spcPts val="1092"/>
               </a:lnSpc>
               <a:spcAft>
                 <a:spcPts val="0"/>
               </a:spcAft>
             </a:pPr>
             <a:r>
-              <a:rPr sz="1000" b="1" i="0">
+              <a:rPr sz="950" b="1" i="0">
                 <a:solidFill>
                   <a:srgbClr val="141B2E"/>
                 </a:solidFill>
@@ -13157,7 +13157,7 @@
               <a:t>TF-IDF + косинус</a:t>
             </a:r>
             <a:r>
-              <a:rPr sz="1000" b="0" i="0">
+              <a:rPr sz="950" b="0" i="0">
                 <a:solidFill>
                   <a:srgbClr val="141B2E"/>
                 </a:solidFill>
@@ -13176,8 +13176,8 @@
         </p:nvSpPr>
         <p:spPr>
           <a:xfrm>
-            <a:off x="3267002" y="3034030"/>
-            <a:ext cx="680059" cy="602742"/>
+            <a:off x="3246864" y="2858389"/>
+            <a:ext cx="610910" cy="580834"/>
           </a:xfrm>
           <a:prstGeom prst="rect">
             <a:avLst/>
@@ -13192,14 +13192,14 @@
           <a:p>
             <a:pPr algn="l">
               <a:lnSpc>
-                <a:spcPts val="1150"/>
+                <a:spcPts val="1092"/>
               </a:lnSpc>
               <a:spcAft>
                 <a:spcPts val="0"/>
               </a:spcAft>
             </a:pPr>
             <a:r>
-              <a:rPr sz="1000" b="1" i="0">
+              <a:rPr sz="950" b="1" i="0">
                 <a:solidFill>
                   <a:srgbClr val="141B2E"/>
                 </a:solidFill>
@@ -13208,7 +13208,7 @@
               <a:t>13/20</a:t>
             </a:r>
             <a:r>
-              <a:rPr sz="1000" b="0" i="0">
+              <a:rPr sz="950" b="0" i="0">
                 <a:solidFill>
                   <a:srgbClr val="141B2E"/>
                 </a:solidFill>
@@ -13227,8 +13227,8 @@
         </p:nvSpPr>
         <p:spPr>
           <a:xfrm>
-            <a:off x="4093365" y="3034030"/>
-            <a:ext cx="1863295" cy="602742"/>
+            <a:off x="4004079" y="2858389"/>
+            <a:ext cx="2186532" cy="580834"/>
           </a:xfrm>
           <a:prstGeom prst="rect">
             <a:avLst/>
@@ -13243,14 +13243,14 @@
           <a:p>
             <a:pPr algn="l">
               <a:lnSpc>
-                <a:spcPts val="1150"/>
+                <a:spcPts val="1092"/>
               </a:lnSpc>
               <a:spcAft>
                 <a:spcPts val="0"/>
               </a:spcAft>
             </a:pPr>
             <a:r>
-              <a:rPr sz="1000" b="0" i="0">
+              <a:rPr sz="950" b="0" i="0">
                 <a:solidFill>
                   <a:srgbClr val="141B2E"/>
                 </a:solidFill>
@@ -13269,8 +13269,8 @@
         </p:nvSpPr>
         <p:spPr>
           <a:xfrm>
-            <a:off x="6102964" y="3034030"/>
-            <a:ext cx="5253883" cy="602742"/>
+            <a:off x="6336915" y="2858389"/>
+            <a:ext cx="5019932" cy="580834"/>
           </a:xfrm>
           <a:prstGeom prst="rect">
             <a:avLst/>
@@ -13285,14 +13285,14 @@
           <a:p>
             <a:pPr algn="l">
               <a:lnSpc>
-                <a:spcPts val="1150"/>
+                <a:spcPts val="1092"/>
               </a:lnSpc>
               <a:spcAft>
                 <a:spcPts val="0"/>
               </a:spcAft>
             </a:pPr>
             <a:r>
-              <a:rPr sz="1000" b="0" i="0">
+              <a:rPr sz="950" b="0" i="0">
                 <a:solidFill>
                   <a:srgbClr val="141B2E"/>
                 </a:solidFill>
@@ -13311,7 +13311,7 @@
         </p:nvCxnSpPr>
         <p:spPr>
           <a:xfrm>
-            <a:off x="685800" y="3636772"/>
+            <a:off x="685800" y="3439223"/>
             <a:ext cx="10817352" cy="0"/>
           </a:xfrm>
           <a:prstGeom prst="line">
@@ -13346,8 +13346,8 @@
         </p:nvSpPr>
         <p:spPr>
           <a:xfrm>
-            <a:off x="685800" y="3636772"/>
-            <a:ext cx="2434898" cy="602742"/>
+            <a:off x="685800" y="3439223"/>
+            <a:ext cx="2414760" cy="580834"/>
           </a:xfrm>
           <a:prstGeom prst="rect">
             <a:avLst/>
@@ -13362,14 +13362,14 @@
           <a:p>
             <a:pPr algn="l">
               <a:lnSpc>
-                <a:spcPts val="1150"/>
+                <a:spcPts val="1092"/>
               </a:lnSpc>
               <a:spcAft>
                 <a:spcPts val="0"/>
               </a:spcAft>
             </a:pPr>
             <a:r>
-              <a:rPr sz="1000" b="1" i="0">
+              <a:rPr sz="950" b="1" i="0">
                 <a:solidFill>
                   <a:srgbClr val="141B2E"/>
                 </a:solidFill>
@@ -13378,7 +13378,7 @@
               <a:t>Дешёвая модель-судья</a:t>
             </a:r>
             <a:r>
-              <a:rPr sz="1000" b="0" i="0">
+              <a:rPr sz="950" b="0" i="0">
                 <a:solidFill>
                   <a:srgbClr val="141B2E"/>
                 </a:solidFill>
@@ -13397,8 +13397,8 @@
         </p:nvSpPr>
         <p:spPr>
           <a:xfrm>
-            <a:off x="3267002" y="3636772"/>
-            <a:ext cx="680059" cy="602742"/>
+            <a:off x="3246864" y="3439223"/>
+            <a:ext cx="610910" cy="580834"/>
           </a:xfrm>
           <a:prstGeom prst="rect">
             <a:avLst/>
@@ -13413,14 +13413,14 @@
           <a:p>
             <a:pPr algn="l">
               <a:lnSpc>
-                <a:spcPts val="1150"/>
+                <a:spcPts val="1092"/>
               </a:lnSpc>
               <a:spcAft>
                 <a:spcPts val="0"/>
               </a:spcAft>
             </a:pPr>
             <a:r>
-              <a:rPr sz="1000" b="1" i="0">
+              <a:rPr sz="950" b="1" i="0">
                 <a:solidFill>
                   <a:srgbClr val="141B2E"/>
                 </a:solidFill>
@@ -13439,8 +13439,8 @@
         </p:nvSpPr>
         <p:spPr>
           <a:xfrm>
-            <a:off x="4093365" y="3636772"/>
-            <a:ext cx="1863295" cy="602742"/>
+            <a:off x="4004079" y="3439223"/>
+            <a:ext cx="2186532" cy="580834"/>
           </a:xfrm>
           <a:prstGeom prst="rect">
             <a:avLst/>
@@ -13455,14 +13455,14 @@
           <a:p>
             <a:pPr algn="l">
               <a:lnSpc>
-                <a:spcPts val="1150"/>
+                <a:spcPts val="1092"/>
               </a:lnSpc>
               <a:spcAft>
                 <a:spcPts val="0"/>
               </a:spcAft>
             </a:pPr>
             <a:r>
-              <a:rPr sz="1000" b="0" i="0">
+              <a:rPr sz="950" b="0" i="0">
                 <a:solidFill>
                   <a:srgbClr val="141B2E"/>
                 </a:solidFill>
@@ -13481,8 +13481,8 @@
         </p:nvSpPr>
         <p:spPr>
           <a:xfrm>
-            <a:off x="6102964" y="3636772"/>
-            <a:ext cx="5253883" cy="602742"/>
+            <a:off x="6336915" y="3439223"/>
+            <a:ext cx="5019932" cy="580834"/>
           </a:xfrm>
           <a:prstGeom prst="rect">
             <a:avLst/>
@@ -13497,14 +13497,14 @@
           <a:p>
             <a:pPr algn="l">
               <a:lnSpc>
-                <a:spcPts val="1150"/>
+                <a:spcPts val="1092"/>
               </a:lnSpc>
               <a:spcAft>
                 <a:spcPts val="0"/>
               </a:spcAft>
             </a:pPr>
             <a:r>
-              <a:rPr sz="1000" b="0" i="0">
+              <a:rPr sz="950" b="0" i="0">
                 <a:solidFill>
                   <a:srgbClr val="141B2E"/>
                 </a:solidFill>
@@ -13523,7 +13523,7 @@
         </p:nvCxnSpPr>
         <p:spPr>
           <a:xfrm>
-            <a:off x="685800" y="4239514"/>
+            <a:off x="685800" y="4020058"/>
             <a:ext cx="10817352" cy="0"/>
           </a:xfrm>
           <a:prstGeom prst="line">
@@ -13558,8 +13558,8 @@
         </p:nvSpPr>
         <p:spPr>
           <a:xfrm>
-            <a:off x="685800" y="4239514"/>
-            <a:ext cx="2434898" cy="456692"/>
+            <a:off x="685800" y="4020058"/>
+            <a:ext cx="2414760" cy="442087"/>
           </a:xfrm>
           <a:prstGeom prst="rect">
             <a:avLst/>
@@ -13574,14 +13574,14 @@
           <a:p>
             <a:pPr algn="l">
               <a:lnSpc>
-                <a:spcPts val="1150"/>
+                <a:spcPts val="1092"/>
               </a:lnSpc>
               <a:spcAft>
                 <a:spcPts val="0"/>
               </a:spcAft>
             </a:pPr>
             <a:r>
-              <a:rPr sz="1000" b="1" i="0">
+              <a:rPr sz="950" b="1" i="0">
                 <a:solidFill>
                   <a:srgbClr val="141B2E"/>
                 </a:solidFill>
@@ -13600,8 +13600,8 @@
         </p:nvSpPr>
         <p:spPr>
           <a:xfrm>
-            <a:off x="3267002" y="4239514"/>
-            <a:ext cx="680059" cy="456692"/>
+            <a:off x="3246864" y="4020058"/>
+            <a:ext cx="610910" cy="442087"/>
           </a:xfrm>
           <a:prstGeom prst="rect">
             <a:avLst/>
@@ -13616,20 +13616,20 @@
           <a:p>
             <a:pPr algn="l">
               <a:lnSpc>
-                <a:spcPts val="1150"/>
+                <a:spcPts val="1092"/>
               </a:lnSpc>
               <a:spcAft>
                 <a:spcPts val="0"/>
               </a:spcAft>
             </a:pPr>
             <a:r>
-              <a:rPr sz="1000" b="0" i="0">
-                <a:solidFill>
-                  <a:srgbClr val="141B2E"/>
-                </a:solidFill>
-                <a:latin typeface="Arial"/>
-              </a:rPr>
-              <a:t>не измерено</a:t>
+              <a:rPr sz="950" b="1" i="0">
+                <a:solidFill>
+                  <a:srgbClr val="141B2E"/>
+                </a:solidFill>
+                <a:latin typeface="Arial"/>
+              </a:rPr>
+              <a:t>20/20</a:t>
             </a:r>
           </a:p>
         </p:txBody>
@@ -13642,8 +13642,8 @@
         </p:nvSpPr>
         <p:spPr>
           <a:xfrm>
-            <a:off x="4093365" y="4239514"/>
-            <a:ext cx="1863295" cy="456692"/>
+            <a:off x="4004079" y="4020058"/>
+            <a:ext cx="2186532" cy="442087"/>
           </a:xfrm>
           <a:prstGeom prst="rect">
             <a:avLst/>
@@ -13658,20 +13658,20 @@
           <a:p>
             <a:pPr algn="l">
               <a:lnSpc>
-                <a:spcPts val="1150"/>
+                <a:spcPts val="1092"/>
               </a:lnSpc>
               <a:spcAft>
                 <a:spcPts val="0"/>
               </a:spcAft>
             </a:pPr>
             <a:r>
-              <a:rPr sz="1000" b="0" i="0">
-                <a:solidFill>
-                  <a:srgbClr val="141B2E"/>
-                </a:solidFill>
-                <a:latin typeface="Arial"/>
-              </a:rPr>
-              <a:t>сервис подтверждён как реальный</a:t>
+              <a:rPr sz="950" b="0" i="0">
+                <a:solidFill>
+                  <a:srgbClr val="141B2E"/>
+                </a:solidFill>
+                <a:latin typeface="Arial"/>
+              </a:rPr>
+              <a:t>все 10 дублей и все 10 разных вопросов — без единой ошибки</a:t>
             </a:r>
           </a:p>
         </p:txBody>
@@ -13684,8 +13684,8 @@
         </p:nvSpPr>
         <p:spPr>
           <a:xfrm>
-            <a:off x="6102964" y="4239514"/>
-            <a:ext cx="5253883" cy="456692"/>
+            <a:off x="6336915" y="4020058"/>
+            <a:ext cx="5019932" cy="442087"/>
           </a:xfrm>
           <a:prstGeom prst="rect">
             <a:avLst/>
@@ -13700,20 +13700,20 @@
           <a:p>
             <a:pPr algn="l">
               <a:lnSpc>
-                <a:spcPts val="1150"/>
+                <a:spcPts val="1092"/>
               </a:lnSpc>
               <a:spcAft>
                 <a:spcPts val="0"/>
               </a:spcAft>
             </a:pPr>
             <a:r>
-              <a:rPr sz="1000" b="0" i="0">
-                <a:solidFill>
-                  <a:srgbClr val="141B2E"/>
-                </a:solidFill>
-                <a:latin typeface="Arial"/>
-              </a:rPr>
-              <a:t>измерение заблокировано правом доступа credential в n8n, не существованием сервиса</a:t>
+              <a:rPr sz="950" b="0" i="0">
+                <a:solidFill>
+                  <a:srgbClr val="141B2E"/>
+                </a:solidFill>
+                <a:latin typeface="Arial"/>
+              </a:rPr>
+              <a:t>ни одной: разделение чистое (0,02–0,08 на разных, 0,70–0,97 на дублях)</a:t>
             </a:r>
           </a:p>
         </p:txBody>
@@ -13726,8 +13726,8 @@
         </p:nvSpPr>
         <p:spPr>
           <a:xfrm>
-            <a:off x="502920" y="5043678"/>
-            <a:ext cx="82296" cy="1061720"/>
+            <a:off x="502920" y="4809617"/>
+            <a:ext cx="82296" cy="1408176"/>
           </a:xfrm>
           <a:prstGeom prst="roundRect">
             <a:avLst>
@@ -13772,8 +13772,8 @@
         </p:nvSpPr>
         <p:spPr>
           <a:xfrm>
-            <a:off x="859536" y="5171694"/>
-            <a:ext cx="10643616" cy="805688"/>
+            <a:off x="859536" y="4937633"/>
+            <a:ext cx="10643616" cy="1152144"/>
           </a:xfrm>
           <a:prstGeom prst="rect">
             <a:avLst/>
@@ -13788,14 +13788,14 @@
           <a:p>
             <a:pPr algn="l">
               <a:lnSpc>
-                <a:spcPts val="1550"/>
+                <a:spcPts val="1488"/>
               </a:lnSpc>
               <a:spcAft>
                 <a:spcPts val="300"/>
               </a:spcAft>
             </a:pPr>
             <a:r>
-              <a:rPr sz="1250" b="1" i="0">
+              <a:rPr sz="1200" b="1" i="0">
                 <a:solidFill>
                   <a:srgbClr val="141B2E"/>
                 </a:solidFill>
@@ -13804,13 +13804,13 @@
               <a:t>Честная находка.</a:t>
             </a:r>
             <a:r>
-              <a:rPr sz="1250" b="1" i="0">
-                <a:solidFill>
-                  <a:srgbClr val="141B2E"/>
-                </a:solidFill>
-                <a:latin typeface="Arial"/>
-              </a:rPr>
-              <a:t> При пороге 0,3 классический подход не просто не даёт прироста — добавляет 2 ложных срабатывания там, где хэш не ошибается в принципе. Поднять порог до значения, которое убрало бы эти ложные срабатывания, не помогает поймать ни одну перефразировку: лучшее, что даёт настройка порога на этом наборе, — сравняться с хэшем, а не превзойти его.</a:t>
+              <a:rPr sz="1200" b="1" i="0">
+                <a:solidFill>
+                  <a:srgbClr val="141B2E"/>
+                </a:solidFill>
+                <a:latin typeface="Arial"/>
+              </a:rPr>
+              <a:t> При пороге 0,3 классический подход не просто не даёт прироста — добавляет 2 ложных срабатывания там, где хэш не ошибается в принципе. Поднять порог до значения, которое убрало бы эти ложные срабатывания, не помогает поймать ни одну перефразировку: лучшее, что даёт настройка порога на этом наборе, — сравняться с хэшем, а не превзойти его. И вторая честная находка: лучший результат на этом тесте дал не самый очевидный кандидат — узкий специализированный сервис обошёл универсальную модель-судью, но одного измерения на 20 парах недостаточно, чтобы на этом основании менять уже работающую архитектуру.</a:t>
             </a:r>
           </a:p>
         </p:txBody>
@@ -13941,8 +13941,8 @@
         </p:blipFill>
         <p:spPr>
           <a:xfrm>
-            <a:off x="1515612" y="943356"/>
-            <a:ext cx="9157727" cy="3319676"/>
+            <a:off x="1625106" y="943356"/>
+            <a:ext cx="8938738" cy="3240292"/>
           </a:xfrm>
           <a:prstGeom prst="rect">
             <a:avLst/>
@@ -13957,99 +13957,8 @@
         </p:nvSpPr>
         <p:spPr>
           <a:xfrm>
-            <a:off x="502920" y="4427624"/>
-            <a:ext cx="11183112" cy="604012"/>
-          </a:xfrm>
-          <a:prstGeom prst="roundRect">
-            <a:avLst>
-              <a:gd name="adj" fmla="val 25000"/>
-            </a:avLst>
-          </a:prstGeom>
-          <a:solidFill>
-            <a:srgbClr val="E4E9EF"/>
-          </a:solidFill>
-          <a:ln w="15240">
-            <a:solidFill>
-              <a:srgbClr val="6B7685"/>
-            </a:solidFill>
-            <a:prstDash val="dash"/>
-          </a:ln>
-          <a:effectLst/>
-        </p:spPr>
-        <p:style>
-          <a:lnRef idx="1">
-            <a:schemeClr val="accent1"/>
-          </a:lnRef>
-          <a:fillRef idx="3">
-            <a:schemeClr val="accent1"/>
-          </a:fillRef>
-          <a:effectRef idx="2">
-            <a:schemeClr val="accent1"/>
-          </a:effectRef>
-          <a:fontRef idx="minor">
-            <a:schemeClr val="lt1"/>
-          </a:fontRef>
-        </p:style>
-        <p:txBody>
-          <a:bodyPr rtlCol="0" anchor="ctr"/>
-          <a:lstStyle/>
-          <a:p>
-            <a:pPr algn="ctr"/>
-          </a:p>
-        </p:txBody>
-      </p:sp>
-      <p:sp>
-        <p:nvSpPr>
-          <p:cNvPr id="5" name="TextBox 4"/>
-          <p:cNvSpPr txBox="1"/>
-          <p:nvPr/>
-        </p:nvSpPr>
-        <p:spPr>
-          <a:xfrm>
-            <a:off x="740664" y="4564784"/>
-            <a:ext cx="10707624" cy="329692"/>
-          </a:xfrm>
-          <a:prstGeom prst="rect">
-            <a:avLst/>
-          </a:prstGeom>
-          <a:noFill/>
-        </p:spPr>
-        <p:txBody>
-          <a:bodyPr wrap="square" lIns="0" rIns="0" tIns="0" bIns="0" anchor="ctr">
-            <a:spAutoFit/>
-          </a:bodyPr>
-          <a:lstStyle/>
-          <a:p>
-            <a:pPr algn="l">
-              <a:lnSpc>
-                <a:spcPts val="1297"/>
-              </a:lnSpc>
-              <a:spcAft>
-                <a:spcPts val="300"/>
-              </a:spcAft>
-            </a:pPr>
-            <a:r>
-              <a:rPr sz="1100" b="0" i="1">
-                <a:solidFill>
-                  <a:srgbClr val="6B7685"/>
-                </a:solidFill>
-                <a:latin typeface="Arial"/>
-              </a:rPr>
-              <a:t>Фигура: карточки — точное совпадение (хэш) 15/20, классический векторный подход (TF-IDF-косинус) 13/20, дешёвая модель-судья 17/20, внешний сервис (jev) — не измерено, на одних и тех же 20 тестовых парах. Внизу подпись: числа — измерение, не предположение.</a:t>
-            </a:r>
-          </a:p>
-        </p:txBody>
-      </p:sp>
-      <p:sp>
-        <p:nvSpPr>
-          <p:cNvPr id="6" name="Rounded Rectangle 5"/>
-          <p:cNvSpPr/>
-          <p:nvPr/>
-        </p:nvSpPr>
-        <p:spPr>
-          <a:xfrm>
-            <a:off x="502920" y="5196228"/>
-            <a:ext cx="82296" cy="841247"/>
+            <a:off x="502920" y="4348240"/>
+            <a:ext cx="82296" cy="636524"/>
           </a:xfrm>
           <a:prstGeom prst="roundRect">
             <a:avLst>
@@ -14088,13 +13997,101 @@
       </p:sp>
       <p:sp>
         <p:nvSpPr>
+          <p:cNvPr id="5" name="TextBox 4"/>
+          <p:cNvSpPr txBox="1"/>
+          <p:nvPr/>
+        </p:nvSpPr>
+        <p:spPr>
+          <a:xfrm>
+            <a:off x="859536" y="4476256"/>
+            <a:ext cx="10643616" cy="380492"/>
+          </a:xfrm>
+          <a:prstGeom prst="rect">
+            <a:avLst/>
+          </a:prstGeom>
+          <a:noFill/>
+        </p:spPr>
+        <p:txBody>
+          <a:bodyPr wrap="square" lIns="0" rIns="0" tIns="0" bIns="0" anchor="ctr">
+            <a:spAutoFit/>
+          </a:bodyPr>
+          <a:lstStyle/>
+          <a:p>
+            <a:pPr algn="l">
+              <a:lnSpc>
+                <a:spcPts val="1426"/>
+              </a:lnSpc>
+              <a:spcAft>
+                <a:spcPts val="300"/>
+              </a:spcAft>
+            </a:pPr>
+            <a:r>
+              <a:rPr sz="1150" b="1" i="0">
+                <a:solidFill>
+                  <a:srgbClr val="141B2E"/>
+                </a:solidFill>
+                <a:latin typeface="Arial"/>
+              </a:rPr>
+              <a:t>Фигура: карточки — точное совпадение (хэш) 15/20, классический векторный подход (TF-IDF-косинус) 13/20, дешёвая модель-судья 17/20, внешний сервис (jev) 20/20, на одних и тех же 20 тестовых парах. Внизу подпись: числа — измерение, не предположение.</a:t>
+            </a:r>
+          </a:p>
+        </p:txBody>
+      </p:sp>
+      <p:sp>
+        <p:nvSpPr>
+          <p:cNvPr id="6" name="Rounded Rectangle 5"/>
+          <p:cNvSpPr/>
+          <p:nvPr/>
+        </p:nvSpPr>
+        <p:spPr>
+          <a:xfrm>
+            <a:off x="502920" y="5149356"/>
+            <a:ext cx="82296" cy="841247"/>
+          </a:xfrm>
+          <a:prstGeom prst="roundRect">
+            <a:avLst>
+              <a:gd name="adj" fmla="val 50000"/>
+            </a:avLst>
+          </a:prstGeom>
+          <a:solidFill>
+            <a:srgbClr val="F0AB00"/>
+          </a:solidFill>
+          <a:ln>
+            <a:noFill/>
+          </a:ln>
+          <a:effectLst/>
+        </p:spPr>
+        <p:style>
+          <a:lnRef idx="1">
+            <a:schemeClr val="accent1"/>
+          </a:lnRef>
+          <a:fillRef idx="3">
+            <a:schemeClr val="accent1"/>
+          </a:fillRef>
+          <a:effectRef idx="2">
+            <a:schemeClr val="accent1"/>
+          </a:effectRef>
+          <a:fontRef idx="minor">
+            <a:schemeClr val="lt1"/>
+          </a:fontRef>
+        </p:style>
+        <p:txBody>
+          <a:bodyPr rtlCol="0" anchor="ctr"/>
+          <a:lstStyle/>
+          <a:p>
+            <a:pPr algn="ctr"/>
+          </a:p>
+        </p:txBody>
+      </p:sp>
+      <p:sp>
+        <p:nvSpPr>
           <p:cNvPr id="7" name="TextBox 6"/>
           <p:cNvSpPr txBox="1"/>
           <p:nvPr/>
         </p:nvSpPr>
         <p:spPr>
           <a:xfrm>
-            <a:off x="859536" y="5324244"/>
+            <a:off x="859536" y="5277372"/>
             <a:ext cx="10643616" cy="585215"/>
           </a:xfrm>
           <a:prstGeom prst="rect">

--- a/library/seminars/sem-08/rendered/sem-08.pptx
+++ b/library/seminars/sem-08/rendered/sem-08.pptx
@@ -14938,7 +14938,359 @@
       </p:sp>
       <p:sp>
         <p:nvSpPr>
-          <p:cNvPr id="5" name="TextBox 4"/>
+          <p:cNvPr id="5" name="Rounded Rectangle 4"/>
+          <p:cNvSpPr/>
+          <p:nvPr/>
+        </p:nvSpPr>
+        <p:spPr>
+          <a:xfrm>
+            <a:off x="502920" y="5989320"/>
+            <a:ext cx="2658618" cy="384048"/>
+          </a:xfrm>
+          <a:prstGeom prst="roundRect">
+            <a:avLst>
+              <a:gd name="adj" fmla="val 30000"/>
+            </a:avLst>
+          </a:prstGeom>
+          <a:solidFill>
+            <a:srgbClr val="028090"/>
+          </a:solidFill>
+          <a:ln>
+            <a:noFill/>
+          </a:ln>
+          <a:effectLst/>
+        </p:spPr>
+        <p:style>
+          <a:lnRef idx="1">
+            <a:schemeClr val="accent1"/>
+          </a:lnRef>
+          <a:fillRef idx="3">
+            <a:schemeClr val="accent1"/>
+          </a:fillRef>
+          <a:effectRef idx="2">
+            <a:schemeClr val="accent1"/>
+          </a:effectRef>
+          <a:fontRef idx="minor">
+            <a:schemeClr val="lt1"/>
+          </a:fontRef>
+        </p:style>
+        <p:txBody>
+          <a:bodyPr rtlCol="0" anchor="ctr"/>
+          <a:lstStyle/>
+          <a:p>
+            <a:pPr algn="ctr"/>
+          </a:p>
+        </p:txBody>
+      </p:sp>
+      <p:sp>
+        <p:nvSpPr>
+          <p:cNvPr id="6" name="TextBox 5"/>
+          <p:cNvSpPr txBox="1"/>
+          <p:nvPr/>
+        </p:nvSpPr>
+        <p:spPr>
+          <a:xfrm>
+            <a:off x="502920" y="5989320"/>
+            <a:ext cx="2658618" cy="384048"/>
+          </a:xfrm>
+          <a:prstGeom prst="rect">
+            <a:avLst/>
+          </a:prstGeom>
+          <a:noFill/>
+        </p:spPr>
+        <p:txBody>
+          <a:bodyPr wrap="square" lIns="0" rIns="0" tIns="0" bIns="0" anchor="ctr">
+            <a:spAutoFit/>
+          </a:bodyPr>
+          <a:lstStyle/>
+          <a:p>
+            <a:pPr algn="ctr">
+              <a:lnSpc>
+                <a:spcPts val="1475"/>
+              </a:lnSpc>
+              <a:spcAft>
+                <a:spcPts val="0"/>
+              </a:spcAft>
+            </a:pPr>
+            <a:r>
+              <a:rPr sz="1250" b="0" i="0">
+                <a:solidFill>
+                  <a:srgbClr val="FFFFFF"/>
+                </a:solidFill>
+                <a:latin typeface="Arial"/>
+              </a:rPr>
+              <a:t>Уведомления</a:t>
+            </a:r>
+          </a:p>
+        </p:txBody>
+      </p:sp>
+      <p:sp>
+        <p:nvSpPr>
+          <p:cNvPr id="7" name="Rounded Rectangle 6"/>
+          <p:cNvSpPr/>
+          <p:nvPr/>
+        </p:nvSpPr>
+        <p:spPr>
+          <a:xfrm>
+            <a:off x="3344418" y="5989320"/>
+            <a:ext cx="2658618" cy="384048"/>
+          </a:xfrm>
+          <a:prstGeom prst="roundRect">
+            <a:avLst>
+              <a:gd name="adj" fmla="val 30000"/>
+            </a:avLst>
+          </a:prstGeom>
+          <a:solidFill>
+            <a:srgbClr val="F0AB00"/>
+          </a:solidFill>
+          <a:ln>
+            <a:noFill/>
+          </a:ln>
+          <a:effectLst/>
+        </p:spPr>
+        <p:style>
+          <a:lnRef idx="1">
+            <a:schemeClr val="accent1"/>
+          </a:lnRef>
+          <a:fillRef idx="3">
+            <a:schemeClr val="accent1"/>
+          </a:fillRef>
+          <a:effectRef idx="2">
+            <a:schemeClr val="accent1"/>
+          </a:effectRef>
+          <a:fontRef idx="minor">
+            <a:schemeClr val="lt1"/>
+          </a:fontRef>
+        </p:style>
+        <p:txBody>
+          <a:bodyPr rtlCol="0" anchor="ctr"/>
+          <a:lstStyle/>
+          <a:p>
+            <a:pPr algn="ctr"/>
+          </a:p>
+        </p:txBody>
+      </p:sp>
+      <p:sp>
+        <p:nvSpPr>
+          <p:cNvPr id="8" name="TextBox 7"/>
+          <p:cNvSpPr txBox="1"/>
+          <p:nvPr/>
+        </p:nvSpPr>
+        <p:spPr>
+          <a:xfrm>
+            <a:off x="3344418" y="5989320"/>
+            <a:ext cx="2658618" cy="384048"/>
+          </a:xfrm>
+          <a:prstGeom prst="rect">
+            <a:avLst/>
+          </a:prstGeom>
+          <a:noFill/>
+        </p:spPr>
+        <p:txBody>
+          <a:bodyPr wrap="square" lIns="0" rIns="0" tIns="0" bIns="0" anchor="ctr">
+            <a:spAutoFit/>
+          </a:bodyPr>
+          <a:lstStyle/>
+          <a:p>
+            <a:pPr algn="ctr">
+              <a:lnSpc>
+                <a:spcPts val="1475"/>
+              </a:lnSpc>
+              <a:spcAft>
+                <a:spcPts val="0"/>
+              </a:spcAft>
+            </a:pPr>
+            <a:r>
+              <a:rPr sz="1250" b="1" i="0">
+                <a:solidFill>
+                  <a:srgbClr val="21295C"/>
+                </a:solidFill>
+                <a:latin typeface="Arial"/>
+              </a:rPr>
+              <a:t>Проверка на повтор</a:t>
+            </a:r>
+          </a:p>
+        </p:txBody>
+      </p:sp>
+      <p:sp>
+        <p:nvSpPr>
+          <p:cNvPr id="9" name="Rounded Rectangle 8"/>
+          <p:cNvSpPr/>
+          <p:nvPr/>
+        </p:nvSpPr>
+        <p:spPr>
+          <a:xfrm>
+            <a:off x="6185916" y="5989320"/>
+            <a:ext cx="2658618" cy="384048"/>
+          </a:xfrm>
+          <a:prstGeom prst="roundRect">
+            <a:avLst>
+              <a:gd name="adj" fmla="val 30000"/>
+            </a:avLst>
+          </a:prstGeom>
+          <a:solidFill>
+            <a:srgbClr val="3E4C8A"/>
+          </a:solidFill>
+          <a:ln>
+            <a:noFill/>
+          </a:ln>
+          <a:effectLst/>
+        </p:spPr>
+        <p:style>
+          <a:lnRef idx="1">
+            <a:schemeClr val="accent1"/>
+          </a:lnRef>
+          <a:fillRef idx="3">
+            <a:schemeClr val="accent1"/>
+          </a:fillRef>
+          <a:effectRef idx="2">
+            <a:schemeClr val="accent1"/>
+          </a:effectRef>
+          <a:fontRef idx="minor">
+            <a:schemeClr val="lt1"/>
+          </a:fontRef>
+        </p:style>
+        <p:txBody>
+          <a:bodyPr rtlCol="0" anchor="ctr"/>
+          <a:lstStyle/>
+          <a:p>
+            <a:pPr algn="ctr"/>
+          </a:p>
+        </p:txBody>
+      </p:sp>
+      <p:sp>
+        <p:nvSpPr>
+          <p:cNvPr id="10" name="TextBox 9"/>
+          <p:cNvSpPr txBox="1"/>
+          <p:nvPr/>
+        </p:nvSpPr>
+        <p:spPr>
+          <a:xfrm>
+            <a:off x="6185916" y="5989320"/>
+            <a:ext cx="2658618" cy="384048"/>
+          </a:xfrm>
+          <a:prstGeom prst="rect">
+            <a:avLst/>
+          </a:prstGeom>
+          <a:noFill/>
+        </p:spPr>
+        <p:txBody>
+          <a:bodyPr wrap="square" lIns="0" rIns="0" tIns="0" bIns="0" anchor="ctr">
+            <a:spAutoFit/>
+          </a:bodyPr>
+          <a:lstStyle/>
+          <a:p>
+            <a:pPr algn="ctr">
+              <a:lnSpc>
+                <a:spcPts val="1475"/>
+              </a:lnSpc>
+              <a:spcAft>
+                <a:spcPts val="0"/>
+              </a:spcAft>
+            </a:pPr>
+            <a:r>
+              <a:rPr sz="1250" b="0" i="0">
+                <a:solidFill>
+                  <a:srgbClr val="9FAEC4"/>
+                </a:solidFill>
+                <a:latin typeface="Arial"/>
+              </a:rPr>
+              <a:t>Одобрение возврата</a:t>
+            </a:r>
+          </a:p>
+        </p:txBody>
+      </p:sp>
+      <p:sp>
+        <p:nvSpPr>
+          <p:cNvPr id="11" name="Rounded Rectangle 10"/>
+          <p:cNvSpPr/>
+          <p:nvPr/>
+        </p:nvSpPr>
+        <p:spPr>
+          <a:xfrm>
+            <a:off x="9027414" y="5989320"/>
+            <a:ext cx="2658618" cy="384048"/>
+          </a:xfrm>
+          <a:prstGeom prst="roundRect">
+            <a:avLst>
+              <a:gd name="adj" fmla="val 30000"/>
+            </a:avLst>
+          </a:prstGeom>
+          <a:solidFill>
+            <a:srgbClr val="3E4C8A"/>
+          </a:solidFill>
+          <a:ln>
+            <a:noFill/>
+          </a:ln>
+          <a:effectLst/>
+        </p:spPr>
+        <p:style>
+          <a:lnRef idx="1">
+            <a:schemeClr val="accent1"/>
+          </a:lnRef>
+          <a:fillRef idx="3">
+            <a:schemeClr val="accent1"/>
+          </a:fillRef>
+          <a:effectRef idx="2">
+            <a:schemeClr val="accent1"/>
+          </a:effectRef>
+          <a:fontRef idx="minor">
+            <a:schemeClr val="lt1"/>
+          </a:fontRef>
+        </p:style>
+        <p:txBody>
+          <a:bodyPr rtlCol="0" anchor="ctr"/>
+          <a:lstStyle/>
+          <a:p>
+            <a:pPr algn="ctr"/>
+          </a:p>
+        </p:txBody>
+      </p:sp>
+      <p:sp>
+        <p:nvSpPr>
+          <p:cNvPr id="12" name="TextBox 11"/>
+          <p:cNvSpPr txBox="1"/>
+          <p:nvPr/>
+        </p:nvSpPr>
+        <p:spPr>
+          <a:xfrm>
+            <a:off x="9027414" y="5989320"/>
+            <a:ext cx="2658618" cy="384048"/>
+          </a:xfrm>
+          <a:prstGeom prst="rect">
+            <a:avLst/>
+          </a:prstGeom>
+          <a:noFill/>
+        </p:spPr>
+        <p:txBody>
+          <a:bodyPr wrap="square" lIns="0" rIns="0" tIns="0" bIns="0" anchor="ctr">
+            <a:spAutoFit/>
+          </a:bodyPr>
+          <a:lstStyle/>
+          <a:p>
+            <a:pPr algn="ctr">
+              <a:lnSpc>
+                <a:spcPts val="1475"/>
+              </a:lnSpc>
+              <a:spcAft>
+                <a:spcPts val="0"/>
+              </a:spcAft>
+            </a:pPr>
+            <a:r>
+              <a:rPr sz="1250" b="0" i="0">
+                <a:solidFill>
+                  <a:srgbClr val="9FAEC4"/>
+                </a:solidFill>
+                <a:latin typeface="Arial"/>
+              </a:rPr>
+              <a:t>Карточка в Telegram</a:t>
+            </a:r>
+          </a:p>
+        </p:txBody>
+      </p:sp>
+      <p:sp>
+        <p:nvSpPr>
+          <p:cNvPr id="13" name="TextBox 12"/>
           <p:cNvSpPr txBox="1"/>
           <p:nvPr/>
         </p:nvSpPr>
@@ -29292,55 +29644,6 @@
         </p:nvSpPr>
         <p:spPr>
           <a:xfrm>
-            <a:off x="6309200" y="4144899"/>
-            <a:ext cx="5029359" cy="171640"/>
-          </a:xfrm>
-          <a:prstGeom prst="roundRect">
-            <a:avLst>
-              <a:gd name="adj" fmla="val 16666"/>
-            </a:avLst>
-          </a:prstGeom>
-          <a:solidFill>
-            <a:srgbClr val="E4E9EF"/>
-          </a:solidFill>
-          <a:ln w="12700">
-            <a:solidFill>
-              <a:srgbClr val="E5EAF0"/>
-            </a:solidFill>
-            <a:prstDash val="dash"/>
-          </a:ln>
-          <a:effectLst/>
-        </p:spPr>
-        <p:style>
-          <a:lnRef idx="1">
-            <a:schemeClr val="accent1"/>
-          </a:lnRef>
-          <a:fillRef idx="3">
-            <a:schemeClr val="accent1"/>
-          </a:fillRef>
-          <a:effectRef idx="2">
-            <a:schemeClr val="accent1"/>
-          </a:effectRef>
-          <a:fontRef idx="minor">
-            <a:schemeClr val="lt1"/>
-          </a:fontRef>
-        </p:style>
-        <p:txBody>
-          <a:bodyPr rtlCol="0" anchor="ctr"/>
-          <a:lstStyle/>
-          <a:p>
-            <a:pPr algn="ctr"/>
-          </a:p>
-        </p:txBody>
-      </p:sp>
-      <p:sp>
-        <p:nvSpPr>
-          <p:cNvPr id="51" name="Rounded Rectangle 50"/>
-          <p:cNvSpPr/>
-          <p:nvPr/>
-        </p:nvSpPr>
-        <p:spPr>
-          <a:xfrm>
             <a:off x="502920" y="4737163"/>
             <a:ext cx="82296" cy="1187704"/>
           </a:xfrm>
@@ -29381,7 +29684,7 @@
       </p:sp>
       <p:sp>
         <p:nvSpPr>
-          <p:cNvPr id="52" name="TextBox 51"/>
+          <p:cNvPr id="51" name="TextBox 50"/>
           <p:cNvSpPr txBox="1"/>
           <p:nvPr/>
         </p:nvSpPr>
@@ -29432,7 +29735,7 @@
       </p:sp>
       <p:sp>
         <p:nvSpPr>
-          <p:cNvPr id="53" name="TextBox 52"/>
+          <p:cNvPr id="52" name="TextBox 51"/>
           <p:cNvSpPr txBox="1"/>
           <p:nvPr/>
         </p:nvSpPr>
@@ -37966,7 +38269,7 @@
                 </a:solidFill>
                 <a:latin typeface="Arial"/>
               </a:rPr>
-              <a:t>Карточка в Telegram</a:t>
+              <a:t>Кейс 4. Карточка в Telegram</a:t>
             </a:r>
           </a:p>
         </p:txBody>
@@ -38015,7 +38318,359 @@
       </p:sp>
       <p:sp>
         <p:nvSpPr>
-          <p:cNvPr id="5" name="TextBox 4"/>
+          <p:cNvPr id="5" name="Rounded Rectangle 4"/>
+          <p:cNvSpPr/>
+          <p:nvPr/>
+        </p:nvSpPr>
+        <p:spPr>
+          <a:xfrm>
+            <a:off x="502920" y="5989320"/>
+            <a:ext cx="2658618" cy="384048"/>
+          </a:xfrm>
+          <a:prstGeom prst="roundRect">
+            <a:avLst>
+              <a:gd name="adj" fmla="val 30000"/>
+            </a:avLst>
+          </a:prstGeom>
+          <a:solidFill>
+            <a:srgbClr val="028090"/>
+          </a:solidFill>
+          <a:ln>
+            <a:noFill/>
+          </a:ln>
+          <a:effectLst/>
+        </p:spPr>
+        <p:style>
+          <a:lnRef idx="1">
+            <a:schemeClr val="accent1"/>
+          </a:lnRef>
+          <a:fillRef idx="3">
+            <a:schemeClr val="accent1"/>
+          </a:fillRef>
+          <a:effectRef idx="2">
+            <a:schemeClr val="accent1"/>
+          </a:effectRef>
+          <a:fontRef idx="minor">
+            <a:schemeClr val="lt1"/>
+          </a:fontRef>
+        </p:style>
+        <p:txBody>
+          <a:bodyPr rtlCol="0" anchor="ctr"/>
+          <a:lstStyle/>
+          <a:p>
+            <a:pPr algn="ctr"/>
+          </a:p>
+        </p:txBody>
+      </p:sp>
+      <p:sp>
+        <p:nvSpPr>
+          <p:cNvPr id="6" name="TextBox 5"/>
+          <p:cNvSpPr txBox="1"/>
+          <p:nvPr/>
+        </p:nvSpPr>
+        <p:spPr>
+          <a:xfrm>
+            <a:off x="502920" y="5989320"/>
+            <a:ext cx="2658618" cy="384048"/>
+          </a:xfrm>
+          <a:prstGeom prst="rect">
+            <a:avLst/>
+          </a:prstGeom>
+          <a:noFill/>
+        </p:spPr>
+        <p:txBody>
+          <a:bodyPr wrap="square" lIns="0" rIns="0" tIns="0" bIns="0" anchor="ctr">
+            <a:spAutoFit/>
+          </a:bodyPr>
+          <a:lstStyle/>
+          <a:p>
+            <a:pPr algn="ctr">
+              <a:lnSpc>
+                <a:spcPts val="1475"/>
+              </a:lnSpc>
+              <a:spcAft>
+                <a:spcPts val="0"/>
+              </a:spcAft>
+            </a:pPr>
+            <a:r>
+              <a:rPr sz="1250" b="0" i="0">
+                <a:solidFill>
+                  <a:srgbClr val="FFFFFF"/>
+                </a:solidFill>
+                <a:latin typeface="Arial"/>
+              </a:rPr>
+              <a:t>Уведомления</a:t>
+            </a:r>
+          </a:p>
+        </p:txBody>
+      </p:sp>
+      <p:sp>
+        <p:nvSpPr>
+          <p:cNvPr id="7" name="Rounded Rectangle 6"/>
+          <p:cNvSpPr/>
+          <p:nvPr/>
+        </p:nvSpPr>
+        <p:spPr>
+          <a:xfrm>
+            <a:off x="3344418" y="5989320"/>
+            <a:ext cx="2658618" cy="384048"/>
+          </a:xfrm>
+          <a:prstGeom prst="roundRect">
+            <a:avLst>
+              <a:gd name="adj" fmla="val 30000"/>
+            </a:avLst>
+          </a:prstGeom>
+          <a:solidFill>
+            <a:srgbClr val="028090"/>
+          </a:solidFill>
+          <a:ln>
+            <a:noFill/>
+          </a:ln>
+          <a:effectLst/>
+        </p:spPr>
+        <p:style>
+          <a:lnRef idx="1">
+            <a:schemeClr val="accent1"/>
+          </a:lnRef>
+          <a:fillRef idx="3">
+            <a:schemeClr val="accent1"/>
+          </a:fillRef>
+          <a:effectRef idx="2">
+            <a:schemeClr val="accent1"/>
+          </a:effectRef>
+          <a:fontRef idx="minor">
+            <a:schemeClr val="lt1"/>
+          </a:fontRef>
+        </p:style>
+        <p:txBody>
+          <a:bodyPr rtlCol="0" anchor="ctr"/>
+          <a:lstStyle/>
+          <a:p>
+            <a:pPr algn="ctr"/>
+          </a:p>
+        </p:txBody>
+      </p:sp>
+      <p:sp>
+        <p:nvSpPr>
+          <p:cNvPr id="8" name="TextBox 7"/>
+          <p:cNvSpPr txBox="1"/>
+          <p:nvPr/>
+        </p:nvSpPr>
+        <p:spPr>
+          <a:xfrm>
+            <a:off x="3344418" y="5989320"/>
+            <a:ext cx="2658618" cy="384048"/>
+          </a:xfrm>
+          <a:prstGeom prst="rect">
+            <a:avLst/>
+          </a:prstGeom>
+          <a:noFill/>
+        </p:spPr>
+        <p:txBody>
+          <a:bodyPr wrap="square" lIns="0" rIns="0" tIns="0" bIns="0" anchor="ctr">
+            <a:spAutoFit/>
+          </a:bodyPr>
+          <a:lstStyle/>
+          <a:p>
+            <a:pPr algn="ctr">
+              <a:lnSpc>
+                <a:spcPts val="1475"/>
+              </a:lnSpc>
+              <a:spcAft>
+                <a:spcPts val="0"/>
+              </a:spcAft>
+            </a:pPr>
+            <a:r>
+              <a:rPr sz="1250" b="0" i="0">
+                <a:solidFill>
+                  <a:srgbClr val="FFFFFF"/>
+                </a:solidFill>
+                <a:latin typeface="Arial"/>
+              </a:rPr>
+              <a:t>Проверка на повтор</a:t>
+            </a:r>
+          </a:p>
+        </p:txBody>
+      </p:sp>
+      <p:sp>
+        <p:nvSpPr>
+          <p:cNvPr id="9" name="Rounded Rectangle 8"/>
+          <p:cNvSpPr/>
+          <p:nvPr/>
+        </p:nvSpPr>
+        <p:spPr>
+          <a:xfrm>
+            <a:off x="6185916" y="5989320"/>
+            <a:ext cx="2658618" cy="384048"/>
+          </a:xfrm>
+          <a:prstGeom prst="roundRect">
+            <a:avLst>
+              <a:gd name="adj" fmla="val 30000"/>
+            </a:avLst>
+          </a:prstGeom>
+          <a:solidFill>
+            <a:srgbClr val="028090"/>
+          </a:solidFill>
+          <a:ln>
+            <a:noFill/>
+          </a:ln>
+          <a:effectLst/>
+        </p:spPr>
+        <p:style>
+          <a:lnRef idx="1">
+            <a:schemeClr val="accent1"/>
+          </a:lnRef>
+          <a:fillRef idx="3">
+            <a:schemeClr val="accent1"/>
+          </a:fillRef>
+          <a:effectRef idx="2">
+            <a:schemeClr val="accent1"/>
+          </a:effectRef>
+          <a:fontRef idx="minor">
+            <a:schemeClr val="lt1"/>
+          </a:fontRef>
+        </p:style>
+        <p:txBody>
+          <a:bodyPr rtlCol="0" anchor="ctr"/>
+          <a:lstStyle/>
+          <a:p>
+            <a:pPr algn="ctr"/>
+          </a:p>
+        </p:txBody>
+      </p:sp>
+      <p:sp>
+        <p:nvSpPr>
+          <p:cNvPr id="10" name="TextBox 9"/>
+          <p:cNvSpPr txBox="1"/>
+          <p:nvPr/>
+        </p:nvSpPr>
+        <p:spPr>
+          <a:xfrm>
+            <a:off x="6185916" y="5989320"/>
+            <a:ext cx="2658618" cy="384048"/>
+          </a:xfrm>
+          <a:prstGeom prst="rect">
+            <a:avLst/>
+          </a:prstGeom>
+          <a:noFill/>
+        </p:spPr>
+        <p:txBody>
+          <a:bodyPr wrap="square" lIns="0" rIns="0" tIns="0" bIns="0" anchor="ctr">
+            <a:spAutoFit/>
+          </a:bodyPr>
+          <a:lstStyle/>
+          <a:p>
+            <a:pPr algn="ctr">
+              <a:lnSpc>
+                <a:spcPts val="1475"/>
+              </a:lnSpc>
+              <a:spcAft>
+                <a:spcPts val="0"/>
+              </a:spcAft>
+            </a:pPr>
+            <a:r>
+              <a:rPr sz="1250" b="0" i="0">
+                <a:solidFill>
+                  <a:srgbClr val="FFFFFF"/>
+                </a:solidFill>
+                <a:latin typeface="Arial"/>
+              </a:rPr>
+              <a:t>Одобрение возврата</a:t>
+            </a:r>
+          </a:p>
+        </p:txBody>
+      </p:sp>
+      <p:sp>
+        <p:nvSpPr>
+          <p:cNvPr id="11" name="Rounded Rectangle 10"/>
+          <p:cNvSpPr/>
+          <p:nvPr/>
+        </p:nvSpPr>
+        <p:spPr>
+          <a:xfrm>
+            <a:off x="9027414" y="5989320"/>
+            <a:ext cx="2658618" cy="384048"/>
+          </a:xfrm>
+          <a:prstGeom prst="roundRect">
+            <a:avLst>
+              <a:gd name="adj" fmla="val 30000"/>
+            </a:avLst>
+          </a:prstGeom>
+          <a:solidFill>
+            <a:srgbClr val="F0AB00"/>
+          </a:solidFill>
+          <a:ln>
+            <a:noFill/>
+          </a:ln>
+          <a:effectLst/>
+        </p:spPr>
+        <p:style>
+          <a:lnRef idx="1">
+            <a:schemeClr val="accent1"/>
+          </a:lnRef>
+          <a:fillRef idx="3">
+            <a:schemeClr val="accent1"/>
+          </a:fillRef>
+          <a:effectRef idx="2">
+            <a:schemeClr val="accent1"/>
+          </a:effectRef>
+          <a:fontRef idx="minor">
+            <a:schemeClr val="lt1"/>
+          </a:fontRef>
+        </p:style>
+        <p:txBody>
+          <a:bodyPr rtlCol="0" anchor="ctr"/>
+          <a:lstStyle/>
+          <a:p>
+            <a:pPr algn="ctr"/>
+          </a:p>
+        </p:txBody>
+      </p:sp>
+      <p:sp>
+        <p:nvSpPr>
+          <p:cNvPr id="12" name="TextBox 11"/>
+          <p:cNvSpPr txBox="1"/>
+          <p:nvPr/>
+        </p:nvSpPr>
+        <p:spPr>
+          <a:xfrm>
+            <a:off x="9027414" y="5989320"/>
+            <a:ext cx="2658618" cy="384048"/>
+          </a:xfrm>
+          <a:prstGeom prst="rect">
+            <a:avLst/>
+          </a:prstGeom>
+          <a:noFill/>
+        </p:spPr>
+        <p:txBody>
+          <a:bodyPr wrap="square" lIns="0" rIns="0" tIns="0" bIns="0" anchor="ctr">
+            <a:spAutoFit/>
+          </a:bodyPr>
+          <a:lstStyle/>
+          <a:p>
+            <a:pPr algn="ctr">
+              <a:lnSpc>
+                <a:spcPts val="1475"/>
+              </a:lnSpc>
+              <a:spcAft>
+                <a:spcPts val="0"/>
+              </a:spcAft>
+            </a:pPr>
+            <a:r>
+              <a:rPr sz="1250" b="1" i="0">
+                <a:solidFill>
+                  <a:srgbClr val="21295C"/>
+                </a:solidFill>
+                <a:latin typeface="Arial"/>
+              </a:rPr>
+              <a:t>Карточка в Telegram</a:t>
+            </a:r>
+          </a:p>
+        </p:txBody>
+      </p:sp>
+      <p:sp>
+        <p:nvSpPr>
+          <p:cNvPr id="13" name="TextBox 12"/>
           <p:cNvSpPr txBox="1"/>
           <p:nvPr/>
         </p:nvSpPr>

--- a/library/seminars/sem-08/rendered/sem-08.pptx
+++ b/library/seminars/sem-08/rendered/sem-08.pptx
@@ -6652,7 +6652,7 @@
           <a:p/>
           <a:p>
             <a:r>
-              <a:t>Второй. Лимиты Telegram — отдельный, более узкий потолок, и они разные для фото и для документа. То, что прошло мимо лимита n8n, может всё равно не пройти мимо лимита канала доставки: это два независимых порога, не один, и проверка одного не освобождает от проверки другого.</a:t>
+              <a:t>Второй. Лимиты Telegram — отдельный, более узкий потолок, и они разные для фото и для документа. То, что прошло мимо лимита n8n, может всё равно не пройти мимо лимита канала доставки: это два независимых порога, не один, и проверка одного не освобождает от проверки другого. В нашей сцене они разошлись ровно так: шестнадцать мегабайт у самого n8n против десяти с небольшим у отправки фотографии — и файл на двенадцать с лишним мегабайт прошёл первый порог и не прошёл второй.</a:t>
             </a:r>
           </a:p>
           <a:p/>
@@ -6758,7 +6758,7 @@
           <a:p/>
           <a:p>
             <a:r>
-              <a:t>Третья строка, самая дорогая по цене доказательства. В промте было написано «не возвращай больше суммы X» — и решение месяц считалось надёжным, потому что жалоб не было. Чем оказалось: решение оставалось вероятностным, и модель обходила правило в измеренной доле прогонов — ровно на границе условия, не случайно. Алгоритмический гейт — условие в коде — не ошибся ни разу на том же эксперименте. А дальше мы увидели ту же форму пропуска на масштабе целой компании: Zillow потеряла четверть штата и сотни миллионов долларов на том же непогейтированном пороге, который у нас стоил одного неловкого разговора с клиентом.</a:t>
+              <a:t>Третья строка, самая дорогая по цене доказательства. В промте было написано «не возвращай больше суммы X» — и решение месяц считалось надёжным, потому что жалоб не было. Чем оказалось: решение оставалось вероятностным, и модель обходила правило в измеренной доле прогонов — ровно на границе условия, не случайно. Алгоритмический гейт — условие в коде — не ошибся ни разу на том же эксперименте. А дальше мы увидели ту же форму пропуска на масштабе целой компании: Zillow потеряла четверть штата и сотни миллионов долларов на том же пороге без гейта, который у нас стоил одного неловкого разговора с клиентом.</a:t>
             </a:r>
           </a:p>
           <a:p/>
@@ -13049,7 +13049,7 @@
             <a:r>
               <a:rPr sz="1250" b="0" i="0">
                 <a:solidFill>
-                  <a:srgbClr val="9FAEC4"/>
+                  <a:srgbClr val="D6E2EC"/>
                 </a:solidFill>
                 <a:latin typeface="Arial"/>
               </a:rPr>
@@ -13137,7 +13137,7 @@
             <a:r>
               <a:rPr sz="1250" b="0" i="0">
                 <a:solidFill>
-                  <a:srgbClr val="9FAEC4"/>
+                  <a:srgbClr val="D6E2EC"/>
                 </a:solidFill>
                 <a:latin typeface="Arial"/>
               </a:rPr>
@@ -20598,7 +20598,7 @@
             <a:r>
               <a:rPr sz="1250" b="0" i="0">
                 <a:solidFill>
-                  <a:srgbClr val="9FAEC4"/>
+                  <a:srgbClr val="D6E2EC"/>
                 </a:solidFill>
                 <a:latin typeface="Arial"/>
               </a:rPr>
@@ -31391,7 +31391,7 @@
                 </a:solidFill>
                 <a:latin typeface="Arial"/>
               </a:rPr>
-              <a:t>Тот же непогейтированный порог, что в «Одобрении возврата», — на масштабе компании.</a:t>
+              <a:t>Тот же порог без гейта, что в «Одобрении возврата», — на масштабе компании.</a:t>
             </a:r>
           </a:p>
         </p:txBody>
@@ -35497,7 +35497,7 @@
             <a:r>
               <a:rPr sz="1250" b="0" i="0">
                 <a:solidFill>
-                  <a:srgbClr val="9FAEC4"/>
+                  <a:srgbClr val="D6E2EC"/>
                 </a:solidFill>
                 <a:latin typeface="Arial"/>
               </a:rPr>
@@ -35585,7 +35585,7 @@
             <a:r>
               <a:rPr sz="1250" b="0" i="0">
                 <a:solidFill>
-                  <a:srgbClr val="9FAEC4"/>
+                  <a:srgbClr val="D6E2EC"/>
                 </a:solidFill>
                 <a:latin typeface="Arial"/>
               </a:rPr>
@@ -35673,7 +35673,7 @@
             <a:r>
               <a:rPr sz="1250" b="0" i="0">
                 <a:solidFill>
-                  <a:srgbClr val="9FAEC4"/>
+                  <a:srgbClr val="D6E2EC"/>
                 </a:solidFill>
                 <a:latin typeface="Arial"/>
               </a:rPr>
@@ -40473,8 +40473,8 @@
         </p:blipFill>
         <p:spPr>
           <a:xfrm>
-            <a:off x="1604500" y="943356"/>
-            <a:ext cx="8979951" cy="3142982"/>
+            <a:off x="502920" y="1055126"/>
+            <a:ext cx="11183112" cy="3914089"/>
           </a:xfrm>
           <a:prstGeom prst="rect">
             <a:avLst/>
@@ -40489,8 +40489,8 @@
         </p:nvSpPr>
         <p:spPr>
           <a:xfrm>
-            <a:off x="502920" y="4250930"/>
-            <a:ext cx="82296" cy="715263"/>
+            <a:off x="502920" y="5413232"/>
+            <a:ext cx="82296" cy="746760"/>
           </a:xfrm>
           <a:prstGeom prst="roundRect">
             <a:avLst>
@@ -40535,8 +40535,8 @@
         </p:nvSpPr>
         <p:spPr>
           <a:xfrm>
-            <a:off x="859536" y="4378946"/>
-            <a:ext cx="10643616" cy="459231"/>
+            <a:off x="859536" y="5541248"/>
+            <a:ext cx="10643616" cy="490727"/>
           </a:xfrm>
           <a:prstGeom prst="rect">
             <a:avLst/>
@@ -40551,199 +40551,45 @@
           <a:p>
             <a:pPr algn="l">
               <a:lnSpc>
-                <a:spcPts val="1736"/>
+                <a:spcPts val="1860"/>
               </a:lnSpc>
               <a:spcAft>
                 <a:spcPts val="300"/>
               </a:spcAft>
             </a:pPr>
             <a:r>
-              <a:rPr sz="1400" b="1" i="0">
-                <a:solidFill>
-                  <a:srgbClr val="141B2E"/>
-                </a:solidFill>
-                <a:latin typeface="Arial"/>
-              </a:rPr>
-              <a:t>Текст уведомления и требование «текст поверх картинки» → </a:t>
-            </a:r>
-            <a:r>
-              <a:rPr sz="1400" b="1" i="0">
-                <a:solidFill>
-                  <a:srgbClr val="141B2E"/>
-                </a:solidFill>
-                <a:latin typeface="Arial"/>
-              </a:rPr>
-              <a:t>специализированная генерирующая модель</a:t>
-            </a:r>
-            <a:r>
-              <a:rPr sz="1400" b="1" i="0">
-                <a:solidFill>
-                  <a:srgbClr val="141B2E"/>
-                </a:solidFill>
-                <a:latin typeface="Arial"/>
-              </a:rPr>
-              <a:t> (текст → изображение) → готовая карточка, текст уже встроен в пиксели → отправка в Telegram как фото.</a:t>
-            </a:r>
-          </a:p>
-        </p:txBody>
-      </p:sp>
-      <p:sp>
-        <p:nvSpPr>
-          <p:cNvPr id="6" name="Rounded Rectangle 5"/>
-          <p:cNvSpPr/>
-          <p:nvPr/>
-        </p:nvSpPr>
-        <p:spPr>
-          <a:xfrm>
-            <a:off x="502920" y="5130786"/>
-            <a:ext cx="11183112" cy="1098550"/>
-          </a:xfrm>
-          <a:prstGeom prst="roundRect">
-            <a:avLst>
-              <a:gd name="adj" fmla="val 25000"/>
-            </a:avLst>
-          </a:prstGeom>
-          <a:solidFill>
-            <a:srgbClr val="E4E9EF"/>
-          </a:solidFill>
-          <a:ln w="15240">
-            <a:solidFill>
-              <a:srgbClr val="6B7685"/>
-            </a:solidFill>
-            <a:prstDash val="dash"/>
-          </a:ln>
-          <a:effectLst/>
-        </p:spPr>
-        <p:style>
-          <a:lnRef idx="1">
-            <a:schemeClr val="accent1"/>
-          </a:lnRef>
-          <a:fillRef idx="3">
-            <a:schemeClr val="accent1"/>
-          </a:fillRef>
-          <a:effectRef idx="2">
-            <a:schemeClr val="accent1"/>
-          </a:effectRef>
-          <a:fontRef idx="minor">
-            <a:schemeClr val="lt1"/>
-          </a:fontRef>
-        </p:style>
-        <p:txBody>
-          <a:bodyPr rtlCol="0" anchor="ctr"/>
-          <a:lstStyle/>
-          <a:p>
-            <a:pPr algn="ctr"/>
-          </a:p>
-        </p:txBody>
-      </p:sp>
-      <p:sp>
-        <p:nvSpPr>
-          <p:cNvPr id="7" name="TextBox 6"/>
-          <p:cNvSpPr txBox="1"/>
-          <p:nvPr/>
-        </p:nvSpPr>
-        <p:spPr>
-          <a:xfrm>
-            <a:off x="740664" y="5267946"/>
-            <a:ext cx="10707624" cy="824229"/>
-          </a:xfrm>
-          <a:prstGeom prst="rect">
-            <a:avLst/>
-          </a:prstGeom>
-          <a:noFill/>
-        </p:spPr>
-        <p:txBody>
-          <a:bodyPr wrap="square" lIns="0" rIns="0" tIns="0" bIns="0" anchor="ctr">
-            <a:spAutoFit/>
-          </a:bodyPr>
-          <a:lstStyle/>
-          <a:p>
-            <a:pPr algn="l">
-              <a:lnSpc>
-                <a:spcPts val="1297"/>
-              </a:lnSpc>
-              <a:spcAft>
-                <a:spcPts val="300"/>
-              </a:spcAft>
-            </a:pPr>
-            <a:r>
-              <a:rPr sz="1100" b="1" i="1">
-                <a:solidFill>
-                  <a:srgbClr val="6B7685"/>
-                </a:solidFill>
-                <a:latin typeface="Arial"/>
-              </a:rPr>
-              <a:t>Стоимость генерации одной картинки</a:t>
-            </a:r>
-            <a:r>
-              <a:rPr sz="1100" b="0" i="1">
-                <a:solidFill>
-                  <a:srgbClr val="6B7685"/>
-                </a:solidFill>
-                <a:latin typeface="Arial"/>
-              </a:rPr>
-              <a:t> — gpt-image-1.5 (OpenAI), 1024×1024: низкое качество $0,009 · среднее $0,034 · высокое $0,133 за картинку. Для уведомления подойдёт среднее — ≈$0,034 за карточку. </a:t>
-            </a:r>
-            <a:r>
-              <a:rPr sz="1100" b="1" i="1">
-                <a:solidFill>
-                  <a:srgbClr val="6B7685"/>
-                </a:solidFill>
-                <a:latin typeface="Arial"/>
-              </a:rPr>
-              <a:t>Иллюстративно, не измеренный объём:</a:t>
-            </a:r>
-            <a:r>
-              <a:rPr sz="1100" b="0" i="1">
-                <a:solidFill>
-                  <a:srgbClr val="6B7685"/>
-                </a:solidFill>
-                <a:latin typeface="Arial"/>
-              </a:rPr>
-              <a:t> сцена кейса не называет частоту рассылки явно — если это ≈20 карточек в день, тот же поток заявок, что и в Кейсе 1 (n06), — выходит ≈600 карточек в месяц и ≈$20,4 в месяц. </a:t>
-            </a:r>
-            <a:r>
-              <a:rPr sz="1100" b="1" i="1">
-                <a:solidFill>
-                  <a:srgbClr val="6B7685"/>
-                </a:solidFill>
-                <a:latin typeface="Arial"/>
-              </a:rPr>
-              <a:t>Примечание.</a:t>
-            </a:r>
-            <a:r>
-              <a:rPr sz="1100" b="0" i="1">
-                <a:solidFill>
-                  <a:srgbClr val="6B7685"/>
-                </a:solidFill>
-                <a:latin typeface="Arial"/>
-              </a:rPr>
-              <a:t> Генерируемые картинки приходят большого стандартного размера, слабо сжатые — перед отправкой в Telegram нужна перекодировка в более лёгкий формат, тот же лимит </a:t>
-            </a:r>
-            <a:r>
-              <a:rPr sz="1100" b="0" i="1">
-                <a:solidFill>
-                  <a:srgbClr val="6B7685"/>
-                </a:solidFill>
-                <a:latin typeface="Consolas"/>
-              </a:rPr>
-              <a:t>sendPhoto</a:t>
-            </a:r>
-            <a:r>
-              <a:rPr sz="1100" b="0" i="1">
-                <a:solidFill>
-                  <a:srgbClr val="6B7685"/>
-                </a:solidFill>
-                <a:latin typeface="Arial"/>
-              </a:rPr>
-              <a:t> 10 МБ, что мы уже измерили.</a:t>
-            </a:r>
-          </a:p>
-        </p:txBody>
-      </p:sp>
-      <p:sp>
-        <p:nvSpPr>
-          <p:cNvPr id="8" name="TextBox 7"/>
+              <a:rPr sz="1500" b="1" i="0">
+                <a:solidFill>
+                  <a:srgbClr val="141B2E"/>
+                </a:solidFill>
+                <a:latin typeface="Arial"/>
+              </a:rPr>
+              <a:t>То, что мы собрали на предыдущем экране, — </a:t>
+            </a:r>
+            <a:r>
+              <a:rPr sz="1500" b="1" i="0">
+                <a:solidFill>
+                  <a:srgbClr val="141B2E"/>
+                </a:solidFill>
+                <a:latin typeface="Arial"/>
+              </a:rPr>
+              <a:t>текст подписью к фотографии по ссылке</a:t>
+            </a:r>
+            <a:r>
+              <a:rPr sz="1500" b="1" i="0">
+                <a:solidFill>
+                  <a:srgbClr val="141B2E"/>
+                </a:solidFill>
+                <a:latin typeface="Arial"/>
+              </a:rPr>
+              <a:t>. Маркетинг просил текст поверх картинки, то есть внутри самого изображения, — а это отдельный шаг.</a:t>
+            </a:r>
+          </a:p>
+        </p:txBody>
+      </p:sp>
+      <p:sp>
+        <p:nvSpPr>
+          <p:cNvPr id="6" name="TextBox 5"/>
           <p:cNvSpPr txBox="1"/>
           <p:nvPr/>
         </p:nvSpPr>
@@ -46126,7 +45972,271 @@
         </p:nvSpPr>
         <p:spPr>
           <a:xfrm>
-            <a:off x="502920" y="2071878"/>
+            <a:off x="502920" y="1159510"/>
+            <a:ext cx="5490972" cy="1298448"/>
+          </a:xfrm>
+          <a:prstGeom prst="roundRect">
+            <a:avLst>
+              <a:gd name="adj" fmla="val 23474"/>
+            </a:avLst>
+          </a:prstGeom>
+          <a:solidFill>
+            <a:srgbClr val="F4F7FA"/>
+          </a:solidFill>
+          <a:ln w="19050">
+            <a:solidFill>
+              <a:srgbClr val="1C7293"/>
+            </a:solidFill>
+          </a:ln>
+          <a:effectLst/>
+        </p:spPr>
+        <p:style>
+          <a:lnRef idx="1">
+            <a:schemeClr val="accent1"/>
+          </a:lnRef>
+          <a:fillRef idx="3">
+            <a:schemeClr val="accent1"/>
+          </a:fillRef>
+          <a:effectRef idx="2">
+            <a:schemeClr val="accent1"/>
+          </a:effectRef>
+          <a:fontRef idx="minor">
+            <a:schemeClr val="lt1"/>
+          </a:fontRef>
+        </p:style>
+        <p:txBody>
+          <a:bodyPr rtlCol="0" anchor="ctr"/>
+          <a:lstStyle/>
+          <a:p>
+            <a:pPr algn="ctr"/>
+          </a:p>
+        </p:txBody>
+      </p:sp>
+      <p:sp>
+        <p:nvSpPr>
+          <p:cNvPr id="4" name="TextBox 3"/>
+          <p:cNvSpPr txBox="1"/>
+          <p:nvPr/>
+        </p:nvSpPr>
+        <p:spPr>
+          <a:xfrm>
+            <a:off x="630936" y="1348359"/>
+            <a:ext cx="5234940" cy="466344"/>
+          </a:xfrm>
+          <a:prstGeom prst="rect">
+            <a:avLst/>
+          </a:prstGeom>
+          <a:noFill/>
+        </p:spPr>
+        <p:txBody>
+          <a:bodyPr wrap="square" lIns="0" rIns="0" tIns="0" bIns="0" anchor="ctr">
+            <a:spAutoFit/>
+          </a:bodyPr>
+          <a:lstStyle/>
+          <a:p>
+            <a:pPr algn="ctr">
+              <a:lnSpc>
+                <a:spcPts val="3672"/>
+              </a:lnSpc>
+              <a:spcAft>
+                <a:spcPts val="0"/>
+              </a:spcAft>
+            </a:pPr>
+            <a:r>
+              <a:rPr sz="3400" b="1" i="0">
+                <a:solidFill>
+                  <a:srgbClr val="065A82"/>
+                </a:solidFill>
+                <a:latin typeface="Arial"/>
+              </a:rPr>
+              <a:t>3 значения</a:t>
+            </a:r>
+          </a:p>
+        </p:txBody>
+      </p:sp>
+      <p:sp>
+        <p:nvSpPr>
+          <p:cNvPr id="5" name="TextBox 4"/>
+          <p:cNvSpPr txBox="1"/>
+          <p:nvPr/>
+        </p:nvSpPr>
+        <p:spPr>
+          <a:xfrm>
+            <a:off x="630936" y="1906143"/>
+            <a:ext cx="5234940" cy="344678"/>
+          </a:xfrm>
+          <a:prstGeom prst="rect">
+            <a:avLst/>
+          </a:prstGeom>
+          <a:noFill/>
+        </p:spPr>
+        <p:txBody>
+          <a:bodyPr wrap="square" lIns="0" rIns="0" tIns="0" bIns="0" anchor="t">
+            <a:spAutoFit/>
+          </a:bodyPr>
+          <a:lstStyle/>
+          <a:p>
+            <a:pPr algn="ctr">
+              <a:lnSpc>
+                <a:spcPts val="1356"/>
+              </a:lnSpc>
+              <a:spcAft>
+                <a:spcPts val="0"/>
+              </a:spcAft>
+            </a:pPr>
+            <a:r>
+              <a:rPr sz="1150" b="0" i="0">
+                <a:solidFill>
+                  <a:srgbClr val="141B2E"/>
+                </a:solidFill>
+                <a:latin typeface="Arial"/>
+              </a:rPr>
+              <a:t>уже извлечены на прошлом занятии: имя · тема · дополнительные темы</a:t>
+            </a:r>
+          </a:p>
+        </p:txBody>
+      </p:sp>
+      <p:sp>
+        <p:nvSpPr>
+          <p:cNvPr id="6" name="Rounded Rectangle 5"/>
+          <p:cNvSpPr/>
+          <p:nvPr/>
+        </p:nvSpPr>
+        <p:spPr>
+          <a:xfrm>
+            <a:off x="6195059" y="1159510"/>
+            <a:ext cx="5490972" cy="1298448"/>
+          </a:xfrm>
+          <a:prstGeom prst="roundRect">
+            <a:avLst>
+              <a:gd name="adj" fmla="val 23474"/>
+            </a:avLst>
+          </a:prstGeom>
+          <a:solidFill>
+            <a:srgbClr val="F4F7FA"/>
+          </a:solidFill>
+          <a:ln w="19050">
+            <a:solidFill>
+              <a:srgbClr val="1C7293"/>
+            </a:solidFill>
+          </a:ln>
+          <a:effectLst/>
+        </p:spPr>
+        <p:style>
+          <a:lnRef idx="1">
+            <a:schemeClr val="accent1"/>
+          </a:lnRef>
+          <a:fillRef idx="3">
+            <a:schemeClr val="accent1"/>
+          </a:fillRef>
+          <a:effectRef idx="2">
+            <a:schemeClr val="accent1"/>
+          </a:effectRef>
+          <a:fontRef idx="minor">
+            <a:schemeClr val="lt1"/>
+          </a:fontRef>
+        </p:style>
+        <p:txBody>
+          <a:bodyPr rtlCol="0" anchor="ctr"/>
+          <a:lstStyle/>
+          <a:p>
+            <a:pPr algn="ctr"/>
+          </a:p>
+        </p:txBody>
+      </p:sp>
+      <p:sp>
+        <p:nvSpPr>
+          <p:cNvPr id="7" name="TextBox 6"/>
+          <p:cNvSpPr txBox="1"/>
+          <p:nvPr/>
+        </p:nvSpPr>
+        <p:spPr>
+          <a:xfrm>
+            <a:off x="6323075" y="1348359"/>
+            <a:ext cx="5234940" cy="466344"/>
+          </a:xfrm>
+          <a:prstGeom prst="rect">
+            <a:avLst/>
+          </a:prstGeom>
+          <a:noFill/>
+        </p:spPr>
+        <p:txBody>
+          <a:bodyPr wrap="square" lIns="0" rIns="0" tIns="0" bIns="0" anchor="ctr">
+            <a:spAutoFit/>
+          </a:bodyPr>
+          <a:lstStyle/>
+          <a:p>
+            <a:pPr algn="ctr">
+              <a:lnSpc>
+                <a:spcPts val="3672"/>
+              </a:lnSpc>
+              <a:spcAft>
+                <a:spcPts val="0"/>
+              </a:spcAft>
+            </a:pPr>
+            <a:r>
+              <a:rPr sz="3400" b="1" i="0">
+                <a:solidFill>
+                  <a:srgbClr val="065A82"/>
+                </a:solidFill>
+                <a:latin typeface="Arial"/>
+              </a:rPr>
+              <a:t>1 строка</a:t>
+            </a:r>
+          </a:p>
+        </p:txBody>
+      </p:sp>
+      <p:sp>
+        <p:nvSpPr>
+          <p:cNvPr id="8" name="TextBox 7"/>
+          <p:cNvSpPr txBox="1"/>
+          <p:nvPr/>
+        </p:nvSpPr>
+        <p:spPr>
+          <a:xfrm>
+            <a:off x="6323075" y="1906143"/>
+            <a:ext cx="5234940" cy="344678"/>
+          </a:xfrm>
+          <a:prstGeom prst="rect">
+            <a:avLst/>
+          </a:prstGeom>
+          <a:noFill/>
+        </p:spPr>
+        <p:txBody>
+          <a:bodyPr wrap="square" lIns="0" rIns="0" tIns="0" bIns="0" anchor="t">
+            <a:spAutoFit/>
+          </a:bodyPr>
+          <a:lstStyle/>
+          <a:p>
+            <a:pPr algn="ctr">
+              <a:lnSpc>
+                <a:spcPts val="1356"/>
+              </a:lnSpc>
+              <a:spcAft>
+                <a:spcPts val="0"/>
+              </a:spcAft>
+            </a:pPr>
+            <a:r>
+              <a:rPr sz="1150" b="0" i="0">
+                <a:solidFill>
+                  <a:srgbClr val="141B2E"/>
+                </a:solidFill>
+                <a:latin typeface="Arial"/>
+              </a:rPr>
+              <a:t>столько Ольга просила на каждую такую заявку</a:t>
+            </a:r>
+          </a:p>
+        </p:txBody>
+      </p:sp>
+      <p:sp>
+        <p:nvSpPr>
+          <p:cNvPr id="9" name="Rounded Rectangle 8"/>
+          <p:cNvSpPr/>
+          <p:nvPr/>
+        </p:nvSpPr>
+        <p:spPr>
+          <a:xfrm>
+            <a:off x="502920" y="3054858"/>
             <a:ext cx="11183112" cy="822960"/>
           </a:xfrm>
           <a:prstGeom prst="roundRect">
@@ -46168,13 +46278,13 @@
       </p:sp>
       <p:sp>
         <p:nvSpPr>
-          <p:cNvPr id="4" name="TextBox 3"/>
-          <p:cNvSpPr txBox="1"/>
-          <p:nvPr/>
-        </p:nvSpPr>
-        <p:spPr>
-          <a:xfrm>
-            <a:off x="722376" y="2199894"/>
+          <p:cNvPr id="10" name="TextBox 9"/>
+          <p:cNvSpPr txBox="1"/>
+          <p:nvPr/>
+        </p:nvSpPr>
+        <p:spPr>
+          <a:xfrm>
+            <a:off x="722376" y="3182874"/>
             <a:ext cx="10634472" cy="566928"/>
           </a:xfrm>
           <a:prstGeom prst="rect">
@@ -46210,13 +46320,13 @@
       </p:sp>
       <p:sp>
         <p:nvSpPr>
-          <p:cNvPr id="5" name="Rounded Rectangle 4"/>
+          <p:cNvPr id="11" name="Rounded Rectangle 10"/>
           <p:cNvSpPr/>
           <p:nvPr/>
         </p:nvSpPr>
         <p:spPr>
           <a:xfrm>
-            <a:off x="502920" y="3562350"/>
+            <a:off x="502920" y="4474718"/>
             <a:ext cx="2686050" cy="1636775"/>
           </a:xfrm>
           <a:prstGeom prst="roundRect">
@@ -46258,13 +46368,13 @@
       </p:sp>
       <p:sp>
         <p:nvSpPr>
-          <p:cNvPr id="6" name="TextBox 5"/>
-          <p:cNvSpPr txBox="1"/>
-          <p:nvPr/>
-        </p:nvSpPr>
-        <p:spPr>
-          <a:xfrm>
-            <a:off x="612648" y="3562350"/>
+          <p:cNvPr id="12" name="TextBox 11"/>
+          <p:cNvSpPr txBox="1"/>
+          <p:nvPr/>
+        </p:nvSpPr>
+        <p:spPr>
+          <a:xfrm>
+            <a:off x="612648" y="4474718"/>
             <a:ext cx="2466594" cy="1636775"/>
           </a:xfrm>
           <a:prstGeom prst="rect">
@@ -46300,13 +46410,13 @@
       </p:sp>
       <p:sp>
         <p:nvSpPr>
-          <p:cNvPr id="7" name="Rounded Rectangle 6"/>
+          <p:cNvPr id="13" name="Rounded Rectangle 12"/>
           <p:cNvSpPr/>
           <p:nvPr/>
         </p:nvSpPr>
         <p:spPr>
           <a:xfrm>
-            <a:off x="3335274" y="3562350"/>
+            <a:off x="3335274" y="4474718"/>
             <a:ext cx="2686050" cy="1636775"/>
           </a:xfrm>
           <a:prstGeom prst="roundRect">
@@ -46348,13 +46458,13 @@
       </p:sp>
       <p:sp>
         <p:nvSpPr>
-          <p:cNvPr id="8" name="TextBox 7"/>
-          <p:cNvSpPr txBox="1"/>
-          <p:nvPr/>
-        </p:nvSpPr>
-        <p:spPr>
-          <a:xfrm>
-            <a:off x="3445002" y="3562350"/>
+          <p:cNvPr id="14" name="TextBox 13"/>
+          <p:cNvSpPr txBox="1"/>
+          <p:nvPr/>
+        </p:nvSpPr>
+        <p:spPr>
+          <a:xfrm>
+            <a:off x="3445002" y="4474718"/>
             <a:ext cx="2466594" cy="1636775"/>
           </a:xfrm>
           <a:prstGeom prst="rect">
@@ -46390,13 +46500,13 @@
       </p:sp>
       <p:sp>
         <p:nvSpPr>
-          <p:cNvPr id="9" name="Rounded Rectangle 8"/>
+          <p:cNvPr id="15" name="Rounded Rectangle 14"/>
           <p:cNvSpPr/>
           <p:nvPr/>
         </p:nvSpPr>
         <p:spPr>
           <a:xfrm>
-            <a:off x="6167628" y="3562350"/>
+            <a:off x="6167628" y="4474718"/>
             <a:ext cx="2686050" cy="1636775"/>
           </a:xfrm>
           <a:prstGeom prst="roundRect">
@@ -46438,13 +46548,13 @@
       </p:sp>
       <p:sp>
         <p:nvSpPr>
-          <p:cNvPr id="10" name="TextBox 9"/>
-          <p:cNvSpPr txBox="1"/>
-          <p:nvPr/>
-        </p:nvSpPr>
-        <p:spPr>
-          <a:xfrm>
-            <a:off x="6277356" y="3562350"/>
+          <p:cNvPr id="16" name="TextBox 15"/>
+          <p:cNvSpPr txBox="1"/>
+          <p:nvPr/>
+        </p:nvSpPr>
+        <p:spPr>
+          <a:xfrm>
+            <a:off x="6277356" y="4474718"/>
             <a:ext cx="2466594" cy="1636775"/>
           </a:xfrm>
           <a:prstGeom prst="rect">
@@ -46480,13 +46590,13 @@
       </p:sp>
       <p:sp>
         <p:nvSpPr>
-          <p:cNvPr id="11" name="Rounded Rectangle 10"/>
+          <p:cNvPr id="17" name="Rounded Rectangle 16"/>
           <p:cNvSpPr/>
           <p:nvPr/>
         </p:nvSpPr>
         <p:spPr>
           <a:xfrm>
-            <a:off x="8999982" y="3562350"/>
+            <a:off x="8999982" y="4474718"/>
             <a:ext cx="2686050" cy="1636775"/>
           </a:xfrm>
           <a:prstGeom prst="roundRect">
@@ -46528,13 +46638,13 @@
       </p:sp>
       <p:sp>
         <p:nvSpPr>
-          <p:cNvPr id="12" name="TextBox 11"/>
-          <p:cNvSpPr txBox="1"/>
-          <p:nvPr/>
-        </p:nvSpPr>
-        <p:spPr>
-          <a:xfrm>
-            <a:off x="9109710" y="3562350"/>
+          <p:cNvPr id="18" name="TextBox 17"/>
+          <p:cNvSpPr txBox="1"/>
+          <p:nvPr/>
+        </p:nvSpPr>
+        <p:spPr>
+          <a:xfrm>
+            <a:off x="9109710" y="4474718"/>
             <a:ext cx="2466594" cy="1636775"/>
           </a:xfrm>
           <a:prstGeom prst="rect">
@@ -46570,7 +46680,7 @@
       </p:sp>
       <p:sp>
         <p:nvSpPr>
-          <p:cNvPr id="13" name="TextBox 12"/>
+          <p:cNvPr id="19" name="TextBox 18"/>
           <p:cNvSpPr txBox="1"/>
           <p:nvPr/>
         </p:nvSpPr>

--- a/library/seminars/sem-08/rendered/sem-08.pptx
+++ b/library/seminars/sem-08/rendered/sem-08.pptx
@@ -571,19 +571,19 @@
           <a:p/>
           <a:p>
             <a:r>
-              <a:t>На каждом из этих шагов мы будем задавать один и тот же вопрос: эту часть работы должна делать модель, или её должен делать код? Ответ не всегда очевиден заранее. Иногда шаг с моделью стоит там, где хватило бы простой подстановки уже известных значений — и тогда модель просто лишняя, со своей ценой и риском. А иногда, наоборот, текстовое правило внутри промпта вероятностно обходит то, что с самого начала должно было быть жёстким условием в коде — и это выясняется не сразу, а на практике, когда правило один раз ошибается именно там, где цена ошибки выше всего.</a:t>
+              <a:t>На каждом из этих шагов мы будем задавать один и тот же вопрос: эту часть работы должна делать модель, или её должен делать код? Ответ не всегда очевиден заранее. Иногда шаг с моделью стоит там, где хватило бы подстановки уже известных значений, — и тогда модель лишняя, со своей ценой и риском. А иногда, наоборот, текстовое правило внутри промпта вероятностно обходит то, что с самого начала должно было быть жёстким условием в коде — и выясняется это не сразу: на практике, когда правило один раз ошибается там, где цена ошибки выше всего.</a:t>
             </a:r>
           </a:p>
           <a:p/>
           <a:p>
             <a:r>
-              <a:t>Занятие практическое, но устроено иначе, чем прошлое. В прошлый раз я собирал узлы вживую у вас на глазах. Сегодня — на каждый кейс заранее собрана и прогнана готовая пара процессов, с моделью и без, — и мы смотрим на то, что они реально сделали на одних и тех же заявках одного и того же учебного центра. Для одного из кейсов мы пойдём ещё дальше и разберём целый эксперимент: несколько десятков прогонов с измеренным числом ошибок, а не предположение о том, как оно должно было бы работать.</a:t>
+              <a:t>Занятие практическое, но устроено иначе, чем прошлое. В прошлый раз я собирал узлы вживую у вас на глазах. Сегодня — на каждый кейс заранее собрана и прогнана готовая пара процессов, с моделью и без, — и мы смотрим на то, что они реально сделали на одних и тех же заявках одного и того же учебного центра. Для одного из кейсов мы пойдём ещё дальше и разберём целый эксперимент: несколько десятков прогонов с измеренным числом ошибок, а не предположение о том, как оно работало бы.</a:t>
             </a:r>
           </a:p>
           <a:p/>
           <a:p>
             <a:r>
-              <a:t>Мы остаёмся на той же ступени лестницы, что и в прошлый раз, — цепочка. Сегодня мы не поднимаемся выше, мы её усложняем. К концу занятия у вас будет не один новый узел, а критерий: как смотреть на любой шаг своей собственной цепочки и решать, кому в нём место — модели или коду.</a:t>
+              <a:t>Мы остаёмся на той же ступени лестницы, что и в прошлый раз, — цепочка. Сегодня мы не поднимаемся выше, мы её усложняем. К концу занятия у вас будет не один новый узел, а критерий: как смотреть на любой шаг своей цепочки и решать, кому в нём место — модели или коду.</a:t>
             </a:r>
           </a:p>
         </p:txBody>
@@ -677,7 +677,7 @@
           <a:p/>
           <a:p>
             <a:r>
-              <a:t>Обратите внимание на то, чего в инструкции нет: ни слова вроде «обратись к координатору по имени». Имени координатора модели просто не сообщили — тексту, который получит Ольга, оно не нужно. Эта деталь станет важна через экран.</a:t>
+              <a:t>Теперь о пропуске: в инструкции нет ни слова вроде «обратись к координатору по имени». Имени координатора модели не сообщили — тексту, который получит Ольга, оно не нужно. Эта деталь станет важна через экран.</a:t>
             </a:r>
           </a:p>
           <a:p/>
@@ -689,7 +689,7 @@
           <a:p/>
           <a:p>
             <a:r>
-              <a:t>Конфигурация выглядит аккуратно и ничем не намекает на будущую проблему: промпт короткий, понятный, без ошибок формулировки. Это стоит держать в голове дальше — если на следующих экранах найдётся находка, дело будет не в качестве написания промпта.</a:t>
+              <a:t>Конфигурация выглядит аккуратно и ничем не намекает на будущую проблему: промпт короткий, понятный, без ошибок формулировки. Запомните это: если на следующих экранах найдётся находка, причина будет не в том, как написан промпт.</a:t>
             </a:r>
           </a:p>
         </p:txBody>
@@ -777,13 +777,13 @@
           <a:p/>
           <a:p>
             <a:r>
-              <a:t>В интерфейсе это выглядит буднично, и это и есть главная мысль слайда. Новое сообщение просто появляется в том же чате, где уже лежит история всех прежних уведомлений центра — без отдельной вкладки, без нового значка, без перехода куда-либо ещё. Ольга читает этот чат сверху вниз точно так же, как читала его вчера и позавчера; меняется только содержимое одной строки, а не привычка, которой она уже пользуется.</a:t>
+              <a:t>В интерфейсе это выглядит буднично, и будничность тут не случайна. Новое сообщение просто появляется в том же чате, где уже лежит история всех прежних уведомлений центра — без отдельной вкладки, без нового значка, без перехода куда-либо ещё. Ольга читает этот чат сверху вниз точно так же, как читала его вчера и позавчера; меняется только содержимое одной строки, а не привычка, которой она уже пользуется.</a:t>
             </a:r>
           </a:p>
           <a:p/>
           <a:p>
             <a:r>
-              <a:t>Это ровно тот пример, который Ольга назвала в прошлой сцене, слово в слово — кто написал, по какой теме, что упомянул дополнительно. Три значения, одна строка. Если сообщение выглядит так на каждой заявке, задача решена полностью: Ольге достаточно читать уведомления, не открывая экран результата из-за одной многотемной заявки среди двадцати обычных.</a:t>
+              <a:t>Три значения, одна строка — ровно то, что Ольга назвала в прошлой сцене. Если сообщение выглядит так на каждой заявке, задача решена полностью: Ольге достаточно читать уведомления, не открывая экран результата из-за одной многотемной заявки среди двадцати обычных.</a:t>
             </a:r>
           </a:p>
           <a:p/>
@@ -859,25 +859,25 @@
           <a:lstStyle/>
           <a:p>
             <a:r>
-              <a:t>Вот что реально получилось, не в теории, — два прогона одного и того же узла, одной и той же инструкции, на реальных заявках.</a:t>
+              <a:t>А теперь — что получилось на деле: два прогона одного и того же узла, одной и той же инструкции, на настоящих заявках.</a:t>
             </a:r>
           </a:p>
           <a:p/>
           <a:p>
             <a:r>
-              <a:t>Первая заявка — от Марии, про курс и оплату. Модель получила три значения и инструкцию написать короткое дружелюбное уведомление. Результат: «Новая заявка от Марии: тема «курс», также упомянуто: оплата.» Звучит свободно, по-человечески — и при этом совпадает по смыслу с тем, что просила Ольга. На этой заявке интерпретировать было действительно нечего сложного: три значения легко складываются в фразу.</a:t>
+              <a:t>Первая заявка — от Марии, про курс и оплату. Модель получила три значения и инструкцию написать короткое дружелюбное уведомление. Результат: «Новая заявка от Марии: тема «курс», также упомянуто: оплата.» Звучит свободно, по-человечески — и при этом совпадает по смыслу с тем, что просила Ольга. Сложного на этой заявке и не было: три значения легко складываются в фразу.</a:t>
             </a:r>
           </a:p>
           <a:p/>
           <a:p>
             <a:r>
-              <a:t>Вторая заявка — от Олега, про перенос занятия и оплату. Тот же узел, та же инструкция. И вот что он реально написал: «Привет, [Имя координатора]! У нас новая многотемная заявка от Олега по вопросу переноса занятия и об оплате.» Прочитайте внимательно второе слово. Это не переменная, которая не подставилась технически, — это буквальный кусок собственного шаблона-инструкции модели, адресованный самой модели, а не Ольге, который она должна была заменить настоящим содержанием и не заменила.</a:t>
+              <a:t>Вторая заявка — от Олега, про перенос занятия и оплату. Тот же узел, та же инструкция. И вот что он реально написал: «Привет, [Имя координатора]! У нас новая многотемная заявка от Олега по вопросу переноса занятия и об оплате.» Прочитайте внимательно второе слово. Это не переменная, которая не подставилась технически. Это буквальный кусок собственного шаблона-инструкции модели, адресованный самой модели, а не Ольге: модель должна была заменить его настоящим содержанием и не заменила.</a:t>
             </a:r>
           </a:p>
           <a:p/>
           <a:p>
             <a:r>
-              <a:t>И важно, что произошло на уровне журнала выполнения: ничего. Узел не упал, не вернул ошибку. Статус — success на обоих прогонах. Если смотреть только в журнал, второй прогон неотличим от первого.</a:t>
+              <a:t>А в журнале выполнения при этом не произошло ничего. Узел не упал, не вернул ошибку. Статус — success на обоих прогонах. Если смотреть только в журнал, второй прогон неотличим от первого.</a:t>
             </a:r>
           </a:p>
           <a:p/>
@@ -971,7 +971,7 @@
           <a:p/>
           <a:p>
             <a:r>
-              <a:t>Узел извлечения полей левее по-прежнему помечен «Model» со звёздочкой, и это важно не спутать: тот вызов общий для обеих версий. Разница между версиями — не «с моделью» против «совсем без модели», а «модель вызывается дважды» против «модель вызывается один раз, там, где без неё правда не обойтись».</a:t>
+              <a:t>Узел извлечения полей левее по-прежнему помечен «Model» со звёздочкой — и спутать здесь легко: тот вызов общий для обеих версий. Разница между версиями — не «с моделью» против «совсем без модели», а «модель вызывается дважды» против «модель вызывается один раз, там, где без неё правда не обойтись».</a:t>
             </a:r>
           </a:p>
           <a:p/>
@@ -992,7 +992,7 @@
           <a:p/>
           <a:p>
             <a:r>
-              <a:t>Справа — переключатель, который легко пропустить: узел не просто кладёт в новое поле собранный текст, он заодно пропускает дальше по цепочке все остальные поля заявки без изменений, чтобы следующие узлы не потеряли то, что им понадобится.</a:t>
+              <a:t>Справа — переключатель, который легко пропустить: узел не только кладёт в новое поле собранный текст, он заодно пропускает дальше по цепочке все остальные поля заявки без изменений, чтобы следующие узлы не потеряли то, что им понадобится.</a:t>
             </a:r>
           </a:p>
           <a:p/>
@@ -1068,13 +1068,13 @@
           <a:lstStyle/>
           <a:p>
             <a:r>
-              <a:t>Соберём итог этого кейса в одно переносимое правило, а не в вывод, работающий только для уведомлений координатору.</a:t>
+              <a:t>Соберём итог этого кейса в одно переносимое правило.</a:t>
             </a:r>
           </a:p>
           <a:p/>
           <a:p>
             <a:r>
-              <a:t>Узел модели в первой версии не сломался и технически не ошибся: сообщение дошло, формат ответа был правильным. Он просто решал задачу, которой на самом деле не было. Все три значения уже лежали в структурированном виде, интерпретировать было нечего, а форма итогового сообщения не менялась от заявки к заявке. В такой ситуации вызов модели — не инструмент для создания нового смысла, а дорогой и не вполне предсказуемый способ пересказать своими словами то, что уже известно.</a:t>
+              <a:t>Узел модели в первой версии не сломался и технически не ошибся: сообщение дошло, формат ответа был правильным. Он просто решал задачу, которой на самом деле не было. Все три значения уже лежали в структурированном виде, интерпретировать было нечего, а форма итогового сообщения не менялась от заявки к заявке. В такой ситуации вызов модели нового смысла не создаёт — он лишь пересказывает своими словами то, что уже известно, дорого и не вполне предсказуемо.</a:t>
             </a:r>
           </a:p>
           <a:p/>
@@ -1092,13 +1092,13 @@
           <a:p/>
           <a:p>
             <a:r>
-              <a:t>Первый — лишний шаг модели это риск, а не только лишняя цена. Легко подумать, что раз задача тривиальная, то и опасаться нечего. Но мы только что видели: даже на форматировании вызов модели остаётся точкой, где может появиться деталь, которой не было на входе. Деньги и время здесь даже не главное — главное, что непредсказуемо, что именно окажется в тексте.</a:t>
+              <a:t>Первый — лишний шаг модели это риск, а не только лишняя цена. Легко подумать, что раз задача тривиальная, то и опасаться нечего. Но мы только что видели: даже на форматировании вызов модели остаётся точкой, где может появиться деталь, которой не было на входе. Дороже денег и времени здесь другое: непредсказуемо, что именно окажется в тексте.</a:t>
             </a:r>
           </a:p>
           <a:p/>
           <a:p>
             <a:r>
-              <a:t>Второй нюанс — ровно про шаблон, и он для равновесия. Шаблон не безопасен навсегда просто потому, что детерминированный. Понадобится форме настоящая вариативность — скажем, несколько языков или разная подробность для разных получателей — статическое выражение этого не почувствует само, и переписывать его придётся руками на каждый новый случай. Это другая цена, инженерная, но тоже реальная.</a:t>
+              <a:t>Второй нюанс — ровно про шаблон, и он для равновесия. Шаблон не безопасен навсегда — одной детерминированности мало. Понадобится форме настоящая вариативность — скажем, несколько языков или разная подробность для разных получателей — статическое выражение этого не почувствует само, и переписывать его придётся руками на каждый новый случай. Это другая цена, инженерная, но тоже реальная.</a:t>
             </a:r>
           </a:p>
           <a:p/>
@@ -1110,7 +1110,7 @@
           <a:p/>
           <a:p>
             <a:r>
-              <a:t>И возвращаемся к оси занятия. Первая строка: сообщение действительно ушло координатору, и это было правдой с самого начала. Чем оно оказалось — цепочка получилась короче и дешевле вовсе без узла модели. Заметьте: оба узла формально решили одну задачу, и прогон был зелёным у обоих. Различие проявляется только тогда, когда смотришь не на то, что узел сделал один раз, а на то, что он может сделать на следующем прогоне, которого вы ещё не видели.</a:t>
+              <a:t>И возвращаемся к оси занятия. Первая строка: сообщение действительно ушло координатору, и это было правдой с самого начала. Чем оно оказалось — цепочка получилась короче и дешевле вовсе без узла модели. Заметьте: оба узла формально решили одну задачу, и прогон был зелёным у обоих. Различие проявляется, только если смотреть не на то, что узел сделал один раз, а на то, что он может сделать на следующем прогоне, которого вы ещё не видели.</a:t>
             </a:r>
           </a:p>
         </p:txBody>
@@ -1180,31 +1180,31 @@
           <a:lstStyle/>
           <a:p>
             <a:r>
-              <a:t>Первый кейс мы закрыли: уведомление координатору теперь собирается подстановкой значений, а не сочинением текста моделью на каждый прогон. Второй кейс начинается с другой потребности, но такой же обычной для учебного центра.</a:t>
+              <a:t>Первый кейс мы закрыли: уведомление координатору теперь собирается подстановкой значений, а не сочиняется моделью заново на каждый прогон. Второй кейс начинается с другой потребности, но такой же обычной для учебного центра.</a:t>
             </a:r>
           </a:p>
           <a:p/>
           <a:p>
             <a:r>
-              <a:t>Заявки на курсы обрабатывает администратор, и за день через неё проходит много сообщений от разных людей. Иногда один и тот же человек пишет об одном и том же вопросе дважды: забыл, что уже спрашивал, не увидел ответа, решил напомнить другими словами. Причина нам не важна. Важно, что цепочка, которую мы собираем, не должна каждый раз реагировать на повторное обращение так, будто видит его первый раз.</a:t>
+              <a:t>Заявки на курсы обрабатывает администратор, и за день через неё проходит много сообщений от разных людей. Иногда один и тот же человек пишет об одном и том же вопросе дважды: забыл, что уже спрашивал, не увидел ответа, решил напомнить другими словами. Причина нам всё равно. Цепочка, которую мы собираем, не должна каждый раз реагировать на повторное обращение так, будто видит его первый раз.</a:t>
             </a:r>
           </a:p>
           <a:p/>
           <a:p>
             <a:r>
-              <a:t>Реплика на экране — не абстрактного клиента, а того, кто читает заявки на другом конце: администратора, которая весь день видит входящий поток и должна за секунду решить, новый это вопрос или она это уже разбирала. Разница с первым кейсом в том, откуда растёт потребность: там неудобство было у клиента, получавшего сухой или неровный текст уведомления, здесь неудобство — у администратора и, не в меньшей степени, у самого клиента, который вправе рассчитывать, что его уже не будут спрашивать заново о том, что он только что объяснил.</a:t>
+              <a:t>Реплика на экране — не абстрактного клиента, а того, кто читает заявки на другом конце: администратора, которая весь день видит входящий поток и должна за секунду решить, новый это вопрос или она это уже разбирала. Разница с первым кейсом в том, откуда растёт потребность: там неудобно было клиенту, получавшему сухой или неровный текст уведомления; здесь неудобно администратору — и клиенту, который вправе рассчитывать, что его не станут заново спрашивать о том, что он только что объяснил.</a:t>
             </a:r>
           </a:p>
           <a:p/>
           <a:p>
             <a:r>
-              <a:t>Пока это выглядит как мелкая деталь интерфейса: ну прислали вопрос дважды, что такого. Но за каждым повторным прогоном стоит та же цепочка целиком — запись заявки, формирование уведомления, работа модели на предыдущих шагах. Если повтор не остановить на входе, вся эта работа делается заново ради вопроса, ответ на который уже есть. Дешевле остановить повтор на входе, чем прогонять его через всю цепочку и разбираться постфактум.</a:t>
+              <a:t>Пока это выглядит мелкой деталью интерфейса: ну прислали вопрос дважды, что такого. Но за каждым повторным прогоном стоит та же цепочка целиком — запись заявки, сборка уведомления, работа модели на предыдущих шагах. Если повтор не остановить на входе, вся эта работа делается заново ради вопроса, ответ на который уже есть. Дешевле остановить повтор на входе, чем прогонять его через всю цепочку и разбираться постфактум.</a:t>
             </a:r>
           </a:p>
           <a:p/>
           <a:p>
             <a:r>
-              <a:t>Сегодня задача не в том, нужна проверка или нет — она нужна очевидно, — а в том, из чего её собрать. И, как мы увидим дальше, участвуют два разных инструмента по цене: один почти бесплатный, другой — ощутимо дороже. Вопрос не в том, какой выбрать единственным, а в том, как расставить их по порядку.</a:t>
+              <a:t>Нужна проверка или нет — не вопрос: нужна очевидно. Вопрос, из чего её собрать. Инструментов тут два, и они разной цены: один почти бесплатный, другой ощутимо дороже. Выбирать единственный не придётся — придётся расставить их по порядку.</a:t>
             </a:r>
           </a:p>
         </p:txBody>
@@ -1274,31 +1274,31 @@
           <a:lstStyle/>
           <a:p>
             <a:r>
-              <a:t>Потребность простая и ровно та, с которой начинается этот кейс: администратор учебного центра Ольга ведёт учёт заявок. В понедельник утром она видит в таблице вопрос от клиента — «когда можно оплатить занятие?» — обрабатывает его и отвечает. Обычное утро, обычная заявка.</a:t>
+              <a:t>Потребность простая, и ровно с неё начинается этот кейс: администратор учебного центра Ольга ведёт учёт заявок. В понедельник утром она видит в таблице вопрос от клиента — «когда можно оплатить занятие?» — обрабатывает его и отвечает. Обычное утро, обычная заявка.</a:t>
             </a:r>
           </a:p>
           <a:p/>
           <a:p>
             <a:r>
-              <a:t>Через два часа приходит вторая заявка от того же контакта: «как мне внести оплату за курс». По смыслу это тот же вопрос, просто сформулированный иначе. Но Ольга за день видит десятки обращений и не держит в голове, кто что спрашивал два часа назад, — она не узнаёт перефразировку и обрабатывает заявку как новую: тратит время повторно, отвечает ещё раз.</a:t>
+              <a:t>Через два часа приходит вторая заявка от того же контакта: «как мне внести оплату за курс». По смыслу это тот же вопрос, просто сформулированный иначе. Но Ольга за день видит десятки обращений и не держит в голове, кто что спрашивал два часа назад. Перефразировку она не узнаёт и обрабатывает заявку как новую: тратит время повторно, отвечает ещё раз.</a:t>
             </a:r>
           </a:p>
           <a:p/>
           <a:p>
             <a:r>
-              <a:t>Для клиента это выглядит иначе. Он получает два разных ответа от учебного центра с разницей в два часа — и единственное объяснение, которое приходит в голову, это что первый ответ потерялся или его никто не прочитал. Цена этой ошибки не абстрактная: это двойная работа администратора, которая могла бы уйти на что-то другое, и недоверие клиента, который теперь не уверен, что его вообще читают внимательно.</a:t>
+              <a:t>Для клиента это выглядит иначе. Он получает два разных ответа от учебного центра с разницей в два часа — и единственное объяснение, которое приходит в голову, это что первый ответ потерялся или его никто не прочитал. Цена этой ошибки не абстрактная: это двойная работа администратора, которая могла бы уйти на что-то другое, и недоверие клиента, который теперь не уверен, что его читают внимательно.</a:t>
             </a:r>
           </a:p>
           <a:p/>
           <a:p>
             <a:r>
-              <a:t>И это не разовый случай. По ощущению самой Ольги, подобное повторение — вопрос другими словами, на который уже есть ответ, — происходит у неё примерно десять раз в день. Мы не замеряли это число инструментально, оно идёт от человека, который читает заявки каждый день, — но даже как оценка оно показывает, что перед нами не курьёз одного утра, а постоянная часть потока.</a:t>
+              <a:t>И это не разовый случай. По ощущению самой Ольги, такое повторение — вопрос другими словами, на который уже есть ответ, — случается у неё примерно десять раз в день. Инструментально мы это число не замеряли, оно идёт от человека, который читает заявки каждый день. Но даже как оценка оно показывает: перед нами не курьёз одного утра, а постоянная часть потока.</a:t>
             </a:r>
           </a:p>
           <a:p/>
           <a:p>
             <a:r>
-              <a:t>Сегодня задача не в том, нужна проверка или нет — она нужна очевидно, раз это происходит каждый день, — а в том, из чего её собрать так, чтобы она ловила не только буквальное повторение, но и переформулировку, с которой мы только что столкнулись.</a:t>
+              <a:t>Нужна проверка или нет — не вопрос: раз это случается каждый день, нужна очевидно. Вопрос, из чего её собрать так, чтобы она ловила не только буквальное повторение, но и переформулировку, с которой мы только что столкнулись.</a:t>
             </a:r>
           </a:p>
         </p:txBody>
@@ -1380,25 +1380,25 @@
           <a:p/>
           <a:p>
             <a:r>
-              <a:t>Пять карточек, и это не теория, а пять реальных способов, которые встречаются в живых системах. Сравнивать тексты буквально — точное совпадение после нормализации, то, что мы уже видели на предыдущем экране. Сравнивать тексты по общим словам — классический векторный подход с порогом, без обучаемой модели, но серьёзнее простого сравнения строк. Спросить у модели общего назначения, один ли это вопрос, просто сформулированный иначе. Спросить у специализированного сервиса, настроенного именно на сравнение вопросов, а не у модели, которая умеет вообще всё. Или сначала проверить точное совпадение дёшево, а дальше пускать только то, что осталось непонятным.</a:t>
+              <a:t>Пять карточек, и все пять встречаются в живых системах. Сравнивать тексты буквально — точное совпадение после нормализации, то, что мы уже видели на предыдущем экране. Сравнивать тексты по общим словам — классический векторный подход с порогом: обучаемой модели нет, но это серьёзнее простого сравнения строк. Спросить у модели общего назначения, один ли это вопрос, просто сформулированный иначе. Спросить у специализированного сервиса, настроенного именно на сравнение вопросов, а не у модели, которая умеет вообще всё. Или сначала проверить точное совпадение дёшево, а дальше пускать только то, что осталось непонятным.</a:t>
             </a:r>
           </a:p>
           <a:p/>
           <a:p>
             <a:r>
-              <a:t>Обратите внимание на формулировки: все пять описывают действие, которое можно взять и реализовать, а не утверждение о том, что умеет или не умеет какой-то инструмент сам по себе. «Сравнивать буквально» — действие. «Спросить у модели» и «спросить у специализированного сервиса» — тоже действия, а не готовый вывод вроде «специализированный сервис точнее модели общего назначения». Разница важна: вопрос не о том, какой инструмент умнее в принципе, а о том, какой шаг вы бы поставили первым и вторым в цепочке, которая обрабатывает заявки целого учебного центра.</a:t>
+              <a:t>Все пять формулировок описывают действие, которое можно взять и реализовать, а не утверждение о том, что умеет или не умеет какой-то инструмент сам по себе. «Сравнивать буквально» — действие. «Спросить у модели» и «спросить у специализированного сервиса» — тоже действия, а не готовый вывод вроде «специализированный сервис точнее модели общего назначения». Разница важна: отвечать надо не за то, какой инструмент умнее в принципе, а за то, какой шаг вы поставите первым и вторым в цепочке, которая обрабатывает заявки целого учебного центра.</a:t>
             </a:r>
           </a:p>
           <a:p/>
           <a:p>
             <a:r>
-              <a:t>Четыре из пяти карточек — самостоятельные решения, которые можно взять и реализовать целиком: сравнение буквально, сравнение по словам, вызов модели общего назначения или вызов специализированного сервиса. Пятая — не ещё один отдельный инструмент, а способ скомбинировать уже названные: сначала дёшево, а дороже — только на то, что дёшево не разрешило. Если голоса разделятся между первыми четырьмя вариантами и пятым, это нормально: первые четыре отвечают на вопрос «чем сравнивать», пятый — на вопрос «в каком порядке».</a:t>
+              <a:t>Четыре из пяти карточек — самостоятельные решения, которые можно взять и реализовать целиком: сравнение буквально, сравнение по словам, вызов модели общего назначения или вызов специализированного сервиса. Пятая отдельным инструментом и не была: она комбинирует уже названные — сначала дёшево, а дороже только на то, что дёшево не разрешило. Если голоса разделятся между первыми четырьмя вариантами и пятым, это нормально: первые четыре отвечают на вопрос «чем сравнивать», пятый — на вопрос «в каком порядке».</a:t>
             </a:r>
           </a:p>
           <a:p/>
           <a:p>
             <a:r>
-              <a:t>Выбирайте. Правильных ответов здесь больше одного, все пять — реальные инженерные решения. Разбирать будем, что каждое реально ловит на нашей паре, а что — нет, и во что это обходится.</a:t>
+              <a:t>Выбирайте. Правильных ответов здесь больше одного, все пять — настоящие инженерные решения. Разбирать будем, что каждое ловит на нашей паре, чего не ловит и во что это обходится.</a:t>
             </a:r>
           </a:p>
           <a:p/>
@@ -1416,7 +1416,7 @@
           <a:p/>
           <a:p>
             <a:r>
-              <a:t>Ответ на следующем экране, и он переворачивает ожидание: классика хуже — тринадцать против пятнадцати. Ставка на векторный подход совершенно разумна, и ровно поэтому его и измерили: более серьёзный инструмент не обязан быть лучше простого, но проверяется это измерением, а не рассуждением. Ставка на буквальное совпадение верна по другой причине, чем кажется: хэш ошибается только в одну сторону — пропускает, — а векторный подход научился ошибаться в обе.</a:t>
+              <a:t>Ответ на следующем экране, и он переворачивает ожидание: классика хуже — тринадцать против пятнадцати. Ставка на векторный подход совершенно разумна, и поэтому его и измерили: более серьёзный инструмент не обязан быть лучше простого, и проверяется это измерением, а не рассуждением. Ставка на буквальное совпадение верна по другой причине, чем кажется: хэш ошибается только в одну сторону — пропускает, — а векторный подход научился ошибаться в обе.</a:t>
             </a:r>
           </a:p>
         </p:txBody>
@@ -1492,19 +1492,19 @@
           <a:p/>
           <a:p>
             <a:r>
-              <a:t>Точное совпадение, действие первое, на наборе из 20 пар ловит 15: все 5 буквальных повторов и все 10 заведомо разных вопросов, но ни одной из 5 перефразировок — ноль из пяти. Цена и скорость здесь не считаются отдельно: это сравнение строк, оно либо бесплатно и мгновенно, либо его нет.</a:t>
+              <a:t>Точное совпадение, действие первое, на наборе из 20 пар ловит 15: все 5 буквальных повторов и все 10 заведомо разных вопросов, но ни одной из 5 перефразировок — ноль из пяти. Цену и скорость здесь не считают отдельно: это сравнение строк — оно либо бесплатно и мгновенно, либо его нет.</a:t>
             </a:r>
           </a:p>
           <a:p/>
           <a:p>
             <a:r>
-              <a:t>Действие второе, классический векторный подход — TF-IDF плюс косинусная близость, порог 0,3, — выглядит серьёзнее: мера похожести, настраиваемый порог, реалистичный инженерный выбор, а не слабая альтернатива для контраста. Результат на том же наборе, тем же методом — 13 из 20, хуже хэша. Те же пять перефразировок пропущены по той же причине: «оплату» и «оплатить» разные словоформы, «курс» и «занятие» разные слова при одном смысле, мера на основе слов слепа к этому в принципе. Но добавились два ложных срабатывания на близкой теме — «курс по питону» и «курс по аналитике данных» делят почти все слова, и порог 0,3 посчитал их одним вопросом. Хэш на этой же паре не ошибается никогда — разные строки не совпадают по определению. Более серьёзный инструмент заплатил новой категорией ошибок за старую, тоже бесплатно — цена не в деньгах, а в пропущенных и ложных ответах.</a:t>
+              <a:t>Действие второе, классический векторный подход — TF-IDF плюс косинусная близость, порог 0,3, — выглядит серьёзнее: мера похожести, настраиваемый порог — настоящий инженерный выбор, а не слабая альтернатива для контраста. Результат на том же наборе, тем же методом — 13 из 20, хуже хэша. Те же пять перефразировок пропущены по той же причине: «оплату» и «оплатить» разные словоформы, «курс» и «занятие» разные слова при одном смысле, мера по словам к этому слепа в принципе. Зато добавились два ложных срабатывания на близкой теме — «курс по питону» и «курс по аналитике данных» делят почти все слова, и порог 0,3 посчитал их одним вопросом. Хэш на этой же паре не ошибается никогда — разные строки не совпадают по определению. Более серьёзный инструмент заплатил новой категорией ошибок за старую, тоже бесплатно: цена здесь не денежная, а в пропущенных и ложных ответах.</a:t>
             </a:r>
           </a:p>
           <a:p/>
           <a:p>
             <a:r>
-              <a:t>Действие третье, дешёвая модель-судья: прямой вопрос «это тот же вопрос, просто сформулированный иначе?», модель gpt-4o-mini. Результат — 17 из 20, все 10 настоящих дублей пойманы. Но три собственных ложных срабатывания, и не все из совпадения слов: пара «сколько длится одно занятие по времени» и «расскажите про группу для продолжающих» не делит ни одного слова, и модель всё равно сказала «да» — ошибка суждения о смысле, а не о словах. И здесь впервые появляется денежная цена: по прайсу gpt-4o-mini, на объёме кейса (~300 вызовов в месяц) — около $0,006 в месяц, меньше цента; оценка по прайсу, не измеренный факт.</a:t>
+              <a:t>Действие третье, дешёвая модель-судья: прямой вопрос «это тот же вопрос, просто сформулированный иначе?», модель gpt-4o-mini. Результат — 17 из 20, все 10 настоящих дублей пойманы. Зато три собственных ложных срабатывания, и не все от совпадения слов: пара «сколько длится одно занятие по времени» и «расскажите про группу для продолжающих» не делит ни одного слова, и модель всё равно сказала «да» — ошибка суждения о смысле, а не о словах. И здесь впервые появляется денежная цена: по прайсу gpt-4o-mini, на объёме кейса (~300 вызовов в месяц) — около $0,006 в месяц, меньше цента; оценка по прайсу, не измеренный факт.</a:t>
             </a:r>
           </a:p>
           <a:p/>
@@ -1516,7 +1516,7 @@
           <a:p/>
           <a:p>
             <a:r>
-              <a:t>Главная честная находка: лучший результат дал не самый очевидный кандидат — узкий сервис обошёл универсальную модель-судью и обошёлся дешевле. Но одно измерение на 20 парах одной темы — не повод сразу переписывать уже показанную на стенде архитектуру: та же дисциплина, что не дала поверить jev на слово раньше, не даёт поверить и этому числу слепо сейчас. И ещё одна: обе суммы здесь — меньше цента в месяц, цена не аргумент.</a:t>
+              <a:t>Честная находка: лучший результат дал не самый очевидный кандидат — узкий сервис обошёл универсальную модель-судью и обошёлся дешевле. Но одно измерение на 20 парах одной темы — не повод сразу переписывать уже показанную на стенде архитектуру: та же дисциплина, что не дала поверить jev на слово раньше, не даёт поверить слепо и этому числу. И вторая находка: обе суммы здесь меньше цента в месяц, цена не аргумент.</a:t>
             </a:r>
           </a:p>
           <a:p/>
@@ -1592,31 +1592,31 @@
           <a:lstStyle/>
           <a:p>
             <a:r>
-              <a:t>На прошлом экране мы измерили пять действий. Отсюда — архитектурный вывод, и он не привязан ни к одному конкретному инструменту: эта формулировка не изменится, если цепочку собирать не в n8n, а в чём угодно ещё, и не называет ни одного узла.</a:t>
+              <a:t>На прошлом экране мы измерили пять действий. Отсюда архитектурный вывод, не привязанный ни к одному инструменту: эта формулировка не назовёт ни одного узла и не изменится, если цепочку собирать не в n8n, а в чём угодно ещё.</a:t>
             </a:r>
           </a:p>
           <a:p/>
           <a:p>
             <a:r>
-              <a:t>Первый шаг — дешёвый, механический фильтр. Он берёт на себя всё, что решается без модели: все буквальные повторы, и решает это бесплатно и мгновенно. Классический векторный подход в этот шаг не идёт — измерение показало, что он не просто не даёт прироста над самым простым сравнением строк, а измеримо хуже него. Это не изменилось.</a:t>
+              <a:t>Первый шаг — дешёвый, механический фильтр. Он берёт на себя всё, что решается без модели: буквальные повторы гасит бесплатно и мгновенно. Классический векторный подход в этот шаг не идёт — измерение показало, что он не просто не даёт прироста над самым простым сравнением строк, а измеримо хуже него. Это не изменилось.</a:t>
             </a:r>
           </a:p>
           <a:p/>
           <a:p>
             <a:r>
-              <a:t>Изменилось то, что стоит на втором шаге. Раньше здесь стояла только модель-судья — единственный измеренный кандидат на дорогой шаг. Измерение между ней и вторым кандидатом дало разницу не в пользу привычного выбора: специализированный сервис jev — 20 из 20, без единой ошибки, и по публичному прайсу ещё и дешевле дешёвой модели-судьи. По итогам этого теста на дорогой шаг встал именно он, а не модель общего назначения — и это уже не мысль на будущее, а собранная цепочка.</a:t>
+              <a:t>Изменилось то, что стоит на втором шаге. Раньше здесь стояла только модель-судья — единственный измеренный кандидат на дорогой шаг. Измерение между ней и вторым кандидатом дало разницу не в пользу привычного выбора: специализированный сервис jev — 20 из 20, без единой ошибки, и по публичному прайсу ещё и дешевле дешёвой модели-судьи. По итогам теста на дорогой шаг встал он, а не модель общего назначения, — и стоит он там уже собранной цепочкой.</a:t>
             </a:r>
           </a:p>
           <a:p/>
           <a:p>
             <a:r>
-              <a:t>И сразу честно про границы этого измерения: один тест на 20 парах одного языка и одной тематики — узкое основание для вывода «jev всегда лучше любой модели-судьи везде». Обобщаемость за пределы этого конкретного набора — другой язык, другая тематика, другой объём — никто не проверял. Та же дисциплина, что не дала поверить jev на слово раньше, не даёт сейчас говорить шире, чем показало измерение. Но это не повод откладывать внедрение здесь: на этом наборе и для этой задачи разница чистая и с запасом, и решение уже стоит на стенде — дальше на двух экранах вы увидите настоящую настроенную цепочку, а не схему-черновик.</a:t>
+              <a:t>И сразу честно про границы этого измерения: один тест на 20 парах одного языка и одной тематики — узкое основание для вывода «jev всегда лучше любой модели-судьи везде». Обобщаемость за пределы этого конкретного набора — другой язык, другая тематика, другой объём — никто не проверял. Та же дисциплина, что не дала поверить jev на слово раньше, не даёт сейчас говорить шире, чем показало измерение. Откладывать внедрение здесь она тоже не велит: на этом наборе и для этой задачи разница чистая и с запасом, а решение уже стоит на стенде — дальше на двух экранах вы увидите настоящую настроенную цепочку.</a:t>
             </a:r>
           </a:p>
           <a:p/>
           <a:p>
             <a:r>
-              <a:t>Это тот же общий приём, что и в первом кейсе этого занятия: модель не убирается, а сдвигается туда, где она реально нужна, — только здесь мы вдобавок увидели, что и внутри «дорогого» шага бывает больше одного кандидата, и выбор между ними — отдельная проверка, а не самоочевидность.</a:t>
+              <a:t>Это тот же общий приём, что и в первом кейсе занятия: модель не убирается, а сдвигается туда, где она нужна. Только здесь мы вдобавок увидели, что и внутри дорогого шага бывает больше одного кандидата, и выбор между ними — отдельная проверка, а не самоочевидность.</a:t>
             </a:r>
           </a:p>
           <a:p/>
@@ -1710,7 +1710,7 @@
           <a:p/>
           <a:p>
             <a:r>
-              <a:t>Зачем мы вообще на это смотрим снова. Не потому, что здесь есть к чему придраться — к этим шести узлам сегодня претензий нет. А потому, что сегодняшние четыре кейса — это ровно те шаги, которые этой цепочке только предстоит получить: канал уведомления, проверка на повтор, решение по сумме возврата, доставка картинки. Ни для одного из них вопрос «это задача модели или задача кода» ещё не был задан. Мы начинаем с чистого, уже работающего основания и достраиваем его, кейс за кейсом, этим одним вопросом.</a:t>
+              <a:t>Зачем мы смотрим на это снова. К этим шести узлам сегодня претензий нет; смотрим потому, что сегодняшние четыре кейса — ровно те шаги, которые этой цепочке только предстоит получить: канал уведомления, проверка на повтор, решение по сумме возврата, доставка картинки. Ни одному из них вопрос «это задача модели или задача кода» ещё не задавали. Мы начинаем с чистого, уже работающего основания и достраиваем его, кейс за кейсом, этим одним вопросом.</a:t>
             </a:r>
           </a:p>
         </p:txBody>
@@ -1780,7 +1780,7 @@
           <a:lstStyle/>
           <a:p>
             <a:r>
-              <a:t>Вот как первый, дешёвый шаг выглядит в настоящей цепочке — не принцип, а два настоящих настроенных узла со стенда, на настоящем скрине холста.</a:t>
+              <a:t>Так первый, дешёвый шаг выглядит в настоящей цепочке: два настроенных узла со стенда, на снятом с него холсте.</a:t>
             </a:r>
           </a:p>
           <a:p/>
@@ -1804,7 +1804,7 @@
               <a:t>Set</a:t>
             </a:r>
             <a:r>
-              <a:t>, он ничего не вызывает, только считает значения. Берём текст заявки и приводим его к нижнему регистру: «Когда» и «когда» после этого — одна и та же строка. Убираем пробелы по краям и схлопываем повторные пробелы внутри — лишний пробел не должен превращать совпадающий текст в несовпадающий. То же самое считается и для недавнего сообщения того же контакта, чтобы было с чем сравнивать.</a:t>
+              <a:t>: он ничего не вызывает, только считает значения. Берём текст заявки и приводим к нижнему регистру: «Когда» и «когда» после этого — одна и та же строка. Убираем пробелы по краям и схлопываем повторные пробелы внутри — лишний пробел не должен превращать совпадающий текст в несовпадающий. То же самое считается и для недавнего сообщения того же контакта, чтобы было с чем сравнивать.</a:t>
             </a:r>
           </a:p>
           <a:p/>
@@ -1828,19 +1828,19 @@
               <a:t>IF</a:t>
             </a:r>
             <a:r>
-              <a:t>, и у него одно условие: нормализованный хэш текущей заявки строго равен нормализованному хэшу недавнего обращения. Строки совпали — перед нами повтор, и дальше цепочка не идёт: ответ уже есть, новую запись делать не нужно, а сам прогон при этом завершается успешно — это важно запомнить, мы вернёмся к этому через экран. Строки не совпали — значит дешёвый фильтр не дал однозначного ответа, и заявка идёт дальше, к проверке смыслом.</a:t>
+              <a:t>, и у него одно условие: нормализованный хэш текущей заявки строго равен нормализованному хэшу недавнего обращения. Строки совпали — перед нами повтор, и дальше цепочка не идёт: ответ уже есть, новую запись делать не нужно, а прогон при этом завершается успешно. Запомните это, мы вернёмся сюда через экран. Строки не совпали — значит дешёвый фильтр не дал однозначного ответа, и заявка идёт дальше, к проверке смыслом.</a:t>
             </a:r>
           </a:p>
           <a:p/>
           <a:p>
             <a:r>
-              <a:t>Обратите внимание: ни один из этих двух узлов не вызывает модель. Сравнение строк — чистая механика, дешёвая и мгновенная, и её можно позволить себе на каждую заявку без исключения — цена этого шага не растёт от того, сколько заявок приходит в час. Это ровно тот же дешёвый шаг, что и до сегодняшней архитектурной правки: меняется только то, что стоит дальше, за ним.</a:t>
+              <a:t>Ни один из этих двух узлов не вызывает модель. Сравнение строк — чистая механика, дешёвая и мгновенная; позволить её себе можно на каждую заявку без исключения, цена шага не растёт от того, сколько заявок приходит в час. Это ровно тот же дешёвый шаг, что и до сегодняшней архитектурной правки: меняется только то, что стоит дальше, за ним.</a:t>
             </a:r>
           </a:p>
           <a:p/>
           <a:p>
             <a:r>
-              <a:t>Один параметр здесь стоит отдельного внимания, хотя на этом экране он не виден, — это интервал времени, за который мы ищем недавнее обращение того же контакта. Слишком короткий интервал пропустит повтор, если человек написал во второй раз не сразу. Слишком длинный начнёт путать разные, по-настоящему новые вопросы одного и того же человека с повтором одного и того же вопроса. Это параметр с ценой в обе стороны, и мы вернёмся к нему в нюансах.</a:t>
+              <a:t>Один параметр на этом экране не виден, а решает многое, — интервал времени, за который мы ищем недавнее обращение того же контакта. Слишком короткий интервал пропустит повтор, если человек написал во второй раз не сразу. Слишком длинный начнёт путать разные, по-настоящему новые вопросы одного человека с повтором одного и того же вопроса. Цена у этого параметра в обе стороны, и мы вернёмся к нему в нюансах.</a:t>
             </a:r>
           </a:p>
           <a:p/>
@@ -1916,7 +1916,7 @@
           <a:lstStyle/>
           <a:p>
             <a:r>
-              <a:t>Вот как эти два узла выглядят на самом деле, если открыть панель настройки каждого на живом стенде.</a:t>
+              <a:t>Откроем панель настройки каждого на живом стенде — и увидим эти два узла изнутри.</a:t>
             </a:r>
           </a:p>
           <a:p/>
@@ -1940,7 +1940,7 @@
               <a:t>normalized_hash</a:t>
             </a:r>
             <a:r>
-              <a:t>: оно берёт текст текущей заявки из формы, поле «Что нужно», и приводит его к общему виду — нижний регистр, обрезка пробелов по краям, схлопывание повторных пробелов внутри. Слово «hash» в имени поля здесь не про криптографический хэш: это просто нормализованная строка, и никакого необратимого преобразования за ним не стоит.</a:t>
+              <a:t>: оно берёт текст текущей заявки из формы, поле «Что нужно», и приводит его к общему виду — нижний регистр, обрезка пробелов по краям, схлопывание повторных пробелов внутри. Слово «hash» в имени поля здесь не про криптографический хэш: за ним стоит нормализованная строка и ни одного необратимого преобразования.</a:t>
             </a:r>
           </a:p>
           <a:p/>
@@ -1964,7 +1964,7 @@
               <a:t>recent_same_contact_hash</a:t>
             </a:r>
             <a:r>
-              <a:t> — тот же текст, пропущенный через ту же самую нормализацию. То есть узел готовит две строки к сравнению одной и той же операцией, и это важно: если бы текущую заявку и предыдущее сообщение нормализовали по-разному, сравнение потеряло бы смысл ещё до того, как дошло до условия.</a:t>
+              <a:t> — тот же текст, пропущенный через ту же самую нормализацию. То есть узел готовит обе строки к сравнению одной и той же операцией. Нормализуй текущую заявку и предыдущее сообщение по-разному — и сравнение потеряет смысл ещё до того, как дойдёт до условия.</a:t>
             </a:r>
           </a:p>
           <a:p/>
@@ -2018,7 +2018,7 @@
           <a:p/>
           <a:p>
             <a:r>
-              <a:t>Вместе эти два узла и есть весь дешёвый слой проверки: одна операция приведения к общему виду и одно сравнение. Ни одного параметра, который можно настроить удачно или неудачно, ни одного места, где решение зависело бы от формулировки. Дальше — второй, дорогой шаг, который видит только то, что это условие не остановило.</a:t>
+              <a:t>Вместе эти два узла и есть весь дешёвый слой проверки: одна операция приведения к общему виду и одно сравнение. Ни одного параметра, который можно настроить удачно или неудачно; ни одного места, где решение зависело бы от формулировки. Дальше — второй, дорогой шаг: он видит только то, что это условие не остановило.</a:t>
             </a:r>
           </a:p>
         </p:txBody>
@@ -2088,13 +2088,13 @@
           <a:lstStyle/>
           <a:p>
             <a:r>
-              <a:t>Вот второй узел — тот, что видит только то, что дешёвый фильтр не разрешил однозначно. И устроен он принципиально иначе, чем прежняя версия на этом же месте.</a:t>
+              <a:t>Вот второй узел — тот, что видит только не разрешённое дешёвым фильтром. Устроен он принципиально иначе, чем прежняя версия на этом же месте.</a:t>
             </a:r>
           </a:p>
           <a:p/>
           <a:p>
             <a:r>
-              <a:t>Раньше здесь стоял запрос к модели общего назначения со свободным текстовым промптом: опиши задачу словами, попроси ответить «да» или «нет». Теперь — структурированный HTTP-запрос к специализированному сервису jev. Разница не только в инструменте, но и в самой форме вопроса: сервис принимает не произвольный текст, а явно типизированный вопрос — в этом случае тип </a:t>
+              <a:t>Раньше здесь стоял запрос к модели общего назначения со свободным текстовым промптом: опиши задачу словами, попроси ответить «да» или «нет». Теперь — структурированный HTTP-запрос к специализированному сервису jev. Разница не только в инструменте, но и в самой форме вопроса: сервис принимает не произвольный текст, а явно типизированный вопрос — здесь это тип </a:t>
             </a:r>
             <a:r>
               <a:rPr>
@@ -2103,19 +2103,19 @@
               <a:t>noul</a:t>
             </a:r>
             <a:r>
-              <a:t>, закрытый вопрос с ответом «да или нет», но не просто бинарным, а с вероятностью. Модели передают оба текста, явную инструкцию, что именно считается «тем же вопросом», и два явных критерия — что засчитывается как «да», что как «нет». Ничего из этого не нужно угадывать по тону формулировки, как в свободном промпте: критерии — отдельное явное поле запроса.</a:t>
+              <a:t>, закрытый вопрос «да или нет» с вероятностью вместо чистой двоичности. Модели передают оба текста, явную инструкцию, что именно считается «тем же вопросом», и два явных критерия — что засчитывается как «да», что как «нет». Угадывать это по тону формулировки, как в свободном промпте, не нужно: критерии — отдельное явное поле запроса.</a:t>
             </a:r>
           </a:p>
           <a:p/>
           <a:p>
             <a:r>
-              <a:t>Результат проверили не на двух показательных прогонах, а на всех двадцати парах тестового набора — том же самом, на котором раньше измеряли хэш, TF-IDF и модель-судью. Разделение получилось чистым: на десяти парах, где ожидался дубль, сервис вернул вероятность от 0.70 до 0.97. На десяти парах, где ожидался разный вопрос, — от 0.02 до 0.08. Между этими двумя группами — честный разрыв: максимум среди «разных» заметно ниже минимума среди «дублей». Порог 0.5 работает здесь с большим запасом, и это важно: результат не зависит от удачно подобранного порога, сервис развёл пары уверенно в обе стороны.</a:t>
+              <a:t>Результат проверили не на двух показательных прогонах, а на всех двадцати парах тестового набора — том же самом, на котором раньше измеряли хэш, TF-IDF и модель-судью. Разделение получилось чистым: на десяти парах, где ожидался дубль, сервис вернул вероятность от 0.70 до 0.97. На десяти парах, где ожидался разный вопрос, — от 0.02 до 0.08. Между этими двумя группами — честный разрыв: максимум среди «разных» заметно ниже минимума среди «дублей». Порог 0.5 работает здесь с большим запасом — значит, результат не держится на удачно подобранном пороге: сервис развёл пары уверенно в обе стороны.</a:t>
             </a:r>
           </a:p>
           <a:p/>
           <a:p>
             <a:r>
-              <a:t>Возьмём одну пару для конкретности, чтобы не оставаться только с диапазонами. «Когда можно оплатить занятие?» и «как мне внести оплату за курс» — разные слова, тот же смысл. Jev вернул 0.76 — уверенно выше порога. На этой же паре хэш и TF-IDF дают ноль не потому, что ошиблись, а потому что у них по конструкции нет общих значимых слов для сравнения: это ровно та задача, где механическое сравнение слепо в принципе, а проверка смыслом — нет.</a:t>
+              <a:t>Возьмём одну пару для конкретности, чтобы не оставаться только с диапазонами. «Когда можно оплатить занятие?» и «как мне внести оплату за курс» — разные слова, тот же смысл. Jev вернул 0.76 — уверенно выше порога. На этой же паре хэш и TF-IDF дают ноль — не от ошибки, а потому что по конструкции им не из чего сравнивать: общих значимых слов нет. Это ровно та задача, где механическое сравнение слепо в принципе, а проверка смыслом — нет.</a:t>
             </a:r>
           </a:p>
           <a:p/>
@@ -2191,31 +2191,31 @@
           <a:lstStyle/>
           <a:p>
             <a:r>
-              <a:t>Прежде чем подводить итог кейса, стоит посмотреть не на схему и не на настройку узла, а на то, что в итоге видит сама Ольга в таблице заявок, которую она открывает каждое утро. На экране — настоящая таблица учебного стенда, строки с пятнадцатой по двадцатую.</a:t>
+              <a:t>Прежде чем подводить итог кейса — не схема и не настройка узла, а то, что в итоге видит сама Ольга в таблице заявок, которую открывает каждое утро. На экране — настоящая таблица учебного стенда, строки с пятнадцатой по двадцатую.</a:t>
             </a:r>
           </a:p>
           <a:p/>
           <a:p>
             <a:r>
-              <a:t>Пятнадцатая и шестнадцатая — Пётр, одно и то же письмо слово в слово, между ними сутки. Следующие четыре — Анна, снова один и тот же текст, записанный четыре раза. Внутри каждой пары разница меньше двадцати миллисекунд: человек дважды нажал кнопку отправки, а форма честно приняла оба нажатия. Для таблицы это четыре разные заявки; никакого признака, по которому их можно было бы отличить от четырёх разных вопросов, в ней нет.</a:t>
+              <a:t>Пятнадцатая и шестнадцатая — Пётр, одно и то же письмо слово в слово, между ними сутки. Следующие четыре — Анна, снова один и тот же текст, записанный четыре раза. Внутри каждой пары разница меньше двадцати миллисекунд: человек дважды нажал кнопку отправки, а форма честно приняла оба нажатия. Для таблицы это четыре разные заявки, и признака, по которому их отличить от четырёх разных вопросов, в ней нет.</a:t>
             </a:r>
           </a:p>
           <a:p/>
           <a:p>
             <a:r>
-              <a:t>Даты на кадре старше проверки на повтор — проверка появилась в цепочке позже, и ни одна из этих строк через неё не проходила. С ней картина меняется наполовину. Буквальный повтор до таблицы больше не доходит: дешёвый механический шаг останавливает заявку раньше, чем она туда попадёт, прогон при этом завершается штатно, и Ольга не увидит ни повтора, ни следа того, что он был. А тот же вопрос другими словами доходит по-прежнему. Проверку смыслом на этом шаге только что измерили — перефразировку от нового вопроса она отличает надёжно, — но её ответ никуда не сохраняется: колонки под него в таблице нет, и после неё в цепочке нет ни одной развилки. Строка записывается такой же, как первая.</a:t>
+              <a:t>Даты на кадре старше проверки на повтор — проверка появилась в цепочке позже, и ни одна из этих строк через неё не проходила. С ней картина меняется наполовину. Буквальный повтор до таблицы больше не доходит: дешёвый механический шаг останавливает заявку раньше, чем она туда попадёт, прогон при этом завершается штатно, и Ольга не увидит ни повтора, ни следа того, что он был. А тот же вопрос другими словами доходит по-прежнему. Проверку смыслом на этом шаге только что измерили: перефразировку от нового вопроса она отличает надёжно. Но её ответ никуда не сохраняется — колонки под него в таблице нет, и после неё в цепочке нет ни одной развилки. Строка записывается такой же, как первая.</a:t>
             </a:r>
           </a:p>
           <a:p/>
           <a:p>
             <a:r>
-              <a:t>Это не промах измерения. Это граница между «различить» и «показать различие»: первое собрано и замерено, второе не собрано вовсе. Что делать с найденной перефразировкой — пропустить молча, записать с пометкой или гасить наравне с буквальным повтором — продуктовый вопрос, который уже назван нюансом кейса. Сегодня выбран первый ответ, и выбран он не решением, а умолчанием.</a:t>
+              <a:t>Это не промах измерения, а граница между «различить» и «показать различие»: первое собрано и замерено, второе не собрано вовсе. Что делать с найденной перефразировкой — пропустить молча, записать с пометкой или гасить наравне с буквальным повтором — продуктовый вопрос, уже названный нюансом кейса. Сегодня выбран первый ответ, и выбран он не решением, а умолчанием.</a:t>
             </a:r>
           </a:p>
           <a:p/>
           <a:p>
             <a:r>
-              <a:t>Ещё одно наблюдение из той же таблицы, за пределами разбора. У строк с семнадцатой по двадцатую текст один, а тема, которую извлёк шаг классификации, разная: дважды «другое», потом «перенос занятия», потом «оплата». Та же история ниже по таблице: один текст в трёх строках получил «курс», «оплату» и «другое». Шаг извлечения полей, стоящий до всякой дедупликации, на одинаковом входе даёт разный выход — и именно поэтому повтор ищут по самому тексту, а не по извлечённой теме.</a:t>
+              <a:t>Ещё одно наблюдение из той же таблицы, за пределами разбора. У строк с семнадцатой по двадцатую текст один, а тема, извлечённая шагом классификации, всякий раз разная: дважды «другое», потом «перенос занятия», потом «оплата». Та же история ниже по таблице: один текст в трёх строках получил «курс», «оплату» и «другое». Шаг извлечения полей, стоящий до всякой дедупликации, на одинаковом входе даёт разный выход — и именно поэтому повтор ищут по самому тексту, а не по извлечённой теме.</a:t>
             </a:r>
           </a:p>
         </p:txBody>
@@ -2285,25 +2285,25 @@
           <a:lstStyle/>
           <a:p>
             <a:r>
-              <a:t>Подведём итог этого кейса на измерении, которое мы только что видели, а не на предположении.</a:t>
+              <a:t>Подведём итог кейса на измерении, которое мы только что видели.</a:t>
             </a:r>
           </a:p>
           <a:p/>
           <a:p>
             <a:r>
-              <a:t>Механическая проверка и проверка смыслом — не конкуренты, и ни одна не является «более совершенной версией» другой. Точное совпадение не ловит переформулировку в принципе: оно сравнивает строки, а не смысл, и иначе работать не умеет. Классический векторный подход выглядел более серьёзной альтернативой — у него есть мера и порог, — но измерение на 20 реальных парах дало ему хуже, чем простому хэшу: 13 из 20 против 15. Он ошибается там же, на тех же перефразировках, по той же причине — ноль общих слов при полном совпадении смысла, — и вдобавок даёт 2 ложных срабатывания там, где хэш не ошибается в принципе. «Более серьёзный» неязыковой инструмент не просто не гарантирует прироста — он может быть измеримо хуже. Это показало измерение на своих данных, не общее свойство метода.</a:t>
+              <a:t>Механическая проверка и проверка смыслом друг другу не конкуренты, и ни одна не служит «более совершенной версией» другой. Точное совпадение не ловит переформулировку в принципе: оно сравнивает строки, а не смысл, и иначе работать не умеет. Классический векторный подход выглядел более серьёзной альтернативой — мера, порог, — но измерение на 20 настоящих парах дало ему хуже, чем простому хэшу: 13 из 20 против 15. Он ошибается там же, на тех же перефразировках, по той же причине — ноль общих слов при полном совпадении смысла, — и вдобавок даёт 2 ложных срабатывания там, где хэш не ошибается в принципе. «Более серьёзный» неязыковой инструмент не только не гарантирует прироста — он может быть измеримо хуже. Так показало измерение на своих данных; общим свойством метода это не считайте.</a:t>
             </a:r>
           </a:p>
           <a:p/>
           <a:p>
             <a:r>
-              <a:t>Системный приём, который стоит унести: тратить дорогой инструмент только там, где дешёвый явно не дал ответа. Точное совпадение остаётся в финальном решении — но как первый дешёвый фильтр, который берёт на себя буквальные повторы бесплатно и экономит на нашем наборе 5 вызовов модели из 20, а не как альтернатива LLM, с которой она якобы конкурирует. Модель вызывается только на то, что первый фильтр не разрешил однозначно, и тогда её цена оправдана, потому что заменить её нечем: ни хэш, ни классический векторный подход не решают переформулировку на русском языке.</a:t>
+              <a:t>Системный приём, который стоит унести: тратить дорогой инструмент только там, где дешёвый явно не дал ответа. Точное совпадение остаётся в финальном решении — но как первый дешёвый фильтр, который берёт на себя буквальные повторы бесплатно и экономит на нашем наборе 5 вызовов модели из 20, а не как альтернатива LLM, с которой она якобы конкурирует. Модель вызывается только на не разрешённое первым фильтром, и тогда её цена оправдана: заменить её нечем — ни хэш, ни классический векторный подход переформулировку на русском языке не решают.</a:t>
             </a:r>
           </a:p>
           <a:p/>
           <a:p>
             <a:r>
-              <a:t>Это тот же системный приём, что в первом кейсе этого занятия, только там он смотрелся иначе: шаг модели убрали целиком и заменили подстановкой значений, потому что задача оказалась полностью детерминированной. Здесь задача не детерминирована целиком — определить, один ли смысл у двух разных строк текста, механика не умеет в общем случае, — поэтому модель не убирается, а сдвигается туда, где она реально нужна.</a:t>
+              <a:t>Тот же системный приём работал и в первом кейсе занятия, только смотрелся иначе: шаг модели убрали целиком и заменили подстановкой значений, потому что задача оказалась полностью детерминированной. Здесь она детерминирована не целиком: определить, один ли смысл у двух разных строк текста, механика в общем случае не умеет. Поэтому модель не убирается, а сдвигается туда, где нужна.</a:t>
             </a:r>
           </a:p>
           <a:p/>
@@ -2379,25 +2379,25 @@
           <a:lstStyle/>
           <a:p>
             <a:r>
-              <a:t>Три нюанса, и ни один не про то, какую из схем выбрать — все три всплывают уже после того, как выбор сделан и решение собрано.</a:t>
+              <a:t>Три нюанса, и ни один не про выбор схемы: все три всплывают после того, как выбор сделан и решение собрано.</a:t>
             </a:r>
           </a:p>
           <a:p/>
           <a:p>
             <a:r>
-              <a:t>Первый — интервал времени сам по себе параметр с ценой. Слишком короткий интервал — и повтор, который человек прислал через день, а не через пару минут, проверка пропустит: формально это уже «не недавнее» обращение. Слишком длинный интервал — и проверка начнёт путать разные, но подряд идущие обращения одного и того же человека с повтором одного и того же обращения. Это число приходится настраивать по факту, а не один раз угадать.</a:t>
+              <a:t>Первый — интервал времени сам по себе параметр с ценой. Слишком короткий — и повтор, присланный через день, а не через пару минут, проверка пропустит: формально это уже «не недавнее» обращение. Слишком длинный интервал — и проверка начнёт путать разные, но подряд идущие обращения одного и того же человека с повтором одного и того же обращения. Это число приходится настраивать по факту, а не один раз угадать.</a:t>
             </a:r>
           </a:p>
           <a:p/>
           <a:p>
             <a:r>
-              <a:t>Второй — LLM-проверка похожести — частный случай более общей задачи, когда модель выступает судьёй, оценивающим чужой текст. И у неё та же асимметрия ошибок, что у любой модели в роли оценщика: это не предположение, а задокументированный результат — Ватаока, Такахаси и Ри показали на NeurIPS 2024, на воркшопе Safe GenAI, что модель-судья систематически не нейтральна, даже когда формально просто отвечает «да» или «нет» на прямой вопрос. И это не абстрактная ссылка на чужую работу: мы только что увидели ровно это на своём тесте — три ложных срабатывания из двадцати, не ноль, и хотя бы одно из них не объясняется совпадением слов в вопросах — модель ошиблась на паре без единого общего слова. Проверка смыслом не идеальна, она просто ошибается иначе, чем механика.</a:t>
+              <a:t>Второй: проверка похожести моделью — частный случай более общей задачи, где модель судит чужой текст. Асимметрия ошибок у неё та же, что у любой модели в роли оценщика, и это задокументированный результат: Ватаока, Такахаси и Ри показали на NeurIPS 2024, на воркшопе Safe GenAI, что модель-судья систематически не нейтральна — даже когда формально отвечает «да» или «нет» на прямой вопрос. И это не ссылка на чужую работу вместо своей: ровно это мы только что увидели на своём тесте — три ложных срабатывания из двадцати, не ноль. Хотя бы одно совпадением слов не объясняется: модель ошиблась на паре без единого общего слова. Проверка смыслом не идеальна — она ошибается иначе, чем механика.</a:t>
             </a:r>
           </a:p>
           <a:p/>
           <a:p>
             <a:r>
-              <a:t>Третий нюанс — что мы вообще считаем дублем — это решение продукта, не только техники. Иногда человек специально переспрашивает другими словами, потому что ему нужен ответ срочнее второго раза, и схлопнуть это обращение в «уже отвечали» будет неверно по сути, даже если технически это тот же вопрос. Не каждый обнаруженный повтор обязан выглядеть одной записью в интерфейсе — это решение стоит обсудить с тем, кто работает с заявками каждый день, не угадывать его в коде.</a:t>
+              <a:t>Третий нюанс — что мы считаем дублем — решение продукта, не только техники. Иногда человек переспрашивает другими словами нарочно: ему нужен ответ срочнее второго раза, и схлопнуть такое обращение в «уже отвечали» будет неверно по сути, даже если технически это тот же вопрос. Не каждый обнаруженный повтор обязан выглядеть одной записью в интерфейсе; такое решение обсуждают с тем, кто работает с заявками каждый день, а не угадывают в коде.</a:t>
             </a:r>
           </a:p>
         </p:txBody>
@@ -2467,43 +2467,43 @@
           <a:lstStyle/>
           <a:p>
             <a:r>
-              <a:t>Критерий, и он не про то, какой инструмент принципиально лучше — все три работают, вопрос в том, что за повторы вы ожидаете и чем готовы платить за ошибку каждого.</a:t>
+              <a:t>Критерий. Работают все три, и спор о том, какой принципиально лучше, ничего не решает: решают два обстоятельства — какие повторы вы ожидаете и чем готовы платить за ошибку каждого.</a:t>
             </a:r>
           </a:p>
           <a:p/>
           <a:p>
             <a:r>
-              <a:t>Точного совпадения достаточно для буквальных повторов — на нашем наборе это 75 процентов, 15 из 20, бесплатно и мгновенно. Это первый вопрос Бориса, заданный дважды одними и теми же словами, — для такого случая хэш справляется полностью, и тратить вызов модели на каждое обращение не окупается.</a:t>
+              <a:t>Точного совпадения достаточно для буквальных повторов — на нашем наборе это 75 процентов, 15 из 20, бесплатно и мгновенно. Это первый вопрос Бориса, заданный дважды одними и теми же словами: здесь хэш справляется полностью, и тратить вызов модели на каждое обращение не окупается.</a:t>
             </a:r>
           </a:p>
           <a:p/>
           <a:p>
             <a:r>
-              <a:t>Классический векторный подход не стоит добавлять «на всякий случай», рассчитывая на то, что мера похожести и настраиваемый порог сами по себе дадут прирост. Измерение на 20 реальных парах показало результат ХУЖЕ, чем у хэша, — 13 из 20 против 15: его нельзя брать как «более умного хэша» без проверки на своих данных, он может оказаться хуже самого простого варианта.</a:t>
+              <a:t>Классический векторный подход не стоит добавлять «на всякий случай», рассчитывая, что мера похожести и настраиваемый порог сами по себе дадут прирост. Измерение на 20 настоящих парах показало результат ХУЖЕ, чем у хэша, — 13 из 20 против 15: его нельзя брать как «более умного хэша» без проверки на своих данных, он может оказаться хуже самого простого варианта.</a:t>
             </a:r>
           </a:p>
           <a:p/>
           <a:p>
             <a:r>
-              <a:t>Проверка смыслом нужна сверху там, где ожидаются именно переформулировки — второй вопрос Бориса, заданный другими словами. Модель нужна там, и важно помнить: её собственная частота ошибок — у нас три ложных срабатывания из двадцати, пятнадцать процентов — это цена, которую вы платите за эту точность, а не ноль. Если цена необнаруженного дубля — повторная работа администратора, повторный звонок, недоверие клиента вроде того, что получил Борис, — выше цены одного лишнего вызова модели на спорные случаи, проверка смыслом себя оправдывает.</a:t>
+              <a:t>Проверка смыслом нужна сверху там, где ожидаются именно переформулировки — второй вопрос Бориса, заданный другими словами. Модель нужна там — и помните про её собственную частоту ошибок: у нас три ложных срабатывания из двадцати, пятнадцать процентов. Это цена, которую вы платите за такую точность, а не ноль. Если цена необнаруженного дубля — повторная работа администратора, повторный звонок, недоверие клиента вроде того, что получил Борис, — выше цены одного лишнего вызова модели на спорные случаи, проверка смыслом себя оправдывает.</a:t>
             </a:r>
           </a:p>
           <a:p/>
           <a:p>
             <a:r>
-              <a:t>И отдельная строка критерия: какой именно моделью проверять смыслом — тоже решение, не очевидное по умолчанию. На нашем тесте дешёвая модель общего назначения дала 17 из 20, специализированный сервис jev — 20 из 20 и дешевле по прайсу. Это не значит «всегда берите специализированный сервис»: значит, что выбор инструмента для этого шага стоит проверять так же, как мы проверили, нужен ли шаг вообще, — не угадывать.</a:t>
+              <a:t>И отдельная строка критерия: чем именно проверять смыслом — тоже решение, не очевидное по умолчанию. На нашем тесте дешёвая модель общего назначения дала 17 из 20, специализированный сервис jev — 20 из 20 и дешевле по прайсу. Из этого не следует «всегда берите специализированный сервис». Следует другое: выбор инструмента для этого шага проверяют так же, как мы проверили, нужен ли шаг, — а не угадывают.</a:t>
             </a:r>
           </a:p>
           <a:p/>
           <a:p>
             <a:r>
-              <a:t>И теперь закрываем вторую строку нашей таблицы. Выглядело надёжным: заявка про тот же вопрос пришла снова — формально это просто новое обращение, обработали как новое, прогон зелёный. Чем оказалось: без проверки на дубль каждое повторное обращение запускает всю цепочку с нуля, как будто вопрос никогда не задавали, — ровно то, что случилось у Ольги и Бориса. И важно унести именно это: ни точное совпадение, ни классический векторный подход не решают эту задачу целиком сами по себе — для настоящей переформулировки нужна проверка смыслом, со своей измеренной, а не воображаемой ценой ошибки, и именно поэтому в финальном решении она стоит вторым шагом, а не единственным.</a:t>
+              <a:t>И закрываем вторую строку нашей таблицы. Выглядело надёжным: заявка про тот же вопрос пришла снова — формально новое обращение, обработали как новое, прогон зелёный. Чем оказалось: без проверки на дубль каждое повторное обращение запускает всю цепочку с нуля, как будто вопрос никогда не задавали, — ровно то, что случилось у Ольги и Бориса. И важно унести именно это: ни точное совпадение, ни классический векторный подход не решают эту задачу целиком сами по себе — для настоящей переформулировки нужна проверка смыслом, со своей измеренной, а не воображаемой ценой ошибки, и именно поэтому в финальном решении она стоит вторым шагом, а не единственным.</a:t>
             </a:r>
           </a:p>
           <a:p/>
           <a:p>
             <a:r>
-              <a:t>Кейс закрыт: путь прошли от потребности Ольги и её клиента через два неудачных или неполных дешёвых подхода, честное измерение на реальных текстах и выбор правильного порядка инструментов — до конкретного критерия, по которому решать, нужен ли второй, дорогой слой вообще, и каким именно инструментом его ставить. Дальше — третий кейс этого занятия, и там та же развилка между моделью и кодом встанет не на тексте заявки, а на решении, которое напрямую управляет деньгами.</a:t>
+              <a:t>Кейс закрыт: путь прошли от потребности Ольги и её клиента через два неполных дешёвых подхода, честное измерение на настоящих текстах и выбор правильного порядка инструментов — до критерия, по которому решают, нужен ли второй, дорогой слой и каким инструментом его ставить. Дальше — третий кейс этого занятия, и там та же развилка между моделью и кодом встанет не на тексте заявки, а на решении, которое напрямую управляет деньгами.</a:t>
             </a:r>
           </a:p>
         </p:txBody>
@@ -2579,31 +2579,31 @@
           <a:p/>
           <a:p>
             <a:r>
-              <a:t>Учебный центр принимает заявки на возврат оплаты — занятие пропустили, курс не подошёл, передумали. Часть таких заявок центр должен одобрять сам, не отрывая руководителя на каждую мелочь: это его повседневная работа, и ему нужно решать её быстро, без согласований сверху. Другую часть — крупные суммы — обязательно показывать руководителю: там цена ошибки выше, и решение нельзя отдавать без контроля. Разделяет эти две категории порог: три тысячи рублей.</a:t>
+              <a:t>Учебный центр принимает заявки на возврат оплаты — занятие пропустили, курс не подошёл, передумали. Часть таких заявок центр должен одобрять сам, не отрывая руководителя на каждую мелочь: это повседневная работа, и решать её надо быстро, без согласований сверху. Другую часть — крупные суммы — обязательно показывать руководителю: там цена ошибки выше, и решение нельзя отдавать без контроля. Разделяет эти две категории порог: три тысячи рублей.</a:t>
             </a:r>
           </a:p>
           <a:p/>
           <a:p>
             <a:r>
-              <a:t>Почему нельзя просто отдать всё руководителю или всё — автоматике, тоже понятно без лишних слов. Если решать всё вручную, руководитель тонет в мелких заявках и не успевает заниматься тем, для чего он нужен. Если доверить автоматике вообще всё без разбора, крупная сумма может уйти без единого взгляда человека — а там, где счёт идёт на десятки тысяч, это риск, который никто сознательно на себя не берёт. Порог — это и есть компромисс между этими двумя крайностями, и от того, насколько точно он соблюдается, зависит, работает ли компромисс на практике или только на бумаге.</a:t>
+              <a:t>Почему нельзя отдать всё руководителю или всё автоматике, понятно без лишних слов. Решать всё вручную — руководитель тонет в мелких заявках и не успевает заниматься тем, для чего нужен. Доверить всё автоматике без разбора — крупная сумма уйдёт без единого взгляда человека, а там, где счёт идёт на десятки тысяч, такой риск никто сознательно на себя не берёт. Порог и есть компромисс между этими крайностями, и держится он ровно настолько, насколько точно его соблюдают: иначе компромисс остаётся на бумаге.</a:t>
             </a:r>
           </a:p>
           <a:p/>
           <a:p>
             <a:r>
-              <a:t>Фраза на экране — не технический промпт и не инструкция для модели, а то, как эту идею сформулировал бы бизнес, прежде чем передавать её в реализацию: автоматический возврат средств — до заданного порога суммы. Это прямое продолжение процесса, который мы уже собирали в Семинаре 7: там система читала текст обращения и определяла его тему; здесь она идёт на шаг дальше — после того как обращение распознано как просьба о возврате, она же решает, одобрить сумму автоматически или передать её руководителю. Не два разных процесса, а один, которому добавили ещё один шаг.</a:t>
+              <a:t>Фраза на экране — не технический промпт и не инструкция для модели, а то, как эту идею сформулировал бы бизнес, прежде чем передавать её в реализацию: автоматический возврат средств — до заданного порога суммы. Это прямое продолжение процесса, который мы уже собирали в Семинаре 7: там система читала текст обращения и определяла тему; здесь она идёт на шаг дальше — распознав в обращении просьбу о возврате, она же решает, одобрить сумму автоматически или передать руководителю. Процесс один, ему добавили ещё один шаг.</a:t>
             </a:r>
           </a:p>
           <a:p/>
           <a:p>
             <a:r>
-              <a:t>Внутри этого шага правило звучит просто и на первый взгляд совершенно однозначно — порог есть, сравнение есть, что тут можно перепутать.</a:t>
+              <a:t>Внутри этого шага правило звучит просто и на первый взгляд однозначно: порог есть, сравнение есть — что тут перепутаешь.</a:t>
             </a:r>
           </a:p>
           <a:p/>
           <a:p>
             <a:r>
-              <a:t>Именно эта кажущаяся однозначность и окажется на проверке неполной. Но не будем забегать: сначала посмотрим, как это правило живёт сегодня и кто его выполняет — следующий экран.</a:t>
+              <a:t>Эта кажущаяся однозначность и окажется на проверке неполной. Но не будем забегать: сначала посмотрим, как правило живёт сегодня и кто его выполняет, — следующий экран.</a:t>
             </a:r>
           </a:p>
           <a:p/>
@@ -2679,7 +2679,7 @@
           <a:lstStyle/>
           <a:p>
             <a:r>
-              <a:t>Вот как это работает сегодня, и это не новый процесс с нуля — это продолжение того, что мы уже собрали в Семинаре 7. Там система читала текст обращения и определяла его тему: оплата, перенос, вопрос по курсу. Здесь, после того как обращение распознано как просьба о возврате, добавлен ещё один шаг: та же система читает сумму внутри текста и сама решает, одобрить её автоматически или передать руководителю.</a:t>
+              <a:t>Сегодня это работает продолжением того, что мы уже собрали в Семинаре 7, а не новым процессом с нуля. Там система читала текст обращения и определяла его тему: оплата, перенос, вопрос по курсу. Здесь, после того как обращение распознано как просьба о возврате, добавлен ещё один шаг: та же система читает сумму внутри текста и сама решает, одобрить её автоматически или передать руководителю.</a:t>
             </a:r>
           </a:p>
           <a:p/>
@@ -2691,31 +2691,31 @@
           <a:p/>
           <a:p>
             <a:r>
-              <a:t>Решение принимает один шаг цепочки, и принимает его целиком. Внутри этого шага совмещены сразу три операции: прочитать сумму, сравнить её с порогом, сформулировать ответ — и все три модель делает сама, без какой-либо проверки снаружи. Именно эту возможность — в рамках той же формы добавить автоматический возврат средств до заданного порога, не отправляя каждую мелкую заявку руководителю, — команда и реализовала месяц назад.</a:t>
+              <a:t>Решение принимает один шаг цепочки, и принимает целиком. Внутри него совмещены три операции: прочитать сумму, сравнить с порогом, сформулировать ответ — и все три модель делает сама, без проверки снаружи. Эту возможность — добавить к той же форме автоматический возврат до заданного порога, не отправляя каждую мелкую заявку руководителю — команда и собрала месяц назад.</a:t>
             </a:r>
           </a:p>
           <a:p/>
           <a:p>
             <a:r>
-              <a:t>Дальше развилка простая и в ней появляется деталь, которой не было в предыдущих кейсах: если решение «одобрить» — деньги не просто «оформляются», они автоматически уходят на карту клиента, без единого касания человека. Если решение «эскалировать» — заявка попадает к руководителю, и он решает уже сам.</a:t>
+              <a:t>Дальше развилка простая, и в ней появляется деталь, которой не было в предыдущих кейсах: решение «одобрить» — и деньги не «оформляются», а автоматически уходят на карту клиента, без единого касания человека. Если решение «эскалировать» — заявка попадает к руководителю, и он решает уже сам.</a:t>
             </a:r>
           </a:p>
           <a:p/>
           <a:p>
             <a:r>
-              <a:t>И вот на чём держится сегодняшнее доверие к этой версии. Она работает месяц. За этот месяц никто не пришёл и не сказал «вот эта заявка одобрена неправильно» или «эту напрасно отправили руководителю». Команда, естественно, читает это как подтверждение: правило работает, модель справляется.</a:t>
+              <a:t>И вот на чём держится сегодняшнее доверие к этой версии. Она работает месяц. За этот месяц никто не пришёл и не сказал «вот эта заявка одобрена неправильно» или «эту напрасно отправили руководителю». Команда читает это как подтверждение: правило работает, модель справляется.</a:t>
             </a:r>
           </a:p>
           <a:p/>
           <a:p>
             <a:r>
-              <a:t>Но стоит заметить вслух, что именно подтверждает отсутствие жалоб — и чего оно не подтверждает. Оно подтверждает, что ни одна ошибка не была достаточно заметной или достаточно дорогой, чтобы кто-то вернулся и пожаловался. Оно не подтверждает, что ошибок не было вовсе. Про разницу между этими двумя утверждениями — ровно следующий такт.</a:t>
+              <a:t>Но скажем вслух, что подтверждает отсутствие жалоб и чего оно не подтверждает. Подтверждает: ни одна ошибка не была достаточно заметной или достаточно дорогой, чтобы кто-то вернулся и пожаловался. Не подтверждает: что ошибок не было вовсе. Про разницу между этими двумя утверждениями — следующий такт.</a:t>
             </a:r>
           </a:p>
           <a:p/>
           <a:p>
             <a:r>
-              <a:t>Обратите внимание и на то, чего в этой версии нет между чтением суммы и финальным словом ответа. Нет отдельного шага, который бы вслух зафиксировал, что сумма такая-то, и отдельно — что порог такой-то, и отдельно — результат их сравнения. Всё это происходит внутри одного вызова модели, и наружу выходит только готовое слово «одобрить» или «эскалировать» — без промежуточного следа, по которому можно было бы проверить, как модель пришла к этому слову в конкретном случае. Именно эта непрозрачность одного вызова и есть то, что придётся распаковать дальше.</a:t>
+              <a:t>Посмотрите, чего в этой версии нет между чтением суммы и финальным словом ответа. Нет отдельного шага, который зафиксировал бы вслух: сумма такая-то, порог такой-то, результат их сравнения такой-то. Всё это происходит внутри одного вызова модели, и наружу выходит только готовое слово «одобрить» или «эскалировать» — без промежуточного следа, по которому проверишь, как модель пришла к этому слову в конкретном случае. Эту непрозрачность одного вызова и придётся распаковать дальше.</a:t>
             </a:r>
           </a:p>
         </p:txBody>
@@ -2785,13 +2785,13 @@
           <a:lstStyle/>
           <a:p>
             <a:r>
-              <a:t>Остановимся здесь на секунду, прежде чем идти дальше. Правило работает месяц, жалоб не было — и это ровно та точка, где инженер должен спросить себя: тишина — это доказательство, или просто отсутствие повода проверить?</a:t>
+              <a:t>Остановимся на секунду, прежде чем идти дальше. Правило работает месяц, жалоб не было — и здесь инженер обязан спросить себя: тишина — это доказательство или отсутствие повода проверить?</a:t>
             </a:r>
           </a:p>
           <a:p/>
           <a:p>
             <a:r>
-              <a:t>Вопрос, который стоит задать: как добиться, чтобы решение о пороге действительно никогда не принималось неверно? Не «как сделать ещё надёжнее» вообще, а именно про эту конкретную точку — сравнение суммы с порогом.</a:t>
+              <a:t>Вопрос дня: как добиться, чтобы решение о пороге никогда не принималось неверно? Не «как сделать ещё надёжнее» вообще, а про одну точку — сравнение суммы с порогом.</a:t>
             </a:r>
           </a:p>
           <a:p/>
@@ -2803,7 +2803,7 @@
           <a:p/>
           <a:p>
             <a:r>
-              <a:t>Первая — написать правило яснее в самом промте: переформулировать текст, явно развести, что происходит на самой границе и по обе стороны от неё.</a:t>
+              <a:t>Первая — написать правило яснее в промте: переформулировать текст, явно развести, что происходит на границе и по обе стороны от неё.</a:t>
             </a:r>
           </a:p>
           <a:p/>
@@ -2836,13 +2836,13 @@
           <a:p/>
           <a:p>
             <a:r>
-              <a:t>Как и в прошлых кейсах: здесь нет одного очевидно неправильного варианта среди остальных. Все четыре — настоящие инженерные ходы, и у части из них есть реальное ограничение, которое проявляется не сразу. Подумайте не «что звучит надёжнее», а что устраняет саму возможность ошибки, а не просто снижает её частоту.</a:t>
+              <a:t>Как и в прошлых кейсах, очевидно неправильного варианта среди остальных здесь нет. Все четыре — настоящие инженерные ходы, и у части есть ограничение, которое проявляется не сразу. Думайте не про то, что звучит надёжнее, а про то, что устраняет саму возможность ошибки, а не снижает её частоту.</a:t>
             </a:r>
           </a:p>
           <a:p/>
           <a:p>
             <a:r>
-              <a:t>И ещё одна подсказка на будущее, не про то, какая карточка верна, а про то, как к ним подходить. Два действия меняют ЧТО-ТО в том, как модель принимает решение, — переформулировку, инструмент. Два действия меняют, ГДЕ ВООБЩЕ принимается это решение — переносят его в код или убирают саму необходимость что-то извлекать. Разница между «лучше сделать то же самое» и «сделать по-другому» будет держать весь дальнейший разбор.</a:t>
+              <a:t>И ещё одна подсказка — не про то, какая карточка верна, а про то, как к ним подходить. Два действия меняют ЧТО-ТО в том, как модель принимает решение: переформулировку, инструмент. Два других меняют, ГДЕ это решение принимается, — переносят его в код или вовсе снимают нужду что-то извлекать. Разница между «лучше сделать то же самое» и «сделать по-другому» будет держать весь дальнейший разбор.</a:t>
             </a:r>
           </a:p>
           <a:p/>
@@ -2918,25 +2918,25 @@
           <a:lstStyle/>
           <a:p>
             <a:r>
-              <a:t>Быстрое напоминание, не новое знакомство — эту лестницу вы уже видели на прошлом занятии, и я не буду снова проходить все девять ступеней.</a:t>
+              <a:t>Напоминание, и короткое: эту лестницу вы уже видели на прошлом занятии, и я не буду снова проходить все девять ступеней заново.</a:t>
             </a:r>
           </a:p>
           <a:p/>
           <a:p>
             <a:r>
-              <a:t>Короткая суть для тех, кто забыл детали. Девять ступеней снизу вверх, от простого к сложному: внизу — то, что закрывается одним вызовом модели или поиском по своим документам, это пройдено ещё на лекции. Дальше — цепочка: несколько шагов в заранее известном порядке, данные между ними. На ней мы были весь прошлый раз, и на ней же мы остаёмся весь сегодняшний.</a:t>
+              <a:t>Коротко суть, одним абзацем. Девять ступеней снизу вверх, от простого к сложному: внизу — то, что закрывается одним вызовом модели или поиском по своим документам, это пройдено ещё на лекции. Дальше — цепочка: несколько шагов в заранее известном порядке, данные между ними. На ней мы были весь прошлый раз, и на ней же мы остаёмся весь сегодняшний.</a:t>
             </a:r>
           </a:p>
           <a:p/>
           <a:p>
             <a:r>
-              <a:t>Это важно сказать прямо, потому что интуитивно кажется, что раз сегодня четыре новых кейса и один сложный эксперимент — значит, мы куда-то поднялись. Это не так. Маршрут, где путь выбирает категория входа, параллельные независимые проверки, циклы и подпроцессы, агент, который сам решает порядок шагов, несколько агентов вместе — всё это следующие занятия, другие ступени. Сегодня цепочка остаётся той же самой по устройству: шаг за шагом, в известном порядке. Меняется не высота, а глубина — мы учимся задавать одному и тому же устройству более точный вопрос про каждый отдельный шаг.</a:t>
+              <a:t>Скажу это прямо, потому что интуитивно кажется, что раз сегодня четыре новых кейса и один сложный эксперимент — значит, мы куда-то поднялись. Это не так. Маршрут, где путь выбирает категория входа, параллельные независимые проверки, циклы и подпроцессы, агент, который сам решает порядок шагов, несколько агентов вместе — всё это следующие занятия, другие ступени. Сегодня цепочка остаётся той же самой по устройству: шаг за шагом, в известном порядке. Меняется не высота, а глубина — мы учимся задавать одному и тому же устройству более точный вопрос про каждый отдельный шаг.</a:t>
             </a:r>
           </a:p>
           <a:p/>
           <a:p>
             <a:r>
-              <a:t>Почему это стоит отдельного напоминания, а не только устного комментария. Потому что правило движения по лестнице из прошлого занятия звучит ровно так: не поднимайся без требования, которого ступень ниже не закрывает. А все четыре сегодняшних кейса — это именно требования, которые ступень «цепочка» не закрыла автоматически сама по себе: уведомление, которое не путает факты, проверка, которая не запускает повтор с нуля, решение по сумме, за которое можно ручаться, доставка картинки, которая не роняет прогон. Ни одно из них не требует подняться — все четыре закрываются внутри той же самой ступени, если на каждом шаге правильно ответить на один вопрос.</a:t>
+              <a:t>Почему под это отдан отдельный экран. Потому что правило движения по лестнице из прошлого занятия звучит ровно так: не поднимайся без требования, которого ступень ниже не закрывает. А все четыре сегодняшних кейса — это как раз требования, которые ступень «цепочка» не закрыла сама собой: уведомление, которое не путает факты, проверка, которая не запускает повтор с нуля, решение по сумме, за которое можно ручаться, доставка картинки, которая не роняет прогон. Ни одно из них не требует подняться — все четыре закрываются внутри той же самой ступени, если на каждом шаге правильно ответить на один вопрос.</a:t>
             </a:r>
           </a:p>
         </p:txBody>
@@ -3006,7 +3006,7 @@
           <a:lstStyle/>
           <a:p>
             <a:r>
-              <a:t>Разбираем четыре действия, и для каждого теперь есть не только рассуждение, но и настоящий прогон на живом стенде.</a:t>
+              <a:t>Разбираем четыре действия, и за каждым теперь не только рассуждение, но и настоящий прогон на живом стенде.</a:t>
             </a:r>
           </a:p>
           <a:p/>
@@ -3018,7 +3018,7 @@
           <a:p/>
           <a:p>
             <a:r>
-              <a:t>Дать модели инструмент-калькулятор — здесь нужно пояснить подробнее, почему это не решает проблему. Прежде чем калькулятор что-то сравнит, модели всё равно нужно извлечь сумму из текста — тот же вероятностный шаг, что и без калькулятора. А дальше модель сама, тоже вероятностно, решает, вызывать ли инструмент и с какими аргументами. Калькулятор не убирает вероятностность — он добавляет её туда, где её раньше не было. Мы собрали настоящего агента с настоящим калькулятором и прогнали на той же сотне запросов: пятьдесят шесть из ста, хуже всех вариантов. Встроенный калькулятор n8n умеет арифметику, не умеет сравнений, и на «2500 меньше 3000» честно отвечал «не знаю, как это сделать» (11 из 100). Треть ответов не свелась к чистому слову — смешанный алфавит, рассуждение вместо ответа, одно переключение на китайский. Почти десятая часть ошибок рассыпалась по всему диапазону, не только у границы.</a:t>
+              <a:t>Дать модели инструмент-калькулятор. Поясню подробнее, почему это не решает проблему. Прежде чем калькулятор что-то сравнит, модели всё равно надо извлечь сумму из текста — тот же вероятностный шаг, что и без калькулятора. А дальше модель сама, тоже вероятностно, решает, вызывать ли инструмент и с какими аргументами. Калькулятор вероятностность не убирает — он добавляет её туда, где её раньше не было. Мы собрали настоящего агента с настоящим калькулятором и прогнали на той же сотне запросов: пятьдесят шесть из ста, хуже всех вариантов. Встроенный калькулятор n8n умеет арифметику, не умеет сравнений, и на «2500 меньше 3000» честно отвечал «не знаю, как это сделать» (11 из 100). Треть ответов не свелась к чистому слову — смешанный алфавит, рассуждение вместо ответа, одно переключение на китайский. Почти десятая часть ошибок рассыпалась по всему диапазону, не только у границы.</a:t>
             </a:r>
           </a:p>
           <a:p/>
@@ -3033,13 +3033,13 @@
               <a:t>IF</a:t>
             </a:r>
             <a:r>
-              <a:t>-узел после извлечения — сумму достаёт модель, сравнивает код. На ста одном запросе — ноль ошибок, включая все заложенные граничные случаи. Что он принципиально не закрывает — ошибку самого извлечения; на этом измерении её не нашлось, но архитектурно это не его забота.</a:t>
+              <a:t>-узел после извлечения — сумму достаёт модель, сравнивает код. На ста одном запросе ноль ошибок, включая все заложенные граничные случаи. Чего он принципиально не закрывает — ошибку самого извлечения: на этом измерении её не нашлось, но архитектурно это и не его забота.</a:t>
             </a:r>
           </a:p>
           <a:p/>
           <a:p>
             <a:r>
-              <a:t>И последнее — явное числовое поле формы. Точность здесь сознательно не измеряли: у шага извлечения, которого нет, нет и точности. Применимая мера — применимость: работает только если форму можно менять; иначе извлекать из текста всё равно придётся.</a:t>
+              <a:t>И последнее — явное числовое поле формы. Точность здесь сознательно не измеряли: у шага извлечения, которого нет, нет и точности. Применимая мера — применимость: работает, только если форму можно менять, иначе извлекать из текста всё равно придётся.</a:t>
             </a:r>
           </a:p>
           <a:p/>
@@ -3115,7 +3115,7 @@
           <a:lstStyle/>
           <a:p>
             <a:r>
-              <a:t>Прежде чем идти дальше, стоит рассказать про одну идею, которая появилась уже после того, как таблица на предыдущем экране была готова, и которая не вошла в неё пятой строкой — не потому что её постеснялись, а потому что проверка показала: собрать её так, как она задумывалась, нельзя.</a:t>
+              <a:t>Прежде чем идти дальше — одна идея, появившаяся уже после того, как таблица на предыдущем экране была готова. Пятой строкой она в таблицу не вошла, и не из стеснения: проверка показала, что собрать её так, как она задумывалась, нельзя.</a:t>
             </a:r>
           </a:p>
           <a:p/>
@@ -3127,25 +3127,25 @@
           <a:p/>
           <a:p>
             <a:r>
-              <a:t>Прежде чем собирать цепочку, идею проверили прямыми вызовами на живом стенде: число нельзя выдумывать, его нужно измерить. И выяснилось то, что вы видите в верхнем ряду. У сервиса ровно четыре типа ответа: да или нет с вероятностью, выбор одного варианта из заранее перечисленных, позиция на заданной шкале, область на картинке. Открытого числа среди них нет вообще, ни в каком виде, — и пятая карточка перечёркнута не для красоты: это не «плохо поддерживается», это отсутствующая операция.</a:t>
+              <a:t>Прежде чем собирать цепочку, идею проверили прямыми вызовами на живом стенде: число не выдумывают, его измеряют. И выяснилось то, что вы видите в верхнем ряду. У сервиса ровно четыре типа ответа: да или нет с вероятностью, выбор одного варианта из заранее перечисленных, позиция на заданной шкале, область на картинке. Открытого числа среди них нет ни в каком виде, и пятая карточка перечёркнута не для красоты: это не «плохо поддерживается», а отсутствующая операция.</a:t>
             </a:r>
           </a:p>
           <a:p/>
           <a:p>
             <a:r>
-              <a:t>Нижний ярус показывает, почему это не мелочь. Две суммы, две тысячи девятьсот девяносто девять и три тысячи один рубль, лежат по разные стороны настоящего порога. Обеим предложили одну и ту же шкалу диапазонов, заданную заранее. Сервис вернул для обеих один и тот же диапазон, с полной уверенностью в обоих случаях. Различить их получилось бы только если заранее зашить границу ровно в три тысячи в сам вопрос к сервису — то есть знать порог в момент формулировки вопроса, точно как в тексте правила, которое мы и пытаемся обойти.</a:t>
+              <a:t>Нижний ярус показывает, почему это не мелочь. Две суммы, две тысячи девятьсот девяносто девять и три тысячи один рубль, лежат по разные стороны настоящего порога. Обеим предложили одну и ту же шкалу диапазонов, заданную заранее. Сервис вернул для обеих один и тот же диапазон, с полной уверенностью в обоих случаях. Различить их удалось бы единственным способом: заранее зашить границу ровно в три тысячи в сам вопрос к сервису — то есть знать порог, когда вопрос формулируешь, точно как в тексте правила, которое мы и пытаемся обойти.</a:t>
             </a:r>
           </a:p>
           <a:p/>
           <a:p>
             <a:r>
-              <a:t>Это другая история, чем с калькулятором, который мы разобрали минуту назад. У калькулятора модель могла вызвать инструмент — вероятностность просто переезжала на шаг раньше и там продолжала жить. У этого сервиса в данной задаче самой операции «вернуть число» не существует: это не плохо выполненная работа, а работа другого класса, которую он в принципе не берёт.</a:t>
+              <a:t>Это другая история, чем с калькулятором, который мы разобрали минуту назад. У калькулятора модель могла вызвать инструмент — вероятностность переезжала на шаг раньше и там продолжала жить. У этого сервиса в такой задаче самой операции «вернуть число» не существует: это не плохо выполненная работа, а работа другого класса, которую он в принципе не берёт.</a:t>
             </a:r>
           </a:p>
           <a:p/>
           <a:p>
             <a:r>
-              <a:t>Урок простой и универсальный, не только про возврат денег: прежде чем проектировать шаг вокруг стороннего сервиса, проверьте, что он физически умеет делать то, что от него хотят. Не исходите из того, что раз он хорош в соседней задаче, значит подойдёт и здесь. «Выбрать из готовых вариантов» и «извлечь произвольное число» — разные классы, и успех в одном ничего не говорит про другой.</a:t>
+              <a:t>Урок простой и переносимый, не только про возврат денег: прежде чем проектировать шаг вокруг стороннего сервиса, проверьте, что он физически умеет делать то, что от него хотят. И не считайте, что раз он хорош в соседней задаче, значит подойдёт и здесь. «Выбрать из готовых вариантов» и «извлечь произвольное число» — разные классы, и успех в одном ничего не говорит про другой.</a:t>
             </a:r>
           </a:p>
           <a:p/>
@@ -3221,13 +3221,13 @@
           <a:lstStyle/>
           <a:p>
             <a:r>
-              <a:t>В таблице действий мы только что проговорили число: версия один, та, что работает месяц, ошибается девять раз из ста одного. И не где-то в случайном месте цепочки — ровно в одной точке: там, где принимается решение «одобрить» или «эскалировать». Прежде чем идти дальше и разбирать это число подробно, стоит показать, что мы с этой находкой сделали. Версия два — это не новая цепочка с нуля, это версия один с заменой ровно этого одного узла.</a:t>
+              <a:t>В таблице действий мы только что проговорили число: версия один, та, что работает месяц, ошибается девять раз из ста одного. И не в случайном месте цепочки — ровно в одной точке: там, где принимается решение «одобрить» или «эскалировать». Прежде чем разбирать это число подробно, покажу, что мы с находкой сделали. Версия два — не новая цепочка с нуля, а версия один с заменой одного узла.</a:t>
             </a:r>
           </a:p>
           <a:p/>
           <a:p>
             <a:r>
-              <a:t>Посмотрите на схему. Верхняя полоса — версия один, та, что работала месяц. Форма со свободным текстом, модель достаёт из него сумму, и та же модель — тем же вызовом — решает, одобрить сумму или эскалировать её, читая текст правила. Вот это последнее действие, решение по тексту правила, и есть точка, где случались все девять ошибок.</a:t>
+              <a:t>Посмотрите на схему. Верхняя полоса — версия один, та, что работала месяц. Форма со свободным текстом, модель достаёт из него сумму, и та же модель — тем же вызовом — решает, одобрить сумму или эскалировать её, читая текст правила. Последнее действие, решение по тексту правила, и есть точка, где случались все девять ошибок.</a:t>
             </a:r>
           </a:p>
           <a:p/>
@@ -3248,13 +3248,13 @@
           <a:p/>
           <a:p>
             <a:r>
-              <a:t>Обратите внимание, что я рисую это не как два равноправных параллельных процесса, которые мы якобы собрали сразу и сравнили. Версия два появилась после версии один и из-за найденной в ней проблемы — это и есть правильный порядок рассказа про смену решения, и ровно он совпадает с тем, что произошло на самом деле: месяц работы, эксперимент, находка, и только потом — замена узла.</a:t>
+              <a:t>И рисую я это не как два равноправных параллельных процесса, которые мы якобы собрали сразу и сравнили. Версия два появилась после версии один и из-за найденной в ней проблемы — это и есть правильный порядок рассказа про смену решения, и он совпадает с тем, что было: месяц работы, эксперимент, находка, и только потом замена узла.</a:t>
             </a:r>
           </a:p>
           <a:p/>
           <a:p>
             <a:r>
-              <a:t>Дальше разберём, насколько хорошо это работает на самом деле: не просто headline-число, а как именно был устроен тест на сто один запрос и на каких конкретно формулировках версия один раз за разом спотыкалась. Это следующий такт.</a:t>
+              <a:t>Дальше разберём, насколько хорошо это работает: не одно итоговое число, а как был устроен тест на сто один запрос и на каких формулировках версия один раз за разом спотыкалась. Это следующий такт.</a:t>
             </a:r>
           </a:p>
         </p:txBody>
@@ -3324,13 +3324,13 @@
           <a:lstStyle/>
           <a:p>
             <a:r>
-              <a:t>Это отдельный такт про сам процесс измерения, и он заслуживает полного экрана, а не одной итоговой строки — потому что метод здесь важнее числа, и в этой волне метод стал ещё важнее: исходные три ошибки на пятьдесят одном запросе звучали недостаточно представительно, чтобы на них опираться уверенно, и набор расширили.</a:t>
+              <a:t>Это отдельный такт про сам процесс измерения, и он заслуживает полного экрана: метод здесь важнее числа. В этой волне метод стал важнее вдвойне — исходные три ошибки на пятьдесят одном запросе звучали недостаточно представительно, чтобы на них опираться уверенно, и набор расширили.</a:t>
             </a:r>
           </a:p>
           <a:p/>
           <a:p>
             <a:r>
-              <a:t>Начнём с того, зачем мерить вообще, если жалоб не было. Жалоба — это сигнал, который приходит только при одном условии: ошибка достаточно заметна и достаточно дорога, чтобы человек вернулся и указал на неё. Тихая ошибка — там, где чуть большую сумму одобрили, которую следовало эскалировать, или наоборот — жалобы не вызовет вообще никогда, потому что её, скорее всего, никто и не заметит.</a:t>
+              <a:t>Начнём с того, зачем мерить, если жалоб не было. Жалоба приходит при одном условии: ошибка достаточно заметна и достаточно дорога, чтобы человек вернулся и указал на неё. Тихая ошибка — одобрили чуть большую сумму, которую следовало эскалировать, или наоборот — жалобы не вызовет никогда, потому что её, скорее всего, никто и не заметит.</a:t>
             </a:r>
           </a:p>
           <a:p/>
@@ -3342,7 +3342,7 @@
           <a:p/>
           <a:p>
             <a:r>
-              <a:t>И вот что добавлено в этой волне. Три тысячи рублей — это одна конкретная сумма, и кластер вокруг неё в исходном наборе был плотным, но не исчерпывающим. Добавили пятнадцать сумм ещё плотнее к самой границе — буквально в пределах двадцати рублей от неё в обе стороны. Добавили двадцать текстов, где в одном сообщении встречаются два разных числа: отвлекающая сумма — то, что курс или занятие стоило раньше, — и целевая сумма, та, которую на самом деле просят вернуть. Правильный ответ считается по целевой, и экстрактору нужно отличить одно от другого, а не просто найти первое число в тексте. И добавили пятнадцать формулировок, где сумма вообще не названа прямым числом, а выводится арифметикой — «два занятия по тысяче пятьсот» — или словом «около», «примерно».</a:t>
+              <a:t>Что добавлено в этой волне. Три тысячи рублей — одна конкретная сумма, и кластер вокруг неё в исходном наборе был плотным, но не исчерпывающим. Добавили пятнадцать сумм ещё плотнее к самой границе — буквально в пределах двадцати рублей от неё в обе стороны. Добавили двадцать текстов, где в одном сообщении встречаются два разных числа: отвлекающая сумма — то, что курс или занятие стоило раньше, — и целевая сумма, та, которую на самом деле просят вернуть. Правильный ответ считается по целевой, и экстрактору нужно отличить одно от другого, а не найти первое число в тексте. И добавили пятнадцать формулировок, где сумма вообще не названа прямым числом, а выводится арифметикой — «два занятия по тысяче пятьсот» — или словом «около», «примерно».</a:t>
             </a:r>
           </a:p>
           <a:p/>
@@ -3354,13 +3354,13 @@
           <a:p/>
           <a:p>
             <a:r>
-              <a:t>Прежде чем переключать на результат — остановитесь и предположите сами, тремя вариантами руками: ошибок ноль, до пяти, больше двадцати. Правило месяц работало без единой жалобы, и это единственное, что про него известно заранее. Пауза здесь нужна настоящая: число на следующем экране стоит ровно столько, сколько стоило собственное предположение до него.</a:t>
+              <a:t>Прежде чем переключать на результат — остановитесь и предположите сами, тремя вариантами руками: ошибок ноль, до пяти, больше двадцати. Правило месяц работало без единой жалобы, и это единственное, что про него известно заранее. Пауза здесь нужна настоящая: число на следующем экране стоит столько, сколько стоило собственное предположение до него.</a:t>
             </a:r>
           </a:p>
           <a:p/>
           <a:p>
             <a:r>
-              <a:t>Оба исхода предположения одинаково полезны. Ответ «до пяти» близок к истине по доле — девять из ста одного, — но доля здесь не главное: все девять ошибок стоят в одной точке, и это выясняется только из разбивки. Ответ «ноль» — самый частый и самый поучительный: месяц без единой жалобы не говорит о числе ошибок ничего, потому что тихая ошибка жалобы и не вызывает.</a:t>
+              <a:t>Оба исхода предположения одинаково полезны. Ответ «до пяти» близок к истине по доле — девять из ста одного, — но доля здесь решает меньше всего: все девять ошибок стоят в одной точке, и это выясняется только из разбивки. Ответ «ноль» — самый частый и самый поучительный: месяц без единой жалобы не говорит о числе ошибок ничего, потому что тихая ошибка жалобы и не вызывает.</a:t>
             </a:r>
           </a:p>
         </p:txBody>
@@ -3430,13 +3430,13 @@
           <a:lstStyle/>
           <a:p>
             <a:r>
-              <a:t>Вот ответ. Девять ошибок из ста одного прогона у версии, где порог записан словами внутри промпта, и ноль ошибок у версии, где тот же порог стоит условием в коде. Один и тот же набор запросов, один и тот же учебный центр, одна и та же модель на шаге извлечения суммы — разница только в том, кто принимает решение «одобрить или эскалировать».</a:t>
+              <a:t>Ответ. Девять ошибок из ста одного прогона у версии, где порог записан словами внутри промпта, и ноль ошибок у версии, где тот же порог стоит условием в коде. Один и тот же набор запросов, один и тот же учебный центр, одна и та же модель на шаге извлечения суммы — разница только в том, кто принимает решение «одобрить или эскалировать».</a:t>
             </a:r>
           </a:p>
           <a:p/>
           <a:p>
             <a:r>
-              <a:t>Девять из ста одного — это чуть меньше девяти процентов. Само по себе это число мало что говорит: девять процентов ошибок на шаге, который срабатывает раз в неделю, и девять процентов на шаге, который срабатывает триста раз в месяц, — совершенно разные вещи. Но здесь важнее не доля, а то, где именно эти девять стоят.</a:t>
+              <a:t>Девять из ста одного — чуть меньше девяти процентов. Само по себе это число говорит мало: девять процентов ошибок на шаге, который срабатывает раз в неделю, и девять процентов на шаге, который срабатывает триста раз в месяц, — разные вещи. Но здесь важнее доли другое: где эти девять стоят.</a:t>
             </a:r>
           </a:p>
           <a:p/>
@@ -3448,13 +3448,13 @@
           <a:p/>
           <a:p>
             <a:r>
-              <a:t>Почему именно там. Правило в промте написано словами: «не возвращай больше трёх тысяч». Человек читает это как «три тысячи ещё можно». Модель на самой границе читает это иначе и отправляет заявку руководителю. Спорить о том, чьё прочтение правильное, бессмысленно: формулировка допускает оба, и в этом вся беда — граница осталась предметом интерпретации вместо того, чтобы быть сравнением двух чисел.</a:t>
+              <a:t>Почему именно там. Правило в промте написано словами: «не возвращай больше трёх тысяч». Человек читает это как «три тысячи ещё можно». Модель на самой границе читает это иначе и отправляет заявку руководителю. Спорить о том, чьё прочтение правильное, бессмысленно: формулировка допускает оба, и в этом вся беда — граница осталась предметом толкования, а сравнением двух чисел так и не стала.</a:t>
             </a:r>
           </a:p>
           <a:p/>
           <a:p>
             <a:r>
-              <a:t>Для учебного центра три тысячи — не случайная сумма из середины диапазона. Это и есть заявленный порог, то самое место, где решение переключается, и именно на нём стоит самая частая заявка: клиенты просят вернуть ровно столько, сколько стоит занятие или блок занятий.</a:t>
+              <a:t>Для учебного центра три тысячи — не случайная сумма из середины диапазона. Это и есть заявленный порог, то место, где решение переключается, и на нём стоит самая частая заявка: клиенты просят вернуть ровно столько, сколько стоит занятие или блок занятий.</a:t>
             </a:r>
           </a:p>
           <a:p/>
@@ -3536,25 +3536,25 @@
           <a:p/>
           <a:p>
             <a:r>
-              <a:t>Таблица разбита по блокам теста не для красоты, а потому что так сразу видно, где ошибка есть и где её нет. Исходный кластер у границы — двадцать пять запросов, три ошибки. Исходные суммы явно выше порога — двадцать пять запросов, ноль ошибок. Новый блок у самой границы, где суммы ещё плотнее прижаты к трём тысячам, — пятнадцать запросов, и неожиданно ноль ошибок: ни 2980, ни 2999, ни 3001, ни 3020 не сбили модель, потому что ни одна из них не совпадает РОВНО с порогом. Блок с двумя числами в тексте — двадцать запросов, тоже ноль: модель уверенно отличает отвлекающую сумму от целевой. А вот блок непрямых формулировок — пятнадцать запросов, и в нём шесть новых ошибок, и все шесть — там, где арифметика внутри текста («половина от шести тысяч», «три занятия по тысяче») в точности равна трём тысячам.</a:t>
+              <a:t>Таблица разбита по блокам теста не для красоты: так сразу видно, где ошибка есть и где её нет. Исходный кластер у границы — двадцать пять запросов, три ошибки. Исходные суммы явно выше порога — двадцать пять запросов, ноль ошибок. Блок у границы, где суммы ещё плотнее прижаты к трём тысячам, — пятнадцать запросов, и неожиданно ноль ошибок: ни 2980, ни 2999, ни 3001, ни 3020 модель не сбили, потому что ни одна из них не совпадает РОВНО с порогом. Блок с двумя числами в тексте — двадцать запросов, тоже ноль: модель уверенно отличает отвлекающую сумму от целевой. А вот блок непрямых формулировок — пятнадцать запросов, и в нём шесть новых ошибок, и все шесть — там, где арифметика внутри текста («половина от шести тысяч», «три занятия по тысяче») в точности равна трём тысячам.</a:t>
             </a:r>
           </a:p>
           <a:p/>
           <a:p>
             <a:r>
-              <a:t>Это и есть главное, что подтверждает расширенный набор: ошибка не размазана по диапазону и не зависит от того, насколько сложно сформулирован текст. Она привязана к ОДНОЙ ТОЧНОЙ СУММЕ — трём тысячам рублей, — независимо от того, пришла эта сумма прямым числом или арифметикой из двух чисел. Модель справляется с «очевидно много», с «очевидно мало» и даже с суммами в двадцати рублях от границы — идеально, во всех случаях без исключения. Промах — только там, где сумма равна порогу буквально.</a:t>
+              <a:t>Расширенный набор подтверждает вот что: ошибка не размазана по диапазону и не зависит от того, насколько сложно сформулирован текст. Она привязана к ОДНОЙ ТОЧНОЙ СУММЕ — трём тысячам рублей, — независимо от того, пришла эта сумма прямым числом или арифметикой из двух чисел. Модель справляется с «очевидно много», с «очевидно мало» и даже с суммами в двадцати рублях от границы — во всех случаях без исключения. Промах один: там, где сумма равна порогу буквально.</a:t>
             </a:r>
           </a:p>
           <a:p/>
           <a:p>
             <a:r>
-              <a:t>И это не случайная ошибка, которая иногда проскакивает где угодно. Это систематическая ошибка, сидящая в одной конкретной точке — там, где текст правила и его формальная интерпретация расходятся. В остальном диапазоне, сколь угодно близко к границе, модель безупречна.</a:t>
+              <a:t>И это не случайная ошибка, которая иногда проскакивает где угодно, а систематическая, сидящая в одной точке: там, где текст правила и его формальное толкование расходятся. В остальном диапазоне, сколь угодно близко к границе, модель безупречна.</a:t>
             </a:r>
           </a:p>
           <a:p/>
           <a:p>
             <a:r>
-              <a:t>Разница между «случайная ошибка» и «систематическая ошибка ровно на границе» — это и есть то, что решение, которое мы уже показали на схеме, устраняет структурно: </a:t>
+              <a:t>Разницу между «случайной ошибкой» и «систематической ошибкой ровно на границе» решение, уже показанное на схеме, и устраняет структурно: </a:t>
             </a:r>
             <a:r>
               <a:rPr>
@@ -3563,7 +3563,7 @@
               <a:t>IF</a:t>
             </a:r>
             <a:r>
-              <a:t>-узел меняет саму точку, где принимается решение, вместо того чтобы снижать частоту ошибки в ней. Дальше — как этот узел выглядит в настоящей настройке, рядом с промптом версии один для контраста.</a:t>
+              <a:t>-узел меняет саму точку, где принимается решение, а не снижает частоту ошибки в ней. Дальше — как этот узел выглядит в настоящей настройке, рядом с промптом версии один для контраста.</a:t>
             </a:r>
           </a:p>
         </p:txBody>
@@ -3633,7 +3633,7 @@
           <a:lstStyle/>
           <a:p>
             <a:r>
-              <a:t>Вот настоящая настройка узла, который заменил решение модели в версии два — рядом с настоящей открытой панелью промпта версии один, который он заменил. Оба экрана настоящие, оба сняты с живого стенда, и ради контраста стоило положить их рядом.</a:t>
+              <a:t>Настройка узла, который заменил решение модели в версии два, — и рядом открытая панель промпта версии один, который он заменил. Оба кадра сняты с живого стенда, и ради контраста их стоило положить рядом.</a:t>
             </a:r>
           </a:p>
           <a:p/>
@@ -3648,7 +3648,7 @@
               <a:t>IF</a:t>
             </a:r>
             <a:r>
-              <a:t>, названный по-русски для удобства, «Amount over threshold?» по смыслу. Условие внутри него одно: извлечённая сумма, уже число, а не текст, сравнивается с тремя тысячами строгим «больше». Если условие верно — заявка идёт по ветке «эскалировать». Если нет — по ветке «одобрить». Это операция сравнения чисел, и у неё нет пространства для интерпретации: либо число больше другого числа, либо нет.</a:t>
+              <a:t>, названный по-русски для удобства, «Amount over threshold?» по смыслу. Условие внутри него одно: извлечённая сумма, уже число, а не текст, сравнивается с тремя тысячами строгим «больше». Если условие верно — заявка идёт по ветке «эскалировать». Если нет — по ветке «одобрить». Это операция сравнения чисел, и пространства для толкования у неё нет: либо число больше другого числа, либо нет.</a:t>
             </a:r>
           </a:p>
           <a:p/>
@@ -3672,13 +3672,13 @@
               <a:t>Prompt (User Message)</a:t>
             </a:r>
             <a:r>
-              <a:t> — текст: «Правило: не возвращай больше 3000 рублей автоматически, иначе эскалируй руководителю. Сумма запроса: {{ $json.output.amount_rub }} рублей. Ответь строго одним словом: «одобрить» или «эскалировать».» На экране это поле обрезано по высоте самим интерфейсом n8n — видна не вся строка целиком, здесь она договорена полностью. Обратите внимание, что в этом тексте формально есть то же самое сравнение — «не больше 3000» — но оно существует только как часть смысла предложения, которое модель должна понять и применить. У модели нет отдельного шага «сравнить два числа»: есть один шаг «прочитать правило и сумму вместе и сформулировать ответ». И именно внутри этого одного шага девять раз из ста одного правило и его трактовка расходились — ровно на границе, там, где текст можно прочитать двояко.</a:t>
+              <a:t> — текст: «Правило: не возвращай больше 3000 рублей автоматически, иначе эскалируй руководителю. Сумма запроса: {{ $json.output.amount_rub }} рублей. Ответь строго одним словом: «одобрить» или «эскалировать».» На экране это поле обрезано по высоте самим интерфейсом n8n — видна не вся строка, здесь она договорена полностью. В этом тексте формально есть то же самое сравнение — «не больше 3000», — но живёт оно только как часть смысла предложения, которое модель должна понять и применить. У модели нет отдельного шага «сравнить два числа»: есть один шаг «прочитать правило и сумму вместе и сформулировать ответ». Внутри этого одного шага девять раз из ста одного правило и его трактовка и расходились — ровно на границе, там, где текст можно прочитать двояко.</a:t>
             </a:r>
           </a:p>
           <a:p/>
           <a:p>
             <a:r>
-              <a:t>Это и есть разница между решением, принятым кодом, и решением, принятым текстовым пониманием, положенная рядом, без единого слова о том, какая версия лучше — она видна по самой форме настройки. Слева — число сравнивается с числом. Справа — число спрятано внутри фразы, которую нужно понять целиком, чтобы из неё извлечь тот же самый факт.</a:t>
+              <a:t>Вот и вся разница между решением, принятым кодом, и решением, принятым текстовым пониманием: положили рядом, и ни одного слова о том, какая версия лучше, не понадобилось — разницу видно по самой форме настройки. Слева — число сравнивается с числом. Справа — число спрятано внутри фразы, которую нужно понять целиком, чтобы из неё извлечь тот же самый факт.</a:t>
             </a:r>
           </a:p>
           <a:p/>
@@ -3778,13 +3778,13 @@
               <a:t>IF</a:t>
             </a:r>
             <a:r>
-              <a:t> был виден снаружи — карточкой на канвасе с именем и двумя ветками. Здесь то же самое изнутри: ровно то, что видит инженер, открыв настройку двойным щелчком.</a:t>
+              <a:t> был виден снаружи — карточкой на канвасе с именем и двумя ветками. Здесь он изнутри: то, что видит инженер, открыв настройку двойным щелчком.</a:t>
             </a:r>
           </a:p>
           <a:p/>
           <a:p>
             <a:r>
-              <a:t>Слева — узел, который достаёт сумму из текста заявки. Он называется «Information Extractor», и его задача задана не вольной инструкцией, а строгой схемой ответа на двенадцать строк. В схеме один параметр, </a:t>
+              <a:t>Слева — узел, который достаёт сумму из текста заявки. Он называется «Information Extractor», и задача ему задана не вольной инструкцией, а строгой схемой ответа на двенадцать строк. В схеме один параметр, </a:t>
             </a:r>
             <a:r>
               <a:rPr>
@@ -3793,25 +3793,25 @@
               <a:t>amount_rub</a:t>
             </a:r>
             <a:r>
-              <a:t>, тип у него — строго число, и он помечен обязательным. Модели внутри этого узла не разрешено вернуть текст, диапазон или слово «примерно»: результат либо проходит эту схему, либо узел считается не выполнившимся. Это тот самый шаг извлечения, который версия два не убирает — сумму по-прежнему достаёт модель, — но результат шага дисциплинирован форматом, а не только просьбой в промпте.</a:t>
+              <a:t>, тип у него — строго число, и он помечен обязательным. Модели внутри этого узла не разрешено вернуть текст, диапазон или слово «примерно»: результат либо проходит схему, либо узел не выполнился. Это тот самый шаг извлечения, который версия два не убирает — сумму по-прежнему достаёт модель, — но результат шага дисциплинирован форматом, а не только просьбой в промпте.</a:t>
             </a:r>
           </a:p>
           <a:p/>
           <a:p>
             <a:r>
-              <a:t>Справа — узел, который заменил текстовое решение версии один. Условие у него одно, и читается оно буквально: уже извлечённое число сравнивается с тремя тысячами оператором «больше». Не абзац текста о пороге, а одна строка сравнения в форме, где у исполнителя нет пространства для толкования. Под условием стоит кнопка «добавить условие» — значит, скрытых правил рядом нет, и то, что видно, и есть всё правило целиком.</a:t>
+              <a:t>Справа — узел, который заменил текстовое решение версии один. Условие у него одно, и читается оно буквально: уже извлечённое число сравнивается с тремя тысячами оператором «больше». Не абзац текста о пороге, а одна строка сравнения — в форме, где у исполнителя нет пространства для толкования. Под условием стоит кнопка «добавить условие»: скрытых правил рядом нет, и то, что видно, и есть всё правило целиком.</a:t>
             </a:r>
           </a:p>
           <a:p/>
           <a:p>
             <a:r>
-              <a:t>Отдельно стоит переключатель приведения типов, и он выключен намеренно. Если бы он был включён, условие соглашалось бы сравнивать с числом строку — а строка приезжает сюда с предыдущего шага, где её собрала модель, и тихое преобразование «три тысячи рублей» в число или в ноль прошло бы без единого следа в журнале. Выключенный переключатель превращает такую ситуацию в честный сбой узла вместо тихо неверного ответа.</a:t>
+              <a:t>Отдельно стоит переключатель приведения типов, и выключен он намеренно. Включи его — и условие согласится сравнивать с числом строку, а строка приезжает сюда с предыдущего шага, где её собрала модель: тихое преобразование «три тысячи рублей» в число или в ноль прошло бы без единого следа в журнале. Выключенный переключатель превращает такую ситуацию в честный сбой узла вместо тихо неверного ответа.</a:t>
             </a:r>
           </a:p>
           <a:p/>
           <a:p>
             <a:r>
-              <a:t>Разница между этими двумя панелями и текстовым промптом версии один — не в количестве слов, а в том, где живёт смысл решения. В промпте правило растворено в естественном языке, и модель перечитывает и толкует его заново на каждом прогоне. Здесь правило — поле формы, которое либо заполнено верно, либо подсвечено ошибкой ещё до запуска. Остальная цепочка не изменилась: изменилось ровно то, что видно на этих двух панелях.</a:t>
+              <a:t>Эти две панели и текстовый промпт версии один различает не количество слов, а место, где живёт смысл решения. В промпте правило растворено в естественном языке, и модель перечитывает и толкует его заново на каждом прогоне. Здесь правило — поле формы, которое либо заполнено верно, либо подсвечено ошибкой ещё до запуска. Остальная цепочка не изменилась: изменилось ровно то, что видно на этих двух панелях.</a:t>
             </a:r>
           </a:p>
         </p:txBody>
@@ -3881,13 +3881,13 @@
           <a:lstStyle/>
           <a:p>
             <a:r>
-              <a:t>Прежде чем вернуться к сравнению версий, стоит на секунду встать на сторону клиента и посмотреть, что он видит, когда его заявка одобрена автоматически.</a:t>
+              <a:t>Прежде чем вернуться к сравнению версий — на секунду встанем на сторону клиента: что он видит, когда заявка одобрена автоматически.</a:t>
             </a:r>
           </a:p>
           <a:p/>
           <a:p>
             <a:r>
-              <a:t>Вспомним заявку со сцены: «прошу вернуть 2500 рублей за пропущенное занятие». Сумма ниже порога в три тысячи рублей, поэтому и версия один, и версия два одобрили бы её сами, без участия руководителя. Разница между версиями — в том, как внутри цепочки принимается это решение; для самого клиента её не видно вовсе.</a:t>
+              <a:t>Вспомним заявку со сцены: «прошу вернуть 2500 рублей за пропущенное занятие». Сумма ниже порога в три тысячи рублей, поэтому и версия один, и версия два одобрили бы её сами, без участия руководителя. Версии различает то, как внутри цепочки принимается это решение; для клиента разницы не видно вовсе.</a:t>
             </a:r>
           </a:p>
           <a:p/>
@@ -3899,19 +3899,19 @@
           <a:p/>
           <a:p>
             <a:r>
-              <a:t>Важно, чего в этом сообщении нет. В нём нет имени узла, который принял решение, нет слова «порог» или числа «три тысячи», нет внутреннего идентификатора заявки или исполнения цепочки — ничего из того, что мы только что разбирали на схеме и в настройке узла. Это та же граница, о которой курс говорит с самого начала: служебные детали живут в наших разборах и в документации производства, а на экране, который видит реальный человек, — только то, что ему нужно знать, чтобы понять: деньги уже у него.</a:t>
+              <a:t>А вот чего в этом сообщении нет. Нет имени узла, который принял решение; нет слова «порог» и числа «три тысячи»; нет внутреннего идентификатора заявки или прогона цепочки — ничего из того, что мы только что разбирали на схеме и в настройке узла. Это та же граница, о которой курс говорит с самого начала: служебные детали живут в наших разборах и в документации производства, а на экране, который видит реальный человек, — только то, что ему нужно знать, чтобы понять: деньги уже у него.</a:t>
             </a:r>
           </a:p>
           <a:p/>
           <a:p>
             <a:r>
-              <a:t>И это не особенность, привязанная именно к версии два. Если бы версия один, с её текстовым промптом, тоже решила одобрить эту заявку, клиент увидел бы ровно то же самое сообщение — потому что всё, что меняется между версиями, происходит до этого экрана, внутри цепочки, а не в интерфейсе, который видит клиент. Разница версий — это разница в надёжности самого решения, а не в том, что в итоге получает человек.</a:t>
+              <a:t>И к версии два это не привязано. Реши версия один, с её текстовым промптом, одобрить ту же заявку — клиент увидел бы ровно то же сообщение: всё, что меняется между версиями, происходит до этого экрана, внутри цепочки, а не в интерфейсе клиента. Версии различает надёжность самого решения, а не то, что в итоге получает человек.</a:t>
             </a:r>
           </a:p>
           <a:p/>
           <a:p>
             <a:r>
-              <a:t>Вопрос, который стоит держать в голове дальше: если бы сумма заявки случайно совпала с порогом в три тысячи рублей — а мы только что видели, где именно версия один раз за разом ошибалась, — пришло бы клиенту то же сообщение, или вместо него другое, про передачу заявки руководителю? Ответ на него — в сравнении, к которому мы сейчас и возвращаемся.</a:t>
+              <a:t>Вопрос на дальше: если бы сумма заявки случайно совпала с порогом в три тысячи рублей — а мы только что видели, где версия один раз за разом ошибалась, — пришло бы клиенту то же сообщение или другое, про передачу заявки руководителю? Ответ на него — в сравнении, к которому мы сейчас и возвращаемся.</a:t>
             </a:r>
           </a:p>
         </p:txBody>
@@ -3981,19 +3981,19 @@
           <a:lstStyle/>
           <a:p>
             <a:r>
-              <a:t>Вот итоговое сравнение, и важно, на чём оно построено: это не новый тест, собранный специально под версию два, чтобы она выглядела хорошо. Это тот же самый расширенный набор из ста одного запроса — пятьдесят один исходный, на котором мы впервые нашли проблему, и пятьдесят новых, сложнее первых, добавленных именно для того, чтобы проверить находку на более трудных формулировках. Версия два прогнана ровно на нём же.</a:t>
+              <a:t>Итоговое сравнение, и вся его сила в том, на чём оно построено. Это не новый тест, собранный под версию два, чтобы она выглядела хорошо, а тот же расширенный набор из ста одного запроса: пятьдесят один исходный, на котором мы впервые нашли проблему, и пятьдесят новых, сложнее первых, добавленных ради проверки находки на более трудных формулировках. Версия два прогнана ровно на нём же.</a:t>
             </a:r>
           </a:p>
           <a:p/>
           <a:p>
             <a:r>
-              <a:t>Первая строка — число ошибок. Версия один — девять из ста одного. Версия два — ноль. Не «меньше», а ноль на наборе, который включает плотный кластер сумм прямо у границы, суммы в двадцати рублях от неё с обеих сторон, тексты с двумя числами и формулировки, где сумма получается арифметикой, а не названа прямо, — то есть на наборе, который даёт ошибке максимум шансов проявиться, если она есть.</a:t>
+              <a:t>Первая строка — число ошибок. Версия один — девять из ста одного. Версия два — ноль. Не «меньше» — ноль. И ноль на наборе, который включает плотный кластер сумм у границы, суммы в двадцати рублях от неё с обеих сторон, тексты с двумя числами и формулировки, где сумма получается арифметикой, а не названа прямо: набор даёт ошибке максимум шансов проявиться, если она есть.</a:t>
             </a:r>
           </a:p>
           <a:p/>
           <a:p>
             <a:r>
-              <a:t>Вторая строка — то самое поведение на границе, из-за которого всё это затевалось. На сумме ровно три тысячи рублей — независимо от того, пришла она прямым числом или арифметикой внутри текста — версия один отвечала «эскалировать», хотя правило, если его прочитать внимательно, подразумевает, что саму эту сумму ещё можно одобрить. Версия два на той же сумме отвечает «одобрить», и причина не в том, что </a:t>
+              <a:t>Вторая строка — поведение на границе, из-за которого всё и затевалось. На сумме ровно три тысячи рублей — независимо от того, пришла она прямым числом или арифметикой внутри текста — версия один отвечала «эскалировать», хотя правило, если его прочитать внимательно, подразумевает, что саму эту сумму ещё можно одобрить. Версия два на той же сумме отвечает «одобрить», и вовсе не потому, что </a:t>
             </a:r>
             <a:r>
               <a:rPr>
@@ -4002,19 +4002,19 @@
               <a:t>IF</a:t>
             </a:r>
             <a:r>
-              <a:t>-узел «понял правило лучше». Причина в том, что условие «строго больше 3000» математически не допускает двойного толкования: число либо больше другого числа, либо нет.</a:t>
+              <a:t>-узел «понял правило лучше». Условие «строго больше 3000» математически не допускает двойного толкования: число либо больше другого числа, либо нет.</a:t>
             </a:r>
           </a:p>
           <a:p/>
           <a:p>
             <a:r>
-              <a:t>Третья строка — вне границы обе версии безупречны, и расширенный набор это подтвердил отдельно: ни суммы в двадцати рублях от порога, ни тексты с отвлекающим вторым числом не сбили версию один с толку. Она была плохой ровно в одной точке — и именно поэтому диагноз «систематическая ошибка на границе», а не «ненадёжная модель», был правильным диагнозом, а решение — точечной заменой одного узла, а не переписыванием всей цепочки.</a:t>
+              <a:t>Третья строка — вне границы обе версии безупречны, и расширенный набор это подтвердил отдельно: ни суммы в двадцати рублях от порога, ни тексты с отвлекающим вторым числом версию один с толку не сбили. Плоха она была ровно в одной точке. Поэтому и диагноз звучал «систематическая ошибка на границе», а не «ненадёжная модель», а лечение свелось к замене одного узла, не к переписыванию всей цепочки.</a:t>
             </a:r>
           </a:p>
           <a:p/>
           <a:p>
             <a:r>
-              <a:t>Это и есть форма, в которой положено сравнивать решения внутри кейса на этом курсе: не два мира, собранные параллельно для иллюстрации тезиса, а версия, построенная как прямой ответ на находку, и измеренная на том самом — теперь расширенном — тесте, который эту находку дал и подтвердил.</a:t>
+              <a:t>Так на этом курсе и положено сравнивать решения внутри кейса: версия строится прямым ответом на находку и измеряется на том самом — теперь расширенном — тесте, который эту находку дал и подтвердил. Не два мира, собранные параллельно ради иллюстрации тезиса.</a:t>
             </a:r>
           </a:p>
         </p:txBody>
@@ -4090,19 +4090,19 @@
           <a:p/>
           <a:p>
             <a:r>
-              <a:t>Правая колонка пустая, и это не недосмотр — это и есть план занятия. В каждой из этих четырёх историй есть что-то, что выглядывает наружу только при более внимательном взгляде: лишний шаг там, где он не нужен, повтор, который не узнали, вероятностное решение там, где нужно жёсткое условие, формат данных, который ведёт себя не так, как текст. Мы не называем это сейчас — мы его найдём и впишем в таблицу по ходу разбора каждого кейса.</a:t>
+              <a:t>Правая колонка пустая, и пустая она намеренно: это и есть план занятия. В каждой из этих четырёх историй есть что-то, что выглядывает наружу только со второго, более внимательного взгляда: лишний шаг там, где он не нужен, повтор, который не узнали, вероятностное решение там, где нужно жёсткое условие, формат данных, который ведёт себя не так, как текст. Мы не называем это сейчас — мы его найдём и впишем в таблицу по ходу разбора каждого кейса.</a:t>
             </a:r>
           </a:p>
           <a:p/>
           <a:p>
             <a:r>
-              <a:t>Четыре строки — это ровно четыре кейса сегодняшнего занятия: уведомления, проверка на повтор, одобрение возврата, картинка в Telegram. У каждого кейса в конце будет момент, где мы возвращаемся к этой самой таблице и вписываем ровно одну строку в правую колонку — не абстрактный вывод, а конкретное наблюдение с конкретного прогона, который мы только что видели своими глазами.</a:t>
+              <a:t>Четыре строки — это ровно четыре кейса сегодняшнего занятия: уведомления, проверка на повтор, одобрение возврата, картинка в Telegram. У каждого кейса в конце будет момент, где мы возвращаемся к этой самой таблице и вписываем ровно одну строку в правую колонку — конкретное наблюдение с конкретного прогона, который мы только что видели своими глазами.</a:t>
             </a:r>
           </a:p>
           <a:p/>
           <a:p>
             <a:r>
-              <a:t>Это не означает, что все четыре истории провальные с самого начала. Наоборот — каждая выглядит полностью рабочей, и в этом главная ловушка: то, что работает, легко спутать с тем, за что можно ручаться. Разница между этими двумя состояниями — то, что эта таблица и измеряет, строка за строкой, до самого конца занятия, когда мы увидим все четыре пары рядом и сможем сравнить их одним взглядом.</a:t>
+              <a:t>Это не означает, что все четыре истории провальные с самого начала. Наоборот — каждая выглядит полностью рабочей, и в этом вся ловушка: то, что работает, легко спутать с тем, за что можно ручаться. Разницу между этими двумя состояниями таблица и измеряет, строка за строкой, до самого конца занятия: там все четыре пары встанут рядом, и сравнить их можно будет одним взглядом.</a:t>
             </a:r>
           </a:p>
           <a:p/>
@@ -4178,37 +4178,37 @@
           <a:lstStyle/>
           <a:p>
             <a:r>
-              <a:t>Теперь обобщение — то, что должно остаться после того, как числа этого конкретного кейса забудутся.</a:t>
+              <a:t>Теперь обобщение — то, что останется, когда числа этого кейса забудутся.</a:t>
             </a:r>
           </a:p>
           <a:p/>
           <a:p>
             <a:r>
-              <a:t>Первое, на чём стоит задержаться: формулировка находки важна буквально, не приблизительно. Неправильно сказать «модель иногда вероятностно ошибается» — это слишком общо и ничего не говорит о том, где искать проблему в следующий раз. Точная формулировка другая: модель систематически промахивается именно на границе условия — там, где текст правила и его формальная интерпретация расходятся, а во всём остальном диапазоне она ведёт себя безупречно. Разница между «иногда ошибается» и «систематически промахивается на границе» — это разница между «нужно больше проверок везде» и «нужно проверить ровно одну точку».</a:t>
+              <a:t>Первое: формулировка находки важна буквально, не приблизительно. Сказать «модель иногда вероятностно ошибается» — слишком общо, и о том, где искать проблему в следующий раз, это не говорит ничего. Точная формулировка другая: модель систематически промахивается именно на границе условия — там, где текст правила и его формальное толкование расходятся, а во всём остальном диапазоне ведёт себя безупречно. Разница между «иногда ошибается» и «систематически промахивается на границе» — это разница между «нужно больше проверок везде» и «нужно проверить ровно одну точку».</a:t>
             </a:r>
           </a:p>
           <a:p/>
           <a:p>
             <a:r>
-              <a:t>Отсюда и класс задачи, который стоит унести с собой. Если решение можно выразить как условие над уже структурированным значением — число больше или меньше другого числа, дата раньше или позже другой даты, статус входит в список или не входит — такое решение не задача модели в точке принятия решения. Модель может оставаться нужной раньше в цепочке, там, где требуется разобрать свободный текст и достать из него значение. Но сам момент сравнения — это код, и только код.</a:t>
+              <a:t>Отсюда и класс задачи, который уносят с собой. Если решение выражается условием над уже структурированным значением — число больше или меньше другого числа, дата раньше или позже другой даты, статус входит в список или не входит, — такое решение не задача модели в точке принятия решения. Модель может оставаться нужной раньше в цепочке, там, где требуется разобрать свободный текст и достать из него значение. Но сам момент сравнения — это код, и только код.</a:t>
             </a:r>
           </a:p>
           <a:p/>
           <a:p>
             <a:r>
-              <a:t>И практический вывод, который работает за пределами возврата денег: граничные значения — это первое, что нужно проверить прогоном, прежде чем доверять любому похожему правилу, построенному на пороге. Не середину диапазона, где всё обычно хорошо, а именно границу — там, где формулировка правила и её трактовка расходятся чаще всего.</a:t>
+              <a:t>И практический вывод, который работает за пределами возврата денег: граничные значения проверяют прогоном первыми, прежде чем доверять любому правилу на пороге. Не середину диапазона, где обычно всё хорошо, а границу — там формулировка правила и её трактовка расходятся чаще всего.</a:t>
             </a:r>
           </a:p>
           <a:p/>
           <a:p>
             <a:r>
-              <a:t>Это тот же урок, который уже встречался в кейсе про уведомления и в кейсе про повторные обращения, только здесь он формулируется точнее благодаря измерению: не «проверяйте модель на крайних случаях вообще», а конкретно — на той точке, где человеческая формулировка правила и буквальное условие могут не совпасть. Такая точка есть у любого порога, который кто-то когда-то написал словами.</a:t>
+              <a:t>Тот же урок встречался в кейсе про уведомления и в кейсе про повторные обращения; здесь измерение дало ему точность: проверяйте не «крайние случаи» вообще, а ту точку, где человеческая формулировка правила и буквальное условие могут не совпасть. Такая точка есть у любого порога, который кто-то когда-то написал словами.</a:t>
             </a:r>
           </a:p>
           <a:p/>
           <a:p>
             <a:r>
-              <a:t>И ещё один штрих, который измерение добавило к этому обобщению. Переформулировка правила яснее — одно из четырёх разобранных действий — на практике полностью убрала именно эту ошибку: сто из ста на расширенном наборе. Это не противоречит выводу «решение должно быть кодом» — это уточняет его. Уточнённая формулировка — это измеренное улучшение КОНКРЕТНОГО промпта на КОНКРЕТНОМ наборе, а не структурная гарантия: ничто в архитектуре не исключает, что другая формулировка, другая модель или её будущее обновление разойдутся с правилом снова, просто в другом месте. </a:t>
+              <a:t>И ещё один штрих, который измерение добавило к обобщению. Переформулировка правила яснее — одно из четырёх разобранных действий — на практике убрала эту ошибку целиком: сто из ста на расширенном наборе. Выводу «решение должно быть кодом» это не противоречит, а уточняет его. Уточнённая формулировка — измеренное улучшение КОНКРЕТНОГО промпта на КОНКРЕТНОМ наборе, а не структурная гарантия: ничто в архитектуре не исключает, что другая формулировка, другая модель или её будущее обновление разойдутся с правилом снова, только в другом месте. </a:t>
             </a:r>
             <a:r>
               <a:rPr>
@@ -4287,13 +4287,13 @@
           <a:lstStyle/>
           <a:p>
             <a:r>
-              <a:t>Три нюанса, прежде чем уносить вывод кейса как абсолютное правило.</a:t>
+              <a:t>Три нюанса, прежде чем унести вывод кейса как абсолютное правило.</a:t>
             </a:r>
           </a:p>
           <a:p/>
           <a:p>
             <a:r>
-              <a:t>Первый — про калькулятор, который мы обсуждали среди четырёх карточек вопроса. Дать модели инструмент для сравнения чисел — это не то же самое, что поставить </a:t>
+              <a:t>Первый — про калькулятор, который мы обсуждали среди четырёх карточек вопроса. Дать модели инструмент для сравнения чисел и поставить </a:t>
             </a:r>
             <a:r>
               <a:rPr>
@@ -4302,7 +4302,7 @@
               <a:t>IF</a:t>
             </a:r>
             <a:r>
-              <a:t>-узел после извлечения. В прошлый раз мы это только утверждали: вероятностность не исчезает, она переезжает на шаг раньше, туда, где модель решает, вызывать ли калькулятор и как передать в него значения. В этот раз утверждение проверено настоящим прогоном — собрали агента с настоящим инструментом-калькулятором и прогнали его на той же сотне запросов. Результат оказался не просто «не гарантией», а измеримо хуже всех остальных вариантов: пятьдесят шесть правильных ответов из ста. И нашлись отказы, которых никто не закладывал специально: встроенный калькулятор n8n не умеет сравнивать числа, только считать арифметику, и в одном случае из девяти честно отвечал «не знаю, как это сделать»; треть ответов агента вообще не свелась к чистому слову «одобрить» или «эскалировать»; и почти десятая часть ошибок рассыпалась по всему диапазону сумм, а не сидела аккуратно на границе, как у версии один. Инструмент у модели — не гарантия, а перенос проблемы, и теперь это не только довод, но и число.</a:t>
+              <a:t>-узел после извлечения — вещи разные. В прошлый раз мы это только утверждали: вероятностность не исчезает, она переезжает на шаг раньше, туда, где модель решает, вызывать ли калькулятор и как передать в него значения. Теперь утверждение проверено прогоном — собрали агента с настоящим инструментом-калькулятором и прогнали его на той же сотне запросов. Результат вышел не только «не гарантией», а измеримо худшим из всех вариантов: пятьдесят шесть правильных ответов из ста. И нашлись отказы, которых никто не закладывал специально: встроенный калькулятор n8n не умеет сравнивать числа, только считать арифметику, и в одном случае из девяти честно отвечал «не знаю, как это сделать»; треть ответов агента не свелась к чистому слову «одобрить» или «эскалировать»; почти десятая часть ошибок рассыпалась по всему диапазону сумм, а не сидела аккуратно на границе, как у версии один. Инструмент у модели проблему не снимает, а переносит, и теперь за этим стоит не только довод, но и число.</a:t>
             </a:r>
           </a:p>
           <a:p/>
@@ -4317,13 +4317,13 @@
               <a:t>IF</a:t>
             </a:r>
             <a:r>
-              <a:t>-узла версии два. Если когда-нибудь порог изменится — скажем, на три тысячи пятьсот — и кто-то поправит его в одном месте, забыв про другое, получится ровно та же проблема, что с контрактом между шагами, который мы уже разбирали в прошлых кейсах этой дуги: два места, которые должны совпадать, но ничто не гарантирует, что совпадают. Порог обязан иметь ровно один источник правды.</a:t>
+              <a:t>-узла версии два. Изменится когда-нибудь порог — скажем, на три тысячи пятьсот, — и кто-то поправит его в одном месте, забыв про другое: получится ровно та же проблема, что с контрактом между шагами, который мы разбирали в прошлых кейсах этой дуги. Два места, которые должны совпадать, и ничего, что бы это гарантировало. Порог обязан иметь ровно один источник правды.</a:t>
             </a:r>
           </a:p>
           <a:p/>
           <a:p>
             <a:r>
-              <a:t>Третий, и он прямо отвечает на карточку вопроса про явное числовое поле формы. Модель, которая извлекает сумму из свободного текста, всё ещё может ошибиться: прочитать не ту цифру, перепутать сумму из одного предложения с суммой из другого. Вывод этого кейса — не «модель нигде не нужна в этом процессе», а точнее: «модель не должна быть точкой, где принимается решение». Если форму запроса можно изменить, явное числовое поле убирает и риск неверного извлечения — сумма приходит уже структурированной, и достраивать её из текста не нужно вовсе. Но если источник — письмо или чат, а не форма, которую мы контролируем, извлечение остаётся задачей модели, и его собственная точность — отдельный вопрос, не закрытый этим решением.</a:t>
+              <a:t>Третий отвечает прямо на карточку вопроса про явное числовое поле формы. Модель, которая извлекает сумму из свободного текста, всё ещё может ошибиться: прочитать не ту цифру, перепутать сумму из одного предложения с суммой из другого. Вывод кейса не «модель нигде не нужна в этом процессе», а точнее: «модель не должна быть точкой, где принимается решение». Если форму запроса можно изменить, явное числовое поле убирает и риск неверного извлечения — сумма приходит уже структурированной, и достраивать её из текста не нужно вовсе. Но если источник — письмо или чат, а не форма, которую мы контролируем, извлечение остаётся задачей модели, и его собственная точность — отдельный вопрос, не закрытый этим решением.</a:t>
             </a:r>
           </a:p>
         </p:txBody>
@@ -4393,25 +4393,25 @@
           <a:lstStyle/>
           <a:p>
             <a:r>
-              <a:t>Критерий, с которым можно унести этот кейс в свою собственную работу, не помня ни одной цифры и ни одного имени узла.</a:t>
+              <a:t>Критерий, с которым этот кейс уносят в свою работу, не помня ни одной цифры и ни одного имени узла.</a:t>
             </a:r>
           </a:p>
           <a:p/>
           <a:p>
             <a:r>
-              <a:t>Решение обязано быть кодом тогда, когда его можно сформулировать как условие над уже структурированным значением: число больше или меньше порога, дата раньше или позже определённой отметки, статус входит в заранее известный список или нет. Если условие можно записать на бумаге без единого слова неоднозначности — ему не место в тексте, который модель должна понимать и трактовать. Ему место в коде, где у сравнения нет пространства для двух прочтений.</a:t>
+              <a:t>Решение обязано быть кодом тогда, когда его можно сформулировать как условие над уже структурированным значением: число больше или меньше порога, дата раньше или позже определённой отметки, статус входит в заранее известный список или нет. Если условие записывается на бумаге без единого слова неоднозначности — ему не место в тексте, который модель должна понимать и трактовать. Ему место в коде, где у сравнения нет пространства для двух прочтений.</a:t>
             </a:r>
           </a:p>
           <a:p/>
           <a:p>
             <a:r>
-              <a:t>И есть более сильная версия того же критерия, на шаг раньше по цепочке: ещё лучше, если получится, — устранить саму потребность в извлечении значения вообще. Если источник данных можно сделать структурированным с самого начала, как это может быть с формой заявки, сравнение становится простым не потому, что мы научили код сравнивать числа — он и так это умел, — а потому что перестаёт существовать сам момент, где из свободного текста нужно что-то доставать.</a:t>
+              <a:t>И есть более сильная версия того же критерия, на шаг раньше по цепочке: если получится — устранить саму потребность в извлечении значения. Если источник данных можно сделать структурированным с самого начала, как это может быть с формой заявки, сравнение становится простым не потому, что мы научили код сравнивать числа — он и так это умел, — а потому что перестаёт существовать сам момент, где из свободного текста нужно что-то доставать.</a:t>
             </a:r>
           </a:p>
           <a:p/>
           <a:p>
             <a:r>
-              <a:t>Теперь — закрытие оси этого занятия применительно к третьему кейсу. Ось спрашивает: где в цепочке решение принимает модель, а где должен — код, и что молчит, когда эту границу не назвали явно. Здесь ответ конкретный и измеренный, не общий: решение, оставленное модели, обходило собственное правило в измеренной доле прогонов — девять из ста одного на расширенном наборе, и ровно в одной точке, на границе условия, не где попало. Решение, отданное алгоритмическому гейту на том же самом тесте, — ноль из ста одного, то есть никогда. Разница между «измеримо редко» и «никогда» — это и есть вся дистанция между решением, которое доверяют модели, и решением, которое доверяют коду, применительно к пороговым условиям.</a:t>
+              <a:t>Теперь — закрытие оси этого занятия применительно к третьему кейсу. Ось спрашивает: где в цепочке решение принимает модель, а где должен — код, и что молчит, когда эту границу не назвали явно. Здесь ответ измеренный, не общий: решение, оставленное модели, обходило собственное правило в измеренной доле прогонов — девять из ста одного на расширенном наборе, и ровно в одной точке, на границе условия, не где попало. Решение, отданное алгоритмическому гейту на том же самом тесте, — ноль из ста одного, то есть никогда. Разница между «измеримо редко» и «никогда» — это и есть вся дистанция между решением, которое доверяют модели, и решением, которое доверяют коду, применительно к пороговым условиям.</a:t>
             </a:r>
           </a:p>
         </p:txBody>
@@ -4487,7 +4487,7 @@
           <a:p/>
           <a:p>
             <a:r>
-              <a:t>Zillow — крупнейший агрегатор объявлений о недвижимости в США, и с 2018 года у компании было отдельное направление Zillow Offers, второе название — iBuying. Работало оно просто: алгоритмическая модель Zestimate оценивала дом по открытым данным, компания покупала дом почти мгновенно по этой цене, делала минимальный ремонт и быстро перепродавала, зарабатывая на разнице между покупкой и продажей. Схема работала, пока рынок жилья вёл себя так, как закладывала модель на исторических данных.</a:t>
+              <a:t>Zillow — крупнейший агрегатор объявлений о недвижимости в США, и с 2018 года у компании было отдельное направление Zillow Offers, второе название — iBuying. Работало оно просто. Алгоритмическая модель Zestimate оценивала дом по открытым данным; компания покупала дом по этой цене почти мгновенно, делала минимальный ремонт и быстро перепродавала, зарабатывая на разнице. Схема работала, пока рынок жилья вёл себя так, как закладывала модель на исторических данных.</a:t>
             </a:r>
           </a:p>
           <a:p/>
@@ -4499,13 +4499,13 @@
           <a:p/>
           <a:p>
             <a:r>
-              <a:t>Мы ставим этот разбор сразу после «Одобрения возврата» не случайно. Там правило о пороге суммы возврата жило в тексте промпта, а не в условии кода, и модель обходила его в измеренной доле прогонов — ровно на границе условия. У Zillow форма пропуска была той же самой: порог риска, выше которого стоило бы остановить автоматическую покупку или передать решение человеку, существовал не как обязательное условие в контуре, а как ожидание, что модель справится, потому что справлялась раньше. Разница — только в масштабе: там это один разговор с клиентом, здесь — покупка дома за реальные деньги, и таких решений принимались тысячи подряд.</a:t>
+              <a:t>Этот разбор стоит сразу после «Одобрения возврата» не случайно. Там правило о пороге суммы возврата жило в тексте промпта, а не в условии кода, и модель обходила его в измеренной доле прогонов — ровно на границе условия. У Zillow форма пропуска была та же. Порог риска, выше которого стоило бы остановить автоматическую покупку или передать решение человеку, существовал не обязательным условием в контуре, а ожиданием, что модель справится, — ведь справлялась раньше. Разница только в масштабе: там это один разговор с клиентом, здесь — покупка дома за настоящие деньги, и таких решений принимали тысячи подряд.</a:t>
             </a:r>
           </a:p>
           <a:p/>
           <a:p>
             <a:r>
-              <a:t>На следующем экране — схема того, как этот контур был устроен на самом деле: без обязательного гейта и без короткого интервала проверки. А вопрос, который мы зададим после неё, не о том, можно ли было предсказать волатильность рынка заранее. Он о том, чего не хватало в самом контуре принятия решения.</a:t>
+              <a:t>На следующем экране — схема того, как этот контур был устроен на самом деле: без обязательного гейта и без короткого интервала проверки. А вопрос после неё будет не про то, можно ли было предсказать волатильность рынка заранее, — а про то, чего не хватало в самом контуре принятия решения.</a:t>
             </a:r>
           </a:p>
         </p:txBody>
@@ -4575,31 +4575,31 @@
           <a:lstStyle/>
           <a:p>
             <a:r>
-              <a:t>Схема на экране — тот же приём, которым мы уже сравнивали устройство решения в кейсе «Уведомления»: там одна полоса показывала цепочку с LLM-узлом, другая — без него. Здесь одна полоса показывает, как контур решения о покупке дома был устроен у Zillow на самом деле.</a:t>
+              <a:t>Схема на экране — тот же приём, которым мы уже сравнивали устройство решения в кейсе «Уведомления»: там одна полоса показывала цепочку с LLM-узлом, другая — без него. Здесь полоса одна, и на ней — как контур решения о покупке дома был устроен у Zillow.</a:t>
             </a:r>
           </a:p>
           <a:p/>
           <a:p>
             <a:r>
-              <a:t>Первый шаг — алгоритмическая оценка Zestimate: модель называет цену дома по открытым данным. Второй шаг — решение о покупке, и здесь первый пропуск: решение принималось без обязательного гейта выше определённого порога риска. Любая оценка, независимо от того, насколько она удалена от разумного диапазона, двигалась дальше по контуру без обязательной остановки.</a:t>
+              <a:t>Первый шаг — алгоритмическая оценка Zestimate: модель называет цену дома по открытым данным. Второй шаг — решение о покупке, и здесь первый пропуск: обязательного гейта выше определённого порога риска не стояло. Любая оценка, как далеко ни уходи она от разумного диапазона, двигалась дальше по контуру без остановки.</a:t>
             </a:r>
           </a:p>
           <a:p/>
           <a:p>
             <a:r>
-              <a:t>Третий шаг — покупка исполняется: деньги уходят, дом становится активом компании. И здесь второй пропуск, более дорогой: после покупки не было короткого периода мониторинга точности — часов или дней, за которые можно было бы заметить, что фактическая цена перепродажи систематически расходится с прогнозом. Такого периода не было вовсе.</a:t>
+              <a:t>Третий шаг — покупка исполняется: деньги уходят, дом становится активом компании. И здесь второй пропуск, дороже первого: после покупки не было короткого периода мониторинга точности — часов или дней, за которые заметишь, что фактическая цена перепродажи систематически расходится с прогнозом. Такого периода не было вовсе.</a:t>
             </a:r>
           </a:p>
           <a:p/>
           <a:p>
             <a:r>
-              <a:t>Из-за этого ошибка не обнаруживалась сразу — она накапливалась незаметно, покупка за покупкой, квартал за кварталом. Единственной точкой, где она становилась видимой, была квартальная отчётность перед SEC — то есть исторический архив, который подтверждает, что случилось, а не период контроля, который мог бы это остановить.</a:t>
+              <a:t>Из-за этого ошибка не обнаруживалась сразу — она накапливалась незаметно, покупка за покупкой, квартал за кварталом. Видимой она становилась в одной точке — в квартальной отчётности перед SEC. А это исторический архив, который подтверждает, что случилось, а не период контроля, который мог бы это остановить.</a:t>
             </a:r>
           </a:p>
           <a:p/>
           <a:p>
             <a:r>
-              <a:t>Разница между архивом и периодом контроля — не стилистическая тонкость. Архив говорит правду только после того, как цена ошибки уже реализовалась. Период контроля мог бы остановить закупку по сегменту, пока убыток ещё маленький. У Zillow был только архив.</a:t>
+              <a:t>Архив и период контроля различает не стилистическая тонкость. Архив говорит правду, когда цена ошибки уже реализовалась. Период контроля мог бы остановить закупку по сегменту, пока убыток ещё маленький. У Zillow был только архив.</a:t>
             </a:r>
           </a:p>
           <a:p/>
@@ -4611,7 +4611,7 @@
           <a:p/>
           <a:p>
             <a:r>
-              <a:t>Обратите внимание, что ни один из пяти шагов на этой схеме сам по себе не выглядит ошибкой. Оценка по открытым данным — обычная практика. Покупка по расчётной цене — обычная практика. Минимальный ремонт и быстрая перепродажа — тоже обычная практика. Ошибка не в одном шаге, а в том, что между шагами нет точки, где процесс мог бы остановиться и спросить «а точно ли эта оценка надёжна именно сейчас». Ровно это отсутствие точки остановки мы и будем искать в следующем разборе.</a:t>
+              <a:t>Ни один из пяти шагов на этой схеме сам по себе не выглядит ошибкой. Оценка по открытым данным — обычная практика. Покупка по расчётной цене — обычная практика. Минимальный ремонт и быстрая перепродажа — тоже обычная практика. Ошибка не в одном шаге: между шагами нет точки, где процесс мог бы остановиться и спросить, надёжна ли эта оценка сейчас. Эту пропавшую точку остановки мы и будем искать в следующем разборе.</a:t>
             </a:r>
           </a:p>
         </p:txBody>
@@ -4681,13 +4681,13 @@
           <a:lstStyle/>
           <a:p>
             <a:r>
-              <a:t>Мы только что увидели схему: оценка, покупка без обязательного гейта, ошибка видна только из квартального отчёта. Вопрос — что в этом контуре должно было стоять и не стояло.</a:t>
+              <a:t>Мы только что увидели схему: оценка, покупка без обязательного гейта, ошибка видна только из квартального отчёта. Вопрос: что в этом контуре должно было стоять и не стояло.</a:t>
             </a:r>
           </a:p>
           <a:p/>
           <a:p>
             <a:r>
-              <a:t>Zillow Offers покупала дома по алгоритмической оценке и перепродавала их. Модель оценивала цену, решение о покупке принималось почти автоматически, и так — тысячи раз подряд, пока рынок вёл себя привычно. Когда рынок жилья в 2021 году повёл себя волатильнее, чем закладывала история, частота ошибки модели выросла резко, а контур решения этого не поймал вовремя.</a:t>
+              <a:t>Zillow Offers покупала дома по алгоритмической оценке и перепродавала их. Модель оценивала цену, решение о покупке принимали почти автоматически — и так тысячи раз подряд, пока рынок вёл себя привычно. В 2021 году рынок жилья повёл себя волатильнее, чем закладывала история: частота ошибки модели выросла резко, а контур решения этого вовремя не поймал.</a:t>
             </a:r>
           </a:p>
           <a:p/>
@@ -4705,7 +4705,7 @@
           <a:p/>
           <a:p>
             <a:r>
-              <a:t>Обратите внимание, что все четыре карточки звучат как разумные инженерные шаги, и это сделано намеренно: вопрос не в том, чтобы отличить нелепый вариант от серьёзных трёх, а в том, чтобы понять, какой из них на самом деле меняет контур решения, а какой только меняет формулировку того, что уже было. Удерживайтесь от того, чтобы угадывать по формулировке, какой вариант тут «лишний».</a:t>
+              <a:t>Все четыре карточки звучат разумными инженерными шагами, и звучат так намеренно: нелепый вариант отличать от трёх серьёзных не придётся. Придётся понять, какой из четырёх меняет контур решения, а какой меняет лишь формулировку того, что уже было. И не угадывайте по формулировке, какой вариант тут «лишний».</a:t>
             </a:r>
           </a:p>
           <a:p/>
@@ -4717,7 +4717,7 @@
           <a:p/>
           <a:p>
             <a:r>
-              <a:t>И ещё одно соображение, прежде чем голосовать. Все четыре варианта стоят на одной схеме, которую мы только что видели: оценка, покупка, исполнение, отсутствие интервала проверки, квартальный отчёт. Подумайте не абстрактно «что из этого звучит разумно», а конкретно — какой из четырёх вариантов добавил бы на эту схему новый узел или новую точку остановки, а какой просто переформулировал бы то, что на ней уже нарисовано.</a:t>
+              <a:t>И ещё одно соображение, прежде чем голосовать. Все четыре варианта стоят на одной схеме, которую мы только что видели: оценка, покупка, исполнение, отсутствие интервала проверки, квартальный отчёт. Думайте не про то, что звучит разумно, а про то, какой из четырёх добавил бы на эту схему новый узел или новую точку остановки, а какой переформулировал бы уже нарисованное.</a:t>
             </a:r>
           </a:p>
         </p:txBody>
@@ -4793,31 +4793,31 @@
           <a:p/>
           <a:p>
             <a:r>
-              <a:t>Откалибровать модель точнее — первое, что приходит в голову, и первое, что не было причиной. Модель Zestimate была откалибрована корректно на исторически стабильных данных: до пандемии её ошибка на срок владения в несколько месяцев была в пределах, которые компания считала рабочими. Виновата не калибровка — виновата сама волатильность рынка, которой не было в обучающей истории.</a:t>
+              <a:t>Откалибровать модель точнее — первое, что приходит в голову, и первое, что причиной не было. Модель Zestimate была откалибрована корректно на исторически стабильных данных: до пандемии её ошибка на срок владения в несколько месяцев держалась в пределах, которые компания считала рабочими. Виновата здесь волатильность рынка, которой не было в обучающей истории, а не калибровка.</a:t>
             </a:r>
           </a:p>
           <a:p/>
           <a:p>
             <a:r>
-              <a:t>Runtime-мониторинг дрейфа с автоматическим порогом остановки — вот то, чего на самом деле не хватало. У продакшен-модели, управляющей закупкой недвижимости на сотни миллионов долларов, не было короткого периода наблюдения за собственной частотой ошибки — часы или дни, которые ловят резкий скачок, пока убыток ещё маленький. Единственным контролем оставалась квартальная отчётность перед SEC — то есть исторический архив, а не период, в котором можно остановиться.</a:t>
+              <a:t>Не хватало как раз второго — runtime-мониторинга дрейфа с автоматическим порогом остановки, того самого наблюдения за моделью в реальном времени. У рабочей модели, управлявшей закупкой недвижимости на сотни миллионов долларов, не было короткого периода наблюдения за собственной частотой ошибки — часов или дней, которые ловят резкий скачок, пока убыток ещё маленький. Единственным контролем оставалась квартальная отчётность перед SEC — то есть исторический архив, а не период, в котором можно остановиться.</a:t>
             </a:r>
           </a:p>
           <a:p/>
           <a:p>
             <a:r>
-              <a:t>Привязать решение выше порога риска к человеку-андеррайтеру — вторая часть того же пробела. Решение о покупке дома выше определённой суммы риска не было структурно привязано ни к одному конкретному человеку: алгоритм решал сам, вне зависимости от размера ставки. Ровно та же форма пропуска, что мы только что разбирали в «Одобрении возврата» — там порог суммы возврата был, но не был алгоритмическим гейтом.</a:t>
+              <a:t>Привязать решение выше порога риска к человеку-андеррайтеру — вторая часть того же пробела. Решение о покупке дома выше определённой суммы риска не было структурно привязано ни к одному конкретному человеку: алгоритм решал сам, независимо от размера ставки. Ровно та же форма пропуска, что мы только что разбирали в «Одобрении возврата»: порог суммы возврата там был, алгоритмическим гейтом не стал.</a:t>
             </a:r>
           </a:p>
           <a:p/>
           <a:p>
             <a:r>
-              <a:t>Заранее знать, что рынок поведёт себя непредсказуемо, — не инженерное решение вовсе, а пожелание. Пандемийная волатильность — реальный внешний фактор, но не точка, в которой инженер может что-то изменить.</a:t>
+              <a:t>Заранее знать, что рынок поведёт себя непредсказуемо, — пожелание, а не инженерное решение. Пандемийная волатильность — настоящий внешний фактор, но не та точка, в которой инженер может что-то изменить.</a:t>
             </a:r>
           </a:p>
           <a:p/>
           <a:p>
             <a:r>
-              <a:t>Решающее здесь то, что модель не подвела — подвёл контур вокруг неё: не было ни короткого периода контроля, ни структурной привязки крупных решений к человеку. Решение, управляющее сотнями миллионов долларов, оставалось вероятностным там, где давно стоило стать гейтированным. На следующем экране — схема того же контура, но с гейтом.</a:t>
+              <a:t>Решает здесь вот что: модель не подвела — подвёл контур вокруг неё. Не было ни короткого периода контроля, ни структурной привязки крупных решений к человеку. Решение, управляющее сотнями миллионов долларов, оставалось вероятностным там, где давно стоило стать гейтированным. На следующем экране — схема того же контура, но с гейтом.</a:t>
             </a:r>
           </a:p>
         </p:txBody>
@@ -4887,25 +4887,25 @@
           <a:lstStyle/>
           <a:p>
             <a:r>
-              <a:t>Демо здесь не будет — это не наш стенд, а чужая, остановленная система. Но архитектурное решение называется так же прямо, как в любом нашем кейсе, и схема на экране — та же полоса, что мы рисовали без гейта, только с двумя добавленными узлами.</a:t>
+              <a:t>Показа на стенде здесь не будет: система чужая и остановленная. Но архитектурное решение называется так же прямо, как в любом нашем кейсе, и схема на экране — та же полоса, что мы рисовали без гейта, только с двумя добавленными узлами.</a:t>
             </a:r>
           </a:p>
           <a:p/>
           <a:p>
             <a:r>
-              <a:t>Архитектурная альтернатива состоит из двух частей, и обе работают вместе, не по отдельности. Первая: алгоритмическая оценка остаётся входом в решение, но не самим решением — покупка дома выше определённого порога суммы риска требует финального решения человека-андеррайтера, именно в точке принятия решения, а не постфактум. Вторая: явный circuit breaker на превышение порога отклонения фактической цены продажи от прогнозной — проверяемый еженедельно или чаще, а не поквартально. Как только фактическое отклонение превышает порог, автоматическая закупка по этому сегменту останавливается до ручной проверки, а не продолжается в ожидании следующего отчёта.</a:t>
+              <a:t>Архитектурная альтернатива состоит из двух частей, и обе работают вместе, не по отдельности. Первая: алгоритмическая оценка остаётся входом в решение, но не самим решением — покупка дома выше определённого порога суммы риска требует финального решения человека-андеррайтера, именно в точке принятия решения, а не постфактум. Вторая: явный circuit breaker на превышение порога отклонения фактической цены продажи от прогнозной — проверяемый еженедельно или чаще, а не поквартально. Как только отклонение переходит порог, автоматическая закупка по этому сегменту встаёт до ручной проверки, а не ждёт следующего отчёта.</a:t>
             </a:r>
           </a:p>
           <a:p/>
           <a:p>
             <a:r>
-              <a:t>Это тот же приём, что мы уже видели в «Одобрении возврата»: решение заменяется детерминированным условием там, где его можно выразить как условие над структурированным значением — суммой риска, отклонением цены. Разница — в масштабе условия и в масштабе цены, если условие не поставить. В учебном центре гейтом была одна сумма возврата. У Zillow гейтом была каждая покупка дома, а ценой пропуска — не неловкий разговор с клиентом, а реализованный убыток в сотни миллионов долларов.</a:t>
+              <a:t>Тот же приём мы уже видели в «Одобрении возврата»: решение заменяют детерминированным условием там, где оно выражается условием над структурированным значением — суммой риска, отклонением цены. Различаются масштаб условия и масштаб цены, если условие не поставить. В учебном центре гейтом была одна сумма возврата. У Zillow гейтом была каждая покупка дома, а ценой пропуска — не неловкий разговор с клиентом, а реализованный убыток в сотни миллионов долларов.</a:t>
             </a:r>
           </a:p>
           <a:p/>
           <a:p>
             <a:r>
-              <a:t>Важно, что ни одна из двух частей решения не работает сама по себе без другой. Человек-андеррайтер без circuit breaker всё равно узнаёт о проблеме только из отчётности, если никто не поручил ему проверять отклонение прогноза от факта регулярно. Circuit breaker без человека на решениях с крупной ставкой остановит процесс, но не объяснит, что делать с уже начатыми покупками. Обе части вместе и дают то, чего не хватало в контуре: быстрое обнаружение отклонения и человека, который берёт на себя решение, когда отклонение подтвердилось.</a:t>
+              <a:t>Ни одна из двух частей решения не работает без другой. Человек-андеррайтер без circuit breaker узнаёт о проблеме всё равно из отчётности, если никто не поручил ему проверять отклонение прогноза от факта регулярно. Circuit breaker без человека на решениях с крупной ставкой остановит процесс, но не объяснит, что делать с уже начатыми покупками. Обе части вместе и дают то, чего не хватало в контуре: быстрое обнаружение отклонения и человека, который берёт на себя решение, когда отклонение подтвердилось.</a:t>
             </a:r>
           </a:p>
         </p:txBody>
@@ -4981,13 +4981,13 @@
           <a:p/>
           <a:p>
             <a:r>
-              <a:t>Снижать объём автоматизированных решений нужно, когда цена одной ошибки модели измеряется десятками или сотнями тысяч долларов реального капитала — не абстрактной метрики, а денег, которые компания платит буквально. У Zillow одна ошибка — это дом, купленный по неверной цене, а не точка на графике.</a:t>
+              <a:t>Снижать объём автоматизированных решений нужно, когда цена одной ошибки модели измеряется десятками или сотнями тысяч долларов настоящего капитала — не абстрактной метрики, а денег, которые компания платит буквально. У Zillow одна ошибка — дом, купленный по неверной цене, а не точка на графике.</a:t>
             </a:r>
           </a:p>
           <a:p/>
           <a:p>
             <a:r>
-              <a:t>Снижать — когда внешние условия показывают растущую волатильность относительно того режима, на котором модель обучена. Пандемийный рынок жилья 2020–2021 годов не был похож на рынок, на истории которого калибровалась модель, и именно это расхождение режимов, а не сама модель, стало источником ошибки.</a:t>
+              <a:t>Снижать — когда внешние условия показывают растущую волатильность относительно того режима, на котором модель обучена. Пандемийный рынок жилья 2020–2021 годов не был похож на рынок, на истории которого калибровалась модель, и источником ошибки стало это расхождение режимов, а не сама модель.</a:t>
             </a:r>
           </a:p>
           <a:p/>
@@ -5011,7 +5011,7 @@
           <a:p/>
           <a:p>
             <a:r>
-              <a:t>И последнее, ради чего мы поставили этот разбавитель именно здесь. Мысль та же, что мы уже разобрали на «Одобрении возврата», просто в другом масштабе. Там гейтом было решение по одной заявке на возврат, а ценой ошибки — неловкий разговор с клиентом. У Zillow гейтом стала каждая покупка дома, а ценой пропущенного порога — реализованный убыток в сотни миллионов долларов и примерно четверть всего штата компании. Порог существовал в обоих случаях. Алгоритмическим гейтом он не стал ни там, ни там — пока кто-то не проверил это прогоном или отчётом перед SEC.</a:t>
+              <a:t>И последнее, ради чего этот разбавитель стоит здесь. Мысль та же, что мы уже разобрали на «Одобрении возврата», только в другом масштабе. Там гейтом было решение по одной заявке на возврат, а ценой ошибки — неловкий разговор с клиентом. У Zillow гейтом стала каждая покупка дома, а ценой пропущенного порога — реализованный убыток в сотни миллионов долларов и примерно четверть всего штата компании. Порог существовал в обоих случаях. Алгоритмическим гейтом он не стал ни там, ни там — пока кто-то не проверил это прогоном или отчётом перед SEC.</a:t>
             </a:r>
           </a:p>
         </p:txBody>
@@ -5093,25 +5093,25 @@
           <a:p/>
           <a:p>
             <a:r>
-              <a:t>Оба утверждения правдивы одновременно, и именно в этом суть кейса: не в том, что что-то сломалось явно и заметно, а в том, что всё, чем мы умеем проверять процесс после трёх предыдущих кейсов, сказало «успех» — а результата у получателя нет. Три предыдущих кейса занятия учили нас ловить отказ модели, повторное обращение и ошибку на границе условия. Ни один из этих трёх приёмов здесь не сработал бы: узел не отказал, повтором тут нечего ловить, а условие вообще ни при чём — весь путь прошёл формально безупречно.</a:t>
+              <a:t>Оба утверждения правдивы одновременно, и в этом суть кейса. Явно и заметно не сломалось ничего: всё, чем мы умеем проверять процесс после трёх предыдущих кейсов, сказало «успех» — а результата у получателя нет. Три предыдущих кейса занятия учили нас ловить отказ модели, повторное обращение и ошибку на границе условия. Ни один из этих трёх приёмов здесь не сработал бы: узел не отказал, повтором тут нечего ловить, условие ни при чём — весь путь прошёл формально безупречно.</a:t>
             </a:r>
           </a:p>
           <a:p/>
           <a:p>
             <a:r>
-              <a:t>Саму потребность маркетинга, из-за которой появилась первая версия цепочки, назовём на следующем экране вместе со всей хронологией: что попросили, что собрали, на чём именно всё сломалось. Здесь, на этом экране, достаточно одного факта — противоречия, с которого начался разбор.</a:t>
+              <a:t>Потребность маркетинга, из-за которой появилась первая версия цепочки, назовём на следующем экране вместе со всей хронологией: что попросили, что собрали, на чём именно всё сломалось. Здесь, на этом экране, достаточно одного факта — противоречия, с которого начался разбор.</a:t>
             </a:r>
           </a:p>
           <a:p/>
           <a:p>
             <a:r>
-              <a:t>Для масштаба: три предыдущих кейса этого занятия добавили в сценарий учебного центра шаблон вместо модели, проверку на повтор и условие вместо текстового правила — три самостоятельных решения, и каждое из них начиналось с жалобы или с измеренной ошибки, которую было видно сразу. Четвёртый кейс начинается иначе: видимых признаков отказа нет вовсе, пока кто-то не сверит журнал прогона с тем, что реально произошло у получателя.</a:t>
+              <a:t>Для масштаба: три предыдущих кейса этого занятия добавили в сценарий учебного центра шаблон вместо модели, проверку на повтор и условие вместо текстового правила — три самостоятельных решения, и каждое из них начиналось с жалобы или с измеренной ошибки, которую было видно сразу. Четвёртый кейс начинается иначе: видимых признаков отказа нет вовсе, пока кто-нибудь не сверит журнал прогона с тем, что произошло у получателя.</a:t>
             </a:r>
           </a:p>
           <a:p/>
           <a:p>
             <a:r>
-              <a:t>Разберём, что здесь произошло на самом деле, почему ни один из прежних приёмов этого не поймал, и что с этим делать дальше. Держите в голове одну вещь на весь кейс: всё, чем мы сегодня научились проверять работу цепочки, здесь сказало «успех» — и ошиблось.</a:t>
+              <a:t>Разберём по порядку, что здесь произошло, почему ни один из прежних приёмов этого не поймал и что с этим делать дальше. Держите в голове одно на весь кейс: всё, чем мы сегодня научились проверять работу цепочки, здесь сказало «успех» — и ошиблось.</a:t>
             </a:r>
           </a:p>
         </p:txBody>
@@ -5193,19 +5193,19 @@
           <a:p/>
           <a:p>
             <a:r>
-              <a:t>Именно здесь кейс и начинается: как именно собрать текст из трёх уже известных значений — это и есть сегодняшний вопрос, не очевидный на первый взгляд. Дальше — живая сцена её рабочего дня, что было сделано первой попыткой, и чуть позже, на настоящих прогонах, — что эта попытка показала на практике.</a:t>
+              <a:t>Здесь кейс и начинается: как именно собрать текст из трёх уже известных значений — это и есть сегодняшний вопрос, не очевидный на первый взгляд. Дальше — живая сцена её рабочего дня, что было сделано первой попыткой, и чуть позже, на настоящих прогонах, — что эта попытка показала на практике.</a:t>
             </a:r>
           </a:p>
           <a:p/>
           <a:p>
             <a:r>
-              <a:t>Обратите внимание на то, о чём Ольга НЕ просила. Она не просила «сделать уведомление умным» или «пусть модель решит, что писать». Она описала результат, который хочет видеть у себя в телефоне, — одну строку, по которой сразу понятно, кто написал и зачем. Как именно цепочка до этой строки дойдёт — её не касается вовсе, и это важно держать в голове: весь кейс дальше будет про то, что разные команды инженеров на этом самом месте выбирают разные ответы, а потребность у всех одна и та же, предельно конкретная.</a:t>
+              <a:t>О чём Ольга НЕ просила. Она не просила «сделать уведомление умным» или «пусть модель решит, что писать». Она описала результат, который хочет видеть у себя в телефоне, — одну строку, по которой сразу понятно, кто написал и зачем. Как цепочка до этой строки дойдёт — её не касается вовсе. А дальше весь кейс про то, что разные команды инженеров на этом самом месте выбирают разные ответы, хотя потребность у всех одна и та же, предельно конкретная.</a:t>
             </a:r>
           </a:p>
           <a:p/>
           <a:p>
             <a:r>
-              <a:t>Эта потребность и есть то, с чем мы работаем весь кейс — не абстрактное «нужно уведомление», а именно эта фраза, слово за словом, с которой дальше можно сверять любое решение. Запомните её форму: так мы и будем проверять каждый вариант дальше — не на глаз, а подставляя в него настоящую заявку и глядя, получилась ли ровно эта строка.</a:t>
+              <a:t>С этой потребностью мы и работаем весь кейс: с этой её фразой, слово за словом — с ней дальше сверяется любое решение. Запомните её форму: так мы и будем проверять каждый вариант дальше — не на глаз, а подставляя в него настоящую заявку и глядя, получилась ли ровно эта строка.</a:t>
             </a:r>
           </a:p>
         </p:txBody>
@@ -5275,7 +5275,7 @@
           <a:lstStyle/>
           <a:p>
             <a:r>
-              <a:t>Сцена этого кейса начинается не с жалобы, а с просьбы, и это обычная история доработки уже работающего процесса.</a:t>
+              <a:t>Сцена этого кейса начинается с просьбы, не с жалобы, — обычная история доработки уже работающего процесса.</a:t>
             </a:r>
           </a:p>
           <a:p/>
@@ -5287,13 +5287,13 @@
           <a:p/>
           <a:p>
             <a:r>
-              <a:t>Собрали цепочку тем же способом, каким собирают любое расширение уже работающего процесса. Текст готовится тем же узлом подстановки, что и раньше. Следующий шаг забирает картинку по ссылке и получает её как бинарные данные, а не как текстовое поле. Последний шаг отправляет эту картинку в Telegram, а текст уведомления идёт подписью к ней.</a:t>
+              <a:t>Собрали цепочку тем же способом, каким собирают любое расширение. Текст готовит тот же узел подстановки, что и раньше. Следующий шаг забирает картинку по ссылке и получает её как бинарные данные, а не как текстовое поле. Последний шаг отправляет эту картинку в Telegram, а текст уведомления идёт подписью к ней.</a:t>
             </a:r>
           </a:p>
           <a:p/>
           <a:p>
             <a:r>
-              <a:t>На тестовых картинках всё работает без единого замечания: карточка собирается, уходит, координатор видит её в Telegram ровно там же, где раньше видел текст. Цепочку включили в работу на этом основании — она прошла проверку, какую мы умели делать.</a:t>
+              <a:t>На тестовых картинках всё работает без единого замечания: карточка собирается, уходит, координатор видит её в Telegram там же, где раньше видел текст. На этом её и включили в работу: проверку, какую мы умели делать, она прошла.</a:t>
             </a:r>
           </a:p>
           <a:p/>
@@ -5311,13 +5311,13 @@
           <a:p/>
           <a:p>
             <a:r>
-              <a:t>Вот в чём настоящая цена этой сцены. Это не отказ узла: отказы мы умеем ловить ещё с прошлого занятия, повтором и веткой. Это тихая потеря результата ровно там, где всё формальное говорит «успех» — потому что до сих пор у нас не было повода проверять бинарные данные хоть чем-то, кроме того, что они вообще сформировались.</a:t>
+              <a:t>Теперь о цене этой сцены. Отказ узла мы ловить умеем ещё с прошлого занятия, повтором и веткой. А здесь — тихая потеря результата ровно там, где всё формальное говорит «успех»: до сих пор у нас не было повода проверять бинарные данные хоть чем-то, кроме самого факта, что они сформировались.</a:t>
             </a:r>
           </a:p>
           <a:p/>
           <a:p>
             <a:r>
-              <a:t>Значит, прежде чем звать это решением, нужно явно назвать, чему карточка обязана соответствовать — не постфактум, глядя на провал, а заранее, как требование. И требований здесь не одно, а два, и они разной природы. Первое — механическое: у файла есть размер, формат, разрешение, и это числа и перечислимые значения, которые можно сравнить с условием. Второе — смысловое, или по содержанию: показывает ли картинка на самом деле то, что должна показывать, а не битую заглушку, чужое изображение или пустой кадр. Разница не формальность — от неё напрямую зависит, какой инструмент вообще способен такое требование проверить, и это ровно тот вопрос, который прозвучит дальше.</a:t>
+              <a:t>Значит, прежде чем звать это решением, надо явно назвать, чему карточка обязана соответствовать — заранее, как требование, а не постфактум, глядя на провал. И требований здесь два, разной природы. Первое — механическое: у файла есть размер, формат, разрешение, и это числа и перечислимые значения, которые можно сравнить с условием. Второе — смысловое, или по содержанию: показывает ли картинка на самом деле то, что должна показывать, а не битую заглушку, чужое изображение или пустой кадр. Разница не формальность: от неё зависит, какой инструмент способен такое требование проверить. Этот вопрос и прозвучит дальше.</a:t>
             </a:r>
           </a:p>
         </p:txBody>
@@ -5387,7 +5387,7 @@
           <a:lstStyle/>
           <a:p>
             <a:r>
-              <a:t>Мы только что видели находку: прогон зелёный, а карточка до координатора не дошла. Сегодня весь день мы задавали цепочке один и тот же вопрос — решает этот шаг модель, или должен решать код. Применим его к картинке.</a:t>
+              <a:t>Мы только что видели находку: прогон зелёный, а карточка до координатора не дошла. Весь день мы задавали цепочке один и тот же вопрос — решает этот шаг модель или должен решать код. Применим его к картинке.</a:t>
             </a:r>
           </a:p>
           <a:p/>
@@ -5399,7 +5399,7 @@
           <a:p/>
           <a:p>
             <a:r>
-              <a:t>Четыре карточки, и это осознанно не вопрос «что делать, если файл превысит лимит» — это вопрос о том, какую проверку построить заранее, до того как файл уйдёт дальше. Первая — проверить размер и формат файла перед отправкой, программно: это то же самое действие, что </a:t>
+              <a:t>Четыре карточки, и спрашиваем мы сознательно не «что делать, если файл превысит лимит», а какую проверку построить заранее, до того как файл уйдёт дальше. Первая — проверить размер и формат файла перед отправкой, программно: это то же самое действие, что </a:t>
             </a:r>
             <a:r>
               <a:rPr>
@@ -5408,19 +5408,19 @@
               <a:t>IF</a:t>
             </a:r>
             <a:r>
-              <a:t>-узел в «Одобрении возврата», только применённое к свойствам файла, а не к сумме. Вторая — проверить, что картинка открывается без ошибок, тоже программно: убедиться, что файл технически исправен, не битый. Третья — проверить, что на картинке действительно то, что нужно показать, моделью с распознаванием изображений: это другая по природе задача, и для неё нужен другой инструмент. Четвёртая — ничего не проверять, довериться тому, что узел отправки сам разберётся: это ровно то, что произошло в нашей сцене.</a:t>
+              <a:t>-узел в «Одобрении возврата», только применённое к свойствам файла, а не к сумме. Вторая — проверить, что картинка открывается без ошибок, тоже программно: убедиться, что файл технически исправен, не битый. Третья — проверить, что на картинке действительно то, что нужно показать, моделью с распознаванием изображений: это другая по природе задача, и для неё нужен другой инструмент. Четвёртая — ничего не проверять, довериться узлу отправки: ровно это и произошло в нашей сцене.</a:t>
             </a:r>
           </a:p>
           <a:p/>
           <a:p>
             <a:r>
-              <a:t>Обратите внимание, что первые две карточки и третья — разного рода действия, хоть и похожи по формулировке «проверить». Размер, формат, то, что файл открывается, — это свойства, которые можно посчитать и сравнить с числом. Соответствует ли содержимое картинки тому, что нужно показать, — это уже не число, а смысл.</a:t>
+              <a:t>Первые две карточки и третья — действия разного рода, хоть и похожи формулировкой «проверить». Размер, формат, то, что файл открывается, — свойства, которые можно посчитать и сравнить с числом. Соответствует ли содержимое картинки тому, что нужно показать, — уже не число, а смысл.</a:t>
             </a:r>
           </a:p>
           <a:p/>
           <a:p>
             <a:r>
-              <a:t>Выбирайте не по тому, что звучит надёжнее, а по тому, какой инструмент вообще способен провести такую проверку: можно ли её выразить условием над числом, или для неё нужно, чтобы кто-то — человек или модель — посмотрел на содержимое.</a:t>
+              <a:t>Выбирайте по тому, какой инструмент способен провести такую проверку: выражается ли она условием над числом — или кому-то, человеку или модели, придётся посмотреть на содержимое.</a:t>
             </a:r>
           </a:p>
           <a:p/>
@@ -5438,7 +5438,7 @@
           <a:p/>
           <a:p>
             <a:r>
-              <a:t>Ответ будет настоящим — дословный ответ интерфейса Telegram на экране про границу размера. Предсказание «дойдёт» опирается на верное наблюдение: файл прошёл предел инструмента, в котором собрана вся цепочка, и обычно этого хватает. Предсказание «не дойдёт» верно по той причине, которую и стоит унести: пределов здесь два, они принадлежат разным системам и не обязаны совпадать, а дешёвая проверка обязана знать меньший из них.</a:t>
+              <a:t>Ответ будет настоящим — дословная реплика Telegram про границу размера, на экране. Предсказание «дойдёт» опирается на верное наблюдение: файл прошёл предел инструмента, в котором собрана вся цепочка, а обычно этого хватает. Предсказание «не дойдёт» верно по той причине, которую и стоит унести: пределов здесь два, они принадлежат разным системам и не обязаны совпадать, а дешёвая проверка обязана знать меньший из них.</a:t>
             </a:r>
           </a:p>
         </p:txBody>
@@ -5508,13 +5508,13 @@
           <a:lstStyle/>
           <a:p>
             <a:r>
-              <a:t>Четыре карточки вопроса — не четыре равноправных ответа, а разбор по двум требованиям, которые мы только что назвали в постановке: механическому и смысловому.</a:t>
+              <a:t>Четыре карточки вопроса — не четыре равноправных ответа: разбираем их по двум требованиям, названным в постановке, механическому и смысловому.</a:t>
             </a:r>
           </a:p>
           <a:p/>
           <a:p>
             <a:r>
-              <a:t>Первая и вторая карточки — проверить размер и формат, проверить, что файл открывается без ошибок, — обе закрывают механическое требование: у файла есть численные и перечислимые свойства, и программа может сравнить их с условием так же детерминированно, как </a:t>
+              <a:t>Первая и вторая карточки — проверить размер и формат, проверить, что файл открывается без ошибок, — обе закрывают механическое требование: у файла есть численные и перечислимые свойства, и программа сравнит их с условием так же детерминированно, как </a:t>
             </a:r>
             <a:r>
               <a:rPr>
@@ -5523,13 +5523,13 @@
               <a:t>IF</a:t>
             </a:r>
             <a:r>
-              <a:t>-узел в «Одобрении возврата» сравнивал сумму с порогом. Это код, и только код: модель здесь не нужна и ничего не добавляет.</a:t>
+              <a:t>-узел в «Одобрении возврата» сравнивал сумму с порогом. Это код, и только код: модель здесь не нужна и ничего не добавит.</a:t>
             </a:r>
           </a:p>
           <a:p/>
           <a:p>
             <a:r>
-              <a:t>Третья карточка — проверить, что на картинке действительно то, что нужно показать, — закрывает смысловое требование, и здесь честный ответ другой: сегодня в нашей цепочке такого шага нет. Единственный инструмент, который в принципе способен оценить, что на картинке, — модель с распознаванием изображений, и этот уровень сегодня не покрыт вовсе.</a:t>
+              <a:t>Третья карточка — проверить, что на картинке то, что нужно показать, — закрывает смысловое требование, и здесь честный ответ другой: такого шага в нашей цепочке сегодня нет. Оценить, что на картинке, в принципе способна только модель с распознаванием изображений, и этот уровень не покрыт вовсе.</a:t>
             </a:r>
           </a:p>
           <a:p/>
@@ -5541,13 +5541,13 @@
           <a:p/>
           <a:p>
             <a:r>
-              <a:t>Отдельный пример, почему эти два требования нельзя подменить друг другом. Технически исправный файл — правильный размер, правильный формат — всё равно может показывать не то, что нужно: например, если узел получения картинки по ссылке получил страницу ошибки хостинга вместо самой картинки. Формат и размер страницы ошибки вполне могут пройти механическую проверку, а содержимое будет совершенно не тем, что требовалось показать. Это тот же урок, что мы уже видели в «Уведомлениях» и в Zillow, перенесённый на картинку: механическое требование к файлу — задача кода; требование к содержимому — задача, которая нуждается в модели, а не отсутствие задачи вовсе.</a:t>
+              <a:t>Отдельный пример, почему эти два требования нельзя подменить друг другом. Технически исправный файл — правильный размер, правильный формат — всё равно может показывать не то, что нужно. Скажем, узел получения картинки по ссылке получил вместо картинки страницу ошибки хостинга: формат и размер такой страницы механическую проверку пройдут, а содержимое окажется совсем не тем. Тот же урок мы уже видели в «Уведомлениях» и в Zillow, здесь он перенесён на картинку: механическое требование к файлу — задача кода, требование к содержимому — задача для модели, а не отсутствие задачи вовсе.</a:t>
             </a:r>
           </a:p>
           <a:p/>
           <a:p>
             <a:r>
-              <a:t>Первая строка таблицы и вторая — это один и тот же класс, закрытый сегодня. Третья строка — класс, названный, но не закрытый: дальше мы посмотрим, как выглядит архитектура, которая его хотя бы предусматривает, а потом — честно собранную цепочку, где его пока нет.</a:t>
+              <a:t>Первая и вторая строки таблицы — один и тот же класс, закрытый сегодня. Третья — класс названный, но не закрытый: дальше посмотрим архитектуру, которая его хотя бы предусматривает, а потом честно собранную цепочку, где его пока нет.</a:t>
             </a:r>
           </a:p>
         </p:txBody>
@@ -5617,25 +5617,25 @@
           <a:lstStyle/>
           <a:p>
             <a:r>
-              <a:t>Первый слой решения — архитектурный, без привязки к n8n или Telegram, и он прямо продолжает разбор, который мы только что сделали.</a:t>
+              <a:t>Первый слой решения — архитектурный, без привязки к n8n или Telegram, и он прямо продолжает только что сделанный разбор.</a:t>
             </a:r>
           </a:p>
           <a:p/>
           <a:p>
             <a:r>
-              <a:t>Два класса требований из предыдущего экрана становятся двумя отдельными стрелками на схеме. Слева — механическое требование: у файла есть размер, формат, разрешение, и все три свойства можно проверить программно, тем же приёмом, которым мы в «Одобрении возврата» сравнивали сумму с порогом. Это проверка до отправки, не после: файл либо проходит условие, либо цепочка останавливает его раньше, чем он уйдёт в Telegram.</a:t>
+              <a:t>Два класса требований с предыдущего экрана становятся на схеме двумя отдельными стрелками. Слева — механическое: у файла есть размер, формат, разрешение, и все три свойства проверяются программно, тем же приёмом, которым мы в «Одобрении возврата» сравнивали сумму с порогом. Проверка идёт до отправки, не после: файл либо проходит условие, либо цепочка останавливает его раньше, чем он уйдёт в Telegram.</a:t>
             </a:r>
           </a:p>
           <a:p/>
           <a:p>
             <a:r>
-              <a:t>Справа — смысловое требование: показывает ли картинка действительно то, что нужно. Для этой стрелки на схеме нет узла в нашей сегодняшней цепочке — честно показываем это пробелом, а не фиктивным блоком. Единственный инструмент, который в принципе способен оценить содержимое изображения, — модель с распознаванием изображений, и её сегодня в цепочке нет.</a:t>
+              <a:t>Справа — смысловое: показывает ли картинка то, что нужно. Узла под эту стрелку в нашей сегодняшней цепочке нет, и мы показываем это пробелом, а не фиктивным блоком. Оценить содержимое изображения в принципе способна только модель с распознаванием изображений, и её сегодня в цепочке нет.</a:t>
             </a:r>
           </a:p>
           <a:p/>
           <a:p>
             <a:r>
-              <a:t>Важно, почему эти две стрелки нарисованы раздельно, а не одной общей проверкой «проверить файл». Код, который проверяет размер и формат, ничего не знает о содержимом — он может пропустить файл правильного размера и формата, даже если внутри него не то изображение. И наоборот: модель, которая умеет оценивать содержимое, — избыточный и дорогой инструмент для вопроса «не превышен ли лимит в байтах», который прекрасно решается одним сравнением чисел.</a:t>
+              <a:t>Почему эти две стрелки нарисованы раздельно, а не одной общей проверкой «проверить файл». Код, который проверяет размер и формат, ничего не знает о содержимом: он пропустит файл правильного размера и формата, даже если внутри не то изображение. И наоборот: модель, умеющая оценивать содержимое, — избыточный и дорогой инструмент для вопроса «не превышен ли лимит в байтах», который решается одним сравнением чисел.</a:t>
             </a:r>
           </a:p>
           <a:p/>
@@ -5647,7 +5647,7 @@
           <a:p/>
           <a:p>
             <a:r>
-              <a:t>Полезно удержать в голове форму этой схемы, потому что она повторяет форму, которую мы уже видели два раза сегодня: в «Уведомлениях» мы разводили шаг, который сочиняет текст, и шаг, который подставляет значения; в «Одобрении возврата» — текстовое правило и условие над числом. Здесь то же самое разведение применено не к тексту и не к сумме, а к файлу: одна его сторона (размер, формат) формализуется и проверяется кодом, другая (содержимое) формализации не поддаётся и требует инструмента, который умеет смотреть на изображение, а не только измерять его.</a:t>
+              <a:t>Форму этой схемы стоит удержать в голове: сегодня мы видели её уже дважды. В «Уведомлениях» разводили шаг, который сочиняет текст, и шаг, который подставляет значения; в «Одобрении возврата» — текстовое правило и условие над числом. Здесь то же разведение применено к файлу: одна его сторона (размер, формат) формализуется и проверяется кодом, другая (содержимое) формализации не поддаётся и требует инструмента, который умеет смотреть на изображение, а не только измерять его.</a:t>
             </a:r>
           </a:p>
         </p:txBody>
@@ -5717,13 +5717,13 @@
           <a:lstStyle/>
           <a:p>
             <a:r>
-              <a:t>Прежде чем открывать панели настройки — один кадр шире, чтобы увидеть, откуда эти три узла вообще берутся на холсте.</a:t>
+              <a:t>Прежде чем открывать панели настройки — один кадр шире, чтобы увидеть, откуда эти три узла берутся на холсте.</a:t>
             </a:r>
           </a:p>
           <a:p/>
           <a:p>
             <a:r>
-              <a:t>Это настоящий канвас живого стенда, тот же воркфлоу, что и на следующем экране, только в кадре чуть больше контекста. Слева — </a:t>
+              <a:t>Это настоящий канвас живого стенда, тот же воркфлоу, что и на следующем экране, только в кадре чуть больше контекста. Слева </a:t>
             </a:r>
             <a:r>
               <a:rPr>
@@ -5732,7 +5732,7 @@
               <a:t>Write row</a:t>
             </a:r>
             <a:r>
-              <a:t>: узел, который записывает заявку в таблицу, и </a:t>
+              <a:t> — узел, который записывает заявку в таблицу, и </a:t>
             </a:r>
             <a:r>
               <a:rPr>
@@ -5741,13 +5741,13 @@
               <a:t>Result screen</a:t>
             </a:r>
             <a:r>
-              <a:t> — экран, которым обычная форма заканчивается. Это тот же самый путь приёма заявки, что мы уже видели на холсте Кейса 1: форма, извлечение полей, проверка по словарю тем, запись строки. Здесь он не повторяется заново — он просто виден слева, за кадром, потому что эта часть процесса не изменилась.</a:t>
+              <a:t> — экран, которым обычная форма заканчивается. Тот же путь приёма заявки, что мы уже видели на холсте Кейса 1: форма, извлечение полей, проверка по словарю тем, запись строки. Заново он здесь не разбирается — просто виден слева, потому что эта часть процесса не изменилась.</a:t>
             </a:r>
           </a:p>
           <a:p/>
           <a:p>
             <a:r>
-              <a:t>А вот то, что изменилось, видно на самой стрелке. От той же точки, сразу после </a:t>
+              <a:t>А изменившееся видно на самой стрелке. От той же точки, сразу после </a:t>
             </a:r>
             <a:r>
               <a:rPr>
@@ -5792,19 +5792,19 @@
               <a:t>Send card (Telegram photo)</a:t>
             </a:r>
             <a:r>
-              <a:t> — три узла, которые мы разберём по одному на следующих экранах. Это и есть честный ответ на вопрос «где в реальном процессе появляется кейс 4» — не рядом, не вместо, а веткой из уже существующей точки.</a:t>
+              <a:t> — три узла, которые мы разберём по одному на следующих экранах. Это и есть честный ответ на вопрос «где в настоящем процессе появляется кейс 4»: веткой из уже существующей точки, не рядом и не вместо.</a:t>
             </a:r>
           </a:p>
           <a:p/>
           <a:p>
             <a:r>
-              <a:t>Специально оставлено честно за кадром: правее по той же обвязке есть ещё одна ветка, на случай если модель не смогла разобрать заявку — тоже настоящая, тоже часть этого воркфлоу, но она про приём заявки, а не про сборку и отправку карточки, и сегодня не в фокусе. Мы не делаем вид, что канвас заканчивается ровно там, где заканчивается этот кадр, — он продолжается, просто не в эту сторону разбора.</a:t>
+              <a:t>И честно про то, что осталось за кадром. Правее по той же обвязке есть ещё одна ветка, на случай если модель не смогла разобрать заявку, — тоже настоящая, тоже часть этого воркфлоу, но она про приём заявки, а не про сборку и отправку карточки, и сегодня не в фокусе. Канвас не заканчивается там, где заканчивается кадр: он продолжается, только не в сторону нашего разбора.</a:t>
             </a:r>
           </a:p>
           <a:p/>
           <a:p>
             <a:r>
-              <a:t>Теперь, когда видно, откуда растут эти три узла, — зум ближе: та же цепочка, но с настоящей проверкой границы размера, которая и привела нас в этот кейс.</a:t>
+              <a:t>Теперь, когда видно, откуда растут эти три узла, — кадр ближе: та же цепочка, но с настоящей проверкой границы размера, которая и привела нас в этот кейс.</a:t>
             </a:r>
           </a:p>
         </p:txBody>
@@ -5874,25 +5874,25 @@
           <a:lstStyle/>
           <a:p>
             <a:r>
-              <a:t>Второй слой — та же архитектура, собранная в n8n конкретными тремя узлами, плюс настоящая проверка той самой границы, о которой говорил первый слой.</a:t>
+              <a:t>Второй слой — та же архитектура, собранная в n8n тремя конкретными узлами, и настоящая проверка той границы, о которой говорил первый слой.</a:t>
             </a:r>
           </a:p>
           <a:p/>
           <a:p>
             <a:r>
-              <a:t>Первый узел — тот же приём подстановки значений, что мы настраивали в кейсе «Уведомления»: одно выражение, которое собирает текст уведомления из уже известных полей заявки. Второй узел забирает картинку по ссылке; важная деталь настройки — формат ответа указан как файл, а не как текст или JSON: с этого момента содержимое узла — бинарные данные. Третий узел — отправка в Telegram в режиме отправки фото, на входе у него бинарные данные картинки и подпись — текст из первого узла. Обратите внимание, чего в этой цепочке нет: ни на одном из трёх шагов не появляется модель, и отдельного узла проверки размера или формата здесь тоже нет — правило первого слоя живёт пока на уровне архитектуры, не внутри конкретного узла, и это честно показано, а не замаскировано.</a:t>
+              <a:t>Первый узел — тот же приём подстановки значений, что мы настраивали в кейсе «Уведомления»: одно выражение, которое собирает текст уведомления из уже известных полей заявки. Второй узел забирает картинку по ссылке; важная деталь настройки — формат ответа указан как файл, а не как текст или JSON: с этого момента содержимое узла — бинарные данные. Третий узел — отправка в Telegram в режиме отправки фото, на входе у него бинарные данные картинки и подпись — текст из первого узла. Теперь о том, чего в этой цепочке нет. Модель не появляется ни на одном из трёх шагов, и отдельного узла проверки размера или формата здесь тоже нет: правило первого слоя живёт пока на уровне архитектуры, не внутри узла, — и мы это показываем, а не маскируем.</a:t>
             </a:r>
           </a:p>
           <a:p/>
           <a:p>
             <a:r>
-              <a:t>Поэтому границу проверили настоящим вызовом, а не предположением. Ограничение самого n8n по умолчанию — 16 МБ на бинарные данные. Ограничение Telegram на фото — отдельное и более узкое: 10 485 760 байт, то есть 10 МБ. Собрали намеренно несжатый файл ровно между этими двумя порогами — 12 812 355 байт, около 12,8 МБ: меньше лимита n8n, но больше лимита Telegram на фото. Отправили его напрямую через Telegram Bot API — тем же вызовом, которым пользуется узел отправки внутри цепочки.</a:t>
+              <a:t>Поэтому границу проверили настоящим вызовом. Ограничение самого n8n по умолчанию — 16 МБ на бинарные данные. Ограничение Telegram на фото — отдельное и более узкое: 10 485 760 байт, то есть 10 МБ. Собрали намеренно несжатый файл ровно между этими двумя порогами — 12 812 355 байт, около 12,8 МБ: меньше лимита n8n, но больше лимита Telegram на фото. Отправили его напрямую через Telegram Bot API — тем же вызовом, которым пользуется узел отправки внутри цепочки.</a:t>
             </a:r>
           </a:p>
           <a:p/>
           <a:p>
             <a:r>
-              <a:t>Ответ пришёл настоящий, не придуманный для примера: файл такого-то размера слишком велик для фото, максимальный размер — столько-то байт. Telegram прямо называет размер и прямо называет предел — не тишина, а явная, читаемая ошибка. И это уточняет то, что мы видели в сцене кейса: там карточка пропадала тихо — потому что проблема на границе n8n чаще выглядит именно так, а сам Telegram на своей границе отвечает иначе, явным текстом. Проверка размера внутри цепочки не может полагаться на то, что хоть одна из двух сторон обязательно сообщит об ошибке честно.</a:t>
+              <a:t>Ответ пришёл настоящий, не придуманный для примера: файл такого-то размера слишком велик для фото, максимальный размер — столько-то байт. Telegram прямо называет и размер, и предел: явная, читаемая ошибка, а не тишина. И это уточняет то, что мы видели в сцене кейса — там карточка пропадала тихо, потому что проблема на границе n8n чаще так и выглядит, а сам Telegram на своей границе отвечает явным текстом. Проверка размера внутри цепочки не вправе рассчитывать, что хоть одна из двух сторон честно сообщит об ошибке.</a:t>
             </a:r>
           </a:p>
         </p:txBody>
@@ -5962,7 +5962,7 @@
           <a:lstStyle/>
           <a:p>
             <a:r>
-              <a:t>Вот как три узла цепочки выглядят на самом деле, если открыть настройку каждого на живом стенде.</a:t>
+              <a:t>Три узла цепочки изнутри — настройка каждого, открытая на живом стенде.</a:t>
             </a:r>
           </a:p>
           <a:p/>
@@ -5977,7 +5977,7 @@
               <a:t>Compose notification (template)</a:t>
             </a:r>
             <a:r>
-              <a:t>, первый шаг. На прошлом экране прозвучало, что он собирает текст тем же приёмом подстановки значений, что мы настраивали в кейсе «Уведомления», — и здесь это не нужно принимать на слово: в поле </a:t>
+              <a:t>, первый шаг. На прошлом экране прозвучало, что он собирает текст тем же приёмом подстановки значений, что мы настраивали в кейсе «Уведомления». На слово это принимать не надо: в поле </a:t>
             </a:r>
             <a:r>
               <a:rPr>
@@ -5986,7 +5986,7 @@
               <a:t>notification_text</a:t>
             </a:r>
             <a:r>
-              <a:t> стоит ровно то же выражение, что уже было на экране в Кейсе 1. Разбирать его заново смысла нет, это сделано там; увидеть, что узел буквально тот же, а не переписанный с нуля под новую задачу, стоило прямо здесь.</a:t>
+              <a:t> стоит ровно то же выражение, что уже было на экране в Кейсе 1. Разбирать его заново смысла нет — разобрали там. А вот увидеть, что узел буквально тот же, а не переписанный с нуля под новую задачу, стоило прямо здесь.</a:t>
             </a:r>
           </a:p>
           <a:p/>
@@ -6010,7 +6010,7 @@
               <a:t>picsum.photos</a:t>
             </a:r>
             <a:r>
-              <a:t> с размером восемьсот на четыреста пятьдесят — настоящий публичный сервис тестовых картинок, не выдуманный для примера источник. Ниже на той же панели, уже за границей кадра, стоят четыре выключенных переключателя — аутентификация, параметры запроса, заголовки, тело, — их никто не трогал. А вот следующая за ними настройка решает многое: формат ответа указан как </a:t>
+              <a:t> с размером восемьсот на четыреста пятьдесят — настоящий публичный сервис тестовых картинок, не выдуманный для примера. Ниже на той же панели, уже за границей кадра, стоят четыре выключенных переключателя — аутентификация, параметры запроса, заголовки, тело, — их никто не трогал. А следующая за ними настройка решает многое: формат ответа указан как </a:t>
             </a:r>
             <a:r>
               <a:rPr>
@@ -6019,7 +6019,7 @@
               <a:t>File</a:t>
             </a:r>
             <a:r>
-              <a:t>, не как текст и не как JSON. Именно с этого поля содержимое узла становится двоичными данными — в этом вся разница между «скачать картинку» и «скачать текст, в котором случайно оказалась ссылка на картинку». Имя поля, куда узел кладёт эти данные, — </a:t>
+              <a:t>, не как текст и не как JSON. С этого поля содержимое узла и становится двоичными данными — вот вся разница между «скачать картинку» и «скачать текст, в котором случайно оказалась ссылка на картинку». Имя поля, куда узел кладёт эти данные, — </a:t>
             </a:r>
             <a:r>
               <a:rPr>
@@ -6058,7 +6058,7 @@
           <a:p/>
           <a:p>
             <a:r>
-              <a:t>Стоит задержаться на имени поля. Эти три узла соединены не только стрелкой на холсте: средний кладёт двоичные данные в поле с именем </a:t>
+              <a:t>Задержитесь на имени поля. Эти три узла соединены не только стрелкой на холсте: средний кладёт двоичные данные в поле с именем </a:t>
             </a:r>
             <a:r>
               <a:rPr>
@@ -6067,16 +6067,7 @@
               <a:t>data</a:t>
             </a:r>
             <a:r>
-              <a:t>, правый ищет их в поле с именем </a:t>
-            </a:r>
-            <a:r>
-              <a:rPr>
-                <a:latin typeface="Consolas"/>
-              </a:rPr>
-              <a:t>data</a:t>
-            </a:r>
-            <a:r>
-              <a:t>. Поменяйте имя в одном месте и не поменяйте в другом — стрелка на холсте останется на месте, а картинка исчезнет. Это и есть первый вид связи, который в цепочке не виден глазами.</a:t>
+              <a:t>, правый там же их и ищет. Поменяйте имя в одном месте и не поменяйте в другом — стрелка на холсте останется, а картинка исчезнет. Вот первый вид связи, которого в цепочке не видно глазами.</a:t>
             </a:r>
           </a:p>
         </p:txBody>
@@ -6146,37 +6137,37 @@
           <a:lstStyle/>
           <a:p>
             <a:r>
-              <a:t>Остановимся на секунду на том, что мы на самом деле собрали на предыдущем экране, и сравним это с тем, что просил маркетинг в самом начале кейса.</a:t>
+              <a:t>Остановимся на секунду: что мы собрали на предыдущем экране — и что просил маркетинг в начале кейса.</a:t>
             </a:r>
           </a:p>
           <a:p/>
           <a:p>
             <a:r>
-              <a:t>Маркетинг попросил карточку: текст поверх картинки, в одном изображении. А цепочка, которую мы настроили, делает другое — она забирает готовую картинку по ссылке и кладёт текст уведомления подписью к ней, отдельным текстовым полем сообщения Telegram. Это работает, Telegram действительно покажет текст рядом с фотографией, но текст не внутри изображения — это не то же самое, что «карточка с текстом поверх картинки», и честно об этом стоит сказать прямо, а не стереть разницу молчанием.</a:t>
+              <a:t>Маркетинг попросил карточку: текст поверх картинки, в одном изображении. А цепочка, которую мы настроили, делает другое: забирает готовую картинку по ссылке и кладёт текст уведомления подписью к ней, отдельным текстовым полем сообщения Telegram. Это работает, Telegram покажет текст рядом с фотографией — но не внутри изображения, а «карточка с текстом поверх картинки» значит именно внутри. Эту разницу молчанием не стирают.</a:t>
             </a:r>
           </a:p>
           <a:p/>
           <a:p>
             <a:r>
-              <a:t>Чтобы получить настоящую карточку — изображение, в котором текст физически встроен в пиксели, — нужен отдельный шаг, и обычный узел «забрать файл по ссылке» для этого не подходит: он умеет скачивать готовую картинку, а не рисовать на ней. Нужна специализированная генерирующая модель: на вход — текст уведомления и задача «сделай из этого текста читаемое изображение», на выход — готовый файл с текстом уже внутри.</a:t>
+              <a:t>Чтобы получить настоящую карточку — изображение, в котором текст физически встроен в пиксели, — нужен отдельный шаг. Обычный узел «забрать файл по ссылке» тут не годится: он умеет скачивать готовую картинку, а не рисовать на ней. Нужна специализированная генерирующая модель: на вход — текст уведомления и задача «сделай из этого текста читаемое изображение», на выход — готовый файл с текстом уже внутри.</a:t>
             </a:r>
           </a:p>
           <a:p/>
           <a:p>
             <a:r>
-              <a:t>У этого шага есть цена, и не нулевая. Для ориентира взята публичная стоимость сопоставимой модели — gpt-image-1.5 от OpenAI: генерация одной картинки 1024 на 1024 точки обходится от неполного цента на низком качестве до 13 центов на высоком, в зависимости от того, какую точность и детализацию выбрать. Для короткого текстового уведомления на карточке наивысшая точность вряд ли нужна — разумный ориентир здесь порядка трёх с половиной центов за картинку, среднее качество. Это не измерение на нашем стенде — на стенде такого шага нет, — а честная оценка по чужому, но актуальному и проверяемому прайсингу.</a:t>
+              <a:t>Цена у этого шага есть, и не нулевая. Для ориентира взята публичная стоимость сопоставимой модели — gpt-image-1.5 от OpenAI: одна картинка 1024 на 1024 точки обходится от неполного цента на низком качестве до 13 центов на высоком, смотря какую точность и детализацию выбрать. Короткому текстовому уведомлению на карточке высшая точность вряд ли нужна — разумный ориентир здесь порядка трёх с половиной центов за картинку, среднее качество. Это не измерение на нашем стенде, такого шага на стенде нет: это честная оценка по чужому, но свежему и проверяемому прайсу.</a:t>
             </a:r>
           </a:p>
           <a:p/>
           <a:p>
             <a:r>
-              <a:t>Три с половиной цента за одну карточку сами по себе ни о чём не говорят, пока не привязаны к объёму, — а сцена этого кейса частоту рассылки явно не называет. Объём не стоит выдумывать из воздуха: карточка заменяет то самое уведомление о каждой новой заявке, а этот поток нам известен из Кейса 1 — двадцать заявок в день. Если на карточки переходит весь поток, выходит около шестисот карточек в месяц и около двадцати долларов в месяц. Это иллюстративный пример расчёта, не измеренный объём: ни частота рассылки, ни полный переход на карточки в сцене явно не зафиксированы. Но с появившейся базой видно: для учебного центра это не та цена, из-за которой стоит отказываться от решения, и не ноль, который можно не считать вовсе.</a:t>
+              <a:t>Три с половиной цента за карточку сами по себе ни о чём не говорят, пока не привязаны к объёму, — а сцена этого кейса частоту рассылки не называет. Выдумывать объём из воздуха не станем: карточка заменяет уведомление о каждой новой заявке, а этот поток известен из Кейса 1 — двадцать заявок в день. Если на карточки переходит весь поток, выходит около шестисот карточек в месяц и около двадцати долларов в месяц. Это иллюстративный пример расчёта, не измеренный объём: ни частота рассылки, ни полный переход на карточки в сцене явно не зафиксированы. Зато с базой видно: для учебного центра это не та цена, из-за которой отказываются от решения, и не ноль, который можно не считать вовсе.</a:t>
             </a:r>
           </a:p>
           <a:p/>
           <a:p>
             <a:r>
-              <a:t>И последнее, что стоит сразу иметь в виду, даже не собирая этот шаг: генерирующие модели обычно отдают файл большого стандартного размера, который сжат не слишком сильно. Это значит, что готовую карточку нельзя отправлять в Telegram как есть — её нужно перекодировать в более лёгкий формат заранее, той же логикой, что мы уже видели на предыдущем экране с лимитом в 10 485 760 байт на фото. Генерация не отменяет проверку размера — она добавляет её ещё раз, на новом месте цепочки.</a:t>
+              <a:t>И последнее, что надо знать заранее, даже не собирая этот шаг: генерирующие модели обычно отдают файл большого стандартного размера, сжатый не слишком сильно. Значит, готовую карточку нельзя отправлять в Telegram как есть — её перекодируют в более лёгкий формат заранее, той же логикой, что мы видели на предыдущем экране с лимитом в 10 485 760 байт на фото. Генерация не отменяет проверку размера — она добавляет её ещё раз, на новом месте цепочки.</a:t>
             </a:r>
           </a:p>
         </p:txBody>
@@ -6246,31 +6237,31 @@
           <a:lstStyle/>
           <a:p>
             <a:r>
-              <a:t>Прежде чем говорить про сжатие, стоит явно назвать порядок, в котором эти два шага вообще должны идти — и это не произвольный выбор.</a:t>
+              <a:t>Прежде чем говорить про сжатие, назовём порядок, в котором эти два шага должны идти. Порядок здесь не произвольный.</a:t>
             </a:r>
           </a:p>
           <a:p/>
           <a:p>
             <a:r>
-              <a:t>Механическая проверка идёт первой. Она дешёвая, быстрая и детерминированная: сравнила размер, формат и разрешение с условием — и либо пропустила файл дальше, либо отклонила его сразу, прежде чем он добрался до чего-то более дорогого. Модель проверки содержимого идёт второй, и только на то, что уже прошло первую проверку: запускать дорогой вызов модели на файле, который и так не пройдёт по формату, — пустая трата. Это та же экономия, которую мы видели на Кейсе 2: дешёвый механический шаг забирает на себя основную часть работы, а дорогой инструмент достаётся только тому, что действительно нуждается в его оценке.</a:t>
+              <a:t>Механическая проверка идёт первой. Она дешёвая, быстрая и детерминированная: сравнила размер, формат и разрешение с условием — и либо пропустила файл дальше, либо отклонила его сразу, прежде чем он добрался до чего-то более дорогого. Модель проверки содержимого идёт второй, и только на то, что прошло первую: дорогой вызов модели на файле, который и так не пройдёт по формату, — пустая трата. Это та же экономия, которую мы видели на Кейсе 2: дешёвый механический шаг забирает на себя основную часть работы, а дорогой инструмент достаётся только тому, что действительно нуждается в его оценке.</a:t>
             </a:r>
           </a:p>
           <a:p/>
           <a:p>
             <a:r>
-              <a:t>Теперь — вопрос, который владелец курса прямо попросил честно исследовать, а не предположить: имеет ли смысл сжимать картинку перед тем, как отправить её в модель-проверяющую. Ответ по общедоступным источникам, не измерение на нашем стенде: умеренное сжатие обычно выгодно и не портит точность заметно. Пример, который приводится в этих источниках: изображение 4032 на 3024 точки без сжатия обходится моделям примерно в полторы тысячи токенов обработки; то же изображение, уменьшенное до 720 на 540 при качестве JPEG 85, — примерно в 300 токенов, то есть впятеро дешевле, и для большинства задач это почти не сказывается на точности.</a:t>
+              <a:t>Теперь вопрос, который прямо просили исследовать, а не предположить: стоит ли сжимать картинку перед отправкой в модель-проверяющую. Ответ по общедоступным источникам, не измерение на нашем стенде: умеренное сжатие обычно выгодно и точность заметно не портит. Пример, который приводится в этих источниках: изображение 4032 на 3024 точки без сжатия обходится моделям примерно в полторы тысячи токенов обработки; то же изображение, уменьшенное до 720 на 540 при качестве JPEG 85, — примерно в 300 токенов, то есть впятеро дешевле, и для большинства задач это почти не сказывается на точности.</a:t>
             </a:r>
           </a:p>
           <a:p/>
           <a:p>
             <a:r>
-              <a:t>Но есть важная оговорка, и её нельзя отбрасывать молча. Задачи, где модель должна прочитать текст на изображении — а наша карточка именно такая, на ней читаемый текст, — деградируют от сжатия заметнее прочих. Общая рекомендация — сжимать аккуратно, не опускаясь ниже примерно 1024 точек по большей стороне, если модель должна разобрать текст или цифры на карточке. Агрессивное сжатие ради лишней экономии здесь не оправдано: цена ошибки распознавания выше, чем цена лишних токенов.</a:t>
+              <a:t>Но есть оговорка, и отбрасывать её молча нельзя. Задачи, где модель должна прочитать текст на изображении — а наша карточка такая, на ней читаемый текст, — от сжатия портятся заметнее прочих. Общая рекомендация — сжимать аккуратно, не опускаясь ниже примерно 1024 точек по большей стороне, если модель должна разобрать текст или цифры на карточке. Сильное сжатие ради лишней экономии здесь не оправдано: ошибка распознавания стоит дороже лишних токенов.</a:t>
             </a:r>
           </a:p>
           <a:p/>
           <a:p>
             <a:r>
-              <a:t>В таблице это разложено как три варианта действия, а не как один правильный ответ: без сжатия, умеренное сжатие и агрессивное сжатие — у каждого своя цена и свой риск, и выбор зависит от того, должна ли модель именно читать текст на карточке или достаточно оценить картинку в целом.</a:t>
+              <a:t>В таблице это разложено тремя вариантами действия, а не одним правильным ответом: без сжатия, умеренное и сильное — у каждого своя цена и свой риск. Выбор зависит от того, должна ли модель читать текст на карточке или достаточно оценить картинку в целом.</a:t>
             </a:r>
           </a:p>
         </p:txBody>
@@ -6340,7 +6331,7 @@
           <a:lstStyle/>
           <a:p>
             <a:r>
-              <a:t>Прежде чем вернуться к обобщению кейса, стоит на секунду посмотреть на то же самое с другой стороны — глазами координатора, который просто открывает Telegram.</a:t>
+              <a:t>Прежде чем вернуться к обобщению кейса — на секунду с другой стороны, глазами координатора, который открывает Telegram.</a:t>
             </a:r>
           </a:p>
           <a:p/>
@@ -6352,25 +6343,25 @@
           <a:p/>
           <a:p>
             <a:r>
-              <a:t>Эта подпись — не новый текст, придуманный специально для карточки. Это тот же самый текст, который мы уже видели в самом первом кейсе занятия, собранный той же формулой подстановки значений из полей заявки. Разница только в том, что теперь он не приходит отдельным сообщением, а идёт подписью к фотографии, вложенной в то же уведомление, — ровно то расширение, которое маркетинг попросил в сцене этого кейса.</a:t>
+              <a:t>Эта подпись — не новый текст, придуманный для карточки. Тот же текст, который мы видели в первом кейсе занятия, собранный той же формулой подстановки значений из полей заявки. Изменилось одно: теперь он идёт не отдельным сообщением, а подписью к фотографии в том же уведомлении, — ровно то расширение, которое маркетинг попросил в сцене этого кейса.</a:t>
             </a:r>
           </a:p>
           <a:p/>
           <a:p>
             <a:r>
-              <a:t>Важно, чего на этом экране нет. Нет имени узла, который собрал текст или забрал картинку по ссылке. Нет числа байт и нет слова «лимит» — координатору не нужно знать, где именно проходит граница, чтобы понять: заявка пришла. Нет журнала прогона и нет отметки, что всё «зелёное». Это та же граница, о которой курс говорит с самого начала: служебные детали живут в наших разборах и в документации производства, а на экране реального человека — только то, что ему нужно знать, чтобы понять, что происходит.</a:t>
+              <a:t>А вот чего на этом экране нет. Нет имени узла, который собрал текст или забрал картинку по ссылке. Нет числа байт и слова «лимит» — чтобы понять «заявка пришла», координатору не нужно знать, где проходит граница. Нет журнала прогона и отметки, что всё «зелёное». Это та же граница, о которой курс говорит с самого начала: служебные детали живут в наших разборах и в документации производства, а на экране реального человека — только то, что ему нужно знать, чтобы понять, что происходит.</a:t>
             </a:r>
           </a:p>
           <a:p/>
           <a:p>
             <a:r>
-              <a:t>И это ровно обратная сторона той сцены, с которой кейс начался. Там прогон был зелёным, а у координатора в чате было пусто — либо лежал обрезанный файл. Здесь прогон тоже зелёный, но координатор видит целую карточку, потому что на этот раз файл укладывается в измеренную границу. Разница между двумя этими состояниями не видна ни в журнале n8n, ни в ответе Telegram API сама по себе — она видна только здесь, в самом чате получателя, и только по одному признаку: дошла картинка целиком или нет.</a:t>
+              <a:t>И это обратная сторона той сцены, с которой кейс начался. Там прогон был зелёным, а у координатора в чате пусто — либо обрезанный файл. Здесь прогон тоже зелёный, но координатор видит целую карточку: на этот раз файл уложился в измеренную границу. Разница между двумя этими состояниями не видна ни в журнале n8n, ни в ответе Telegram API сама по себе — она видна только здесь, в самом чате получателя, и только по одному признаку: дошла картинка целиком или нет.</a:t>
             </a:r>
           </a:p>
           <a:p/>
           <a:p>
             <a:r>
-              <a:t>Ради этого и стоило измерять число байт настолько точно, насколько мы это сделали на предыдущих экранах: единственная причина мерить границу размера — чтобы координатор каждый раз видел именно такой чат, а не пустое место вместо карточки.</a:t>
+              <a:t>Ради этого и стоило мерить число байт так точно, как мы мерили его на предыдущих экранах: границу размера мерят затем, чтобы координатор каждый раз видел такой чат, а не пустое место вместо карточки.</a:t>
             </a:r>
           </a:p>
         </p:txBody>
@@ -6452,7 +6443,7 @@
           <a:p/>
           <a:p>
             <a:r>
-              <a:t>Но раз в несколько заявок человек упоминает что-то сверх основного вопроса: оплату вдобавок к записи, перенос занятия вдобавок к вопросу про курс. Поле дополнительных тем в таблице это честно записывает. Проблема не в том, что процесс не заметил, — он заметил и записал верно. Проблема в том, кто и когда это прочитает.</a:t>
+              <a:t>Но раз в несколько заявок человек упоминает что-то сверх основного вопроса: оплату вдобавок к записи, перенос занятия вдобавок к вопросу про курс. Поле дополнительных тем в таблице это честно записывает. Процесс её не прозевал: заметил и записал верно. Остаётся одно — кто и когда это прочитает.</a:t>
             </a:r>
           </a:p>
           <a:p/>
@@ -6476,7 +6467,7 @@
           <a:p/>
           <a:p>
             <a:r>
-              <a:t>Задержите взгляд на кадре ещё на секунду. Всё, что на нём есть, уже работает и работает правильно. Ни один из этих пяти узлов сегодня трогать не придётся: вопрос кейса не в том, что чинить в готовом, а в том, что именно добавить рядом — и как это новое устроить. Как собрать нужную строку из трёх уже известных значений — с этого начинается сегодняшний кейс.</a:t>
+              <a:t>Задержите взгляд на кадре ещё на секунду. Всё, что на нём есть, уже работает и работает правильно. Ни один из этих пяти узлов сегодня трогать не придётся: в готовом чинить нечего, кейс про то, что добавить рядом — и как это новое устроить. Как собрать нужную строку из трёх уже известных значений — с этого начинается сегодняшний кейс.</a:t>
             </a:r>
           </a:p>
         </p:txBody>
@@ -6552,25 +6543,25 @@
           <a:p/>
           <a:p>
             <a:r>
-              <a:t>Бинарные данные в n8n — отдельная модель данных от текстовых полей JSON, а не просто ещё одно значение в заявке. У текстового поля есть содержимое. У файла — есть содержимое, есть размер и есть формат, и именно два последних свойства решают, дойдёт ли результат до получателя.</a:t>
+              <a:t>Бинарные данные в n8n — отдельная модель данных, а не ещё одно значение в заявке. У текстового поля есть содержимое. У файла — содержимое, размер и формат, и два последних свойства решают, дойдёт ли результат до получателя.</a:t>
             </a:r>
           </a:p>
           <a:p/>
           <a:p>
             <a:r>
-              <a:t>Контракт между шагами, который в кейсе «Уведомления» рвался на тексте — узел не падал, а результат тихо оказывался не тем, — здесь рвётся на формате и размере бинарного вложения, по той же самой причине: формально успешный прогон ничего не говорит о том, дошёл ли результат до получателя в ожидаемом виде. Это один и тот же урок на двух разных типах данных внутри одного занятия, и это не совпадение — это одно и то же системное свойство любой цепочки: успех шага измеряет сам шаг, а не то, что произошло дальше.</a:t>
+              <a:t>Контракт между шагами, который в кейсе «Уведомления» рвался на тексте — узел не падал, а результат тихо оказывался не тем, — здесь рвётся на формате и размере бинарного вложения, по той же причине: формально успешный прогон ничего не говорит о том, дошёл ли результат до получателя в ожидаемом виде. Один урок на двух разных типах данных внутри одного занятия, и совпадением это не назвать: успех шага измеряет сам шаг, а не то, что произошло дальше.</a:t>
             </a:r>
           </a:p>
           <a:p/>
           <a:p>
             <a:r>
-              <a:t>Теперь явная граница, за которую этот кейс сознательно не заходит. Мы ввели бинарные данные на уровне «один файл, один известный лимит, одна отправка»: получить файл, проверить его размер и формат, отправить. Хранение множества файлов, поиск среди них и обработка их содержимого моделью — векторное хранилище, поиск по изображениям, ответы на основе содержимого картинок — это задача следующего уровня, и она здесь намеренно не затронута. Семинар 10 достраивает ровно то, что сегодня осталось за кадром: не вводит бинарные данные с нуля, а продолжает с того уровня, на котором мы их сегодня оставили.</a:t>
+              <a:t>Теперь явная граница, за которую этот кейс сознательно не заходит. Бинарные данные мы ввели на уровне «один файл, один известный лимит, одна отправка»: получить файл, проверить размер и формат, отправить. Хранить множество файлов, искать среди них, отдавать их содержимое модели — векторное хранилище, поиск по изображениям, ответы по содержимому картинок — задача следующего уровня, и здесь мы её намеренно не трогаем. Семинар 10 достраивает ровно то, что сегодня осталось за кадром: не вводит бинарные данные с нуля, а продолжает с того уровня, на котором мы их сегодня оставили.</a:t>
             </a:r>
           </a:p>
           <a:p/>
           <a:p>
             <a:r>
-              <a:t>Разница между двумя уровнями не в сложности инструмента, а в самом вопросе, который задаётся. Сегодня вопрос был «дойдёт ли этот конкретный файл в этом конкретном прогоне» — и ответ на него полностью известен заранее, по двум числам: размеру файла и лимиту канала. На следующем уровне вопрос другой — «какой из многих файлов отвечает смыслу запроса» — и у него уже нет ответа, который можно было бы посчитать по двум числам до прогона.</a:t>
+              <a:t>Два уровня различает не сложность инструмента, а сам задаваемый вопрос. Сегодня вопрос был «дойдёт ли этот файл в этом прогоне» — и ответ на него известен заранее целиком, по двум числам: размеру файла и лимиту канала. На следующем уровне вопрос другой — «какой из многих файлов отвечает смыслу запроса» — и у него уже нет ответа, который можно было бы посчитать по двум числам до прогона.</a:t>
             </a:r>
           </a:p>
         </p:txBody>
@@ -6646,25 +6637,25 @@
           <a:p/>
           <a:p>
             <a:r>
-              <a:t>Первый. Собственный лимит n8n по умолчанию на размер бинарных данных — 16 МБ. Для фотографии с текстом этого обычно достаточно, но скан высокого разрешения или фото прямо с телефона — не всегда: именно так выглядел файл в нашей сцене.</a:t>
+              <a:t>Первый. Собственный лимит n8n по умолчанию на размер бинарных данных — 16 МБ. Для фотографии с текстом этого обычно достаточно, но скан высокого разрешения или фото прямо с телефона — не всегда: так и выглядел файл в нашей сцене.</a:t>
             </a:r>
           </a:p>
           <a:p/>
           <a:p>
             <a:r>
-              <a:t>Второй. Лимиты Telegram — отдельный, более узкий потолок, и они разные для фото и для документа. То, что прошло мимо лимита n8n, может всё равно не пройти мимо лимита канала доставки: это два независимых порога, не один, и проверка одного не освобождает от проверки другого. В нашей сцене они разошлись ровно так: шестнадцать мегабайт у самого n8n против десяти с небольшим у отправки фотографии — и файл на двенадцать с лишним мегабайт прошёл первый порог и не прошёл второй.</a:t>
+              <a:t>Второй. Лимиты Telegram — отдельный, более узкий потолок, и они разные для фото и для документа. Прошедшее мимо лимита n8n может всё равно не пройти мимо лимита канала доставки: пороги независимы, их два, и проверка одного не освобождает от проверки другого. В нашей сцене они разошлись ровно так: шестнадцать мегабайт у самого n8n против десяти с небольшим у отправки фотографии — файл на двенадцать с лишним мегабайт прошёл первый порог и не прошёл второй.</a:t>
             </a:r>
           </a:p>
           <a:p/>
           <a:p>
             <a:r>
-              <a:t>Третий. Ручной прогон с бинарными данными потребляет заметно больше памяти, чем автоматический, — это мы уже видели на текстовых данных в прошлом занятии, но на файле разница заметнее, и стоит иметь это в уме, если вы отлаживаете такой узел вживую на своём стенде.</a:t>
+              <a:t>Третий. Ручной прогон с бинарными данными съедает заметно больше памяти, чем автоматический. На текстовых данных мы это видели ещё в прошлом занятии, но на файле разница ощутимее — держите это в уме, если отлаживаете такой узел вживую на своём стенде.</a:t>
             </a:r>
           </a:p>
           <a:p/>
           <a:p>
             <a:r>
-              <a:t>Критерий. Заботиться о бинарных данных как об отдельном контракте нужно всегда, когда в цепочке передаётся файл или изображение, а не только текстовые поля: проверка размера перед отправкой и знание лимита канала доставки — это базовый уровень, без исключений по типу задачи. А не требует этого занятия — ни в деке, ни в вашем собственном процессе дома — ничего сверх: хранение многих файлов, поиск среди них или обработка их содержимого моделью — это следующий уровень, не вводный.</a:t>
+              <a:t>Критерий. Заботиться о бинарных данных как об отдельном контракте нужно всегда, когда по цепочке идёт файл или изображение, а не только текстовые поля: проверить размер перед отправкой и знать лимит канала доставки — базовый уровень, без исключений по типу задачи. Сверх этого занятие не требует ничего — ни в деке, ни в вашем процессе дома: хранить много файлов, искать среди них, отдавать их содержимое модели — следующий уровень, не вводный.</a:t>
             </a:r>
           </a:p>
           <a:p/>
@@ -6740,25 +6731,25 @@
           <a:lstStyle/>
           <a:p>
             <a:r>
-              <a:t>Возвращаемся к таблице, с которой начинали. Правая колонка больше не пустая, и заполняли её не мои слова, а экраны, которые мы только что видели.</a:t>
+              <a:t>Возвращаемся к таблице, с которой начинали. Правая колонка больше не пустая, и заполнили её экраны, которые мы только что видели, а не мои слова.</a:t>
             </a:r>
           </a:p>
           <a:p/>
           <a:p>
             <a:r>
-              <a:t>Первая строка. Сообщение ушло координатору, цепочка стала короче и дешевле без LLM — так выглядело решение после первого кейса. Чем оказалось: LLM-узел для сборки уведомления был просто лишним шагом — то же самое сделал шаблон, без модели, без вариативности и без риска, что текст скажет то, чего в заявке не было вовсе.</a:t>
+              <a:t>Первая строка. Сообщение ушло координатору, цепочка стала короче и дешевле без LLM — так выглядело решение после первого кейса. Чем оказалось: LLM-узел для сборки уведомления был лишним шагом — то же самое сделал шаблон, без модели, без вариативности и без риска, что текст скажет то, чего в заявке не было вовсе.</a:t>
             </a:r>
           </a:p>
           <a:p/>
           <a:p>
             <a:r>
-              <a:t>Вторая строка. Заявка про тот же вопрос пришла снова, и её обработали как новую — пока мы не поставили проверку на повтор. Чем оказалось: без такой проверки каждое повторное обращение запускает всю цепочку с нуля, и ни точное совпадение текста, ни похожесть по общим словам не ловят переформулировку целиком — мы сами посчитали на реальном тексте ноль общих слов между двумя формулировками одного вопроса. Нужна была проверка смыслом, и только на то, что не отсеялось дешёвым фильтром.</a:t>
+              <a:t>Вторая строка. Заявка про тот же вопрос пришла снова, и её обработали как новую — пока мы не поставили проверку на повтор. Чем оказалось: без такой проверки каждое повторное обращение запускает всю цепочку с нуля, и ни точное совпадение текста, ни похожесть по общим словам не ловят переформулировку целиком — мы сами посчитали на настоящем тексте ноль общих слов между двумя формулировками одного вопроса. Нужна была проверка смыслом, и только на то, что не отсеялось дешёвым фильтром.</a:t>
             </a:r>
           </a:p>
           <a:p/>
           <a:p>
             <a:r>
-              <a:t>Третья строка, самая дорогая по цене доказательства. В промте было написано «не возвращай больше суммы X» — и решение месяц считалось надёжным, потому что жалоб не было. Чем оказалось: решение оставалось вероятностным, и модель обходила правило в измеренной доле прогонов — ровно на границе условия, не случайно. Алгоритмический гейт — условие в коде — не ошибся ни разу на том же эксперименте. А дальше мы увидели ту же форму пропуска на масштабе целой компании: Zillow потеряла четверть штата и сотни миллионов долларов на том же пороге без гейта, который у нас стоил одного неловкого разговора с клиентом.</a:t>
+              <a:t>Третья строка, самая дорогая по цене доказательства. В промте стояло «не возвращай больше суммы X» — и решение месяц считалось надёжным, потому что жалоб не было. Чем оказалось: решение оставалось вероятностным, и модель обходила правило в измеренной доле прогонов — ровно на границе условия, не случайно. Алгоритмический гейт, условие в коде, на том же эксперименте не ошибся ни разу. А дальше мы увидели ту же форму пропуска на масштабе целой компании: Zillow потеряла четверть штата и сотни миллионов долларов на том же пороге без гейта, который у нас стоил одного неловкого разговора с клиентом.</a:t>
             </a:r>
           </a:p>
           <a:p/>
@@ -6770,7 +6761,7 @@
           <a:p/>
           <a:p>
             <a:r>
-              <a:t>Все четыре строки — про одно и то же: где в цепочке решение принимает модель, а где должен принимать код, и что молчит, когда эту границу не назвали явно. Разница между «работает» и «можно ручаться» сегодня прошла не по одному узлу, а по каждому шагу цепочки отдельно.</a:t>
+              <a:t>Все четыре строки — про одно: где в цепочке решение принимает модель, а где должен принимать код, и что молчит, когда эту границу не назвали явно. Разница между «работает» и «можно ручаться» прошла сегодня по каждому шагу цепочки отдельно, а не по одному узлу.</a:t>
             </a:r>
           </a:p>
         </p:txBody>
@@ -6840,7 +6831,7 @@
           <a:lstStyle/>
           <a:p>
             <a:r>
-              <a:t>Соберём, что добавилось сегодня к процессу, с которым вы уже работаете дома.</a:t>
+              <a:t>Соберём, что добавилось сегодня к процессу, с которым вы работаете дома.</a:t>
             </a:r>
           </a:p>
           <a:p/>
@@ -6855,13 +6846,13 @@
               <a:t>student.json</a:t>
             </a:r>
             <a:r>
-              <a:t>, с которым вы ушли с прошлого занятия: форма, извлечение полей, справочник, запись в таблицу, экран результата, плюс повтор и ветка отказа. Сегодня к нему добавились четыре решения, и каждое — замена того, что казалось рабочим, на то, за что можно отвечать.</a:t>
+              <a:t>, с которым вы ушли с прошлого занятия: форма, извлечение полей, справочник, запись в таблицу, экран результата, плюс повтор и ветка отказа. Сегодня к нему добавились четыре решения, и каждое меняет то, что казалось рабочим, на то, за что можно отвечать.</a:t>
             </a:r>
           </a:p>
           <a:p/>
           <a:p>
             <a:r>
-              <a:t>Уведомление координатору теперь собирается подстановкой значений в готовую форму, а не отдельным вызовом модели: тот же текст, без риска, что модель добавит в сообщение деталь, которой в заявке не было. Перед записью заявки встала проверка на повтор в два уровня: дёшево и мгновенно отсекает буквальные повторы, а на то, что осталось, — вопрос смыслом. Решение о возврате денег теперь принимает условие в коде, а не текстовое правило внутри запроса к модели: тот же порог суммы, но без вероятности ошибиться ровно на границе. А доставка картинки в Telegram теперь проверяет размер файла перед отправкой, а не доверяет тому, что получится само.</a:t>
+              <a:t>Уведомление координатору теперь собирается подстановкой значений в готовую форму, а не отдельным вызовом модели: тот же текст, без риска, что модель добавит в сообщение деталь, которой в заявке не было. Перед записью заявки встала проверка на повтор в два уровня: буквальные повторы отсекаются дёшево и мгновенно, а на остальное идёт вопрос смыслом. Решение о возврате денег теперь принимает условие в коде, а не текстовое правило внутри запроса к модели: тот же порог суммы, но без вероятности ошибиться ровно на границе. А доставка картинки в Telegram теперь проверяет размер файла перед отправкой, а не надеется, что получится само.</a:t>
             </a:r>
           </a:p>
           <a:p/>
@@ -6879,7 +6870,7 @@
           <a:p/>
           <a:p>
             <a:r>
-              <a:t>И отдельная просьба, потому что сегодняшнее занятие было плотнее прошлого: не проверяйте все четыре решения за один вечер. Возьмите одно, то, что ближе к вашей собственной работе, и доведите его до состояния, когда вы можете объяснить коллеге, почему оно устроено именно так, — остальные три подождут следующей недели.</a:t>
+              <a:t>И отдельная просьба, потому что сегодняшнее занятие вышло плотнее прошлого: не проверяйте все четыре решения за один вечер. Возьмите одно, ближе к вашей работе, и доведите до того, чтобы объяснить коллеге, почему оно устроено именно так. Остальные три подождут следующей недели.</a:t>
             </a:r>
           </a:p>
         </p:txBody>
@@ -6955,25 +6946,25 @@
           <a:p/>
           <a:p>
             <a:r>
-              <a:t>Весь сегодняшний день каждый шаг цепочки по очереди получал либо модель, либо код — но путь для любой заявки был один и тот же: она проходила по одной и той же последовательности шагов, независимо от того, про что она была. Уведомление собиралось одним способом для всех. Проверка на повтор стояла одна для всех. Решение о возврате принималось одной логикой для любой суммы.</a:t>
+              <a:t>Весь сегодняшний день каждый шаг цепочки по очереди получал либо модель, либо код — а путь для любой заявки оставался один: одна и та же последовательность шагов, про что бы заявка ни была. Уведомление собиралось одним способом для всех. Проверка на повтор стояла одна для всех. Решение о возврате принималось одной логикой для любой суммы.</a:t>
             </a:r>
           </a:p>
           <a:p/>
           <a:p>
             <a:r>
-              <a:t>Но тема заявки у нас уже выделена отдельным полем ещё с прошлого занятия, и как только она выделена, видно, что заявка про оплату и заявка про перенос занятия должны идти дальше по-разному: одна — к бухгалтеру, другая — в расписание. Одной и той же дорогой это не делается.</a:t>
+              <a:t>Но тема заявки выделена отдельным полем ещё с прошлого занятия, и как только она выделена, видно: заявка про оплату и заявка про перенос занятия должны идти дальше по-разному — одна к бухгалтеру, другая в расписание. Одной дорогой это не делается.</a:t>
             </a:r>
           </a:p>
           <a:p/>
           <a:p>
             <a:r>
-              <a:t>На схеме это две строки. Верхняя, бледная, — сегодняшний день: любая заявка, одна цепочка, один выход. Нижняя — то, чего в цепочке пока нет: заявка приходит на развилку, развилка смотрит на тему и выбирает, куда её отправить. Две ветки там названы, а третья нарисована пунктиром — это вход, который не подошёл ни под одну названную ветку. Она пунктирная не потому, что сломана, а потому, что её никто не выбирал: она появляется сама, и большую часть времени про неё вспоминают, когда по ней уже что-то ушло.</a:t>
+              <a:t>На схеме это две строки. Верхняя, бледная, — сегодняшний день: любая заявка, одна цепочка, один выход. Нижняя — то, чего в цепочке пока нет: заявка приходит на развилку, развилка смотрит на тему и выбирает, куда её отправить. Две ветки там названы, а третья нарисована пунктиром — это вход, который не подошёл ни под одну названную ветку. Пунктирная она не от поломки: её никто не выбирал. Она появляется сама, и чаще всего про неё вспоминают, когда по ней уже что-то ушло.</a:t>
             </a:r>
           </a:p>
           <a:p/>
           <a:p>
             <a:r>
-              <a:t>Следующее занятие — про развилку. Условие против переключателя: когда ветвление решает одно условие «да или нет», а когда нужен выбор из нескольких веток сразу. Классификация как отдельный шаг цепочки, который определяет, в какую ветку заявка пойдёт дальше. Что делать со входом, который не подошёл ни под одну из названных веток — у инструмента на этот случай есть ответ по умолчанию, и он не всегда тот, что вы ожидаете. И одна вещь, которую я скажу заранее, чтобы вы не поверили в обратное сами: ветки, которые на холсте выглядят параллельными, на самом деле выполняются по очереди, одна за другой, в порядке их положения на экране.</a:t>
+              <a:t>Следующее занятие — про развилку. Условие против переключателя: когда ветвление решает одно условие «да или нет», а когда нужен выбор из нескольких веток сразу. Классификация как отдельный шаг цепочки, который определяет, в какую ветку заявка пойдёт дальше. Что делать со входом, который не подошёл ни под одну из названных веток: у инструмента на этот случай есть ответ по умолчанию, и он не всегда тот, что вы ожидаете. И одно скажу заранее, чтобы вы не поверили в обратное сами: ветки, которые на холсте выглядят параллельными, выполняются по очереди, одна за другой, в порядке их положения на экране.</a:t>
             </a:r>
           </a:p>
           <a:p/>
@@ -7079,19 +7070,19 @@
           <a:p/>
           <a:p>
             <a:r>
-              <a:t>Выбирайте не по ощущению, а прикиньте: какой из четырёх способов надёжно даст текст, совпадающий с тем, что просила Ольга, на любой заявке, а не только на удачной.</a:t>
+              <a:t>Не выбирайте по ощущению — прикиньте: какой из четырёх способов надёжно даст текст, совпадающий с тем, что просила Ольга, на любой заявке, а не только на удачной.</a:t>
             </a:r>
           </a:p>
           <a:p/>
           <a:p>
             <a:r>
-              <a:t>Обратите внимание, что карточки выстроены спектром, не вразнобой: слева — вариант, где всю работу делает модель, справа — где всю работу делает алгоритм, а между ними — два смешанных варианта, каждый со своим способом разделить работу между моделью и кодом. Это сделано намеренно: вопрос не «модель или код», а «сколько именно работы в этой конкретной задаче реально требует интерпретации, а сколько — просто подстановки уже известного».</a:t>
+              <a:t>Карточки выстроены спектром, не вразнобой: слева — вариант, где всю работу делает модель, справа — где всю работу делает алгоритм, а между ними — два смешанных варианта, каждый со своим способом разделить работу между моделью и кодом. Это сделано намеренно: вопрос не «модель или код», а «сколько работы в этой задаче требует интерпретации, а сколько — подстановки уже известного».</a:t>
             </a:r>
           </a:p>
           <a:p/>
           <a:p>
             <a:r>
-              <a:t>Ни одна карточка здесь не отмечена как заведомо слабая — у каждой из четырёх есть ситуация в принципе, где она была бы разумным выбором. Сегодняшний вопрос — именно под потребность Ольги, с её конкретным примером текста и с уже структурированными значениями на входе. Для другой потребности, с другим набором известных и неизвестных значений, ответ мог бы быть другим — это стоит держать в голове, выбирая карточку, но разбирать мы будем именно эту, сегодняшнюю.</a:t>
+              <a:t>Ни одна карточка здесь не отмечена как заведомо слабая — у каждой из четырёх есть ситуация в принципе, где она была бы разумным выбором. Сегодняшний вопрос — именно под потребность Ольги, с её конкретным примером текста и с уже структурированными значениями на входе. Для другой потребности, с другим набором известных и неизвестных значений, ответ мог бы быть другим — но разбирать мы будем сегодняшнюю.</a:t>
             </a:r>
           </a:p>
           <a:p/>
@@ -7167,19 +7158,19 @@
           <a:lstStyle/>
           <a:p>
             <a:r>
-              <a:t>Разбираем четыре действия по очереди, и сразу скажу: ни одно из них не глупость — у каждого есть ситуация, где оно было бы правильным выбором. Вопрос в том, какая ситуация перед нами на самом деле.</a:t>
+              <a:t>Разбираем четыре действия по очереди, и сразу скажу: ни одно из них не глупость — у каждого есть ситуация, где оно было бы правильным выбором. Вопрос в том, какая ситуация перед нами.</a:t>
             </a:r>
           </a:p>
           <a:p/>
           <a:p>
             <a:r>
-              <a:t>Первое — модель пишет весь текст целиком. Она умеет это сделать, вопросов нет, и текст у неё получается живой, не казённой фразой. Но смотрите, что у неё на входе: все три значения — имя, тема, дополнительные темы — уже извлечены, структурированы и лежат готовыми. Модели нечего интерпретировать, ей просто нечего добавить к тому, что и так известно. А раз она всё равно генерирует текст свободно на каждом прогоне, у неё остаётся шанс вписать в сообщение деталь, которой в заявке не было — чуть позже мы увидим это на настоящем прогоне, не в теории.</a:t>
+              <a:t>Первое — модель пишет весь текст целиком. Она умеет это сделать, вопросов нет, и текст у неё получается живой. Но смотрите, что у неё на входе: все три значения — имя, тема, дополнительные темы — уже извлечены, структурированы и лежат готовыми. Модели нечего интерпретировать — нечего добавить к тому, что и так известно. А раз она всё равно генерирует текст свободно на каждом прогоне, у неё остаётся шанс вписать в сообщение деталь, которой в заявке не было — чуть позже мы увидим это на настоящем прогоне.</a:t>
             </a:r>
           </a:p>
           <a:p/>
           <a:p>
             <a:r>
-              <a:t>Второе — алгоритм заполняет форму целиком. Это ровно тот объём работы, который реально нужен: три значения уже есть, форма сообщения всегда одна и та же, вариативности по сути не требуется. Результат предсказуемо совпадает с тем примером текста, который просила Ольга.</a:t>
+              <a:t>Второе — алгоритм заполняет форму целиком. Это ровно тот объём работы, который нужен: три значения уже есть, форма сообщения всегда одна и та же, вариативности по сути не требуется. Результат предсказуемо совпадает с тем примером текста, который просила Ольга.</a:t>
             </a:r>
           </a:p>
           <a:p/>
@@ -7197,7 +7188,7 @@
           <a:p/>
           <a:p>
             <a:r>
-              <a:t>Какое действие на самом деле закрывает нашу потребность — следующий экран.</a:t>
+              <a:t>Какое действие закрывает нашу потребность — следующий экран.</a:t>
             </a:r>
           </a:p>
         </p:txBody>
@@ -7279,19 +7270,19 @@
           <a:p/>
           <a:p>
             <a:r>
-              <a:t>Смотрите на три остальные колонки: они в обеих строках одинаковы и нарочно приглушены. Форма заявки, извлечение полей, отправка в Telegram — ни один из этих узлов правкой не затронут. Это и есть главное, что должна показать схема: мы меняем один узел, а не переписываем цепочку.</a:t>
+              <a:t>Смотрите на три остальные колонки: они в обеих строках одинаковы и нарочно приглушены. Форма заявки, извлечение полей, отправка в Telegram — ни один из этих узлов правкой не затронут. Это и есть то, что должна показать схема: мы меняем один узел, а не переписываем цепочку.</a:t>
             </a:r>
           </a:p>
           <a:p/>
           <a:p>
             <a:r>
-              <a:t>Главное отличие по сути — не инструмент, а момент принятия решения. В верхней версии решение о том, как будет звучать текст, принимается заново при каждой заявке. В нижней оно принято один раз, заранее, когда форму придумали и зафиксировали, и дальше просто воспроизводится без вариаций. Отсюда прямое следствие для надёжности: у нижнего узла нет пространства для сочинительства — он не может вставить в сообщение деталь, которой не было в заявке, потому что он ничего не сочиняет.</a:t>
+              <a:t>По сути версии различает момент принятия решения. В верхней версии решение о том, как будет звучать текст, принимается заново при каждой заявке. В нижней оно принято один раз, заранее, когда форму придумали и зафиксировали, и дальше просто воспроизводится без вариаций. Отсюда прямое следствие для надёжности: у нижнего узла нет пространства для сочинительства — он не может вставить в сообщение деталь, которой не было в заявке, потому что он ничего не сочиняет.</a:t>
             </a:r>
           </a:p>
           <a:p/>
           <a:p>
             <a:r>
-              <a:t>Почему вообще стоит сначала рисовать такую обезличенную схему, а не сразу открывать настоящий интерфейс. Потому что решение, правильный ли это узел для задачи, не зависит от того, в каком инструменте он собран. Вопрос «вызывает ли этот шаг модель на каждый прогон или решение принято заранее» звучит одинаково на любом движке.</a:t>
+              <a:t>Почему мы сначала рисуем обезличенную схему, а не сразу открываем настоящий интерфейс. Потому что решение, правильный ли это узел для задачи, не зависит от того, в каком инструменте он собран. Вопрос «вызывает ли этот шаг модель на каждый прогон или решение принято заранее» звучит одинаково на любом движке.</a:t>
             </a:r>
           </a:p>
           <a:p/>
@@ -11153,7 +11144,7 @@
         <p:spPr>
           <a:xfrm>
             <a:off x="685800" y="1644751"/>
-            <a:ext cx="2288396" cy="282067"/>
+            <a:ext cx="2318612" cy="282067"/>
           </a:xfrm>
           <a:prstGeom prst="rect">
             <a:avLst/>
@@ -11194,8 +11185,8 @@
         </p:nvSpPr>
         <p:spPr>
           <a:xfrm>
-            <a:off x="3120500" y="1644751"/>
-            <a:ext cx="8236347" cy="282067"/>
+            <a:off x="3150716" y="1644751"/>
+            <a:ext cx="8206131" cy="282067"/>
           </a:xfrm>
           <a:prstGeom prst="rect">
             <a:avLst/>
@@ -11237,7 +11228,7 @@
         <p:spPr>
           <a:xfrm>
             <a:off x="685800" y="1926818"/>
-            <a:ext cx="2288396" cy="894842"/>
+            <a:ext cx="2318612" cy="894842"/>
           </a:xfrm>
           <a:prstGeom prst="rect">
             <a:avLst/>
@@ -11278,8 +11269,8 @@
         </p:nvSpPr>
         <p:spPr>
           <a:xfrm>
-            <a:off x="3120500" y="1926818"/>
-            <a:ext cx="8236347" cy="894842"/>
+            <a:off x="3150716" y="1926818"/>
+            <a:ext cx="8206131" cy="894842"/>
           </a:xfrm>
           <a:prstGeom prst="rect">
             <a:avLst/>
@@ -11307,7 +11298,7 @@
                 </a:solidFill>
                 <a:latin typeface="Arial"/>
               </a:rPr>
-              <a:t>Пришло: «Новая заявка от Марии: тема «курс», также упомянуто: оплата.» Текст свободный, но совпал по смыслу с целью — модели хватило инструкции и трёх значений, интерпретировать было действительно просто.</a:t>
+              <a:t>Пришло: «Новая заявка от Марии: тема «курс», также упомянуто: оплата.» Текст свободный, но совпал по смыслу с целью — модели хватило инструкции и трёх значений, интерпретировать здесь было просто.</a:t>
             </a:r>
           </a:p>
         </p:txBody>
@@ -11356,7 +11347,7 @@
         <p:spPr>
           <a:xfrm>
             <a:off x="685800" y="2821660"/>
-            <a:ext cx="2288396" cy="894842"/>
+            <a:ext cx="2318612" cy="894842"/>
           </a:xfrm>
           <a:prstGeom prst="rect">
             <a:avLst/>
@@ -11397,8 +11388,8 @@
         </p:nvSpPr>
         <p:spPr>
           <a:xfrm>
-            <a:off x="3120500" y="2821660"/>
-            <a:ext cx="8236347" cy="894842"/>
+            <a:off x="3150716" y="2821660"/>
+            <a:ext cx="8206131" cy="894842"/>
           </a:xfrm>
           <a:prstGeom prst="rect">
             <a:avLst/>
@@ -18926,7 +18917,7 @@
                 </a:solidFill>
                 <a:latin typeface="Arial"/>
               </a:rPr>
-              <a:t>LLM-судья имеет собственную асимметрию ошибок</a:t>
+              <a:t>У LLM-судьи своя асимметрия ошибок</a:t>
             </a:r>
             <a:r>
               <a:rPr sz="1350" b="0" i="0">
@@ -22081,7 +22072,7 @@
                 </a:solidFill>
                 <a:latin typeface="Arial"/>
               </a:rPr>
-              <a:t>Золотая полоса стоит там же, где и в прошлый раз. Сегодняшние четыре кейса — не подъём выше, а то, что происходит внутри одной и той же ступени, когда к цепочке добавляют новые шаги.</a:t>
+              <a:t>Золотая полоса стоит там же, где и в прошлый раз. Сегодняшние четыре кейса происходят внутри одной и той же ступени: к цепочке добавляют новые шаги, а выше она не поднимается.</a:t>
             </a:r>
           </a:p>
         </p:txBody>
@@ -22205,11 +22196,11 @@
         <p:spPr>
           <a:xfrm>
             <a:off x="502920" y="943356"/>
-            <a:ext cx="11183112" cy="3912616"/>
+            <a:ext cx="11183112" cy="4358259"/>
           </a:xfrm>
           <a:prstGeom prst="roundRect">
             <a:avLst>
-              <a:gd name="adj" fmla="val 7790"/>
+              <a:gd name="adj" fmla="val 6993"/>
             </a:avLst>
           </a:prstGeom>
           <a:solidFill>
@@ -22253,7 +22244,7 @@
         <p:spPr>
           <a:xfrm>
             <a:off x="685800" y="1126236"/>
-            <a:ext cx="1730785" cy="259587"/>
+            <a:ext cx="1815568" cy="267081"/>
           </a:xfrm>
           <a:prstGeom prst="rect">
             <a:avLst/>
@@ -22268,14 +22259,14 @@
           <a:p>
             <a:pPr algn="l">
               <a:lnSpc>
-                <a:spcPts val="1100"/>
+                <a:spcPts val="1155"/>
               </a:lnSpc>
               <a:spcAft>
                 <a:spcPts val="0"/>
               </a:spcAft>
             </a:pPr>
             <a:r>
-              <a:rPr sz="1000" b="1" i="0">
+              <a:rPr sz="1050" b="1" i="0">
                 <a:solidFill>
                   <a:srgbClr val="6B7685"/>
                 </a:solidFill>
@@ -22294,8 +22285,8 @@
         </p:nvSpPr>
         <p:spPr>
           <a:xfrm>
-            <a:off x="2562889" y="1126236"/>
-            <a:ext cx="1915154" cy="259587"/>
+            <a:off x="2647672" y="1126236"/>
+            <a:ext cx="1895608" cy="267081"/>
           </a:xfrm>
           <a:prstGeom prst="rect">
             <a:avLst/>
@@ -22310,14 +22301,14 @@
           <a:p>
             <a:pPr algn="l">
               <a:lnSpc>
-                <a:spcPts val="1100"/>
+                <a:spcPts val="1155"/>
               </a:lnSpc>
               <a:spcAft>
                 <a:spcPts val="0"/>
               </a:spcAft>
             </a:pPr>
             <a:r>
-              <a:rPr sz="1000" b="1" i="0">
+              <a:rPr sz="1050" b="1" i="0">
                 <a:solidFill>
                   <a:srgbClr val="6B7685"/>
                 </a:solidFill>
@@ -22336,8 +22327,8 @@
         </p:nvSpPr>
         <p:spPr>
           <a:xfrm>
-            <a:off x="4624348" y="1126236"/>
-            <a:ext cx="2126649" cy="259587"/>
+            <a:off x="4689584" y="1126236"/>
+            <a:ext cx="2105019" cy="267081"/>
           </a:xfrm>
           <a:prstGeom prst="rect">
             <a:avLst/>
@@ -22352,14 +22343,14 @@
           <a:p>
             <a:pPr algn="l">
               <a:lnSpc>
-                <a:spcPts val="1100"/>
+                <a:spcPts val="1155"/>
               </a:lnSpc>
               <a:spcAft>
                 <a:spcPts val="0"/>
               </a:spcAft>
             </a:pPr>
             <a:r>
-              <a:rPr sz="1000" b="1" i="0">
+              <a:rPr sz="1050" b="1" i="0">
                 <a:solidFill>
                   <a:srgbClr val="6B7685"/>
                 </a:solidFill>
@@ -22378,8 +22369,8 @@
         </p:nvSpPr>
         <p:spPr>
           <a:xfrm>
-            <a:off x="6897302" y="1126236"/>
-            <a:ext cx="4459545" cy="259587"/>
+            <a:off x="6940907" y="1126236"/>
+            <a:ext cx="4415940" cy="267081"/>
           </a:xfrm>
           <a:prstGeom prst="rect">
             <a:avLst/>
@@ -22394,14 +22385,14 @@
           <a:p>
             <a:pPr algn="l">
               <a:lnSpc>
-                <a:spcPts val="1100"/>
+                <a:spcPts val="1155"/>
               </a:lnSpc>
               <a:spcAft>
                 <a:spcPts val="0"/>
               </a:spcAft>
             </a:pPr>
             <a:r>
-              <a:rPr sz="1000" b="1" i="0">
+              <a:rPr sz="1050" b="1" i="0">
                 <a:solidFill>
                   <a:srgbClr val="6B7685"/>
                 </a:solidFill>
@@ -22420,8 +22411,8 @@
         </p:nvSpPr>
         <p:spPr>
           <a:xfrm>
-            <a:off x="685800" y="1385824"/>
-            <a:ext cx="1730785" cy="748791"/>
+            <a:off x="685800" y="1393317"/>
+            <a:ext cx="1815568" cy="931354"/>
           </a:xfrm>
           <a:prstGeom prst="rect">
             <a:avLst/>
@@ -22436,14 +22427,14 @@
           <a:p>
             <a:pPr algn="l">
               <a:lnSpc>
-                <a:spcPts val="1150"/>
+                <a:spcPts val="1207"/>
               </a:lnSpc>
               <a:spcAft>
                 <a:spcPts val="0"/>
               </a:spcAft>
             </a:pPr>
             <a:r>
-              <a:rPr sz="1000" b="1" i="0">
+              <a:rPr sz="1050" b="1" i="0">
                 <a:solidFill>
                   <a:srgbClr val="141B2E"/>
                 </a:solidFill>
@@ -22462,8 +22453,8 @@
         </p:nvSpPr>
         <p:spPr>
           <a:xfrm>
-            <a:off x="2562889" y="1385824"/>
-            <a:ext cx="1915154" cy="748791"/>
+            <a:off x="2647672" y="1393317"/>
+            <a:ext cx="1895608" cy="931354"/>
           </a:xfrm>
           <a:prstGeom prst="rect">
             <a:avLst/>
@@ -22478,14 +22469,14 @@
           <a:p>
             <a:pPr algn="l">
               <a:lnSpc>
-                <a:spcPts val="1150"/>
+                <a:spcPts val="1207"/>
               </a:lnSpc>
               <a:spcAft>
                 <a:spcPts val="0"/>
               </a:spcAft>
             </a:pPr>
             <a:r>
-              <a:rPr sz="1000" b="0" i="0">
+              <a:rPr sz="1050" b="0" i="0">
                 <a:solidFill>
                   <a:srgbClr val="141B2E"/>
                 </a:solidFill>
@@ -22504,8 +22495,8 @@
         </p:nvSpPr>
         <p:spPr>
           <a:xfrm>
-            <a:off x="4624348" y="1385824"/>
-            <a:ext cx="2126649" cy="748791"/>
+            <a:off x="4689584" y="1393317"/>
+            <a:ext cx="2105019" cy="931354"/>
           </a:xfrm>
           <a:prstGeom prst="rect">
             <a:avLst/>
@@ -22520,14 +22511,14 @@
           <a:p>
             <a:pPr algn="l">
               <a:lnSpc>
-                <a:spcPts val="1150"/>
+                <a:spcPts val="1207"/>
               </a:lnSpc>
               <a:spcAft>
                 <a:spcPts val="0"/>
               </a:spcAft>
             </a:pPr>
             <a:r>
-              <a:rPr sz="1000" b="0" i="0">
+              <a:rPr sz="1050" b="0" i="0">
                 <a:solidFill>
                   <a:srgbClr val="141B2E"/>
                 </a:solidFill>
@@ -22536,7 +22527,7 @@
               <a:t>Измерено: версия 1 ошибалась 9/101 на границе, уточнённая формулировка — </a:t>
             </a:r>
             <a:r>
-              <a:rPr sz="1000" b="1" i="0">
+              <a:rPr sz="1050" b="1" i="0">
                 <a:solidFill>
                   <a:srgbClr val="141B2E"/>
                 </a:solidFill>
@@ -22545,7 +22536,7 @@
               <a:t>100/100</a:t>
             </a:r>
             <a:r>
-              <a:rPr sz="1000" b="0" i="0">
+              <a:rPr sz="1050" b="0" i="0">
                 <a:solidFill>
                   <a:srgbClr val="141B2E"/>
                 </a:solidFill>
@@ -22564,8 +22555,8 @@
         </p:nvSpPr>
         <p:spPr>
           <a:xfrm>
-            <a:off x="6897302" y="1385824"/>
-            <a:ext cx="4459545" cy="748791"/>
+            <a:off x="6940907" y="1393317"/>
+            <a:ext cx="4415940" cy="931354"/>
           </a:xfrm>
           <a:prstGeom prst="rect">
             <a:avLst/>
@@ -22580,14 +22571,14 @@
           <a:p>
             <a:pPr algn="l">
               <a:lnSpc>
-                <a:spcPts val="1150"/>
+                <a:spcPts val="1207"/>
               </a:lnSpc>
               <a:spcAft>
                 <a:spcPts val="0"/>
               </a:spcAft>
             </a:pPr>
             <a:r>
-              <a:rPr sz="1000" b="0" i="0">
+              <a:rPr sz="1050" b="0" i="0">
                 <a:solidFill>
                   <a:srgbClr val="141B2E"/>
                 </a:solidFill>
@@ -22606,7 +22597,7 @@
         </p:nvCxnSpPr>
         <p:spPr>
           <a:xfrm>
-            <a:off x="685800" y="2134616"/>
+            <a:off x="685800" y="2324671"/>
             <a:ext cx="10817352" cy="0"/>
           </a:xfrm>
           <a:prstGeom prst="line">
@@ -22641,8 +22632,8 @@
         </p:nvSpPr>
         <p:spPr>
           <a:xfrm>
-            <a:off x="685800" y="2134616"/>
-            <a:ext cx="1730785" cy="1040891"/>
+            <a:off x="685800" y="2324671"/>
+            <a:ext cx="1815568" cy="1084706"/>
           </a:xfrm>
           <a:prstGeom prst="rect">
             <a:avLst/>
@@ -22657,14 +22648,14 @@
           <a:p>
             <a:pPr algn="l">
               <a:lnSpc>
-                <a:spcPts val="1150"/>
+                <a:spcPts val="1207"/>
               </a:lnSpc>
               <a:spcAft>
                 <a:spcPts val="0"/>
               </a:spcAft>
             </a:pPr>
             <a:r>
-              <a:rPr sz="1000" b="1" i="0">
+              <a:rPr sz="1050" b="1" i="0">
                 <a:solidFill>
                   <a:srgbClr val="141B2E"/>
                 </a:solidFill>
@@ -22683,8 +22674,8 @@
         </p:nvSpPr>
         <p:spPr>
           <a:xfrm>
-            <a:off x="2562889" y="2134616"/>
-            <a:ext cx="1915154" cy="1040891"/>
+            <a:off x="2647672" y="2324671"/>
+            <a:ext cx="1895608" cy="1084706"/>
           </a:xfrm>
           <a:prstGeom prst="rect">
             <a:avLst/>
@@ -22699,14 +22690,14 @@
           <a:p>
             <a:pPr algn="l">
               <a:lnSpc>
-                <a:spcPts val="1150"/>
+                <a:spcPts val="1207"/>
               </a:lnSpc>
               <a:spcAft>
                 <a:spcPts val="0"/>
               </a:spcAft>
             </a:pPr>
             <a:r>
-              <a:rPr sz="1000" b="0" i="0">
+              <a:rPr sz="1050" b="0" i="0">
                 <a:solidFill>
                   <a:srgbClr val="141B2E"/>
                 </a:solidFill>
@@ -22725,8 +22716,8 @@
         </p:nvSpPr>
         <p:spPr>
           <a:xfrm>
-            <a:off x="4624348" y="2134616"/>
-            <a:ext cx="2126649" cy="1040891"/>
+            <a:off x="4689584" y="2324671"/>
+            <a:ext cx="2105019" cy="1084706"/>
           </a:xfrm>
           <a:prstGeom prst="rect">
             <a:avLst/>
@@ -22741,14 +22732,14 @@
           <a:p>
             <a:pPr algn="l">
               <a:lnSpc>
-                <a:spcPts val="1150"/>
+                <a:spcPts val="1207"/>
               </a:lnSpc>
               <a:spcAft>
                 <a:spcPts val="0"/>
               </a:spcAft>
             </a:pPr>
             <a:r>
-              <a:rPr sz="1000" b="0" i="0">
+              <a:rPr sz="1050" b="0" i="0">
                 <a:solidFill>
                   <a:srgbClr val="141B2E"/>
                 </a:solidFill>
@@ -22767,8 +22758,8 @@
         </p:nvSpPr>
         <p:spPr>
           <a:xfrm>
-            <a:off x="6897302" y="2134616"/>
-            <a:ext cx="4459545" cy="1040891"/>
+            <a:off x="6940907" y="2324671"/>
+            <a:ext cx="4415940" cy="1084706"/>
           </a:xfrm>
           <a:prstGeom prst="rect">
             <a:avLst/>
@@ -22783,14 +22774,14 @@
           <a:p>
             <a:pPr algn="l">
               <a:lnSpc>
-                <a:spcPts val="1150"/>
+                <a:spcPts val="1207"/>
               </a:lnSpc>
               <a:spcAft>
                 <a:spcPts val="0"/>
               </a:spcAft>
             </a:pPr>
             <a:r>
-              <a:rPr sz="1000" b="0" i="0">
+              <a:rPr sz="1050" b="0" i="0">
                 <a:solidFill>
                   <a:srgbClr val="141B2E"/>
                 </a:solidFill>
@@ -22799,7 +22790,7 @@
               <a:t>Модель сначала извлекает сумму из текста — тот же вероятностный шаг, затем сама решает, вызывать ли инструмент: вероятностность не исчезает, переезжает раньше. Измерено: </a:t>
             </a:r>
             <a:r>
-              <a:rPr sz="1000" b="1" i="0">
+              <a:rPr sz="1050" b="1" i="0">
                 <a:solidFill>
                   <a:srgbClr val="141B2E"/>
                 </a:solidFill>
@@ -22808,7 +22799,7 @@
               <a:t>56/100</a:t>
             </a:r>
             <a:r>
-              <a:rPr sz="1000" b="0" i="0">
+              <a:rPr sz="1050" b="0" i="0">
                 <a:solidFill>
                   <a:srgbClr val="141B2E"/>
                 </a:solidFill>
@@ -22827,7 +22818,7 @@
         </p:nvCxnSpPr>
         <p:spPr>
           <a:xfrm>
-            <a:off x="685800" y="3175507"/>
+            <a:off x="685800" y="3409378"/>
             <a:ext cx="10817352" cy="0"/>
           </a:xfrm>
           <a:prstGeom prst="line">
@@ -22862,8 +22853,8 @@
         </p:nvSpPr>
         <p:spPr>
           <a:xfrm>
-            <a:off x="685800" y="3175507"/>
-            <a:ext cx="1730785" cy="748791"/>
+            <a:off x="685800" y="3409378"/>
+            <a:ext cx="1815568" cy="931354"/>
           </a:xfrm>
           <a:prstGeom prst="rect">
             <a:avLst/>
@@ -22878,14 +22869,14 @@
           <a:p>
             <a:pPr algn="l">
               <a:lnSpc>
-                <a:spcPts val="1150"/>
+                <a:spcPts val="1207"/>
               </a:lnSpc>
               <a:spcAft>
                 <a:spcPts val="0"/>
               </a:spcAft>
             </a:pPr>
             <a:r>
-              <a:rPr sz="1000" b="1" i="0">
+              <a:rPr sz="1050" b="1" i="0">
                 <a:solidFill>
                   <a:srgbClr val="141B2E"/>
                 </a:solidFill>
@@ -22894,7 +22885,7 @@
               <a:t>Поставить </a:t>
             </a:r>
             <a:r>
-              <a:rPr sz="1000" b="1" i="0">
+              <a:rPr sz="1050" b="1" i="0">
                 <a:solidFill>
                   <a:srgbClr val="141B2E"/>
                 </a:solidFill>
@@ -22903,7 +22894,7 @@
               <a:t>IF</a:t>
             </a:r>
             <a:r>
-              <a:rPr sz="1000" b="1" i="0">
+              <a:rPr sz="1050" b="1" i="0">
                 <a:solidFill>
                   <a:srgbClr val="141B2E"/>
                 </a:solidFill>
@@ -22922,8 +22913,8 @@
         </p:nvSpPr>
         <p:spPr>
           <a:xfrm>
-            <a:off x="2562889" y="3175507"/>
-            <a:ext cx="1915154" cy="748791"/>
+            <a:off x="2647672" y="3409378"/>
+            <a:ext cx="1895608" cy="931354"/>
           </a:xfrm>
           <a:prstGeom prst="rect">
             <a:avLst/>
@@ -22938,14 +22929,14 @@
           <a:p>
             <a:pPr algn="l">
               <a:lnSpc>
-                <a:spcPts val="1150"/>
+                <a:spcPts val="1207"/>
               </a:lnSpc>
               <a:spcAft>
                 <a:spcPts val="0"/>
               </a:spcAft>
             </a:pPr>
             <a:r>
-              <a:rPr sz="1000" b="0" i="0">
+              <a:rPr sz="1050" b="0" i="0">
                 <a:solidFill>
                   <a:srgbClr val="141B2E"/>
                 </a:solidFill>
@@ -22964,8 +22955,8 @@
         </p:nvSpPr>
         <p:spPr>
           <a:xfrm>
-            <a:off x="4624348" y="3175507"/>
-            <a:ext cx="2126649" cy="748791"/>
+            <a:off x="4689584" y="3409378"/>
+            <a:ext cx="2105019" cy="931354"/>
           </a:xfrm>
           <a:prstGeom prst="rect">
             <a:avLst/>
@@ -22980,14 +22971,14 @@
           <a:p>
             <a:pPr algn="l">
               <a:lnSpc>
-                <a:spcPts val="1150"/>
+                <a:spcPts val="1207"/>
               </a:lnSpc>
               <a:spcAft>
                 <a:spcPts val="0"/>
               </a:spcAft>
             </a:pPr>
             <a:r>
-              <a:rPr sz="1000" b="0" i="0">
+              <a:rPr sz="1050" b="0" i="0">
                 <a:solidFill>
                   <a:srgbClr val="141B2E"/>
                 </a:solidFill>
@@ -22996,7 +22987,7 @@
               <a:t>Устраняет вероятностность из точки решения. Измерено: </a:t>
             </a:r>
             <a:r>
-              <a:rPr sz="1000" b="1" i="0">
+              <a:rPr sz="1050" b="1" i="0">
                 <a:solidFill>
                   <a:srgbClr val="141B2E"/>
                 </a:solidFill>
@@ -23005,7 +22996,7 @@
               <a:t>0/101</a:t>
             </a:r>
             <a:r>
-              <a:rPr sz="1000" b="0" i="0">
+              <a:rPr sz="1050" b="0" i="0">
                 <a:solidFill>
                   <a:srgbClr val="141B2E"/>
                 </a:solidFill>
@@ -23024,8 +23015,8 @@
         </p:nvSpPr>
         <p:spPr>
           <a:xfrm>
-            <a:off x="6897302" y="3175507"/>
-            <a:ext cx="4459545" cy="748791"/>
+            <a:off x="6940907" y="3409378"/>
+            <a:ext cx="4415940" cy="931354"/>
           </a:xfrm>
           <a:prstGeom prst="rect">
             <a:avLst/>
@@ -23040,14 +23031,14 @@
           <a:p>
             <a:pPr algn="l">
               <a:lnSpc>
-                <a:spcPts val="1150"/>
+                <a:spcPts val="1207"/>
               </a:lnSpc>
               <a:spcAft>
                 <a:spcPts val="0"/>
               </a:spcAft>
             </a:pPr>
             <a:r>
-              <a:rPr sz="1000" b="0" i="0">
+              <a:rPr sz="1050" b="0" i="0">
                 <a:solidFill>
                   <a:srgbClr val="141B2E"/>
                 </a:solidFill>
@@ -23066,7 +23057,7 @@
         </p:nvCxnSpPr>
         <p:spPr>
           <a:xfrm>
-            <a:off x="685800" y="3924299"/>
+            <a:off x="685800" y="4340732"/>
             <a:ext cx="10817352" cy="0"/>
           </a:xfrm>
           <a:prstGeom prst="line">
@@ -23101,8 +23092,8 @@
         </p:nvSpPr>
         <p:spPr>
           <a:xfrm>
-            <a:off x="685800" y="3924299"/>
-            <a:ext cx="1730785" cy="748791"/>
+            <a:off x="685800" y="4340732"/>
+            <a:ext cx="1815568" cy="778002"/>
           </a:xfrm>
           <a:prstGeom prst="rect">
             <a:avLst/>
@@ -23117,14 +23108,14 @@
           <a:p>
             <a:pPr algn="l">
               <a:lnSpc>
-                <a:spcPts val="1150"/>
+                <a:spcPts val="1207"/>
               </a:lnSpc>
               <a:spcAft>
                 <a:spcPts val="0"/>
               </a:spcAft>
             </a:pPr>
             <a:r>
-              <a:rPr sz="1000" b="1" i="0">
+              <a:rPr sz="1050" b="1" i="0">
                 <a:solidFill>
                   <a:srgbClr val="141B2E"/>
                 </a:solidFill>
@@ -23143,8 +23134,8 @@
         </p:nvSpPr>
         <p:spPr>
           <a:xfrm>
-            <a:off x="2562889" y="3924299"/>
-            <a:ext cx="1915154" cy="748791"/>
+            <a:off x="2647672" y="4340732"/>
+            <a:ext cx="1895608" cy="778002"/>
           </a:xfrm>
           <a:prstGeom prst="rect">
             <a:avLst/>
@@ -23159,14 +23150,14 @@
           <a:p>
             <a:pPr algn="l">
               <a:lnSpc>
-                <a:spcPts val="1150"/>
+                <a:spcPts val="1207"/>
               </a:lnSpc>
               <a:spcAft>
                 <a:spcPts val="0"/>
               </a:spcAft>
             </a:pPr>
             <a:r>
-              <a:rPr sz="1000" b="0" i="0">
+              <a:rPr sz="1050" b="0" i="0">
                 <a:solidFill>
                   <a:srgbClr val="141B2E"/>
                 </a:solidFill>
@@ -23185,8 +23176,8 @@
         </p:nvSpPr>
         <p:spPr>
           <a:xfrm>
-            <a:off x="4624348" y="3924299"/>
-            <a:ext cx="2126649" cy="748791"/>
+            <a:off x="4689584" y="4340732"/>
+            <a:ext cx="2105019" cy="778002"/>
           </a:xfrm>
           <a:prstGeom prst="rect">
             <a:avLst/>
@@ -23201,14 +23192,14 @@
           <a:p>
             <a:pPr algn="l">
               <a:lnSpc>
-                <a:spcPts val="1150"/>
+                <a:spcPts val="1207"/>
               </a:lnSpc>
               <a:spcAft>
                 <a:spcPts val="0"/>
               </a:spcAft>
             </a:pPr>
             <a:r>
-              <a:rPr sz="1000" b="0" i="0">
+              <a:rPr sz="1050" b="0" i="0">
                 <a:solidFill>
                   <a:srgbClr val="141B2E"/>
                 </a:solidFill>
@@ -23227,8 +23218,8 @@
         </p:nvSpPr>
         <p:spPr>
           <a:xfrm>
-            <a:off x="6897302" y="3924299"/>
-            <a:ext cx="4459545" cy="748791"/>
+            <a:off x="6940907" y="4340732"/>
+            <a:ext cx="4415940" cy="778002"/>
           </a:xfrm>
           <a:prstGeom prst="rect">
             <a:avLst/>
@@ -23243,14 +23234,14 @@
           <a:p>
             <a:pPr algn="l">
               <a:lnSpc>
-                <a:spcPts val="1150"/>
+                <a:spcPts val="1207"/>
               </a:lnSpc>
               <a:spcAft>
                 <a:spcPts val="0"/>
               </a:spcAft>
             </a:pPr>
             <a:r>
-              <a:rPr sz="1000" b="0" i="0">
+              <a:rPr sz="1050" b="0" i="0">
                 <a:solidFill>
                   <a:srgbClr val="141B2E"/>
                 </a:solidFill>
@@ -23269,8 +23260,8 @@
         </p:nvSpPr>
         <p:spPr>
           <a:xfrm>
-            <a:off x="502920" y="5020564"/>
-            <a:ext cx="82296" cy="794004"/>
+            <a:off x="502920" y="5466207"/>
+            <a:ext cx="82296" cy="817625"/>
           </a:xfrm>
           <a:prstGeom prst="roundRect">
             <a:avLst>
@@ -23315,8 +23306,8 @@
         </p:nvSpPr>
         <p:spPr>
           <a:xfrm>
-            <a:off x="859536" y="5148580"/>
-            <a:ext cx="10643616" cy="537972"/>
+            <a:off x="859536" y="5594223"/>
+            <a:ext cx="10643616" cy="561593"/>
           </a:xfrm>
           <a:prstGeom prst="rect">
             <a:avLst/>
@@ -23331,14 +23322,14 @@
           <a:p>
             <a:pPr algn="l">
               <a:lnSpc>
-                <a:spcPts val="1364"/>
+                <a:spcPts val="1426"/>
               </a:lnSpc>
               <a:spcAft>
                 <a:spcPts val="300"/>
               </a:spcAft>
             </a:pPr>
             <a:r>
-              <a:rPr sz="1100" b="1" i="0">
+              <a:rPr sz="1150" b="1" i="0">
                 <a:solidFill>
                   <a:srgbClr val="141B2E"/>
                 </a:solidFill>
@@ -23347,13 +23338,13 @@
               <a:t>Мостик дальше.</a:t>
             </a:r>
             <a:r>
-              <a:rPr sz="1100" b="1" i="0">
-                <a:solidFill>
-                  <a:srgbClr val="141B2E"/>
-                </a:solidFill>
-                <a:latin typeface="Arial"/>
-              </a:rPr>
-              <a:t> Одно действие измеримо исправило конкретную находку, одно измеримо провалилось, одно устраняет риск структурно и подтверждено измерением, одно меняет вход раньше решения и не нуждается в метрике точности. Какое из них нужно именно здесь — решает не спор за столом, а измерение, которое вы уже видите в этой таблице: следующий такт показывает, как оно было устроено.</a:t>
+              <a:rPr sz="1150" b="1" i="0">
+                <a:solidFill>
+                  <a:srgbClr val="141B2E"/>
+                </a:solidFill>
+                <a:latin typeface="Arial"/>
+              </a:rPr>
+              <a:t> Одно действие измеримо исправило конкретную находку, одно измеримо провалилось, одно устраняет риск структурно и подтверждено измерением, одно меняет вход раньше решения и не нуждается в метрике точности. Какое из них нужно здесь, показывает измерение — то самое, что уже стоит в этой таблице. Следующий такт — как оно было устроено.</a:t>
             </a:r>
           </a:p>
         </p:txBody>
@@ -23584,7 +23575,7 @@
                 </a:solidFill>
                 <a:latin typeface="Arial"/>
               </a:rPr>
-              <a:t> Сначала проверяют, что сервис умеет делать то, что от него хотят, и только потом проектируют шаг вокруг него — не наоборот.</a:t>
+              <a:t> Сначала проверяют, что сервис умеет делать то, что от него хотят. Проектируют шаг вокруг него только потом.</a:t>
             </a:r>
           </a:p>
         </p:txBody>
@@ -29613,7 +29604,7 @@
                 </a:solidFill>
                 <a:latin typeface="Arial"/>
               </a:rPr>
-              <a:t>Правая колонка закроется не вся разом в конце, а по одной строке — сразу после того кейса, который её закрывает. И каждый раз не моим рассказом, а тем, что мы увидим на экране.</a:t>
+              <a:t>Правая колонка закрывается по одной строке — сразу после того кейса, который её закрывает. И каждую строку впишет экран, не мой рассказ.</a:t>
             </a:r>
           </a:p>
         </p:txBody>
@@ -30204,7 +30195,7 @@
                 </a:solidFill>
                 <a:latin typeface="Arial"/>
               </a:rPr>
-              <a:t> Вероятностность не исчезает, она переехала на шаг раньше: вызовет ли модель калькулятор и как передаст в него значения. Измерено реально: 56 из 100 — хуже всех остальных вариантов, с новыми отказами (смешанный алфавит в ответе, инструмент не умеет сравнений, ошибки разбросаны по всему диапазону).</a:t>
+              <a:t> Вероятностность не исчезает, она переехала на шаг раньше: вызовет ли модель калькулятор и как передаст в него значения. Измерено: 56 из 100 — хуже всех остальных вариантов, с новыми отказами (смешанный алфавит в ответе, инструмент не умеет сравнений, ошибки разбросаны по всему диапазону).</a:t>
             </a:r>
           </a:p>
         </p:txBody>
@@ -33536,7 +33527,7 @@
                 </a:solidFill>
                 <a:latin typeface="Arial"/>
               </a:rPr>
-              <a:t>explicit circuit breaker</a:t>
+              <a:t>явный circuit breaker</a:t>
             </a:r>
             <a:r>
               <a:rPr sz="1500" b="1" i="0">
@@ -46796,12 +46787,12 @@
         </p:nvSpPr>
         <p:spPr>
           <a:xfrm>
-            <a:off x="502920" y="968044"/>
-            <a:ext cx="11183112" cy="5322570"/>
+            <a:off x="502920" y="1041069"/>
+            <a:ext cx="11183112" cy="5140007"/>
           </a:xfrm>
           <a:prstGeom prst="roundRect">
             <a:avLst>
-              <a:gd name="adj" fmla="val 5726"/>
+              <a:gd name="adj" fmla="val 5929"/>
             </a:avLst>
           </a:prstGeom>
           <a:solidFill>
@@ -46844,7 +46835,7 @@
         </p:nvSpPr>
         <p:spPr>
           <a:xfrm>
-            <a:off x="685800" y="1150924"/>
+            <a:off x="685800" y="1223949"/>
             <a:ext cx="1340856" cy="282067"/>
           </a:xfrm>
           <a:prstGeom prst="rect">
@@ -46886,8 +46877,8 @@
         </p:nvSpPr>
         <p:spPr>
           <a:xfrm>
-            <a:off x="2172960" y="1150924"/>
-            <a:ext cx="2837991" cy="282067"/>
+            <a:off x="2172960" y="1223949"/>
+            <a:ext cx="2908036" cy="282067"/>
           </a:xfrm>
           <a:prstGeom prst="rect">
             <a:avLst/>
@@ -46928,8 +46919,8 @@
         </p:nvSpPr>
         <p:spPr>
           <a:xfrm>
-            <a:off x="5157255" y="1150924"/>
-            <a:ext cx="2318162" cy="282067"/>
+            <a:off x="5227300" y="1223949"/>
+            <a:ext cx="2188830" cy="282067"/>
           </a:xfrm>
           <a:prstGeom prst="rect">
             <a:avLst/>
@@ -46970,8 +46961,8 @@
         </p:nvSpPr>
         <p:spPr>
           <a:xfrm>
-            <a:off x="7621722" y="1150924"/>
-            <a:ext cx="3735125" cy="282067"/>
+            <a:off x="7562435" y="1223949"/>
+            <a:ext cx="3794412" cy="282067"/>
           </a:xfrm>
           <a:prstGeom prst="rect">
             <a:avLst/>
@@ -47012,8 +47003,8 @@
         </p:nvSpPr>
         <p:spPr>
           <a:xfrm>
-            <a:off x="685800" y="1432991"/>
-            <a:ext cx="1340856" cy="1077404"/>
+            <a:off x="685800" y="1506016"/>
+            <a:ext cx="1340856" cy="894842"/>
           </a:xfrm>
           <a:prstGeom prst="rect">
             <a:avLst/>
@@ -47054,8 +47045,8 @@
         </p:nvSpPr>
         <p:spPr>
           <a:xfrm>
-            <a:off x="2172960" y="1432991"/>
-            <a:ext cx="2837991" cy="1077404"/>
+            <a:off x="2172960" y="1506016"/>
+            <a:ext cx="2908036" cy="894842"/>
           </a:xfrm>
           <a:prstGeom prst="rect">
             <a:avLst/>
@@ -47096,8 +47087,8 @@
         </p:nvSpPr>
         <p:spPr>
           <a:xfrm>
-            <a:off x="5157255" y="1432991"/>
-            <a:ext cx="2318162" cy="1077404"/>
+            <a:off x="5227300" y="1506016"/>
+            <a:ext cx="2188830" cy="894842"/>
           </a:xfrm>
           <a:prstGeom prst="rect">
             <a:avLst/>
@@ -47125,7 +47116,7 @@
                 </a:solidFill>
                 <a:latin typeface="Arial"/>
               </a:rPr>
-              <a:t>текст звучит живо, не казённой фразой — умеет писать по-человечески</a:t>
+              <a:t>текст звучит живо — модель умеет писать по-человечески</a:t>
             </a:r>
           </a:p>
         </p:txBody>
@@ -47138,8 +47129,8 @@
         </p:nvSpPr>
         <p:spPr>
           <a:xfrm>
-            <a:off x="7621722" y="1432991"/>
-            <a:ext cx="3735125" cy="1077404"/>
+            <a:off x="7562435" y="1506016"/>
+            <a:ext cx="3794412" cy="894842"/>
           </a:xfrm>
           <a:prstGeom prst="rect">
             <a:avLst/>
@@ -47167,7 +47158,7 @@
                 </a:solidFill>
                 <a:latin typeface="Arial"/>
               </a:rPr>
-              <a:t>значения уже извлечены — интерпретировать нечего; текст собирается заново на каждом прогоне, с риском вписать деталь, которой в заявке не было</a:t>
+              <a:t>значения уже извлечены, интерпретировать нечего; а текст собирается заново на каждом прогоне, с риском вписать деталь, которой в заявке не было</a:t>
             </a:r>
           </a:p>
         </p:txBody>
@@ -47180,7 +47171,7 @@
         </p:nvCxnSpPr>
         <p:spPr>
           <a:xfrm>
-            <a:off x="685800" y="2510396"/>
+            <a:off x="685800" y="2400858"/>
             <a:ext cx="10817352" cy="0"/>
           </a:xfrm>
           <a:prstGeom prst="line">
@@ -47215,7 +47206,7 @@
         </p:nvSpPr>
         <p:spPr>
           <a:xfrm>
-            <a:off x="685800" y="2510396"/>
+            <a:off x="685800" y="2400858"/>
             <a:ext cx="1340856" cy="1259966"/>
           </a:xfrm>
           <a:prstGeom prst="rect">
@@ -47257,8 +47248,8 @@
         </p:nvSpPr>
         <p:spPr>
           <a:xfrm>
-            <a:off x="2172960" y="2510396"/>
-            <a:ext cx="2837991" cy="1259966"/>
+            <a:off x="2172960" y="2400858"/>
+            <a:ext cx="2908036" cy="1259966"/>
           </a:xfrm>
           <a:prstGeom prst="rect">
             <a:avLst/>
@@ -47299,8 +47290,8 @@
         </p:nvSpPr>
         <p:spPr>
           <a:xfrm>
-            <a:off x="5157255" y="2510396"/>
-            <a:ext cx="2318162" cy="1259966"/>
+            <a:off x="5227300" y="2400858"/>
+            <a:ext cx="2188830" cy="1259966"/>
           </a:xfrm>
           <a:prstGeom prst="rect">
             <a:avLst/>
@@ -47341,8 +47332,8 @@
         </p:nvSpPr>
         <p:spPr>
           <a:xfrm>
-            <a:off x="7621722" y="2510396"/>
-            <a:ext cx="3735125" cy="1259966"/>
+            <a:off x="7562435" y="2400858"/>
+            <a:ext cx="3794412" cy="1259966"/>
           </a:xfrm>
           <a:prstGeom prst="rect">
             <a:avLst/>
@@ -47370,7 +47361,7 @@
                 </a:solidFill>
                 <a:latin typeface="Arial"/>
               </a:rPr>
-              <a:t>нет пространства для вариативности: если форма сообщения когда-нибудь должна будет меняться по смыслу, а не только по значениям, выражение придётся переписывать руками</a:t>
+              <a:t>нет пространства для вариативности: если форме сообщения однажды понадобится меняться по смыслу, а не только по значениям, выражение придётся переписывать руками</a:t>
             </a:r>
           </a:p>
         </p:txBody>
@@ -47383,7 +47374,7 @@
         </p:nvCxnSpPr>
         <p:spPr>
           <a:xfrm>
-            <a:off x="685800" y="3770363"/>
+            <a:off x="685800" y="3660825"/>
             <a:ext cx="10817352" cy="0"/>
           </a:xfrm>
           <a:prstGeom prst="line">
@@ -47418,7 +47409,7 @@
         </p:nvSpPr>
         <p:spPr>
           <a:xfrm>
-            <a:off x="685800" y="3770363"/>
+            <a:off x="685800" y="3660825"/>
             <a:ext cx="1340856" cy="1259966"/>
           </a:xfrm>
           <a:prstGeom prst="rect">
@@ -47460,8 +47451,8 @@
         </p:nvSpPr>
         <p:spPr>
           <a:xfrm>
-            <a:off x="2172960" y="3770363"/>
-            <a:ext cx="2837991" cy="1259966"/>
+            <a:off x="2172960" y="3660825"/>
+            <a:ext cx="2908036" cy="1259966"/>
           </a:xfrm>
           <a:prstGeom prst="rect">
             <a:avLst/>
@@ -47502,8 +47493,8 @@
         </p:nvSpPr>
         <p:spPr>
           <a:xfrm>
-            <a:off x="5157255" y="3770363"/>
-            <a:ext cx="2318162" cy="1259966"/>
+            <a:off x="5227300" y="3660825"/>
+            <a:ext cx="2188830" cy="1259966"/>
           </a:xfrm>
           <a:prstGeom prst="rect">
             <a:avLst/>
@@ -47531,7 +47522,7 @@
                 </a:solidFill>
                 <a:latin typeface="Arial"/>
               </a:rPr>
-              <a:t>работало бы честно при реальном смешанном случае — когда хотя бы одно значение правда требует интерпретации, а не просто известно</a:t>
+              <a:t>работало бы честно при смешанном случае: когда хотя бы одно значение требует интерпретации, а не просто известно</a:t>
             </a:r>
           </a:p>
         </p:txBody>
@@ -47544,8 +47535,8 @@
         </p:nvSpPr>
         <p:spPr>
           <a:xfrm>
-            <a:off x="7621722" y="3770363"/>
-            <a:ext cx="3735125" cy="1259966"/>
+            <a:off x="7562435" y="3660825"/>
+            <a:ext cx="3794412" cy="1259966"/>
           </a:xfrm>
           <a:prstGeom prst="rect">
             <a:avLst/>
@@ -47586,7 +47577,7 @@
         </p:nvCxnSpPr>
         <p:spPr>
           <a:xfrm>
-            <a:off x="685800" y="5030330"/>
+            <a:off x="685800" y="4920792"/>
             <a:ext cx="10817352" cy="0"/>
           </a:xfrm>
           <a:prstGeom prst="line">
@@ -47621,7 +47612,7 @@
         </p:nvSpPr>
         <p:spPr>
           <a:xfrm>
-            <a:off x="685800" y="5030330"/>
+            <a:off x="685800" y="4920792"/>
             <a:ext cx="1340856" cy="1077404"/>
           </a:xfrm>
           <a:prstGeom prst="rect">
@@ -47663,8 +47654,8 @@
         </p:nvSpPr>
         <p:spPr>
           <a:xfrm>
-            <a:off x="2172960" y="5030330"/>
-            <a:ext cx="2837991" cy="1077404"/>
+            <a:off x="2172960" y="4920792"/>
+            <a:ext cx="2908036" cy="1077404"/>
           </a:xfrm>
           <a:prstGeom prst="rect">
             <a:avLst/>
@@ -47705,8 +47696,8 @@
         </p:nvSpPr>
         <p:spPr>
           <a:xfrm>
-            <a:off x="5157255" y="5030330"/>
-            <a:ext cx="2318162" cy="1077404"/>
+            <a:off x="5227300" y="4920792"/>
+            <a:ext cx="2188830" cy="1077404"/>
           </a:xfrm>
           <a:prstGeom prst="rect">
             <a:avLst/>
@@ -47747,8 +47738,8 @@
         </p:nvSpPr>
         <p:spPr>
           <a:xfrm>
-            <a:off x="7621722" y="5030330"/>
-            <a:ext cx="3735125" cy="1077404"/>
+            <a:off x="7562435" y="4920792"/>
+            <a:ext cx="3794412" cy="1077404"/>
           </a:xfrm>
           <a:prstGeom prst="rect">
             <a:avLst/>

--- a/library/seminars/sem-08/rendered/sem-08.pptx
+++ b/library/seminars/sem-08/rendered/sem-08.pptx
@@ -69,6 +69,7 @@
     <p:sldId id="317" r:id="rId69"/>
     <p:sldId id="318" r:id="rId70"/>
     <p:sldId id="319" r:id="rId71"/>
+    <p:sldId id="320" r:id="rId72"/>
   </p:sldIdLst>
   <p:sldSz cx="12191695" cy="6858000" type="screen4x3"/>
   <p:notesSz cx="6858000" cy="9144000"/>
@@ -765,31 +766,37 @@
           <a:p/>
           <a:p>
             <a:r>
-              <a:t>Она не открывает ничего нового. У неё уже есть чат с ботом уведомлений — тот же бот, которым центр пользуется и для других оповещений. В этот чат падает одно сообщение: «Новая заявка от Марии: тема «курс», также упомянуто: оплата.» Один пузырь, без вложений, без кнопок, без необходимости переходить куда-то ещё, чтобы понять, о чём речь.</a:t>
+              <a:t>Она не открывает ничего нового. У неё уже есть чат с ботом уведомлений — тот же бот, которым центр пользуется и для других оповещений. В этот чат падает сообщение: один пузырь, без вложений, без кнопок, без перехода куда-либо ещё. Будничность тут не случайна: меняется содержимое одной строки, а не привычка, которой Ольга уже пользуется.</a:t>
             </a:r>
           </a:p>
           <a:p/>
           <a:p>
             <a:r>
-              <a:t>Форма сообщения выбрана не произвольно — это ровно те три значения, которые Ольга назвала достаточными в прошлой сцене: кто написал, по какой теме и что упомянул дополнительно. Не больше и не меньше. Добавь в строку ещё одно поле — например, статус оплаты или внутренний номер заявки — и уведомление перестанет читаться одним взглядом: оно превратится в текст, который нужно разбирать, а не бегло просматривать среди двадцати похожих сообщений за день.</a:t>
+              <a:t>На кадре два прогона на одной заявке Марии Величко. Верхний текст сочинила модель: «Привет! У нас новая многотемная заявка от Марии Величко на перенос занятия, в которой также упоминается оплата. Подробности прилагаю, если нужно!» Нижний собрал шаблон: «Новая заявка от Мария Величко: тема «перенос занятия», также: оплата.»</a:t>
             </a:r>
           </a:p>
           <a:p/>
           <a:p>
             <a:r>
-              <a:t>В интерфейсе это выглядит буднично, и будничность тут не случайна. Новое сообщение просто появляется в том же чате, где уже лежит история всех прежних уведомлений центра — без отдельной вкладки, без нового значка, без перехода куда-либо ещё. Ольга читает этот чат сверху вниз точно так же, как читала его вчера и позавчера; меняется только содержимое одной строки, а не привычка, которой она уже пользуется.</a:t>
+              <a:t>Теперь прочитайте имя в обеих строках. Модель склоняет: «от Марии Величко». Шаблон подставляет поле как есть: «от Мария Величко» — склонять он не умеет и не научится. Это честная цена предсказуемости: текст шаблона одинаков до буквы и неграмотен в каждой строке, где стоит имя.</a:t>
             </a:r>
           </a:p>
           <a:p/>
           <a:p>
             <a:r>
-              <a:t>Три значения, одна строка — ровно то, что Ольга назвала в прошлой сцене. Если сообщение выглядит так на каждой заявке, задача решена полностью: Ольге достаточно читать уведомления, не открывая экран результата из-за одной многотемной заявки среди двадцати обычных.</a:t>
+              <a:t>И вторая находка — в верхней строке, в самом конце. «Подробности прилагаю, если нужно!» Прилагать нечем: вложения в сообщении нет и не предполагалось, у узла отправки нет ни файла, ни ссылки. Модель закончила фразу вежливой формулой и пообещала человеку то, чего не будет. Проверка формата такое не ловит — обещание синтаксически безупречно; ловит только человек, который его прочитает.</a:t>
             </a:r>
           </a:p>
           <a:p/>
           <a:p>
             <a:r>
-              <a:t>Вопрос в том, выглядит ли оно так каждый раз, при любой заявке, а не только при этой одной. Следующий экран — настоящие прогоны одного и того же узла, не придуманный пример, и один из них выглядит иначе, чем этот.</a:t>
+              <a:t>Форма сообщения при этом выбрана не произвольно: это те три значения, которые Ольга назвала достаточными в прошлой сцене — кто написал, по какой теме и что упомянул ещё. Добавь в строку четвёртое поле, статус оплаты или внутренний номер, — и уведомление перестанет читаться одним взглядом среди двадцати похожих сообщений за день.</a:t>
+            </a:r>
+          </a:p>
+          <a:p/>
+          <a:p>
+            <a:r>
+              <a:t>Вопрос в том, выглядит ли сообщение приемлемо каждый раз, при любой заявке, а не только при этой. Следующий экран — ещё один настоящий прогон того же узла, и он выглядит иначе.</a:t>
             </a:r>
           </a:p>
         </p:txBody>
@@ -871,7 +878,7 @@
           <a:p/>
           <a:p>
             <a:r>
-              <a:t>Вторая заявка — от Олега, про перенос занятия и оплату. Тот же узел, та же инструкция. И вот что он реально написал: «Привет, [Имя координатора]! У нас новая многотемная заявка от Олега по вопросу переноса занятия и об оплате.» Прочитайте внимательно второе слово. Это не переменная, которая не подставилась технически. Это буквальный кусок собственного шаблона-инструкции модели, адресованный самой модели, а не Ольге: модель должна была заменить его настоящим содержанием и не заменила.</a:t>
+              <a:t>Вторая заявка — от Олега, про перенос занятия и оплату. Тот же узел, та же инструкция. И вот что он реально написал, кадр перед вами: «Привет, Имя координатора! У нас новая многотемная заявка от Олега по вопросу переноса занятия и об оплате. Посмотри, пожалуйста!» Прочитайте внимательно второе слово. Это не переменная, которая не подставилась технически, — и квадратных скобок вокруг неё нет, модель написала это как обычное обращение, со смайликом и всем положенным. Это кусок собственного шаблона-инструкции модели, адресованный самой модели, а не Ольге: модель должна была заменить его настоящим содержанием и не заменила.</a:t>
             </a:r>
           </a:p>
           <a:p/>
@@ -3893,7 +3900,7 @@
           <a:p/>
           <a:p>
             <a:r>
-              <a:t>Клиент не открывает никакого отдельного экрана результата, не заходит в личный кабинет и не ждёт письма с вложением. В чат, где он уже переписывался с учебным центром, приходит одно короткое сообщение: заявка одобрена, и конкретная сумма уже отправлена на карту, которой он платил за занятие. Один пузырь, без вложений и без кнопок — ровно как и в первом кейсе этого занятия, где такое же короткое уведомление приходило в уже существующий чат.</a:t>
+              <a:t>Клиент не открывает никакого отдельного экрана результата, не заходит в личный кабинет и не ждёт письма с вложением. В чат, где он уже переписывался с учебным центром, приходит одно короткое сообщение — вот оно, целиком: «Здравствуйте! Ваш запрос на возврат рассмотрен: одобрено. Сумма: 2500 ₽. Деньги вернутся на карту в течение трёх рабочих дней.» Один пузырь, без вложений и без кнопок — ровно как и в первом кейсе этого занятия, где такое же короткое уведомление приходило в уже существующий чат. Число в нём не вписано руками: это подстановка того значения, которое из текста заявки достала модель извлечения.</a:t>
             </a:r>
           </a:p>
           <a:p/>
@@ -6149,25 +6156,25 @@
           <a:p/>
           <a:p>
             <a:r>
-              <a:t>Чтобы получить настоящую карточку — изображение, в котором текст физически встроен в пиксели, — нужен отдельный шаг. Обычный узел «забрать файл по ссылке» тут не годится: он умеет скачивать готовую картинку, а не рисовать на ней. Нужна специализированная генерирующая модель: на вход — текст уведомления и задача «сделай из этого текста читаемое изображение», на выход — готовый файл с текстом уже внутри.</a:t>
+              <a:t>Чтобы получить настоящую карточку — изображение, в котором текст физически встроен в пиксели, — нужен отдельный шаг. Обычный узел «забрать файл по ссылке» тут не годится: он умеет скачивать готовую картинку, а не рисовать на ней. Нужна специализированная генерирующая модель: на вход — текст уведомления и задача «сделай из этого текста читаемое изображение», на выход — файл с текстом уже внутри. Перед вами эта ветка на холсте: шаблон собирает текст, следующий узел зовёт модель, дальше перекодировка, дальше отправка фотографии.</a:t>
             </a:r>
           </a:p>
           <a:p/>
           <a:p>
             <a:r>
-              <a:t>Цена у этого шага есть, и не нулевая. Для ориентира взята публичная стоимость сопоставимой модели — gpt-image-1.5 от OpenAI: одна картинка 1024 на 1024 точки обходится от неполного цента на низком качестве до 13 центов на высоком, смотря какую точность и детализацию выбрать. Короткому текстовому уведомлению на карточке высшая точность вряд ли нужна — разумный ориентир здесь порядка трёх с половиной центов за картинку, среднее качество. Это не измерение на нашем стенде, такого шага на стенде нет: это честная оценка по чужому, но свежему и проверяемому прайсу.</a:t>
+              <a:t>Теперь цена, и это не прайс, а счёт. Шаг собран и прогнан, сервис в каждом ответе возвращает стоимость вызова: три целых девять сотых цента за карточку. Готовясь к занятию, я брал её из публичного прайса сопоставимой модели — выходило три с половиной цента. Порядок угадан, число нет: прайсовая оценка оказалась ниже счёта на четырнадцать процентов. Ровно в этом разница между «взяли чужой прайс» и «позвали и посмотрели в счёт», и цена этой разницы тут небольшая только потому, что кейс маленький.</a:t>
             </a:r>
           </a:p>
           <a:p/>
           <a:p>
             <a:r>
-              <a:t>Три с половиной цента за карточку сами по себе ни о чём не говорят, пока не привязаны к объёму, — а сцена этого кейса частоту рассылки не называет. Выдумывать объём из воздуха не станем: карточка заменяет уведомление о каждой новой заявке, а этот поток известен из Кейса 1 — двадцать заявок в день. Если на карточки переходит весь поток, выходит около шестисот карточек в месяц и около двадцати долларов в месяц. Это иллюстративный пример расчёта, не измеренный объём: ни частота рассылки, ни полный переход на карточки в сцене явно не зафиксированы. Зато с базой видно: для учебного центра это не та цена, из-за которой отказываются от решения, и не ноль, который можно не считать вовсе.</a:t>
+              <a:t>Привяжем к объёму. Карточка заменяет уведомление о каждой новой заявке, а этот поток известен из первого кейса — двадцать заявок в день, около шестисот в месяц. Выходит порядка двадцати трёх долларов в месяц. Объём остаётся иллюстративным: в сцене не сказано ни про частоту рассылки, ни про полный переход на карточки. Измерена цена одной карточки, а не объём.</a:t>
             </a:r>
           </a:p>
           <a:p/>
           <a:p>
             <a:r>
-              <a:t>И последнее, что надо знать заранее, даже не собирая этот шаг: генерирующие модели обычно отдают файл большого стандартного размера, сжатый не слишком сильно. Значит, готовую карточку нельзя отправлять в Telegram как есть — её перекодируют в более лёгкий формат заранее, той же логикой, что мы видели на предыдущем экране с лимитом в 10 485 760 байт на фото. Генерация не отменяет проверку размера — она добавляет её ещё раз, на новом месте цепочки.</a:t>
+              <a:t>И последнее — про формат. Готовясь, я предупреждал: генерирующие модели отдают большой слабо сжатый файл, его придётся ужимать перед отправкой. Предупреждение оказалось верным по факту и неверным по причине. Файл — восемьсот семьдесят килобайт, это в двенадцать раз ниже лимита на фотографию, Telegram принял все карточки и пережал их сам. Перекодировка в цепочке всё равно нужна, но по другой причине: модель отдаёт картинку текстом, а узел отправки принимает бинарное вложение. Проверять размер пришлось бы на картинках вчетверо крупнее — этой моделью мы такие не просили.</a:t>
             </a:r>
           </a:p>
         </p:txBody>
@@ -6237,31 +6244,31 @@
           <a:lstStyle/>
           <a:p>
             <a:r>
-              <a:t>Прежде чем говорить про сжатие, назовём порядок, в котором эти два шага должны идти. Порядок здесь не произвольный.</a:t>
+              <a:t>Шаг собран, прогнан, цена измерена. Теперь посмотрим на то, что он выдал, — и это главное, ради чего его стоило собрать.</a:t>
             </a:r>
           </a:p>
           <a:p/>
           <a:p>
             <a:r>
-              <a:t>Механическая проверка идёт первой. Она дешёвая, быстрая и детерминированная: сравнила размер, формат и разрешение с условием — и либо пропустила файл дальше, либо отклонила его сразу, прежде чем он добрался до чего-то более дорогого. Модель проверки содержимого идёт второй, и только на то, что прошло первую: дорогой вызов модели на файле, который и так не пройдёт по формату, — пустая трата. Это та же экономия, которую мы видели на Кейсе 2: дешёвый механический шаг забирает на себя основную часть работы, а дорогой инструмент достаётся только тому, что действительно нуждается в его оценке.</a:t>
+              <a:t>Слева карточка, которую нарисовала модель, — ровно те пиксели, которые дошли до чата. В середине две её строки крупно. Прочитайте первое слово: «зяявка». Третья строка: «перенос заняятия». Справа подпись к этой же фотографии, в этом же сообщении: «Новая заявка от Олег: тема «перенос занятия».» Без единой ошибки.</a:t>
             </a:r>
           </a:p>
           <a:p/>
           <a:p>
             <a:r>
-              <a:t>Теперь вопрос, который прямо просили исследовать, а не предположить: стоит ли сжимать картинку перед отправкой в модель-проверяющую. Ответ по общедоступным источникам, не измерение на нашем стенде: умеренное сжатие обычно выгодно и точность заметно не портит. Пример, который приводится в этих источниках: изображение 4032 на 3024 точки без сжатия обходится моделям примерно в полторы тысячи токенов обработки; то же изображение, уменьшенное до 720 на 540 при качестве JPEG 85, — примерно в 300 токенов, то есть впятеро дешевле, и для большинства задач это почти не сказывается на точности.</a:t>
+              <a:t>Разница между этими двумя текстами — вся сегодняшняя ось в одном кадре. Подпись собирает шаблон: подставить значение в заготовленную строку — операция механическая, и ошибиться в ней нечем. Текст внутри картинки рисует модель: для неё буквы — это изображение букв, и пишет она их примерно, как пишет всё остальное. При этом модель получала точную строку и прямое требование написать её дословно. Так вышло на всех пяти карточках, которые дошли; на одной из них вдобавок потерялась точка в конце, на другой — буква в слове «оплата» и кавычки поехали на английские.</a:t>
             </a:r>
           </a:p>
           <a:p/>
           <a:p>
             <a:r>
-              <a:t>Но есть оговорка, и отбрасывать её молча нельзя. Задачи, где модель должна прочитать текст на изображении — а наша карточка такая, на ней читаемый текст, — от сжатия портятся заметнее прочих. Общая рекомендация — сжимать аккуратно, не опускаясь ниже примерно 1024 точек по большей стороне, если модель должна разобрать текст или цифры на карточке. Сильное сжатие ради лишней экономии здесь не оправдано: ошибка распознавания стоит дороже лишних токенов.</a:t>
+              <a:t>Теперь самое неприятное. Поднимите глаза на цепочку с предыдущего экрана и покажите мне узел, который это поймает. Размер файла — в порядке. Формат — PNG, как и ожидалось. Telegram ответил «принято». Прогон зелёный от начала до конца. Ошибка лежит внутри картинки, в пикселях, а цепочка картинку не читает — она её переносит. Единственная проверка, которая здесь работает, — человек, который откроет чат и посмотрит.</a:t>
             </a:r>
           </a:p>
           <a:p/>
           <a:p>
             <a:r>
-              <a:t>В таблице это разложено тремя вариантами действия, а не одним правильным ответом: без сжатия, умеренное и сильное — у каждого своя цена и свой риск. Выбор зависит от того, должна ли модель читать текст на карточке или достаточно оценить картинку в целом.</a:t>
+              <a:t>И это тот же урок, что в первом кейсе, просто на другом типе данных. Там модель сочинила текст и обратилась к координатору словами из собственной инструкции — узел не упал. Здесь модель нарисовала текст с ошибками — узел снова не упал. Успех шага измеряет сам шаг, а не то, что получил человек; и чем дальше результат от того, что цепочка умеет проверять, тем дороже стоит эта разница.</a:t>
             </a:r>
           </a:p>
         </p:txBody>
@@ -6331,37 +6338,31 @@
           <a:lstStyle/>
           <a:p>
             <a:r>
-              <a:t>Прежде чем вернуться к обобщению кейса — на секунду с другой стороны, глазами координатора, который открывает Telegram.</a:t>
+              <a:t>Прежде чем говорить про сжатие, назовём порядок, в котором эти два шага должны идти. Порядок здесь не произвольный.</a:t>
             </a:r>
           </a:p>
           <a:p/>
           <a:p>
             <a:r>
-              <a:t>Когда файл укладывается в лимит — а мы только что измерили этот лимит настоящим вызовом API, — координатор не видит ни журнала прогона, ни узла отправки, ни числа байт. Он открывает тот же самый чат уведомлений учебного центра, где и раньше получал текстовые сообщения о новых заявках, в кейсе «Уведомления», и видит в нём фотографию с подписью: «Новая заявка от Марии: тема «курс», также упомянуто: оплата.»</a:t>
+              <a:t>Механическая проверка идёт первой. Она дешёвая, быстрая и детерминированная: сравнила размер, формат и разрешение с условием — и либо пропустила файл дальше, либо отклонила его сразу, прежде чем он добрался до чего-то более дорогого. Модель проверки содержимого идёт второй, и только на то, что прошло первую: дорогой вызов модели на файле, который и так не пройдёт по формату, — пустая трата. Это та же экономия, которую мы видели на Кейсе 2: дешёвый механический шаг забирает на себя основную часть работы, а дорогой инструмент достаётся только тому, что действительно нуждается в его оценке.</a:t>
             </a:r>
           </a:p>
           <a:p/>
           <a:p>
             <a:r>
-              <a:t>Эта подпись — не новый текст, придуманный для карточки. Тот же текст, который мы видели в первом кейсе занятия, собранный той же формулой подстановки значений из полей заявки. Изменилось одно: теперь он идёт не отдельным сообщением, а подписью к фотографии в том же уведомлении, — ровно то расширение, которое маркетинг попросил в сцене этого кейса.</a:t>
+              <a:t>Теперь вопрос, который прямо просили исследовать, а не предположить: стоит ли сжимать картинку перед отправкой в модель-проверяющую. Ответ по общедоступным источникам, не измерение на нашем стенде: умеренное сжатие обычно выгодно и точность заметно не портит. Пример, который приводится в этих источниках: изображение 4032 на 3024 точки без сжатия обходится моделям примерно в полторы тысячи токенов обработки; то же изображение, уменьшенное до 720 на 540 при качестве JPEG 85, — примерно в 300 токенов, то есть впятеро дешевле, и для большинства задач это почти не сказывается на точности.</a:t>
             </a:r>
           </a:p>
           <a:p/>
           <a:p>
             <a:r>
-              <a:t>А вот чего на этом экране нет. Нет имени узла, который собрал текст или забрал картинку по ссылке. Нет числа байт и слова «лимит» — чтобы понять «заявка пришла», координатору не нужно знать, где проходит граница. Нет журнала прогона и отметки, что всё «зелёное». Это та же граница, о которой курс говорит с самого начала: служебные детали живут в наших разборах и в документации производства, а на экране реального человека — только то, что ему нужно знать, чтобы понять, что происходит.</a:t>
+              <a:t>Но есть оговорка, и отбрасывать её молча нельзя. Задачи, где модель должна прочитать текст на изображении — а наша карточка такая, на ней читаемый текст, — от сжатия портятся заметнее прочих. Общая рекомендация — сжимать аккуратно, не опускаясь ниже примерно 1024 точек по большей стороне, если модель должна разобрать текст или цифры на карточке. Сильное сжатие ради лишней экономии здесь не оправдано: ошибка распознавания стоит дороже лишних токенов.</a:t>
             </a:r>
           </a:p>
           <a:p/>
           <a:p>
             <a:r>
-              <a:t>И это обратная сторона той сцены, с которой кейс начался. Там прогон был зелёным, а у координатора в чате пусто — либо обрезанный файл. Здесь прогон тоже зелёный, но координатор видит целую карточку: на этот раз файл уложился в измеренную границу. Разница между двумя этими состояниями не видна ни в журнале n8n, ни в ответе Telegram API сама по себе — она видна только здесь, в самом чате получателя, и только по одному признаку: дошла картинка целиком или нет.</a:t>
-            </a:r>
-          </a:p>
-          <a:p/>
-          <a:p>
-            <a:r>
-              <a:t>Ради этого и стоило мерить число байт так точно, как мы мерили его на предыдущих экранах: границу размера мерят затем, чтобы координатор каждый раз видел такой чат, а не пустое место вместо карточки.</a:t>
+              <a:t>В таблице это разложено тремя вариантами действия, а не одним правильным ответом: без сжатия, умеренное и сильное — у каждого своя цена и свой риск. Выбор зависит от того, должна ли модель читать текст на карточке или достаточно оценить картинку в целом.</a:t>
             </a:r>
           </a:p>
         </p:txBody>
@@ -6537,31 +6538,37 @@
           <a:lstStyle/>
           <a:p>
             <a:r>
-              <a:t>Обобщаем то, что разобрали на этом кейсе, и сразу называем, где он заканчивается.</a:t>
+              <a:t>Прежде чем вернуться к обобщению кейса — на секунду с другой стороны, глазами координатора, который открывает Telegram.</a:t>
             </a:r>
           </a:p>
           <a:p/>
           <a:p>
             <a:r>
-              <a:t>Бинарные данные в n8n — отдельная модель данных, а не ещё одно значение в заявке. У текстового поля есть содержимое. У файла — содержимое, размер и формат, и два последних свойства решают, дойдёт ли результат до получателя.</a:t>
+              <a:t>Когда файл укладывается в лимит — а мы только что измерили этот лимит настоящим вызовом API, — координатор не видит ни журнала прогона, ни узла отправки, ни числа байт. Он открывает тот же самый чат уведомлений учебного центра, где и раньше получал текстовые сообщения о новых заявках, в кейсе «Уведомления», и видит в нём фотографию с подписью: «Новая заявка от Мария Величко: тема «перенос занятия», также: оплата.»</a:t>
             </a:r>
           </a:p>
           <a:p/>
           <a:p>
             <a:r>
-              <a:t>Контракт между шагами, который в кейсе «Уведомления» рвался на тексте — узел не падал, а результат тихо оказывался не тем, — здесь рвётся на формате и размере бинарного вложения, по той же причине: формально успешный прогон ничего не говорит о том, дошёл ли результат до получателя в ожидаемом виде. Один урок на двух разных типах данных внутри одного занятия, и совпадением это не назвать: успех шага измеряет сам шаг, а не то, что произошло дальше.</a:t>
+              <a:t>Эта подпись — не новый текст, придуманный для карточки. Тот же текст, что мы видели в первом кейсе занятия, собранный той же формулой подстановки значений из полей заявки, — вместе с той же её ценой: имя снова стоит в именительном падеже, потому что шаблон подставляет поле как есть. Изменилось одно: теперь он идёт не отдельным сообщением, а подписью к фотографии в том же уведомлении, — ровно то расширение, которое маркетинг попросил в сцене этого кейса.</a:t>
             </a:r>
           </a:p>
           <a:p/>
           <a:p>
             <a:r>
-              <a:t>Теперь явная граница, за которую этот кейс сознательно не заходит. Бинарные данные мы ввели на уровне «один файл, один известный лимит, одна отправка»: получить файл, проверить размер и формат, отправить. Хранить множество файлов, искать среди них, отдавать их содержимое модели — векторное хранилище, поиск по изображениям, ответы по содержимому картинок — задача следующего уровня, и здесь мы её намеренно не трогаем. Семинар 10 достраивает ровно то, что сегодня осталось за кадром: не вводит бинарные данные с нуля, а продолжает с того уровня, на котором мы их сегодня оставили.</a:t>
+              <a:t>А вот чего на этом экране нет. Нет имени узла, который собрал текст или забрал картинку по ссылке. Нет числа байт и слова «лимит» — чтобы понять «заявка пришла», координатору не нужно знать, где проходит граница. Нет журнала прогона и отметки, что всё «зелёное». Это та же граница, о которой курс говорит с самого начала: служебные детали живут в наших разборах и в документации производства, а на экране реального человека — только то, что ему нужно знать, чтобы понять, что происходит.</a:t>
             </a:r>
           </a:p>
           <a:p/>
           <a:p>
             <a:r>
-              <a:t>Два уровня различает не сложность инструмента, а сам задаваемый вопрос. Сегодня вопрос был «дойдёт ли этот файл в этом прогоне» — и ответ на него известен заранее целиком, по двум числам: размеру файла и лимиту канала. На следующем уровне вопрос другой — «какой из многих файлов отвечает смыслу запроса» — и у него уже нет ответа, который можно было бы посчитать по двум числам до прогона.</a:t>
+              <a:t>И это обратная сторона той сцены, с которой кейс начался. Там прогон был зелёным, а у координатора в чате пусто — либо обрезанный файл. Здесь прогон тоже зелёный, но координатор видит целую карточку: на этот раз файл уложился в измеренную границу. Разница между двумя этими состояниями не видна ни в журнале n8n, ни в ответе Telegram API сама по себе — она видна только здесь, в самом чате получателя, и только по одному признаку: дошла картинка целиком или нет.</a:t>
+            </a:r>
+          </a:p>
+          <a:p/>
+          <a:p>
+            <a:r>
+              <a:t>Ради этого и стоило мерить число байт так точно, как мы мерили его на предыдущих экранах: границу размера мерят затем, чтобы координатор каждый раз видел такой чат, а не пустое место вместо карточки.</a:t>
             </a:r>
           </a:p>
         </p:txBody>
@@ -6631,37 +6638,37 @@
           <a:lstStyle/>
           <a:p>
             <a:r>
-              <a:t>Три класса нюансов, а потом критерий и последняя строка оси.</a:t>
+              <a:t>Обобщаем то, что разобрали на этом кейсе, и сразу называем, где он заканчивается.</a:t>
             </a:r>
           </a:p>
           <a:p/>
           <a:p>
             <a:r>
-              <a:t>Первый. Собственный лимит n8n по умолчанию на размер бинарных данных — 16 МБ. Для фотографии с текстом этого обычно достаточно, но скан высокого разрешения или фото прямо с телефона — не всегда: так и выглядел файл в нашей сцене.</a:t>
+              <a:t>Бинарные данные в n8n — отдельная модель данных, а не ещё одно значение в заявке. У текстового поля есть содержимое. У файла — содержимое, размер и формат, и два последних свойства решают, дойдёт ли результат до получателя.</a:t>
             </a:r>
           </a:p>
           <a:p/>
           <a:p>
             <a:r>
-              <a:t>Второй. Лимиты Telegram — отдельный, более узкий потолок, и они разные для фото и для документа. Прошедшее мимо лимита n8n может всё равно не пройти мимо лимита канала доставки: пороги независимы, их два, и проверка одного не освобождает от проверки другого. В нашей сцене они разошлись ровно так: шестнадцать мегабайт у самого n8n против десяти с небольшим у отправки фотографии — файл на двенадцать с лишним мегабайт прошёл первый порог и не прошёл второй.</a:t>
+              <a:t>Контракт между шагами, который в кейсе «Уведомления» рвался на тексте — узел не падал, а результат тихо оказывался не тем, — здесь рвётся на формате и размере бинарного вложения, по той же причине: формально успешный прогон ничего не говорит о том, дошёл ли результат до получателя в ожидаемом виде. Один урок на двух разных типах данных внутри одного занятия, и совпадением это не назвать: успех шага измеряет сам шаг, а не то, что произошло дальше.</a:t>
             </a:r>
           </a:p>
           <a:p/>
           <a:p>
             <a:r>
-              <a:t>Третий. Ручной прогон с бинарными данными съедает заметно больше памяти, чем автоматический. На текстовых данных мы это видели ещё в прошлом занятии, но на файле разница ощутимее — держите это в уме, если отлаживаете такой узел вживую на своём стенде.</a:t>
+              <a:t>И третий разрез того же урока мы видели в этом же кейсе, на сгенерированной карточке: там контракт не порвался вовсе — размер в норме, формат в норме, доставка подтверждена, — а слово внутри изображения всё равно написано неверно. Чем дальше результат от того, что цепочка умеет проверять, тем меньше её зелёный статус о нём говорит.</a:t>
             </a:r>
           </a:p>
           <a:p/>
           <a:p>
             <a:r>
-              <a:t>Критерий. Заботиться о бинарных данных как об отдельном контракте нужно всегда, когда по цепочке идёт файл или изображение, а не только текстовые поля: проверить размер перед отправкой и знать лимит канала доставки — базовый уровень, без исключений по типу задачи. Сверх этого занятие не требует ничего — ни в деке, ни в вашем процессе дома: хранить много файлов, искать среди них, отдавать их содержимое модели — следующий уровень, не вводный.</a:t>
+              <a:t>Теперь явная граница, за которую этот кейс сознательно не заходит. Бинарные данные мы ввели на уровне «один файл, один известный лимит, одна отправка»: получить файл, проверить размер и формат, отправить. Хранить множество файлов, искать среди них, отдавать их содержимое модели — векторное хранилище, поиск по изображениям, ответы по содержимому картинок — задача следующего уровня, и здесь мы её намеренно не трогаем. Семинар 10 достраивает ровно то, что сегодня осталось за кадром: не вводит бинарные данные с нуля, а продолжает с того уровня, на котором мы их сегодня оставили.</a:t>
             </a:r>
           </a:p>
           <a:p/>
           <a:p>
             <a:r>
-              <a:t>Закрываем последнюю строку оси. Выглядело надёжным: картинка собралась и ушла в Telegram. Чем оказалось: до тех пор, пока помещается в лимит — большой файл уходит не полностью или не уходит вовсе, а прогон при этом всё равно остаётся зелёным.</a:t>
+              <a:t>Два уровня различает не сложность инструмента, а сам задаваемый вопрос. Сегодня вопрос был «дойдёт ли этот файл в этом прогоне» — и ответ на него известен заранее целиком, по двум числам: размеру файла и лимиту канала. На следующем уровне вопрос другой — «какой из многих файлов отвечает смыслу запроса» — и у него уже нет ответа, который можно было бы посчитать по двум числам до прогона.</a:t>
             </a:r>
           </a:p>
         </p:txBody>
@@ -6731,37 +6738,43 @@
           <a:lstStyle/>
           <a:p>
             <a:r>
-              <a:t>Возвращаемся к таблице, с которой начинали. Правая колонка больше не пустая, и заполнили её экраны, которые мы только что видели, а не мои слова.</a:t>
+              <a:t>Три класса нюансов, а потом критерий и последняя строка оси.</a:t>
             </a:r>
           </a:p>
           <a:p/>
           <a:p>
             <a:r>
-              <a:t>Первая строка. Сообщение ушло координатору, цепочка стала короче и дешевле без LLM — так выглядело решение после первого кейса. Чем оказалось: LLM-узел для сборки уведомления был лишним шагом — то же самое сделал шаблон, без модели, без вариативности и без риска, что текст скажет то, чего в заявке не было вовсе.</a:t>
+              <a:t>Первый. Собственный лимит n8n по умолчанию на размер бинарных данных — 16 МБ. Для фотографии с текстом этого обычно достаточно, но скан высокого разрешения или фото прямо с телефона — не всегда: так и выглядел файл в нашей сцене.</a:t>
             </a:r>
           </a:p>
           <a:p/>
           <a:p>
             <a:r>
-              <a:t>Вторая строка. Заявка про тот же вопрос пришла снова, и её обработали как новую — пока мы не поставили проверку на повтор. Чем оказалось: без такой проверки каждое повторное обращение запускает всю цепочку с нуля, и ни точное совпадение текста, ни похожесть по общим словам не ловят переформулировку целиком — мы сами посчитали на настоящем тексте ноль общих слов между двумя формулировками одного вопроса. Нужна была проверка смыслом, и только на то, что не отсеялось дешёвым фильтром.</a:t>
+              <a:t>Второй. Лимиты Telegram — отдельный, более узкий потолок, и они разные для фото и для документа. Прошедшее мимо лимита n8n может всё равно не пройти мимо лимита канала доставки: пороги независимы, их два, и проверка одного не освобождает от проверки другого. В нашей сцене они разошлись ровно так: шестнадцать мегабайт у самого n8n против десяти с небольшим у отправки фотографии — файл на двенадцать с лишним мегабайт прошёл первый порог и не прошёл второй.</a:t>
             </a:r>
           </a:p>
           <a:p/>
           <a:p>
             <a:r>
-              <a:t>Третья строка, самая дорогая по цене доказательства. В промте стояло «не возвращай больше суммы X» — и решение месяц считалось надёжным, потому что жалоб не было. Чем оказалось: решение оставалось вероятностным, и модель обходила правило в измеренной доле прогонов — ровно на границе условия, не случайно. Алгоритмический гейт, условие в коде, на том же эксперименте не ошибся ни разу. А дальше мы увидели ту же форму пропуска на масштабе целой компании: Zillow потеряла четверть штата и сотни миллионов долларов на том же пороге без гейта, который у нас стоил одного неловкого разговора с клиентом.</a:t>
+              <a:t>Третий. Ручной прогон с бинарными данными съедает заметно больше памяти, чем автоматический. На текстовых данных мы это видели ещё в прошлом занятии, но на файле разница ощутимее — держите это в уме, если отлаживаете такой узел вживую на своём стенде.</a:t>
             </a:r>
           </a:p>
           <a:p/>
           <a:p>
             <a:r>
-              <a:t>Четвёртая строка. Картинка собралась и ушла в Telegram — выглядело завершённым действием. Чем оказалось: до тех пор, пока файл помещается в лимит. Большой файл уходит не полностью или не уходит вовсе, а прогон при этом остаётся зелёным — тот же контракт, что рвался на тексте в первом кейсе, только здесь он рвётся на размере и формате.</a:t>
+              <a:t>Сюда же — отказ, который встретился на шаге генерации карточки. Из шести прогонов один вернул не картинку, а текст — «вот ваша карточка-уведомление для Telegram», и больше ничего. Деньги за вызов списались, картинки не было, цепочка упала на следующем узле с сообщением «первый аргумент должен быть строкой или буфером, получено ничего». Отказ назван — но не тем, чем он был: про то, что модель ничего не нарисовала, в тексте ошибки нет ни слова. Повтор той же заявки прошёл удачно, то есть это и не воспроизводится по требованию. Для нашего разговора важно одно: узел, который ждёт файл, должен уметь сказать вслух «файла не пришло», а не падать на длине чего-то внутри себя.</a:t>
             </a:r>
           </a:p>
           <a:p/>
           <a:p>
             <a:r>
-              <a:t>Все четыре строки — про одно: где в цепочке решение принимает модель, а где должен принимать код, и что молчит, когда эту границу не назвали явно. Разница между «работает» и «можно ручаться» прошла сегодня по каждому шагу цепочки отдельно, а не по одному узлу.</a:t>
+              <a:t>Критерий. Заботиться о бинарных данных как об отдельном контракте нужно всегда, когда по цепочке идёт файл или изображение, а не только текстовые поля: проверить размер перед отправкой и знать лимит канала доставки — базовый уровень, без исключений по типу задачи. Сверх этого занятие не требует ничего — ни в деке, ни в вашем процессе дома: хранить много файлов, искать среди них, отдавать их содержимое модели — следующий уровень, не вводный.</a:t>
+            </a:r>
+          </a:p>
+          <a:p/>
+          <a:p>
+            <a:r>
+              <a:t>Закрываем последнюю строку оси. Выглядело надёжным: картинка собралась и ушла в Telegram. Чем оказалось: до тех пор, пока помещается в лимит — большой файл уходит не полностью или не уходит вовсе, а прогон при этом всё равно остаётся зелёным.</a:t>
             </a:r>
           </a:p>
         </p:txBody>
@@ -6831,46 +6844,37 @@
           <a:lstStyle/>
           <a:p>
             <a:r>
-              <a:t>Соберём, что добавилось сегодня к процессу, с которым вы работаете дома.</a:t>
+              <a:t>Возвращаемся к таблице, с которой начинали. Правая колонка больше не пустая, и заполнили её экраны, которые мы только что видели, а не мои слова.</a:t>
             </a:r>
           </a:p>
           <a:p/>
           <a:p>
             <a:r>
-              <a:t>Это тот же файл, продолжение </a:t>
-            </a:r>
-            <a:r>
-              <a:rPr>
-                <a:latin typeface="Consolas"/>
-              </a:rPr>
-              <a:t>student.json</a:t>
-            </a:r>
-            <a:r>
-              <a:t>, с которым вы ушли с прошлого занятия: форма, извлечение полей, справочник, запись в таблицу, экран результата, плюс повтор и ветка отказа. Сегодня к нему добавились четыре решения, и каждое меняет то, что казалось рабочим, на то, за что можно отвечать.</a:t>
+              <a:t>Первая строка. Сообщение ушло координатору, цепочка стала короче и дешевле без LLM — так выглядело решение после первого кейса. Чем оказалось: LLM-узел для сборки уведомления был лишним шагом — то же самое сделал шаблон, без модели, без вариативности и без риска, что текст скажет то, чего в заявке не было вовсе.</a:t>
             </a:r>
           </a:p>
           <a:p/>
           <a:p>
             <a:r>
-              <a:t>Уведомление координатору теперь собирается подстановкой значений в готовую форму, а не отдельным вызовом модели: тот же текст, без риска, что модель добавит в сообщение деталь, которой в заявке не было. Перед записью заявки встала проверка на повтор в два уровня: буквальные повторы отсекаются дёшево и мгновенно, а на остальное идёт вопрос смыслом. Решение о возврате денег теперь принимает условие в коде, а не текстовое правило внутри запроса к модели: тот же порог суммы, но без вероятности ошибиться ровно на границе. А доставка картинки в Telegram теперь проверяет размер файла перед отправкой, а не надеется, что получится само.</a:t>
+              <a:t>Вторая строка. Заявка про тот же вопрос пришла снова, и её обработали как новую — пока мы не поставили проверку на повтор. Чем оказалось: без такой проверки каждое повторное обращение запускает всю цепочку с нуля, и ни точное совпадение текста, ни похожесть по общим словам не ловят переформулировку целиком — мы сами посчитали на настоящем тексте ноль общих слов между двумя формулировками одного вопроса. Нужна была проверка смыслом, и только на то, что не отсеялось дешёвым фильтром.</a:t>
             </a:r>
           </a:p>
           <a:p/>
           <a:p>
             <a:r>
-              <a:t>Поставить так же, как в прошлый раз: меню сценария — импорт из файла. Нужно то же самое, что было нужно для прошлого занятия — свой n8n и ключ провайдера модели, — и дополнительно бот и токен в Telegram, если вы хотите проверить именно уведомления и картинку на своих данных.</a:t>
+              <a:t>Третья строка, самая дорогая по цене доказательства. В промте стояло «не возвращай больше суммы X» — и решение месяц считалось надёжным, потому что жалоб не было. Чем оказалось: решение оставалось вероятностным, и модель обходила правило в измеренной доле прогонов — ровно на границе условия, не случайно. Алгоритмический гейт, условие в коде, на том же эксперименте не ошибся ни разу. А дальше мы увидели ту же форму пропуска на масштабе целой компании: Zillow потеряла четверть штата и сотни миллионов долларов на том же пороге без гейта, который у нас стоил одного неловкого разговора с клиентом.</a:t>
             </a:r>
           </a:p>
           <a:p/>
           <a:p>
             <a:r>
-              <a:t>Просьба на дом та же, что в прошлый раз: прогоните несколько заявок на своей версии, включая повторное обращение и картинку заметно больше обычной, и посмотрите, какое из четырёх решений у вас самого ведёт себя не так, как здесь на экране.</a:t>
+              <a:t>Четвёртая строка. Картинка собралась и ушла в Telegram — выглядело завершённым действием. Чем оказалось: до тех пор, пока файл помещается в лимит. Большой файл уходит не полностью или не уходит вовсе, а прогон при этом остаётся зелёным — тот же контракт, что рвался на тексте в первом кейсе, только здесь он рвётся на размере и формате.</a:t>
             </a:r>
           </a:p>
           <a:p/>
           <a:p>
             <a:r>
-              <a:t>И отдельная просьба, потому что сегодняшнее занятие вышло плотнее прошлого: не проверяйте все четыре решения за один вечер. Возьмите одно, ближе к вашей работе, и доведите до того, чтобы объяснить коллеге, почему оно устроено именно так. Остальные три подождут следующей недели.</a:t>
+              <a:t>Все четыре строки — про одно: где в цепочке решение принимает модель, а где должен принимать код, и что молчит, когда эту границу не назвали явно. Разница между «работает» и «можно ручаться» прошла сегодня по каждому шагу цепочки отдельно, а не по одному узлу.</a:t>
             </a:r>
           </a:p>
         </p:txBody>
@@ -6896,6 +6900,115 @@
 </file>
 
 <file path=ppt/notesSlides/notesSlide64.xml><?xml version="1.0" encoding="utf-8"?>
+<p:notes xmlns:a="http://schemas.openxmlformats.org/drawingml/2006/main" xmlns:p="http://schemas.openxmlformats.org/presentationml/2006/main" xmlns:r="http://schemas.openxmlformats.org/officeDocument/2006/relationships">
+  <p:cSld>
+    <p:spTree>
+      <p:nvGrpSpPr>
+        <p:cNvPr id="1" name=""/>
+        <p:cNvGrpSpPr/>
+        <p:nvPr/>
+      </p:nvGrpSpPr>
+      <p:grpSpPr>
+        <a:xfrm>
+          <a:off x="0" y="0"/>
+          <a:ext cx="0" cy="0"/>
+          <a:chOff x="0" y="0"/>
+          <a:chExt cx="0" cy="0"/>
+        </a:xfrm>
+      </p:grpSpPr>
+      <p:sp>
+        <p:nvSpPr>
+          <p:cNvPr id="2" name="Slide Image Placeholder 1"/>
+          <p:cNvSpPr>
+            <a:spLocks noGrp="1"/>
+          </p:cNvSpPr>
+          <p:nvPr>
+            <p:ph type="sldImg" idx="2"/>
+          </p:nvPr>
+        </p:nvSpPr>
+        <p:spPr/>
+      </p:sp>
+      <p:sp>
+        <p:nvSpPr>
+          <p:cNvPr id="3" name="Notes Placeholder 2"/>
+          <p:cNvSpPr>
+            <a:spLocks noGrp="1"/>
+          </p:cNvSpPr>
+          <p:nvPr>
+            <p:ph type="body" idx="3" sz="quarter"/>
+          </p:nvPr>
+        </p:nvSpPr>
+        <p:spPr/>
+        <p:txBody>
+          <a:bodyPr/>
+          <a:lstStyle/>
+          <a:p>
+            <a:r>
+              <a:t>Соберём, что добавилось сегодня к процессу, с которым вы работаете дома.</a:t>
+            </a:r>
+          </a:p>
+          <a:p/>
+          <a:p>
+            <a:r>
+              <a:t>Это тот же файл, продолжение </a:t>
+            </a:r>
+            <a:r>
+              <a:rPr>
+                <a:latin typeface="Consolas"/>
+              </a:rPr>
+              <a:t>student.json</a:t>
+            </a:r>
+            <a:r>
+              <a:t>, с которым вы ушли с прошлого занятия: форма, извлечение полей, справочник, запись в таблицу, экран результата, плюс повтор и ветка отказа. Сегодня к нему добавились четыре решения, и каждое меняет то, что казалось рабочим, на то, за что можно отвечать.</a:t>
+            </a:r>
+          </a:p>
+          <a:p/>
+          <a:p>
+            <a:r>
+              <a:t>Уведомление координатору теперь собирается подстановкой значений в готовую форму, а не отдельным вызовом модели: тот же текст, без риска, что модель добавит в сообщение деталь, которой в заявке не было. Перед записью заявки встала проверка на повтор в два уровня: буквальные повторы отсекаются дёшево и мгновенно, а на остальное идёт вопрос смыслом. Решение о возврате денег теперь принимает условие в коде, а не текстовое правило внутри запроса к модели: тот же порог суммы, но без вероятности ошибиться ровно на границе. А доставка картинки в Telegram теперь проверяет размер файла перед отправкой, а не надеется, что получится само.</a:t>
+            </a:r>
+          </a:p>
+          <a:p/>
+          <a:p>
+            <a:r>
+              <a:t>Поставить так же, как в прошлый раз: меню сценария — импорт из файла. Нужно то же самое, что было нужно для прошлого занятия — свой n8n и ключ провайдера модели, — и дополнительно бот и токен в Telegram, если вы хотите проверить именно уведомления и картинку на своих данных.</a:t>
+            </a:r>
+          </a:p>
+          <a:p/>
+          <a:p>
+            <a:r>
+              <a:t>Просьба на дом та же, что в прошлый раз: прогоните несколько заявок на своей версии, включая повторное обращение и картинку заметно больше обычной, и посмотрите, какое из четырёх решений у вас самого ведёт себя не так, как здесь на экране.</a:t>
+            </a:r>
+          </a:p>
+          <a:p/>
+          <a:p>
+            <a:r>
+              <a:t>И отдельная просьба, потому что сегодняшнее занятие вышло плотнее прошлого: не проверяйте все четыре решения за один вечер. Возьмите одно, ближе к вашей работе, и доведите до того, чтобы объяснить коллеге, почему оно устроено именно так. Остальные три подождут следующей недели.</a:t>
+            </a:r>
+          </a:p>
+        </p:txBody>
+      </p:sp>
+      <p:sp>
+        <p:nvSpPr>
+          <p:cNvPr id="4" name="Slide Number Placeholder 3"/>
+          <p:cNvSpPr>
+            <a:spLocks noGrp="1"/>
+          </p:cNvSpPr>
+          <p:nvPr>
+            <p:ph type="sldNum" idx="5" sz="quarter"/>
+          </p:nvPr>
+        </p:nvSpPr>
+        <p:spPr/>
+      </p:sp>
+    </p:spTree>
+  </p:cSld>
+  <p:clrMapOvr>
+    <a:masterClrMapping/>
+  </p:clrMapOvr>
+</p:notes>
+</file>
+
+<file path=ppt/notesSlides/notesSlide65.xml><?xml version="1.0" encoding="utf-8"?>
 <p:notes xmlns:a="http://schemas.openxmlformats.org/drawingml/2006/main" xmlns:p="http://schemas.openxmlformats.org/presentationml/2006/main" xmlns:r="http://schemas.openxmlformats.org/officeDocument/2006/relationships">
   <p:cSld>
     <p:spTree>
@@ -10435,15 +10548,39 @@
           </a:p>
         </p:txBody>
       </p:sp>
-      <p:sp>
-        <p:nvSpPr>
-          <p:cNvPr id="5" name="TextBox 4"/>
-          <p:cNvSpPr txBox="1"/>
-          <p:nvPr/>
-        </p:nvSpPr>
-        <p:spPr>
-          <a:xfrm>
-            <a:off x="822960" y="3436239"/>
+      <p:pic>
+        <p:nvPicPr>
+          <p:cNvPr id="5" name="Picture 4" descr="hero-n01.png"/>
+          <p:cNvPicPr>
+            <a:picLocks noChangeAspect="1"/>
+          </p:cNvPicPr>
+          <p:nvPr/>
+        </p:nvPicPr>
+        <p:blipFill>
+          <a:blip r:embed="rId2"/>
+          <a:stretch>
+            <a:fillRect/>
+          </a:stretch>
+        </p:blipFill>
+        <p:spPr>
+          <a:xfrm>
+            <a:off x="0" y="3979889"/>
+            <a:ext cx="12191695" cy="2878111"/>
+          </a:xfrm>
+          <a:prstGeom prst="rect">
+            <a:avLst/>
+          </a:prstGeom>
+        </p:spPr>
+      </p:pic>
+      <p:sp>
+        <p:nvSpPr>
+          <p:cNvPr id="6" name="TextBox 5"/>
+          <p:cNvSpPr txBox="1"/>
+          <p:nvPr/>
+        </p:nvSpPr>
+        <p:spPr>
+          <a:xfrm>
+            <a:off x="822960" y="2170919"/>
             <a:ext cx="10515600" cy="269748"/>
           </a:xfrm>
           <a:prstGeom prst="rect">
@@ -10479,13 +10616,13 @@
       </p:sp>
       <p:sp>
         <p:nvSpPr>
-          <p:cNvPr id="6" name="TextBox 5"/>
-          <p:cNvSpPr txBox="1"/>
-          <p:nvPr/>
-        </p:nvSpPr>
-        <p:spPr>
-          <a:xfrm>
-            <a:off x="1051560" y="4090035"/>
+          <p:cNvPr id="7" name="TextBox 6"/>
+          <p:cNvSpPr txBox="1"/>
+          <p:nvPr/>
+        </p:nvSpPr>
+        <p:spPr>
+          <a:xfrm>
+            <a:off x="1051560" y="2824715"/>
             <a:ext cx="10058400" cy="941070"/>
           </a:xfrm>
           <a:prstGeom prst="rect">
@@ -10521,7 +10658,7 @@
       </p:sp>
       <p:sp>
         <p:nvSpPr>
-          <p:cNvPr id="7" name="TextBox 6"/>
+          <p:cNvPr id="8" name="TextBox 7"/>
           <p:cNvSpPr txBox="1"/>
           <p:nvPr/>
         </p:nvSpPr>
@@ -10763,16 +10900,40 @@
           </a:p>
         </p:txBody>
       </p:sp>
-      <p:sp>
-        <p:nvSpPr>
-          <p:cNvPr id="3" name="Rounded Rectangle 2"/>
+      <p:pic>
+        <p:nvPicPr>
+          <p:cNvPr id="3" name="Picture 2" descr="tg-k1-uvedomlenie.png"/>
+          <p:cNvPicPr>
+            <a:picLocks noChangeAspect="1"/>
+          </p:cNvPicPr>
+          <p:nvPr/>
+        </p:nvPicPr>
+        <p:blipFill>
+          <a:blip r:embed="rId2"/>
+          <a:stretch>
+            <a:fillRect/>
+          </a:stretch>
+        </p:blipFill>
+        <p:spPr>
+          <a:xfrm>
+            <a:off x="1611831" y="949452"/>
+            <a:ext cx="8965289" cy="3931920"/>
+          </a:xfrm>
+          <a:prstGeom prst="rect">
+            <a:avLst/>
+          </a:prstGeom>
+        </p:spPr>
+      </p:pic>
+      <p:sp>
+        <p:nvSpPr>
+          <p:cNvPr id="4" name="Rounded Rectangle 3"/>
           <p:cNvSpPr/>
           <p:nvPr/>
         </p:nvSpPr>
         <p:spPr>
           <a:xfrm>
-            <a:off x="502920" y="2107692"/>
-            <a:ext cx="82296" cy="1059180"/>
+            <a:off x="502920" y="5061204"/>
+            <a:ext cx="82296" cy="1257300"/>
           </a:xfrm>
           <a:prstGeom prst="roundRect">
             <a:avLst>
@@ -10811,14 +10972,14 @@
       </p:sp>
       <p:sp>
         <p:nvSpPr>
-          <p:cNvPr id="4" name="TextBox 3"/>
-          <p:cNvSpPr txBox="1"/>
-          <p:nvPr/>
-        </p:nvSpPr>
-        <p:spPr>
-          <a:xfrm>
-            <a:off x="859536" y="2235708"/>
-            <a:ext cx="10643616" cy="803148"/>
+          <p:cNvPr id="5" name="TextBox 4"/>
+          <p:cNvSpPr txBox="1"/>
+          <p:nvPr/>
+        </p:nvSpPr>
+        <p:spPr>
+          <a:xfrm>
+            <a:off x="859536" y="5189220"/>
+            <a:ext cx="10643616" cy="1001268"/>
           </a:xfrm>
           <a:prstGeom prst="rect">
             <a:avLst/>
@@ -10846,7 +11007,7 @@
                 </a:solidFill>
                 <a:latin typeface="Arial"/>
               </a:rPr>
-              <a:t>Telegram, чат «Уведомления учебного центра».</a:t>
+              <a:t>Одна и та же заявка, два настоящих прогона подряд: верхнее сообщение сочинила модель, нижнее собрал шаблон из тех же трёх значений.</a:t>
             </a:r>
           </a:p>
           <a:p>
@@ -10865,121 +11026,14 @@
                 </a:solidFill>
                 <a:latin typeface="Arial"/>
               </a:rPr>
-              <a:t/>
-            </a:r>
-          </a:p>
-          <a:p>
-            <a:pPr algn="l">
-              <a:lnSpc>
-                <a:spcPts val="1860"/>
-              </a:lnSpc>
-              <a:spcAft>
-                <a:spcPts val="300"/>
-              </a:spcAft>
-            </a:pPr>
-            <a:r>
-              <a:rPr sz="1500" b="1" i="0">
-                <a:solidFill>
-                  <a:srgbClr val="141B2E"/>
-                </a:solidFill>
-                <a:latin typeface="Arial"/>
-              </a:rPr>
-              <a:t>Новая заявка от Марии: тема «курс», также упомянуто: оплата.</a:t>
-            </a:r>
-          </a:p>
-        </p:txBody>
-      </p:sp>
-      <p:sp>
-        <p:nvSpPr>
-          <p:cNvPr id="5" name="Rounded Rectangle 4"/>
-          <p:cNvSpPr/>
-          <p:nvPr/>
-        </p:nvSpPr>
-        <p:spPr>
-          <a:xfrm>
-            <a:off x="502920" y="3834384"/>
-            <a:ext cx="82296" cy="746760"/>
-          </a:xfrm>
-          <a:prstGeom prst="roundRect">
-            <a:avLst>
-              <a:gd name="adj" fmla="val 50000"/>
-            </a:avLst>
-          </a:prstGeom>
-          <a:solidFill>
-            <a:srgbClr val="F0AB00"/>
-          </a:solidFill>
-          <a:ln>
-            <a:noFill/>
-          </a:ln>
-          <a:effectLst/>
-        </p:spPr>
-        <p:style>
-          <a:lnRef idx="1">
-            <a:schemeClr val="accent1"/>
-          </a:lnRef>
-          <a:fillRef idx="3">
-            <a:schemeClr val="accent1"/>
-          </a:fillRef>
-          <a:effectRef idx="2">
-            <a:schemeClr val="accent1"/>
-          </a:effectRef>
-          <a:fontRef idx="minor">
-            <a:schemeClr val="lt1"/>
-          </a:fontRef>
-        </p:style>
-        <p:txBody>
-          <a:bodyPr rtlCol="0" anchor="ctr"/>
-          <a:lstStyle/>
-          <a:p>
-            <a:pPr algn="ctr"/>
+              <a:t>Имя: у модели — «от Марии Величко», у шаблона — «от Мария Величко». Подставить поле шаблон умеет, склонять — нет.</a:t>
+            </a:r>
           </a:p>
         </p:txBody>
       </p:sp>
       <p:sp>
         <p:nvSpPr>
           <p:cNvPr id="6" name="TextBox 5"/>
-          <p:cNvSpPr txBox="1"/>
-          <p:nvPr/>
-        </p:nvSpPr>
-        <p:spPr>
-          <a:xfrm>
-            <a:off x="859536" y="3962399"/>
-            <a:ext cx="10643616" cy="490727"/>
-          </a:xfrm>
-          <a:prstGeom prst="rect">
-            <a:avLst/>
-          </a:prstGeom>
-          <a:noFill/>
-        </p:spPr>
-        <p:txBody>
-          <a:bodyPr wrap="square" lIns="0" rIns="0" tIns="0" bIns="0" anchor="ctr">
-            <a:spAutoFit/>
-          </a:bodyPr>
-          <a:lstStyle/>
-          <a:p>
-            <a:pPr algn="l">
-              <a:lnSpc>
-                <a:spcPts val="1860"/>
-              </a:lnSpc>
-              <a:spcAft>
-                <a:spcPts val="300"/>
-              </a:spcAft>
-            </a:pPr>
-            <a:r>
-              <a:rPr sz="1500" b="1" i="0">
-                <a:solidFill>
-                  <a:srgbClr val="141B2E"/>
-                </a:solidFill>
-                <a:latin typeface="Arial"/>
-              </a:rPr>
-              <a:t>Ровно то, что Ольга описала в прошлой сцене, слово в слово: кто написал, по какой теме и что упомянул ещё — одна строка, без необходимости открывать экран результата.</a:t>
-            </a:r>
-          </a:p>
-        </p:txBody>
-      </p:sp>
-      <p:sp>
-        <p:nvSpPr>
-          <p:cNvPr id="7" name="TextBox 6"/>
           <p:cNvSpPr txBox="1"/>
           <p:nvPr/>
         </p:nvSpPr>
@@ -11087,20 +11141,44 @@
           </a:p>
         </p:txBody>
       </p:sp>
-      <p:sp>
-        <p:nvSpPr>
-          <p:cNvPr id="3" name="Rounded Rectangle 2"/>
+      <p:pic>
+        <p:nvPicPr>
+          <p:cNvPr id="3" name="Picture 2" descr="tg-k1-oshibka.png"/>
+          <p:cNvPicPr>
+            <a:picLocks noChangeAspect="1"/>
+          </p:cNvPicPr>
+          <p:nvPr/>
+        </p:nvPicPr>
+        <p:blipFill>
+          <a:blip r:embed="rId2"/>
+          <a:stretch>
+            <a:fillRect/>
+          </a:stretch>
+        </p:blipFill>
+        <p:spPr>
+          <a:xfrm>
+            <a:off x="1550780" y="943356"/>
+            <a:ext cx="9087391" cy="2869019"/>
+          </a:xfrm>
+          <a:prstGeom prst="rect">
+            <a:avLst/>
+          </a:prstGeom>
+        </p:spPr>
+      </p:pic>
+      <p:sp>
+        <p:nvSpPr>
+          <p:cNvPr id="4" name="Rounded Rectangle 3"/>
           <p:cNvSpPr/>
           <p:nvPr/>
         </p:nvSpPr>
         <p:spPr>
           <a:xfrm>
-            <a:off x="502920" y="1461871"/>
-            <a:ext cx="11183112" cy="2437510"/>
+            <a:off x="502920" y="3976967"/>
+            <a:ext cx="11183112" cy="1380236"/>
           </a:xfrm>
           <a:prstGeom prst="roundRect">
             <a:avLst>
-              <a:gd name="adj" fmla="val 12504"/>
+              <a:gd name="adj" fmla="val 22083"/>
             </a:avLst>
           </a:prstGeom>
           <a:solidFill>
@@ -11137,14 +11215,14 @@
       </p:sp>
       <p:sp>
         <p:nvSpPr>
-          <p:cNvPr id="4" name="TextBox 3"/>
-          <p:cNvSpPr txBox="1"/>
-          <p:nvPr/>
-        </p:nvSpPr>
-        <p:spPr>
-          <a:xfrm>
-            <a:off x="685800" y="1644751"/>
-            <a:ext cx="2318612" cy="282067"/>
+          <p:cNvPr id="5" name="TextBox 4"/>
+          <p:cNvSpPr txBox="1"/>
+          <p:nvPr/>
+        </p:nvSpPr>
+        <p:spPr>
+          <a:xfrm>
+            <a:off x="658368" y="4132415"/>
+            <a:ext cx="4242943" cy="259587"/>
           </a:xfrm>
           <a:prstGeom prst="rect">
             <a:avLst/>
@@ -11159,14 +11237,14 @@
           <a:p>
             <a:pPr algn="l">
               <a:lnSpc>
-                <a:spcPts val="1265"/>
+                <a:spcPts val="1100"/>
               </a:lnSpc>
               <a:spcAft>
                 <a:spcPts val="0"/>
               </a:spcAft>
             </a:pPr>
             <a:r>
-              <a:rPr sz="1150" b="1" i="0">
+              <a:rPr sz="1000" b="1" i="0">
                 <a:solidFill>
                   <a:srgbClr val="6B7685"/>
                 </a:solidFill>
@@ -11179,14 +11257,14 @@
       </p:sp>
       <p:sp>
         <p:nvSpPr>
-          <p:cNvPr id="5" name="TextBox 4"/>
-          <p:cNvSpPr txBox="1"/>
-          <p:nvPr/>
-        </p:nvSpPr>
-        <p:spPr>
-          <a:xfrm>
-            <a:off x="3150716" y="1644751"/>
-            <a:ext cx="8206131" cy="282067"/>
+          <p:cNvPr id="6" name="TextBox 5"/>
+          <p:cNvSpPr txBox="1"/>
+          <p:nvPr/>
+        </p:nvSpPr>
+        <p:spPr>
+          <a:xfrm>
+            <a:off x="5047615" y="4132415"/>
+            <a:ext cx="6336664" cy="259587"/>
           </a:xfrm>
           <a:prstGeom prst="rect">
             <a:avLst/>
@@ -11201,14 +11279,14 @@
           <a:p>
             <a:pPr algn="l">
               <a:lnSpc>
-                <a:spcPts val="1265"/>
+                <a:spcPts val="1100"/>
               </a:lnSpc>
               <a:spcAft>
                 <a:spcPts val="0"/>
               </a:spcAft>
             </a:pPr>
             <a:r>
-              <a:rPr sz="1150" b="1" i="0">
+              <a:rPr sz="1000" b="1" i="0">
                 <a:solidFill>
                   <a:srgbClr val="6B7685"/>
                 </a:solidFill>
@@ -11221,14 +11299,14 @@
       </p:sp>
       <p:sp>
         <p:nvSpPr>
-          <p:cNvPr id="6" name="TextBox 5"/>
-          <p:cNvSpPr txBox="1"/>
-          <p:nvPr/>
-        </p:nvSpPr>
-        <p:spPr>
-          <a:xfrm>
-            <a:off x="685800" y="1926818"/>
-            <a:ext cx="2318612" cy="894842"/>
+          <p:cNvPr id="7" name="TextBox 6"/>
+          <p:cNvSpPr txBox="1"/>
+          <p:nvPr/>
+        </p:nvSpPr>
+        <p:spPr>
+          <a:xfrm>
+            <a:off x="658368" y="4392003"/>
+            <a:ext cx="4242943" cy="404876"/>
           </a:xfrm>
           <a:prstGeom prst="rect">
             <a:avLst/>
@@ -11243,14 +11321,14 @@
           <a:p>
             <a:pPr algn="l">
               <a:lnSpc>
-                <a:spcPts val="1437"/>
+                <a:spcPts val="1090"/>
               </a:lnSpc>
               <a:spcAft>
                 <a:spcPts val="0"/>
               </a:spcAft>
             </a:pPr>
             <a:r>
-              <a:rPr sz="1250" b="0" i="0">
+              <a:rPr sz="1000" b="0" i="0">
                 <a:solidFill>
                   <a:srgbClr val="141B2E"/>
                 </a:solidFill>
@@ -11263,14 +11341,14 @@
       </p:sp>
       <p:sp>
         <p:nvSpPr>
-          <p:cNvPr id="7" name="TextBox 6"/>
-          <p:cNvSpPr txBox="1"/>
-          <p:nvPr/>
-        </p:nvSpPr>
-        <p:spPr>
-          <a:xfrm>
-            <a:off x="3150716" y="1926818"/>
-            <a:ext cx="8206131" cy="894842"/>
+          <p:cNvPr id="8" name="TextBox 7"/>
+          <p:cNvSpPr txBox="1"/>
+          <p:nvPr/>
+        </p:nvSpPr>
+        <p:spPr>
+          <a:xfrm>
+            <a:off x="5047615" y="4392003"/>
+            <a:ext cx="6336664" cy="404876"/>
           </a:xfrm>
           <a:prstGeom prst="rect">
             <a:avLst/>
@@ -11285,34 +11363,34 @@
           <a:p>
             <a:pPr algn="l">
               <a:lnSpc>
-                <a:spcPts val="1437"/>
+                <a:spcPts val="1090"/>
               </a:lnSpc>
               <a:spcAft>
                 <a:spcPts val="0"/>
               </a:spcAft>
             </a:pPr>
             <a:r>
-              <a:rPr sz="1250" b="0" i="0">
-                <a:solidFill>
-                  <a:srgbClr val="141B2E"/>
-                </a:solidFill>
-                <a:latin typeface="Arial"/>
-              </a:rPr>
-              <a:t>Пришло: «Новая заявка от Марии: тема «курс», также упомянуто: оплата.» Текст свободный, но совпал по смыслу с целью — модели хватило инструкции и трёх значений, интерпретировать здесь было просто.</a:t>
+              <a:rPr sz="1000" b="0" i="0">
+                <a:solidFill>
+                  <a:srgbClr val="141B2E"/>
+                </a:solidFill>
+                <a:latin typeface="Arial"/>
+              </a:rPr>
+              <a:t>Текст свободный, но по смыслу тот, что просила Ольга: модели хватило инструкции и трёх значений.</a:t>
             </a:r>
           </a:p>
         </p:txBody>
       </p:sp>
       <p:cxnSp>
         <p:nvCxnSpPr>
-          <p:cNvPr id="8" name="Connector 7"/>
+          <p:cNvPr id="9" name="Connector 8"/>
           <p:cNvCxnSpPr/>
           <p:nvPr/>
         </p:nvCxnSpPr>
         <p:spPr>
           <a:xfrm>
-            <a:off x="685800" y="2821660"/>
-            <a:ext cx="10817352" cy="0"/>
+            <a:off x="658368" y="4796879"/>
+            <a:ext cx="10872216" cy="0"/>
           </a:xfrm>
           <a:prstGeom prst="line">
             <a:avLst/>
@@ -11340,14 +11418,14 @@
       </p:cxnSp>
       <p:sp>
         <p:nvSpPr>
-          <p:cNvPr id="9" name="TextBox 8"/>
-          <p:cNvSpPr txBox="1"/>
-          <p:nvPr/>
-        </p:nvSpPr>
-        <p:spPr>
-          <a:xfrm>
-            <a:off x="685800" y="2821660"/>
-            <a:ext cx="2318612" cy="894842"/>
+          <p:cNvPr id="10" name="TextBox 9"/>
+          <p:cNvSpPr txBox="1"/>
+          <p:nvPr/>
+        </p:nvSpPr>
+        <p:spPr>
+          <a:xfrm>
+            <a:off x="658368" y="4796879"/>
+            <a:ext cx="4242943" cy="404876"/>
           </a:xfrm>
           <a:prstGeom prst="rect">
             <a:avLst/>
@@ -11362,14 +11440,14 @@
           <a:p>
             <a:pPr algn="l">
               <a:lnSpc>
-                <a:spcPts val="1437"/>
+                <a:spcPts val="1090"/>
               </a:lnSpc>
               <a:spcAft>
                 <a:spcPts val="0"/>
               </a:spcAft>
             </a:pPr>
             <a:r>
-              <a:rPr sz="1250" b="0" i="0">
+              <a:rPr sz="1000" b="0" i="0">
                 <a:solidFill>
                   <a:srgbClr val="141B2E"/>
                 </a:solidFill>
@@ -11382,14 +11460,14 @@
       </p:sp>
       <p:sp>
         <p:nvSpPr>
-          <p:cNvPr id="10" name="TextBox 9"/>
-          <p:cNvSpPr txBox="1"/>
-          <p:nvPr/>
-        </p:nvSpPr>
-        <p:spPr>
-          <a:xfrm>
-            <a:off x="3150716" y="2821660"/>
-            <a:ext cx="8206131" cy="894842"/>
+          <p:cNvPr id="11" name="TextBox 10"/>
+          <p:cNvSpPr txBox="1"/>
+          <p:nvPr/>
+        </p:nvSpPr>
+        <p:spPr>
+          <a:xfrm>
+            <a:off x="5047615" y="4796879"/>
+            <a:ext cx="6336664" cy="404876"/>
           </a:xfrm>
           <a:prstGeom prst="rect">
             <a:avLst/>
@@ -11404,52 +11482,34 @@
           <a:p>
             <a:pPr algn="l">
               <a:lnSpc>
-                <a:spcPts val="1437"/>
+                <a:spcPts val="1090"/>
               </a:lnSpc>
               <a:spcAft>
                 <a:spcPts val="0"/>
               </a:spcAft>
             </a:pPr>
             <a:r>
-              <a:rPr sz="1250" b="0" i="0">
-                <a:solidFill>
-                  <a:srgbClr val="141B2E"/>
-                </a:solidFill>
-                <a:latin typeface="Arial"/>
-              </a:rPr>
-              <a:t>Пришло: «Привет, </a:t>
-            </a:r>
-            <a:r>
-              <a:rPr sz="1250" b="1" i="0">
-                <a:solidFill>
-                  <a:srgbClr val="141B2E"/>
-                </a:solidFill>
-                <a:latin typeface="Arial"/>
-              </a:rPr>
-              <a:t>[Имя координатора]</a:t>
-            </a:r>
-            <a:r>
-              <a:rPr sz="1250" b="0" i="0">
-                <a:solidFill>
-                  <a:srgbClr val="141B2E"/>
-                </a:solidFill>
-                <a:latin typeface="Arial"/>
-              </a:rPr>
-              <a:t>! У нас новая многотемная заявка от Олега по вопросу переноса занятия и об оплате.» Модель вписала в текст буквальный кусок собственного шаблона-инструкции — слова, адресованные ей самой, а не Ольге. Узел не упал, сообщение доставлено, статус зелёный: расхождение видно только по содержанию.</a:t>
-            </a:r>
-          </a:p>
-        </p:txBody>
-      </p:sp>
-      <p:sp>
-        <p:nvSpPr>
-          <p:cNvPr id="11" name="Rounded Rectangle 10"/>
+              <a:rPr sz="1000" b="0" i="0">
+                <a:solidFill>
+                  <a:srgbClr val="141B2E"/>
+                </a:solidFill>
+                <a:latin typeface="Arial"/>
+              </a:rPr>
+              <a:t>Сообщение на кадре выше: модель обратилась к человеку словами из собственной инструкции. Узел не упал, статус зелёный.</a:t>
+            </a:r>
+          </a:p>
+        </p:txBody>
+      </p:sp>
+      <p:sp>
+        <p:nvSpPr>
+          <p:cNvPr id="12" name="Rounded Rectangle 11"/>
           <p:cNvSpPr/>
           <p:nvPr/>
         </p:nvSpPr>
         <p:spPr>
           <a:xfrm>
-            <a:off x="502920" y="4566894"/>
-            <a:ext cx="82296" cy="982980"/>
+            <a:off x="502920" y="5521795"/>
+            <a:ext cx="82296" cy="699515"/>
           </a:xfrm>
           <a:prstGeom prst="roundRect">
             <a:avLst>
@@ -11488,14 +11548,14 @@
       </p:sp>
       <p:sp>
         <p:nvSpPr>
-          <p:cNvPr id="12" name="TextBox 11"/>
-          <p:cNvSpPr txBox="1"/>
-          <p:nvPr/>
-        </p:nvSpPr>
-        <p:spPr>
-          <a:xfrm>
-            <a:off x="859536" y="4694910"/>
-            <a:ext cx="10643616" cy="726948"/>
+          <p:cNvPr id="13" name="TextBox 12"/>
+          <p:cNvSpPr txBox="1"/>
+          <p:nvPr/>
+        </p:nvSpPr>
+        <p:spPr>
+          <a:xfrm>
+            <a:off x="859536" y="5649811"/>
+            <a:ext cx="10643616" cy="443483"/>
           </a:xfrm>
           <a:prstGeom prst="rect">
             <a:avLst/>
@@ -11510,14 +11570,14 @@
           <a:p>
             <a:pPr algn="l">
               <a:lnSpc>
-                <a:spcPts val="1860"/>
+                <a:spcPts val="1673"/>
               </a:lnSpc>
               <a:spcAft>
                 <a:spcPts val="300"/>
               </a:spcAft>
             </a:pPr>
             <a:r>
-              <a:rPr sz="1500" b="1" i="0">
+              <a:rPr sz="1350" b="1" i="0">
                 <a:solidFill>
                   <a:srgbClr val="141B2E"/>
                 </a:solidFill>
@@ -11526,7 +11586,7 @@
               <a:t>Проверка форматом этого не ловит.</a:t>
             </a:r>
             <a:r>
-              <a:rPr sz="1500" b="1" i="0">
+              <a:rPr sz="1350" b="1" i="0">
                 <a:solidFill>
                   <a:srgbClr val="141B2E"/>
                 </a:solidFill>
@@ -11539,7 +11599,7 @@
       </p:sp>
       <p:sp>
         <p:nvSpPr>
-          <p:cNvPr id="13" name="TextBox 12"/>
+          <p:cNvPr id="14" name="TextBox 13"/>
           <p:cNvSpPr txBox="1"/>
           <p:nvPr/>
         </p:nvSpPr>
@@ -18657,12 +18717,12 @@
         </p:nvSpPr>
         <p:spPr>
           <a:xfrm>
-            <a:off x="502920" y="1120851"/>
-            <a:ext cx="11183112" cy="1173861"/>
+            <a:off x="502920" y="1958644"/>
+            <a:ext cx="11183112" cy="2846070"/>
           </a:xfrm>
           <a:prstGeom prst="roundRect">
             <a:avLst>
-              <a:gd name="adj" fmla="val 25000"/>
+              <a:gd name="adj" fmla="val 10709"/>
             </a:avLst>
           </a:prstGeom>
           <a:solidFill>
@@ -18705,7 +18765,7 @@
         </p:nvSpPr>
         <p:spPr>
           <a:xfrm>
-            <a:off x="722376" y="1340307"/>
+            <a:off x="722376" y="2178100"/>
             <a:ext cx="329184" cy="734949"/>
           </a:xfrm>
           <a:prstGeom prst="rect">
@@ -18747,7 +18807,7 @@
         </p:nvSpPr>
         <p:spPr>
           <a:xfrm>
-            <a:off x="1106424" y="1340307"/>
+            <a:off x="1106424" y="2178100"/>
             <a:ext cx="10360152" cy="734949"/>
           </a:xfrm>
           <a:prstGeom prst="rect">
@@ -18792,49 +18852,43 @@
       </p:sp>
       <p:sp>
         <p:nvSpPr>
-          <p:cNvPr id="6" name="Rounded Rectangle 5"/>
-          <p:cNvSpPr/>
-          <p:nvPr/>
-        </p:nvSpPr>
-        <p:spPr>
-          <a:xfrm>
-            <a:off x="502920" y="2903042"/>
-            <a:ext cx="11183112" cy="1376172"/>
-          </a:xfrm>
-          <a:prstGeom prst="roundRect">
-            <a:avLst>
-              <a:gd name="adj" fmla="val 22148"/>
-            </a:avLst>
-          </a:prstGeom>
-          <a:solidFill>
-            <a:srgbClr val="F4F7FA"/>
-          </a:solidFill>
-          <a:ln w="15240">
-            <a:solidFill>
-              <a:srgbClr val="E5EAF0"/>
-            </a:solidFill>
-          </a:ln>
-          <a:effectLst/>
-        </p:spPr>
-        <p:style>
-          <a:lnRef idx="1">
-            <a:schemeClr val="accent1"/>
-          </a:lnRef>
-          <a:fillRef idx="3">
-            <a:schemeClr val="accent1"/>
-          </a:fillRef>
-          <a:effectRef idx="2">
-            <a:schemeClr val="accent1"/>
-          </a:effectRef>
-          <a:fontRef idx="minor">
-            <a:schemeClr val="lt1"/>
-          </a:fontRef>
-        </p:style>
-        <p:txBody>
-          <a:bodyPr rtlCol="0" anchor="ctr"/>
-          <a:lstStyle/>
-          <a:p>
-            <a:pPr algn="ctr"/>
+          <p:cNvPr id="6" name="TextBox 5"/>
+          <p:cNvSpPr txBox="1"/>
+          <p:nvPr/>
+        </p:nvSpPr>
+        <p:spPr>
+          <a:xfrm>
+            <a:off x="722376" y="2913049"/>
+            <a:ext cx="329184" cy="937259"/>
+          </a:xfrm>
+          <a:prstGeom prst="rect">
+            <a:avLst/>
+          </a:prstGeom>
+          <a:noFill/>
+        </p:spPr>
+        <p:txBody>
+          <a:bodyPr wrap="square" lIns="0" rIns="0" tIns="0" bIns="0" anchor="ctr">
+            <a:spAutoFit/>
+          </a:bodyPr>
+          <a:lstStyle/>
+          <a:p>
+            <a:pPr algn="l">
+              <a:lnSpc>
+                <a:spcPts val="1829"/>
+              </a:lnSpc>
+              <a:spcAft>
+                <a:spcPts val="0"/>
+              </a:spcAft>
+            </a:pPr>
+            <a:r>
+              <a:rPr sz="1550" b="1" i="0">
+                <a:solidFill>
+                  <a:srgbClr val="028090"/>
+                </a:solidFill>
+                <a:latin typeface="Arial"/>
+              </a:rPr>
+              <a:t>2</a:t>
+            </a:r>
           </a:p>
         </p:txBody>
       </p:sp>
@@ -18846,8 +18900,8 @@
         </p:nvSpPr>
         <p:spPr>
           <a:xfrm>
-            <a:off x="722376" y="3122498"/>
-            <a:ext cx="329184" cy="937259"/>
+            <a:off x="1106424" y="2913049"/>
+            <a:ext cx="10360152" cy="937259"/>
           </a:xfrm>
           <a:prstGeom prst="rect">
             <a:avLst/>
@@ -18862,6 +18916,57 @@
           <a:p>
             <a:pPr algn="l">
               <a:lnSpc>
+                <a:spcPts val="1593"/>
+              </a:lnSpc>
+              <a:spcAft>
+                <a:spcPts val="0"/>
+              </a:spcAft>
+            </a:pPr>
+            <a:r>
+              <a:rPr sz="1350" b="1" i="0">
+                <a:solidFill>
+                  <a:srgbClr val="141B2E"/>
+                </a:solidFill>
+                <a:latin typeface="Arial"/>
+              </a:rPr>
+              <a:t>У модели-судьи своя асимметрия ошибок</a:t>
+            </a:r>
+            <a:r>
+              <a:rPr sz="1350" b="0" i="0">
+                <a:solidFill>
+                  <a:srgbClr val="141B2E"/>
+                </a:solidFill>
+                <a:latin typeface="Arial"/>
+              </a:rPr>
+              <a:t>, не ноль (Wataoka, Takahashi, Ri — NeurIPS 2024 Safe GenAI Workshop, arXiv:2410.21819, self-preference bias): модель-судья систематически не нейтральна, даже отвечая формально «да» или «нет». Наш тест это подтвердил напрямую: 3 ложных срабатывания из 20, и не все объясняются совпадением слов в вопросах.</a:t>
+            </a:r>
+          </a:p>
+        </p:txBody>
+      </p:sp>
+      <p:sp>
+        <p:nvSpPr>
+          <p:cNvPr id="8" name="TextBox 7"/>
+          <p:cNvSpPr txBox="1"/>
+          <p:nvPr/>
+        </p:nvSpPr>
+        <p:spPr>
+          <a:xfrm>
+            <a:off x="722376" y="3850309"/>
+            <a:ext cx="329184" cy="734949"/>
+          </a:xfrm>
+          <a:prstGeom prst="rect">
+            <a:avLst/>
+          </a:prstGeom>
+          <a:noFill/>
+        </p:spPr>
+        <p:txBody>
+          <a:bodyPr wrap="square" lIns="0" rIns="0" tIns="0" bIns="0" anchor="ctr">
+            <a:spAutoFit/>
+          </a:bodyPr>
+          <a:lstStyle/>
+          <a:p>
+            <a:pPr algn="l">
+              <a:lnSpc>
                 <a:spcPts val="1829"/>
               </a:lnSpc>
               <a:spcAft>
@@ -18875,21 +18980,21 @@
                 </a:solidFill>
                 <a:latin typeface="Arial"/>
               </a:rPr>
-              <a:t>1</a:t>
-            </a:r>
-          </a:p>
-        </p:txBody>
-      </p:sp>
-      <p:sp>
-        <p:nvSpPr>
-          <p:cNvPr id="8" name="TextBox 7"/>
-          <p:cNvSpPr txBox="1"/>
-          <p:nvPr/>
-        </p:nvSpPr>
-        <p:spPr>
-          <a:xfrm>
-            <a:off x="1106424" y="3122498"/>
-            <a:ext cx="10360152" cy="937259"/>
+              <a:t>3</a:t>
+            </a:r>
+          </a:p>
+        </p:txBody>
+      </p:sp>
+      <p:sp>
+        <p:nvSpPr>
+          <p:cNvPr id="9" name="TextBox 8"/>
+          <p:cNvSpPr txBox="1"/>
+          <p:nvPr/>
+        </p:nvSpPr>
+        <p:spPr>
+          <a:xfrm>
+            <a:off x="1106424" y="3850309"/>
+            <a:ext cx="10360152" cy="734949"/>
           </a:xfrm>
           <a:prstGeom prst="rect">
             <a:avLst/>
@@ -18917,7 +19022,7 @@
                 </a:solidFill>
                 <a:latin typeface="Arial"/>
               </a:rPr>
-              <a:t>У LLM-судьи своя асимметрия ошибок</a:t>
+              <a:t>«Что считать дублем» — продуктовое решение, не только техническое.</a:t>
             </a:r>
             <a:r>
               <a:rPr sz="1350" b="0" i="0">
@@ -18926,155 +19031,14 @@
                 </a:solidFill>
                 <a:latin typeface="Arial"/>
               </a:rPr>
-              <a:t>, не ноль (Wataoka, Takahashi, Ri — NeurIPS 2024 Safe GenAI Workshop, arXiv:2410.21819, self-preference bias): модель-судья систематически не нейтральна, даже отвечая формально «да» или «нет». Наш тест это подтвердил напрямую: 3 ложных срабатывания из 20, и не все объясняются совпадением слов в вопросах.</a:t>
-            </a:r>
-          </a:p>
-        </p:txBody>
-      </p:sp>
-      <p:sp>
-        <p:nvSpPr>
-          <p:cNvPr id="9" name="Rounded Rectangle 8"/>
-          <p:cNvSpPr/>
-          <p:nvPr/>
-        </p:nvSpPr>
-        <p:spPr>
-          <a:xfrm>
-            <a:off x="502920" y="4887544"/>
-            <a:ext cx="11183112" cy="1173861"/>
-          </a:xfrm>
-          <a:prstGeom prst="roundRect">
-            <a:avLst>
-              <a:gd name="adj" fmla="val 25000"/>
-            </a:avLst>
-          </a:prstGeom>
-          <a:solidFill>
-            <a:srgbClr val="F4F7FA"/>
-          </a:solidFill>
-          <a:ln w="15240">
-            <a:solidFill>
-              <a:srgbClr val="E5EAF0"/>
-            </a:solidFill>
-          </a:ln>
-          <a:effectLst/>
-        </p:spPr>
-        <p:style>
-          <a:lnRef idx="1">
-            <a:schemeClr val="accent1"/>
-          </a:lnRef>
-          <a:fillRef idx="3">
-            <a:schemeClr val="accent1"/>
-          </a:fillRef>
-          <a:effectRef idx="2">
-            <a:schemeClr val="accent1"/>
-          </a:effectRef>
-          <a:fontRef idx="minor">
-            <a:schemeClr val="lt1"/>
-          </a:fontRef>
-        </p:style>
-        <p:txBody>
-          <a:bodyPr rtlCol="0" anchor="ctr"/>
-          <a:lstStyle/>
-          <a:p>
-            <a:pPr algn="ctr"/>
+              <a:t> Иногда «тот же вопрос другими словами» стоит обработать как новое обращение — человек ждёт ответа срочнее второй раз. Не всякий технический повтор должен схлопываться в один в интерфейсе.</a:t>
+            </a:r>
           </a:p>
         </p:txBody>
       </p:sp>
       <p:sp>
         <p:nvSpPr>
           <p:cNvPr id="10" name="TextBox 9"/>
-          <p:cNvSpPr txBox="1"/>
-          <p:nvPr/>
-        </p:nvSpPr>
-        <p:spPr>
-          <a:xfrm>
-            <a:off x="722376" y="5107000"/>
-            <a:ext cx="329184" cy="734949"/>
-          </a:xfrm>
-          <a:prstGeom prst="rect">
-            <a:avLst/>
-          </a:prstGeom>
-          <a:noFill/>
-        </p:spPr>
-        <p:txBody>
-          <a:bodyPr wrap="square" lIns="0" rIns="0" tIns="0" bIns="0" anchor="ctr">
-            <a:spAutoFit/>
-          </a:bodyPr>
-          <a:lstStyle/>
-          <a:p>
-            <a:pPr algn="l">
-              <a:lnSpc>
-                <a:spcPts val="1829"/>
-              </a:lnSpc>
-              <a:spcAft>
-                <a:spcPts val="0"/>
-              </a:spcAft>
-            </a:pPr>
-            <a:r>
-              <a:rPr sz="1550" b="1" i="0">
-                <a:solidFill>
-                  <a:srgbClr val="028090"/>
-                </a:solidFill>
-                <a:latin typeface="Arial"/>
-              </a:rPr>
-              <a:t>1</a:t>
-            </a:r>
-          </a:p>
-        </p:txBody>
-      </p:sp>
-      <p:sp>
-        <p:nvSpPr>
-          <p:cNvPr id="11" name="TextBox 10"/>
-          <p:cNvSpPr txBox="1"/>
-          <p:nvPr/>
-        </p:nvSpPr>
-        <p:spPr>
-          <a:xfrm>
-            <a:off x="1106424" y="5107000"/>
-            <a:ext cx="10360152" cy="734949"/>
-          </a:xfrm>
-          <a:prstGeom prst="rect">
-            <a:avLst/>
-          </a:prstGeom>
-          <a:noFill/>
-        </p:spPr>
-        <p:txBody>
-          <a:bodyPr wrap="square" lIns="0" rIns="0" tIns="0" bIns="0" anchor="ctr">
-            <a:spAutoFit/>
-          </a:bodyPr>
-          <a:lstStyle/>
-          <a:p>
-            <a:pPr algn="l">
-              <a:lnSpc>
-                <a:spcPts val="1593"/>
-              </a:lnSpc>
-              <a:spcAft>
-                <a:spcPts val="0"/>
-              </a:spcAft>
-            </a:pPr>
-            <a:r>
-              <a:rPr sz="1350" b="1" i="0">
-                <a:solidFill>
-                  <a:srgbClr val="141B2E"/>
-                </a:solidFill>
-                <a:latin typeface="Arial"/>
-              </a:rPr>
-              <a:t>«Что считать дублем» — продуктовое решение, не только техническое.</a:t>
-            </a:r>
-            <a:r>
-              <a:rPr sz="1350" b="0" i="0">
-                <a:solidFill>
-                  <a:srgbClr val="141B2E"/>
-                </a:solidFill>
-                <a:latin typeface="Arial"/>
-              </a:rPr>
-              <a:t> Иногда «тот же вопрос другими словами» стоит обработать как новое обращение — человек ждёт ответа срочнее второй раз. Не всякий технический повтор должен схлопываться в один в интерфейсе.</a:t>
-            </a:r>
-          </a:p>
-        </p:txBody>
-      </p:sp>
-      <p:sp>
-        <p:nvSpPr>
-          <p:cNvPr id="12" name="TextBox 11"/>
           <p:cNvSpPr txBox="1"/>
           <p:nvPr/>
         </p:nvSpPr>
@@ -27753,16 +27717,40 @@
           </a:p>
         </p:txBody>
       </p:sp>
-      <p:sp>
-        <p:nvSpPr>
-          <p:cNvPr id="3" name="Rounded Rectangle 2"/>
+      <p:pic>
+        <p:nvPicPr>
+          <p:cNvPr id="3" name="Picture 2" descr="tg-k3-klient.png"/>
+          <p:cNvPicPr>
+            <a:picLocks noChangeAspect="1"/>
+          </p:cNvPicPr>
+          <p:nvPr/>
+        </p:nvPicPr>
+        <p:blipFill>
+          <a:blip r:embed="rId2"/>
+          <a:stretch>
+            <a:fillRect/>
+          </a:stretch>
+        </p:blipFill>
+        <p:spPr>
+          <a:xfrm>
+            <a:off x="502920" y="1135689"/>
+            <a:ext cx="11183112" cy="3275054"/>
+          </a:xfrm>
+          <a:prstGeom prst="rect">
+            <a:avLst/>
+          </a:prstGeom>
+        </p:spPr>
+      </p:pic>
+      <p:sp>
+        <p:nvSpPr>
+          <p:cNvPr id="4" name="Rounded Rectangle 3"/>
           <p:cNvSpPr/>
           <p:nvPr/>
         </p:nvSpPr>
         <p:spPr>
           <a:xfrm>
-            <a:off x="502920" y="1918716"/>
-            <a:ext cx="82296" cy="1295400"/>
+            <a:off x="502920" y="5056168"/>
+            <a:ext cx="82296" cy="982980"/>
           </a:xfrm>
           <a:prstGeom prst="roundRect">
             <a:avLst>
@@ -27801,14 +27789,14 @@
       </p:sp>
       <p:sp>
         <p:nvSpPr>
-          <p:cNvPr id="4" name="TextBox 3"/>
-          <p:cNvSpPr txBox="1"/>
-          <p:nvPr/>
-        </p:nvSpPr>
-        <p:spPr>
-          <a:xfrm>
-            <a:off x="859536" y="2046732"/>
-            <a:ext cx="10643616" cy="1039368"/>
+          <p:cNvPr id="5" name="TextBox 4"/>
+          <p:cNvSpPr txBox="1"/>
+          <p:nvPr/>
+        </p:nvSpPr>
+        <p:spPr>
+          <a:xfrm>
+            <a:off x="859536" y="5184184"/>
+            <a:ext cx="10643616" cy="726948"/>
           </a:xfrm>
           <a:prstGeom prst="rect">
             <a:avLst/>
@@ -27836,140 +27824,14 @@
                 </a:solidFill>
                 <a:latin typeface="Arial"/>
               </a:rPr>
-              <a:t>Чат поддержки учебного центра.</a:t>
-            </a:r>
-          </a:p>
-          <a:p>
-            <a:pPr algn="l">
-              <a:lnSpc>
-                <a:spcPts val="1860"/>
-              </a:lnSpc>
-              <a:spcAft>
-                <a:spcPts val="300"/>
-              </a:spcAft>
-            </a:pPr>
-            <a:r>
-              <a:rPr sz="1500" b="1" i="0">
-                <a:solidFill>
-                  <a:srgbClr val="141B2E"/>
-                </a:solidFill>
-                <a:latin typeface="Arial"/>
-              </a:rPr>
-              <a:t/>
-            </a:r>
-          </a:p>
-          <a:p>
-            <a:pPr algn="l">
-              <a:lnSpc>
-                <a:spcPts val="1860"/>
-              </a:lnSpc>
-              <a:spcAft>
-                <a:spcPts val="300"/>
-              </a:spcAft>
-            </a:pPr>
-            <a:r>
-              <a:rPr sz="1500" b="1" i="0">
-                <a:solidFill>
-                  <a:srgbClr val="141B2E"/>
-                </a:solidFill>
-                <a:latin typeface="Arial"/>
-              </a:rPr>
-              <a:t>Ваша заявка на возврат одобрена. 2500 рублей уже отправлены на карту, которой вы оплачивали занятие.</a:t>
-            </a:r>
-          </a:p>
-        </p:txBody>
-      </p:sp>
-      <p:sp>
-        <p:nvSpPr>
-          <p:cNvPr id="5" name="Rounded Rectangle 4"/>
-          <p:cNvSpPr/>
-          <p:nvPr/>
-        </p:nvSpPr>
-        <p:spPr>
-          <a:xfrm>
-            <a:off x="502920" y="3881628"/>
-            <a:ext cx="82296" cy="982980"/>
-          </a:xfrm>
-          <a:prstGeom prst="roundRect">
-            <a:avLst>
-              <a:gd name="adj" fmla="val 50000"/>
-            </a:avLst>
-          </a:prstGeom>
-          <a:solidFill>
-            <a:srgbClr val="F0AB00"/>
-          </a:solidFill>
-          <a:ln>
-            <a:noFill/>
-          </a:ln>
-          <a:effectLst/>
-        </p:spPr>
-        <p:style>
-          <a:lnRef idx="1">
-            <a:schemeClr val="accent1"/>
-          </a:lnRef>
-          <a:fillRef idx="3">
-            <a:schemeClr val="accent1"/>
-          </a:fillRef>
-          <a:effectRef idx="2">
-            <a:schemeClr val="accent1"/>
-          </a:effectRef>
-          <a:fontRef idx="minor">
-            <a:schemeClr val="lt1"/>
-          </a:fontRef>
-        </p:style>
-        <p:txBody>
-          <a:bodyPr rtlCol="0" anchor="ctr"/>
-          <a:lstStyle/>
-          <a:p>
-            <a:pPr algn="ctr"/>
+              <a:t>Та же заявка, что в сцене кейса, — «прошу вернуть 2500 рублей за пропущенное занятие», пример ниже порога: версия 2 одобряет его сама, без руководителя. Число в сообщении — то самое, которое из заявки достала модель извлечения; клиент видит результат, а не устройство решения.</a:t>
+            </a:r>
           </a:p>
         </p:txBody>
       </p:sp>
       <p:sp>
         <p:nvSpPr>
           <p:cNvPr id="6" name="TextBox 5"/>
-          <p:cNvSpPr txBox="1"/>
-          <p:nvPr/>
-        </p:nvSpPr>
-        <p:spPr>
-          <a:xfrm>
-            <a:off x="859536" y="4009644"/>
-            <a:ext cx="10643616" cy="726948"/>
-          </a:xfrm>
-          <a:prstGeom prst="rect">
-            <a:avLst/>
-          </a:prstGeom>
-          <a:noFill/>
-        </p:spPr>
-        <p:txBody>
-          <a:bodyPr wrap="square" lIns="0" rIns="0" tIns="0" bIns="0" anchor="ctr">
-            <a:spAutoFit/>
-          </a:bodyPr>
-          <a:lstStyle/>
-          <a:p>
-            <a:pPr algn="l">
-              <a:lnSpc>
-                <a:spcPts val="1860"/>
-              </a:lnSpc>
-              <a:spcAft>
-                <a:spcPts val="300"/>
-              </a:spcAft>
-            </a:pPr>
-            <a:r>
-              <a:rPr sz="1500" b="1" i="0">
-                <a:solidFill>
-                  <a:srgbClr val="141B2E"/>
-                </a:solidFill>
-                <a:latin typeface="Arial"/>
-              </a:rPr>
-              <a:t>Та же сумма из сцены этого кейса: «прошу вернуть 2500 рублей за пропущенное занятие» — пример ниже порога, поэтому версия 2 одобряет его сама, без участия руководителя, и клиент видит результат, а не устройство решения.</a:t>
-            </a:r>
-          </a:p>
-        </p:txBody>
-      </p:sp>
-      <p:sp>
-        <p:nvSpPr>
-          <p:cNvPr id="7" name="TextBox 6"/>
           <p:cNvSpPr txBox="1"/>
           <p:nvPr/>
         </p:nvSpPr>
@@ -40450,7 +40312,7 @@
       </p:sp>
       <p:pic>
         <p:nvPicPr>
-          <p:cNvPr id="3" name="Picture 2" descr="k4-shema-generatsii.png"/>
+          <p:cNvPr id="3" name="Picture 2" descr="k4-gen-tsepochka-real.png"/>
           <p:cNvPicPr>
             <a:picLocks noChangeAspect="1"/>
           </p:cNvPicPr>
@@ -40464,8 +40326,8 @@
         </p:blipFill>
         <p:spPr>
           <a:xfrm>
-            <a:off x="502920" y="1055126"/>
-            <a:ext cx="11183112" cy="3914089"/>
+            <a:off x="502920" y="986450"/>
+            <a:ext cx="11183112" cy="2754511"/>
           </a:xfrm>
           <a:prstGeom prst="rect">
             <a:avLst/>
@@ -40480,8 +40342,452 @@
         </p:nvSpPr>
         <p:spPr>
           <a:xfrm>
-            <a:off x="502920" y="5413232"/>
-            <a:ext cx="82296" cy="746760"/>
+            <a:off x="502920" y="4013289"/>
+            <a:ext cx="3593592" cy="1298448"/>
+          </a:xfrm>
+          <a:prstGeom prst="roundRect">
+            <a:avLst>
+              <a:gd name="adj" fmla="val 23474"/>
+            </a:avLst>
+          </a:prstGeom>
+          <a:solidFill>
+            <a:srgbClr val="FEF5E0"/>
+          </a:solidFill>
+          <a:ln w="22860">
+            <a:solidFill>
+              <a:srgbClr val="F0AB00"/>
+            </a:solidFill>
+          </a:ln>
+          <a:effectLst/>
+        </p:spPr>
+        <p:style>
+          <a:lnRef idx="1">
+            <a:schemeClr val="accent1"/>
+          </a:lnRef>
+          <a:fillRef idx="3">
+            <a:schemeClr val="accent1"/>
+          </a:fillRef>
+          <a:effectRef idx="2">
+            <a:schemeClr val="accent1"/>
+          </a:effectRef>
+          <a:fontRef idx="minor">
+            <a:schemeClr val="lt1"/>
+          </a:fontRef>
+        </p:style>
+        <p:txBody>
+          <a:bodyPr rtlCol="0" anchor="ctr"/>
+          <a:lstStyle/>
+          <a:p>
+            <a:pPr algn="ctr"/>
+          </a:p>
+        </p:txBody>
+      </p:sp>
+      <p:sp>
+        <p:nvSpPr>
+          <p:cNvPr id="5" name="TextBox 4"/>
+          <p:cNvSpPr txBox="1"/>
+          <p:nvPr/>
+        </p:nvSpPr>
+        <p:spPr>
+          <a:xfrm>
+            <a:off x="630936" y="4243286"/>
+            <a:ext cx="3337560" cy="384048"/>
+          </a:xfrm>
+          <a:prstGeom prst="rect">
+            <a:avLst/>
+          </a:prstGeom>
+          <a:noFill/>
+        </p:spPr>
+        <p:txBody>
+          <a:bodyPr wrap="square" lIns="0" rIns="0" tIns="0" bIns="0" anchor="ctr">
+            <a:spAutoFit/>
+          </a:bodyPr>
+          <a:lstStyle/>
+          <a:p>
+            <a:pPr algn="ctr">
+              <a:lnSpc>
+                <a:spcPts val="3024"/>
+              </a:lnSpc>
+              <a:spcAft>
+                <a:spcPts val="0"/>
+              </a:spcAft>
+            </a:pPr>
+            <a:r>
+              <a:rPr sz="2800" b="1" i="0">
+                <a:solidFill>
+                  <a:srgbClr val="8A6200"/>
+                </a:solidFill>
+                <a:latin typeface="Arial"/>
+              </a:rPr>
+              <a:t>$0,0387</a:t>
+            </a:r>
+          </a:p>
+        </p:txBody>
+      </p:sp>
+      <p:sp>
+        <p:nvSpPr>
+          <p:cNvPr id="6" name="TextBox 5"/>
+          <p:cNvSpPr txBox="1"/>
+          <p:nvPr/>
+        </p:nvSpPr>
+        <p:spPr>
+          <a:xfrm>
+            <a:off x="630936" y="4718774"/>
+            <a:ext cx="3337560" cy="344678"/>
+          </a:xfrm>
+          <a:prstGeom prst="rect">
+            <a:avLst/>
+          </a:prstGeom>
+          <a:noFill/>
+        </p:spPr>
+        <p:txBody>
+          <a:bodyPr wrap="square" lIns="0" rIns="0" tIns="0" bIns="0" anchor="t">
+            <a:spAutoFit/>
+          </a:bodyPr>
+          <a:lstStyle/>
+          <a:p>
+            <a:pPr algn="ctr">
+              <a:lnSpc>
+                <a:spcPts val="1356"/>
+              </a:lnSpc>
+              <a:spcAft>
+                <a:spcPts val="0"/>
+              </a:spcAft>
+            </a:pPr>
+            <a:r>
+              <a:rPr sz="1150" b="0" i="0">
+                <a:solidFill>
+                  <a:srgbClr val="141B2E"/>
+                </a:solidFill>
+                <a:latin typeface="Arial"/>
+              </a:rPr>
+              <a:t>за одну карточку — по счёту самого сервиса; оценка по прайсу давала $0,034</a:t>
+            </a:r>
+          </a:p>
+        </p:txBody>
+      </p:sp>
+      <p:sp>
+        <p:nvSpPr>
+          <p:cNvPr id="7" name="Rounded Rectangle 6"/>
+          <p:cNvSpPr/>
+          <p:nvPr/>
+        </p:nvSpPr>
+        <p:spPr>
+          <a:xfrm>
+            <a:off x="4297680" y="4013289"/>
+            <a:ext cx="3593592" cy="1298448"/>
+          </a:xfrm>
+          <a:prstGeom prst="roundRect">
+            <a:avLst>
+              <a:gd name="adj" fmla="val 23474"/>
+            </a:avLst>
+          </a:prstGeom>
+          <a:solidFill>
+            <a:srgbClr val="F4F7FA"/>
+          </a:solidFill>
+          <a:ln w="19050">
+            <a:solidFill>
+              <a:srgbClr val="1C7293"/>
+            </a:solidFill>
+          </a:ln>
+          <a:effectLst/>
+        </p:spPr>
+        <p:style>
+          <a:lnRef idx="1">
+            <a:schemeClr val="accent1"/>
+          </a:lnRef>
+          <a:fillRef idx="3">
+            <a:schemeClr val="accent1"/>
+          </a:fillRef>
+          <a:effectRef idx="2">
+            <a:schemeClr val="accent1"/>
+          </a:effectRef>
+          <a:fontRef idx="minor">
+            <a:schemeClr val="lt1"/>
+          </a:fontRef>
+        </p:style>
+        <p:txBody>
+          <a:bodyPr rtlCol="0" anchor="ctr"/>
+          <a:lstStyle/>
+          <a:p>
+            <a:pPr algn="ctr"/>
+          </a:p>
+        </p:txBody>
+      </p:sp>
+      <p:sp>
+        <p:nvSpPr>
+          <p:cNvPr id="8" name="TextBox 7"/>
+          <p:cNvSpPr txBox="1"/>
+          <p:nvPr/>
+        </p:nvSpPr>
+        <p:spPr>
+          <a:xfrm>
+            <a:off x="4425696" y="4243286"/>
+            <a:ext cx="3337560" cy="384048"/>
+          </a:xfrm>
+          <a:prstGeom prst="rect">
+            <a:avLst/>
+          </a:prstGeom>
+          <a:noFill/>
+        </p:spPr>
+        <p:txBody>
+          <a:bodyPr wrap="square" lIns="0" rIns="0" tIns="0" bIns="0" anchor="ctr">
+            <a:spAutoFit/>
+          </a:bodyPr>
+          <a:lstStyle/>
+          <a:p>
+            <a:pPr algn="ctr">
+              <a:lnSpc>
+                <a:spcPts val="3024"/>
+              </a:lnSpc>
+              <a:spcAft>
+                <a:spcPts val="0"/>
+              </a:spcAft>
+            </a:pPr>
+            <a:r>
+              <a:rPr sz="2800" b="1" i="0">
+                <a:solidFill>
+                  <a:srgbClr val="065A82"/>
+                </a:solidFill>
+                <a:latin typeface="Arial"/>
+              </a:rPr>
+              <a:t>≈$23,2 в месяц</a:t>
+            </a:r>
+          </a:p>
+        </p:txBody>
+      </p:sp>
+      <p:sp>
+        <p:nvSpPr>
+          <p:cNvPr id="9" name="TextBox 8"/>
+          <p:cNvSpPr txBox="1"/>
+          <p:nvPr/>
+        </p:nvSpPr>
+        <p:spPr>
+          <a:xfrm>
+            <a:off x="4425696" y="4718774"/>
+            <a:ext cx="3337560" cy="344678"/>
+          </a:xfrm>
+          <a:prstGeom prst="rect">
+            <a:avLst/>
+          </a:prstGeom>
+          <a:noFill/>
+        </p:spPr>
+        <p:txBody>
+          <a:bodyPr wrap="square" lIns="0" rIns="0" tIns="0" bIns="0" anchor="t">
+            <a:spAutoFit/>
+          </a:bodyPr>
+          <a:lstStyle/>
+          <a:p>
+            <a:pPr algn="ctr">
+              <a:lnSpc>
+                <a:spcPts val="1356"/>
+              </a:lnSpc>
+              <a:spcAft>
+                <a:spcPts val="0"/>
+              </a:spcAft>
+            </a:pPr>
+            <a:r>
+              <a:rPr sz="1150" b="0" i="0">
+                <a:solidFill>
+                  <a:srgbClr val="141B2E"/>
+                </a:solidFill>
+                <a:latin typeface="Arial"/>
+              </a:rPr>
+              <a:t>при шестистах карточках — том же потоке заявок, что в Кейсе 1</a:t>
+            </a:r>
+          </a:p>
+        </p:txBody>
+      </p:sp>
+      <p:sp>
+        <p:nvSpPr>
+          <p:cNvPr id="10" name="Rounded Rectangle 9"/>
+          <p:cNvSpPr/>
+          <p:nvPr/>
+        </p:nvSpPr>
+        <p:spPr>
+          <a:xfrm>
+            <a:off x="8092440" y="4013289"/>
+            <a:ext cx="3593592" cy="1298448"/>
+          </a:xfrm>
+          <a:prstGeom prst="roundRect">
+            <a:avLst>
+              <a:gd name="adj" fmla="val 23474"/>
+            </a:avLst>
+          </a:prstGeom>
+          <a:solidFill>
+            <a:srgbClr val="F4F7FA"/>
+          </a:solidFill>
+          <a:ln w="19050">
+            <a:solidFill>
+              <a:srgbClr val="1C7293"/>
+            </a:solidFill>
+          </a:ln>
+          <a:effectLst/>
+        </p:spPr>
+        <p:style>
+          <a:lnRef idx="1">
+            <a:schemeClr val="accent1"/>
+          </a:lnRef>
+          <a:fillRef idx="3">
+            <a:schemeClr val="accent1"/>
+          </a:fillRef>
+          <a:effectRef idx="2">
+            <a:schemeClr val="accent1"/>
+          </a:effectRef>
+          <a:fontRef idx="minor">
+            <a:schemeClr val="lt1"/>
+          </a:fontRef>
+        </p:style>
+        <p:txBody>
+          <a:bodyPr rtlCol="0" anchor="ctr"/>
+          <a:lstStyle/>
+          <a:p>
+            <a:pPr algn="ctr"/>
+          </a:p>
+        </p:txBody>
+      </p:sp>
+      <p:sp>
+        <p:nvSpPr>
+          <p:cNvPr id="11" name="TextBox 10"/>
+          <p:cNvSpPr txBox="1"/>
+          <p:nvPr/>
+        </p:nvSpPr>
+        <p:spPr>
+          <a:xfrm>
+            <a:off x="8220456" y="4243286"/>
+            <a:ext cx="3337560" cy="384048"/>
+          </a:xfrm>
+          <a:prstGeom prst="rect">
+            <a:avLst/>
+          </a:prstGeom>
+          <a:noFill/>
+        </p:spPr>
+        <p:txBody>
+          <a:bodyPr wrap="square" lIns="0" rIns="0" tIns="0" bIns="0" anchor="ctr">
+            <a:spAutoFit/>
+          </a:bodyPr>
+          <a:lstStyle/>
+          <a:p>
+            <a:pPr algn="ctr">
+              <a:lnSpc>
+                <a:spcPts val="3024"/>
+              </a:lnSpc>
+              <a:spcAft>
+                <a:spcPts val="0"/>
+              </a:spcAft>
+            </a:pPr>
+            <a:r>
+              <a:rPr sz="2800" b="1" i="0">
+                <a:solidFill>
+                  <a:srgbClr val="065A82"/>
+                </a:solidFill>
+                <a:latin typeface="Arial"/>
+              </a:rPr>
+              <a:t>≈870 КБ</a:t>
+            </a:r>
+          </a:p>
+        </p:txBody>
+      </p:sp>
+      <p:sp>
+        <p:nvSpPr>
+          <p:cNvPr id="12" name="TextBox 11"/>
+          <p:cNvSpPr txBox="1"/>
+          <p:nvPr/>
+        </p:nvSpPr>
+        <p:spPr>
+          <a:xfrm>
+            <a:off x="8220456" y="4718774"/>
+            <a:ext cx="3337560" cy="344678"/>
+          </a:xfrm>
+          <a:prstGeom prst="rect">
+            <a:avLst/>
+          </a:prstGeom>
+          <a:noFill/>
+        </p:spPr>
+        <p:txBody>
+          <a:bodyPr wrap="square" lIns="0" rIns="0" tIns="0" bIns="0" anchor="t">
+            <a:spAutoFit/>
+          </a:bodyPr>
+          <a:lstStyle/>
+          <a:p>
+            <a:pPr algn="ctr">
+              <a:lnSpc>
+                <a:spcPts val="1356"/>
+              </a:lnSpc>
+              <a:spcAft>
+                <a:spcPts val="0"/>
+              </a:spcAft>
+            </a:pPr>
+            <a:r>
+              <a:rPr sz="1150" b="0" i="0">
+                <a:solidFill>
+                  <a:srgbClr val="141B2E"/>
+                </a:solidFill>
+                <a:latin typeface="Arial"/>
+              </a:rPr>
+              <a:t>PNG 1024×1024 — в двенадцать раз ниже лимита Telegram на фото</a:t>
+            </a:r>
+          </a:p>
+        </p:txBody>
+      </p:sp>
+      <p:sp>
+        <p:nvSpPr>
+          <p:cNvPr id="13" name="Rounded Rectangle 12"/>
+          <p:cNvSpPr/>
+          <p:nvPr/>
+        </p:nvSpPr>
+        <p:spPr>
+          <a:xfrm>
+            <a:off x="502920" y="5584064"/>
+            <a:ext cx="11183112" cy="678942"/>
+          </a:xfrm>
+          <a:prstGeom prst="roundRect">
+            <a:avLst>
+              <a:gd name="adj" fmla="val 25000"/>
+            </a:avLst>
+          </a:prstGeom>
+          <a:solidFill>
+            <a:srgbClr val="E0F1F2"/>
+          </a:solidFill>
+          <a:ln w="13970">
+            <a:solidFill>
+              <a:srgbClr val="028090"/>
+            </a:solidFill>
+          </a:ln>
+          <a:effectLst/>
+        </p:spPr>
+        <p:style>
+          <a:lnRef idx="1">
+            <a:schemeClr val="accent1"/>
+          </a:lnRef>
+          <a:fillRef idx="3">
+            <a:schemeClr val="accent1"/>
+          </a:fillRef>
+          <a:effectRef idx="2">
+            <a:schemeClr val="accent1"/>
+          </a:effectRef>
+          <a:fontRef idx="minor">
+            <a:schemeClr val="lt1"/>
+          </a:fontRef>
+        </p:style>
+        <p:txBody>
+          <a:bodyPr rtlCol="0" anchor="ctr"/>
+          <a:lstStyle/>
+          <a:p>
+            <a:pPr algn="ctr"/>
+          </a:p>
+        </p:txBody>
+      </p:sp>
+      <p:sp>
+        <p:nvSpPr>
+          <p:cNvPr id="14" name="Rounded Rectangle 13"/>
+          <p:cNvSpPr/>
+          <p:nvPr/>
+        </p:nvSpPr>
+        <p:spPr>
+          <a:xfrm>
+            <a:off x="521208" y="5638928"/>
+            <a:ext cx="64008" cy="569214"/>
           </a:xfrm>
           <a:prstGeom prst="roundRect">
             <a:avLst>
@@ -40489,7 +40795,7 @@
             </a:avLst>
           </a:prstGeom>
           <a:solidFill>
-            <a:srgbClr val="F0AB00"/>
+            <a:srgbClr val="028090"/>
           </a:solidFill>
           <a:ln>
             <a:noFill/>
@@ -40520,14 +40826,14 @@
       </p:sp>
       <p:sp>
         <p:nvSpPr>
-          <p:cNvPr id="5" name="TextBox 4"/>
-          <p:cNvSpPr txBox="1"/>
-          <p:nvPr/>
-        </p:nvSpPr>
-        <p:spPr>
-          <a:xfrm>
-            <a:off x="859536" y="5541248"/>
-            <a:ext cx="10643616" cy="490727"/>
+          <p:cNvPr id="15" name="TextBox 14"/>
+          <p:cNvSpPr txBox="1"/>
+          <p:nvPr/>
+        </p:nvSpPr>
+        <p:spPr>
+          <a:xfrm>
+            <a:off x="804672" y="5721224"/>
+            <a:ext cx="10643616" cy="404621"/>
           </a:xfrm>
           <a:prstGeom prst="rect">
             <a:avLst/>
@@ -40542,45 +40848,90 @@
           <a:p>
             <a:pPr algn="l">
               <a:lnSpc>
-                <a:spcPts val="1860"/>
+                <a:spcPts val="1593"/>
               </a:lnSpc>
               <a:spcAft>
                 <a:spcPts val="300"/>
               </a:spcAft>
             </a:pPr>
             <a:r>
-              <a:rPr sz="1500" b="1" i="0">
-                <a:solidFill>
-                  <a:srgbClr val="141B2E"/>
-                </a:solidFill>
-                <a:latin typeface="Arial"/>
-              </a:rPr>
-              <a:t>То, что мы собрали на предыдущем экране, — </a:t>
-            </a:r>
-            <a:r>
-              <a:rPr sz="1500" b="1" i="0">
-                <a:solidFill>
-                  <a:srgbClr val="141B2E"/>
-                </a:solidFill>
-                <a:latin typeface="Arial"/>
-              </a:rPr>
-              <a:t>текст подписью к фотографии по ссылке</a:t>
-            </a:r>
-            <a:r>
-              <a:rPr sz="1500" b="1" i="0">
-                <a:solidFill>
-                  <a:srgbClr val="141B2E"/>
-                </a:solidFill>
-                <a:latin typeface="Arial"/>
-              </a:rPr>
-              <a:t>. Маркетинг просил текст поверх картинки, то есть внутри самого изображения, — а это отдельный шаг.</a:t>
-            </a:r>
-          </a:p>
-        </p:txBody>
-      </p:sp>
-      <p:sp>
-        <p:nvSpPr>
-          <p:cNvPr id="6" name="TextBox 5"/>
+              <a:rPr sz="1350" b="1" i="0">
+                <a:solidFill>
+                  <a:srgbClr val="141B2E"/>
+                </a:solidFill>
+                <a:latin typeface="Arial"/>
+              </a:rPr>
+              <a:t>Перекодировать пришлось не из-за веса.</a:t>
+            </a:r>
+            <a:r>
+              <a:rPr sz="1350" b="0" i="0">
+                <a:solidFill>
+                  <a:srgbClr val="141B2E"/>
+                </a:solidFill>
+                <a:latin typeface="Arial"/>
+              </a:rPr>
+              <a:t> Модель отдаёт картинку текстом, а узел отправки принимает бинарное вложение — шаг </a:t>
+            </a:r>
+            <a:r>
+              <a:rPr sz="1350" b="0" i="0">
+                <a:solidFill>
+                  <a:srgbClr val="141B2E"/>
+                </a:solidFill>
+                <a:latin typeface="Consolas"/>
+              </a:rPr>
+              <a:t>Base64</a:t>
+            </a:r>
+            <a:r>
+              <a:rPr sz="1350" b="0" i="0">
+                <a:solidFill>
+                  <a:srgbClr val="141B2E"/>
+                </a:solidFill>
+                <a:latin typeface="Arial"/>
+              </a:rPr>
+              <a:t> </a:t>
+            </a:r>
+            <a:r>
+              <a:rPr sz="1350" b="0" i="0">
+                <a:solidFill>
+                  <a:srgbClr val="141B2E"/>
+                </a:solidFill>
+                <a:latin typeface="Consolas"/>
+              </a:rPr>
+              <a:t>to</a:t>
+            </a:r>
+            <a:r>
+              <a:rPr sz="1350" b="0" i="0">
+                <a:solidFill>
+                  <a:srgbClr val="141B2E"/>
+                </a:solidFill>
+                <a:latin typeface="Arial"/>
+              </a:rPr>
+              <a:t> </a:t>
+            </a:r>
+            <a:r>
+              <a:rPr sz="1350" b="0" i="0">
+                <a:solidFill>
+                  <a:srgbClr val="141B2E"/>
+                </a:solidFill>
+                <a:latin typeface="Consolas"/>
+              </a:rPr>
+              <a:t>file</a:t>
+            </a:r>
+            <a:r>
+              <a:rPr sz="1350" b="0" i="0">
+                <a:solidFill>
+                  <a:srgbClr val="141B2E"/>
+                </a:solidFill>
+                <a:latin typeface="Arial"/>
+              </a:rPr>
+              <a:t> стоит в цепочке ради формата, а не ради размера.</a:t>
+            </a:r>
+          </a:p>
+        </p:txBody>
+      </p:sp>
+      <p:sp>
+        <p:nvSpPr>
+          <p:cNvPr id="16" name="TextBox 15"/>
           <p:cNvSpPr txBox="1"/>
           <p:nvPr/>
         </p:nvSpPr>
@@ -40683,14 +41034,14 @@
                 </a:solidFill>
                 <a:latin typeface="Arial"/>
               </a:rPr>
-              <a:t>Порядок проверки и вопрос сжатия</a:t>
+              <a:t>Что модель написала внутри картинки</a:t>
             </a:r>
           </a:p>
         </p:txBody>
       </p:sp>
       <p:pic>
         <p:nvPicPr>
-          <p:cNvPr id="3" name="Picture 2" descr="k4-shema-szhatie.png"/>
+          <p:cNvPr id="3" name="Picture 2" descr="tg-k4-gen-razbor.png"/>
           <p:cNvPicPr>
             <a:picLocks noChangeAspect="1"/>
           </p:cNvPicPr>
@@ -40704,8 +41055,8 @@
         </p:blipFill>
         <p:spPr>
           <a:xfrm>
-            <a:off x="1799097" y="943356"/>
-            <a:ext cx="8590757" cy="3651071"/>
+            <a:off x="590338" y="949452"/>
+            <a:ext cx="11008274" cy="3931920"/>
           </a:xfrm>
           <a:prstGeom prst="rect">
             <a:avLst/>
@@ -40720,21 +41071,19 @@
         </p:nvSpPr>
         <p:spPr>
           <a:xfrm>
-            <a:off x="502920" y="4759019"/>
-            <a:ext cx="11183112" cy="1558036"/>
+            <a:off x="502920" y="5061204"/>
+            <a:ext cx="82296" cy="1257300"/>
           </a:xfrm>
           <a:prstGeom prst="roundRect">
             <a:avLst>
-              <a:gd name="adj" fmla="val 19563"/>
+              <a:gd name="adj" fmla="val 50000"/>
             </a:avLst>
           </a:prstGeom>
           <a:solidFill>
-            <a:srgbClr val="FFFFFF"/>
+            <a:srgbClr val="F0AB00"/>
           </a:solidFill>
-          <a:ln w="17780">
-            <a:solidFill>
-              <a:srgbClr val="1C7293"/>
-            </a:solidFill>
+          <a:ln>
+            <a:noFill/>
           </a:ln>
           <a:effectLst/>
         </p:spPr>
@@ -40768,36 +41117,55 @@
         </p:nvSpPr>
         <p:spPr>
           <a:xfrm>
-            <a:off x="685800" y="4941899"/>
-            <a:ext cx="2033786" cy="259587"/>
-          </a:xfrm>
-          <a:prstGeom prst="rect">
-            <a:avLst/>
-          </a:prstGeom>
-          <a:noFill/>
-        </p:spPr>
-        <p:txBody>
-          <a:bodyPr wrap="square" lIns="0" rIns="0" tIns="0" bIns="0" anchor="t">
+            <a:off x="859536" y="5189220"/>
+            <a:ext cx="10643616" cy="1001268"/>
+          </a:xfrm>
+          <a:prstGeom prst="rect">
+            <a:avLst/>
+          </a:prstGeom>
+          <a:noFill/>
+        </p:spPr>
+        <p:txBody>
+          <a:bodyPr wrap="square" lIns="0" rIns="0" tIns="0" bIns="0" anchor="ctr">
             <a:spAutoFit/>
           </a:bodyPr>
           <a:lstStyle/>
           <a:p>
             <a:pPr algn="l">
               <a:lnSpc>
-                <a:spcPts val="1100"/>
-              </a:lnSpc>
-              <a:spcAft>
-                <a:spcPts val="0"/>
-              </a:spcAft>
-            </a:pPr>
-            <a:r>
-              <a:rPr sz="1000" b="1" i="0">
-                <a:solidFill>
-                  <a:srgbClr val="6B7685"/>
-                </a:solidFill>
-                <a:latin typeface="Arial"/>
-              </a:rPr>
-              <a:t>ДЕЙСТВИЕ</a:t>
+                <a:spcPts val="1860"/>
+              </a:lnSpc>
+              <a:spcAft>
+                <a:spcPts val="300"/>
+              </a:spcAft>
+            </a:pPr>
+            <a:r>
+              <a:rPr sz="1500" b="1" i="0">
+                <a:solidFill>
+                  <a:srgbClr val="141B2E"/>
+                </a:solidFill>
+                <a:latin typeface="Arial"/>
+              </a:rPr>
+              <a:t>Так на всех пяти карточках, которые дошли до чата. Модель получала точную строку и требование написать её дословно.</a:t>
+            </a:r>
+          </a:p>
+          <a:p>
+            <a:pPr algn="l">
+              <a:lnSpc>
+                <a:spcPts val="1860"/>
+              </a:lnSpc>
+              <a:spcAft>
+                <a:spcPts val="300"/>
+              </a:spcAft>
+            </a:pPr>
+            <a:r>
+              <a:rPr sz="1500" b="1" i="0">
+                <a:solidFill>
+                  <a:srgbClr val="141B2E"/>
+                </a:solidFill>
+                <a:latin typeface="Arial"/>
+              </a:rPr>
+              <a:t>Ошибка живёт в пикселях: ни размер, ни формат, ни зелёный прогон её не видят. Видит только человек, который посмотрит на картинку.</a:t>
             </a:r>
           </a:p>
         </p:txBody>
@@ -40805,706 +41173,6 @@
       <p:sp>
         <p:nvSpPr>
           <p:cNvPr id="6" name="TextBox 5"/>
-          <p:cNvSpPr txBox="1"/>
-          <p:nvPr/>
-        </p:nvSpPr>
-        <p:spPr>
-          <a:xfrm>
-            <a:off x="2865890" y="4941899"/>
-            <a:ext cx="2611835" cy="259587"/>
-          </a:xfrm>
-          <a:prstGeom prst="rect">
-            <a:avLst/>
-          </a:prstGeom>
-          <a:noFill/>
-        </p:spPr>
-        <p:txBody>
-          <a:bodyPr wrap="square" lIns="0" rIns="0" tIns="0" bIns="0" anchor="t">
-            <a:spAutoFit/>
-          </a:bodyPr>
-          <a:lstStyle/>
-          <a:p>
-            <a:pPr algn="l">
-              <a:lnSpc>
-                <a:spcPts val="1100"/>
-              </a:lnSpc>
-              <a:spcAft>
-                <a:spcPts val="0"/>
-              </a:spcAft>
-            </a:pPr>
-            <a:r>
-              <a:rPr sz="1000" b="1" i="0">
-                <a:solidFill>
-                  <a:srgbClr val="6B7685"/>
-                </a:solidFill>
-                <a:latin typeface="Arial"/>
-              </a:rPr>
-              <a:t>КАК ДЕЛАЕТ</a:t>
-            </a:r>
-          </a:p>
-        </p:txBody>
-      </p:sp>
-      <p:sp>
-        <p:nvSpPr>
-          <p:cNvPr id="7" name="TextBox 6"/>
-          <p:cNvSpPr txBox="1"/>
-          <p:nvPr/>
-        </p:nvSpPr>
-        <p:spPr>
-          <a:xfrm>
-            <a:off x="5624030" y="4941899"/>
-            <a:ext cx="2839988" cy="259587"/>
-          </a:xfrm>
-          <a:prstGeom prst="rect">
-            <a:avLst/>
-          </a:prstGeom>
-          <a:noFill/>
-        </p:spPr>
-        <p:txBody>
-          <a:bodyPr wrap="square" lIns="0" rIns="0" tIns="0" bIns="0" anchor="t">
-            <a:spAutoFit/>
-          </a:bodyPr>
-          <a:lstStyle/>
-          <a:p>
-            <a:pPr algn="l">
-              <a:lnSpc>
-                <a:spcPts val="1100"/>
-              </a:lnSpc>
-              <a:spcAft>
-                <a:spcPts val="0"/>
-              </a:spcAft>
-            </a:pPr>
-            <a:r>
-              <a:rPr sz="1000" b="1" i="0">
-                <a:solidFill>
-                  <a:srgbClr val="6B7685"/>
-                </a:solidFill>
-                <a:latin typeface="Arial"/>
-              </a:rPr>
-              <a:t>ПРЕИМУЩЕСТВО</a:t>
-            </a:r>
-          </a:p>
-        </p:txBody>
-      </p:sp>
-      <p:sp>
-        <p:nvSpPr>
-          <p:cNvPr id="8" name="TextBox 7"/>
-          <p:cNvSpPr txBox="1"/>
-          <p:nvPr/>
-        </p:nvSpPr>
-        <p:spPr>
-          <a:xfrm>
-            <a:off x="8610323" y="4941899"/>
-            <a:ext cx="2746524" cy="259587"/>
-          </a:xfrm>
-          <a:prstGeom prst="rect">
-            <a:avLst/>
-          </a:prstGeom>
-          <a:noFill/>
-        </p:spPr>
-        <p:txBody>
-          <a:bodyPr wrap="square" lIns="0" rIns="0" tIns="0" bIns="0" anchor="t">
-            <a:spAutoFit/>
-          </a:bodyPr>
-          <a:lstStyle/>
-          <a:p>
-            <a:pPr algn="l">
-              <a:lnSpc>
-                <a:spcPts val="1100"/>
-              </a:lnSpc>
-              <a:spcAft>
-                <a:spcPts val="0"/>
-              </a:spcAft>
-            </a:pPr>
-            <a:r>
-              <a:rPr sz="1000" b="1" i="0">
-                <a:solidFill>
-                  <a:srgbClr val="6B7685"/>
-                </a:solidFill>
-                <a:latin typeface="Arial"/>
-              </a:rPr>
-              <a:t>НЕДОСТАТКИ</a:t>
-            </a:r>
-          </a:p>
-        </p:txBody>
-      </p:sp>
-      <p:sp>
-        <p:nvSpPr>
-          <p:cNvPr id="9" name="TextBox 8"/>
-          <p:cNvSpPr txBox="1"/>
-          <p:nvPr/>
-        </p:nvSpPr>
-        <p:spPr>
-          <a:xfrm>
-            <a:off x="685800" y="5201487"/>
-            <a:ext cx="2033786" cy="310896"/>
-          </a:xfrm>
-          <a:prstGeom prst="rect">
-            <a:avLst/>
-          </a:prstGeom>
-          <a:noFill/>
-        </p:spPr>
-        <p:txBody>
-          <a:bodyPr wrap="square" lIns="0" rIns="0" tIns="0" bIns="0" anchor="ctr">
-            <a:spAutoFit/>
-          </a:bodyPr>
-          <a:lstStyle/>
-          <a:p>
-            <a:pPr algn="l">
-              <a:lnSpc>
-                <a:spcPts val="1150"/>
-              </a:lnSpc>
-              <a:spcAft>
-                <a:spcPts val="0"/>
-              </a:spcAft>
-            </a:pPr>
-            <a:r>
-              <a:rPr sz="1000" b="0" i="0">
-                <a:solidFill>
-                  <a:srgbClr val="141B2E"/>
-                </a:solidFill>
-                <a:latin typeface="Arial"/>
-              </a:rPr>
-              <a:t>Без сжатия</a:t>
-            </a:r>
-          </a:p>
-        </p:txBody>
-      </p:sp>
-      <p:sp>
-        <p:nvSpPr>
-          <p:cNvPr id="10" name="TextBox 9"/>
-          <p:cNvSpPr txBox="1"/>
-          <p:nvPr/>
-        </p:nvSpPr>
-        <p:spPr>
-          <a:xfrm>
-            <a:off x="2865890" y="5201487"/>
-            <a:ext cx="2611835" cy="310896"/>
-          </a:xfrm>
-          <a:prstGeom prst="rect">
-            <a:avLst/>
-          </a:prstGeom>
-          <a:noFill/>
-        </p:spPr>
-        <p:txBody>
-          <a:bodyPr wrap="square" lIns="0" rIns="0" tIns="0" bIns="0" anchor="ctr">
-            <a:spAutoFit/>
-          </a:bodyPr>
-          <a:lstStyle/>
-          <a:p>
-            <a:pPr algn="l">
-              <a:lnSpc>
-                <a:spcPts val="1150"/>
-              </a:lnSpc>
-              <a:spcAft>
-                <a:spcPts val="0"/>
-              </a:spcAft>
-            </a:pPr>
-            <a:r>
-              <a:rPr sz="1000" b="0" i="0">
-                <a:solidFill>
-                  <a:srgbClr val="141B2E"/>
-                </a:solidFill>
-                <a:latin typeface="Arial"/>
-              </a:rPr>
-              <a:t>как есть (4032×3024)</a:t>
-            </a:r>
-          </a:p>
-        </p:txBody>
-      </p:sp>
-      <p:sp>
-        <p:nvSpPr>
-          <p:cNvPr id="11" name="TextBox 10"/>
-          <p:cNvSpPr txBox="1"/>
-          <p:nvPr/>
-        </p:nvSpPr>
-        <p:spPr>
-          <a:xfrm>
-            <a:off x="5624030" y="5201487"/>
-            <a:ext cx="2839988" cy="310896"/>
-          </a:xfrm>
-          <a:prstGeom prst="rect">
-            <a:avLst/>
-          </a:prstGeom>
-          <a:noFill/>
-        </p:spPr>
-        <p:txBody>
-          <a:bodyPr wrap="square" lIns="0" rIns="0" tIns="0" bIns="0" anchor="ctr">
-            <a:spAutoFit/>
-          </a:bodyPr>
-          <a:lstStyle/>
-          <a:p>
-            <a:pPr algn="l">
-              <a:lnSpc>
-                <a:spcPts val="1150"/>
-              </a:lnSpc>
-              <a:spcAft>
-                <a:spcPts val="0"/>
-              </a:spcAft>
-            </a:pPr>
-            <a:r>
-              <a:rPr sz="1000" b="0" i="0">
-                <a:solidFill>
-                  <a:srgbClr val="141B2E"/>
-                </a:solidFill>
-                <a:latin typeface="Arial"/>
-              </a:rPr>
-              <a:t>максимум деталей</a:t>
-            </a:r>
-          </a:p>
-        </p:txBody>
-      </p:sp>
-      <p:sp>
-        <p:nvSpPr>
-          <p:cNvPr id="12" name="TextBox 11"/>
-          <p:cNvSpPr txBox="1"/>
-          <p:nvPr/>
-        </p:nvSpPr>
-        <p:spPr>
-          <a:xfrm>
-            <a:off x="8610323" y="5201487"/>
-            <a:ext cx="2746524" cy="310896"/>
-          </a:xfrm>
-          <a:prstGeom prst="rect">
-            <a:avLst/>
-          </a:prstGeom>
-          <a:noFill/>
-        </p:spPr>
-        <p:txBody>
-          <a:bodyPr wrap="square" lIns="0" rIns="0" tIns="0" bIns="0" anchor="ctr">
-            <a:spAutoFit/>
-          </a:bodyPr>
-          <a:lstStyle/>
-          <a:p>
-            <a:pPr algn="l">
-              <a:lnSpc>
-                <a:spcPts val="1150"/>
-              </a:lnSpc>
-              <a:spcAft>
-                <a:spcPts val="0"/>
-              </a:spcAft>
-            </a:pPr>
-            <a:r>
-              <a:rPr sz="1000" b="0" i="0">
-                <a:solidFill>
-                  <a:srgbClr val="141B2E"/>
-                </a:solidFill>
-                <a:latin typeface="Arial"/>
-              </a:rPr>
-              <a:t>дорого — ≈1500 токенов</a:t>
-            </a:r>
-          </a:p>
-        </p:txBody>
-      </p:sp>
-      <p:cxnSp>
-        <p:nvCxnSpPr>
-          <p:cNvPr id="13" name="Connector 12"/>
-          <p:cNvCxnSpPr/>
-          <p:nvPr/>
-        </p:nvCxnSpPr>
-        <p:spPr>
-          <a:xfrm>
-            <a:off x="685800" y="5512383"/>
-            <a:ext cx="10817352" cy="0"/>
-          </a:xfrm>
-          <a:prstGeom prst="line">
-            <a:avLst/>
-          </a:prstGeom>
-          <a:ln w="9525">
-            <a:solidFill>
-              <a:srgbClr val="E5EAF0"/>
-            </a:solidFill>
-          </a:ln>
-        </p:spPr>
-        <p:style>
-          <a:lnRef idx="2">
-            <a:schemeClr val="accent1"/>
-          </a:lnRef>
-          <a:fillRef idx="0">
-            <a:schemeClr val="accent1"/>
-          </a:fillRef>
-          <a:effectRef idx="1">
-            <a:schemeClr val="accent1"/>
-          </a:effectRef>
-          <a:fontRef idx="minor">
-            <a:schemeClr val="tx1"/>
-          </a:fontRef>
-        </p:style>
-      </p:cxnSp>
-      <p:sp>
-        <p:nvSpPr>
-          <p:cNvPr id="14" name="TextBox 13"/>
-          <p:cNvSpPr txBox="1"/>
-          <p:nvPr/>
-        </p:nvSpPr>
-        <p:spPr>
-          <a:xfrm>
-            <a:off x="685800" y="5512383"/>
-            <a:ext cx="2033786" cy="310896"/>
-          </a:xfrm>
-          <a:prstGeom prst="rect">
-            <a:avLst/>
-          </a:prstGeom>
-          <a:noFill/>
-        </p:spPr>
-        <p:txBody>
-          <a:bodyPr wrap="square" lIns="0" rIns="0" tIns="0" bIns="0" anchor="ctr">
-            <a:spAutoFit/>
-          </a:bodyPr>
-          <a:lstStyle/>
-          <a:p>
-            <a:pPr algn="l">
-              <a:lnSpc>
-                <a:spcPts val="1150"/>
-              </a:lnSpc>
-              <a:spcAft>
-                <a:spcPts val="0"/>
-              </a:spcAft>
-            </a:pPr>
-            <a:r>
-              <a:rPr sz="1000" b="0" i="0">
-                <a:solidFill>
-                  <a:srgbClr val="141B2E"/>
-                </a:solidFill>
-                <a:latin typeface="Arial"/>
-              </a:rPr>
-              <a:t>Умеренное сжатие</a:t>
-            </a:r>
-          </a:p>
-        </p:txBody>
-      </p:sp>
-      <p:sp>
-        <p:nvSpPr>
-          <p:cNvPr id="15" name="TextBox 14"/>
-          <p:cNvSpPr txBox="1"/>
-          <p:nvPr/>
-        </p:nvSpPr>
-        <p:spPr>
-          <a:xfrm>
-            <a:off x="2865890" y="5512383"/>
-            <a:ext cx="2611835" cy="310896"/>
-          </a:xfrm>
-          <a:prstGeom prst="rect">
-            <a:avLst/>
-          </a:prstGeom>
-          <a:noFill/>
-        </p:spPr>
-        <p:txBody>
-          <a:bodyPr wrap="square" lIns="0" rIns="0" tIns="0" bIns="0" anchor="ctr">
-            <a:spAutoFit/>
-          </a:bodyPr>
-          <a:lstStyle/>
-          <a:p>
-            <a:pPr algn="l">
-              <a:lnSpc>
-                <a:spcPts val="1150"/>
-              </a:lnSpc>
-              <a:spcAft>
-                <a:spcPts val="0"/>
-              </a:spcAft>
-            </a:pPr>
-            <a:r>
-              <a:rPr sz="1000" b="0" i="0">
-                <a:solidFill>
-                  <a:srgbClr val="141B2E"/>
-                </a:solidFill>
-                <a:latin typeface="Arial"/>
-              </a:rPr>
-              <a:t>Q75–85, ≤1024 px</a:t>
-            </a:r>
-          </a:p>
-        </p:txBody>
-      </p:sp>
-      <p:sp>
-        <p:nvSpPr>
-          <p:cNvPr id="16" name="TextBox 15"/>
-          <p:cNvSpPr txBox="1"/>
-          <p:nvPr/>
-        </p:nvSpPr>
-        <p:spPr>
-          <a:xfrm>
-            <a:off x="5624030" y="5512383"/>
-            <a:ext cx="2839988" cy="310896"/>
-          </a:xfrm>
-          <a:prstGeom prst="rect">
-            <a:avLst/>
-          </a:prstGeom>
-          <a:noFill/>
-        </p:spPr>
-        <p:txBody>
-          <a:bodyPr wrap="square" lIns="0" rIns="0" tIns="0" bIns="0" anchor="ctr">
-            <a:spAutoFit/>
-          </a:bodyPr>
-          <a:lstStyle/>
-          <a:p>
-            <a:pPr algn="l">
-              <a:lnSpc>
-                <a:spcPts val="1150"/>
-              </a:lnSpc>
-              <a:spcAft>
-                <a:spcPts val="0"/>
-              </a:spcAft>
-            </a:pPr>
-            <a:r>
-              <a:rPr sz="1000" b="0" i="0">
-                <a:solidFill>
-                  <a:srgbClr val="141B2E"/>
-                </a:solidFill>
-                <a:latin typeface="Arial"/>
-              </a:rPr>
-              <a:t>≈300 токенов, впятеро дешевле</a:t>
-            </a:r>
-          </a:p>
-        </p:txBody>
-      </p:sp>
-      <p:sp>
-        <p:nvSpPr>
-          <p:cNvPr id="17" name="TextBox 16"/>
-          <p:cNvSpPr txBox="1"/>
-          <p:nvPr/>
-        </p:nvSpPr>
-        <p:spPr>
-          <a:xfrm>
-            <a:off x="8610323" y="5512383"/>
-            <a:ext cx="2746524" cy="310896"/>
-          </a:xfrm>
-          <a:prstGeom prst="rect">
-            <a:avLst/>
-          </a:prstGeom>
-          <a:noFill/>
-        </p:spPr>
-        <p:txBody>
-          <a:bodyPr wrap="square" lIns="0" rIns="0" tIns="0" bIns="0" anchor="ctr">
-            <a:spAutoFit/>
-          </a:bodyPr>
-          <a:lstStyle/>
-          <a:p>
-            <a:pPr algn="l">
-              <a:lnSpc>
-                <a:spcPts val="1150"/>
-              </a:lnSpc>
-              <a:spcAft>
-                <a:spcPts val="0"/>
-              </a:spcAft>
-            </a:pPr>
-            <a:r>
-              <a:rPr sz="1000" b="0" i="0">
-                <a:solidFill>
-                  <a:srgbClr val="141B2E"/>
-                </a:solidFill>
-                <a:latin typeface="Arial"/>
-              </a:rPr>
-              <a:t>режет мелкий текст у предела</a:t>
-            </a:r>
-          </a:p>
-        </p:txBody>
-      </p:sp>
-      <p:cxnSp>
-        <p:nvCxnSpPr>
-          <p:cNvPr id="18" name="Connector 17"/>
-          <p:cNvCxnSpPr/>
-          <p:nvPr/>
-        </p:nvCxnSpPr>
-        <p:spPr>
-          <a:xfrm>
-            <a:off x="685800" y="5823279"/>
-            <a:ext cx="10817352" cy="0"/>
-          </a:xfrm>
-          <a:prstGeom prst="line">
-            <a:avLst/>
-          </a:prstGeom>
-          <a:ln w="9525">
-            <a:solidFill>
-              <a:srgbClr val="E5EAF0"/>
-            </a:solidFill>
-          </a:ln>
-        </p:spPr>
-        <p:style>
-          <a:lnRef idx="2">
-            <a:schemeClr val="accent1"/>
-          </a:lnRef>
-          <a:fillRef idx="0">
-            <a:schemeClr val="accent1"/>
-          </a:fillRef>
-          <a:effectRef idx="1">
-            <a:schemeClr val="accent1"/>
-          </a:effectRef>
-          <a:fontRef idx="minor">
-            <a:schemeClr val="tx1"/>
-          </a:fontRef>
-        </p:style>
-      </p:cxnSp>
-      <p:sp>
-        <p:nvSpPr>
-          <p:cNvPr id="19" name="TextBox 18"/>
-          <p:cNvSpPr txBox="1"/>
-          <p:nvPr/>
-        </p:nvSpPr>
-        <p:spPr>
-          <a:xfrm>
-            <a:off x="685800" y="5823279"/>
-            <a:ext cx="2033786" cy="310896"/>
-          </a:xfrm>
-          <a:prstGeom prst="rect">
-            <a:avLst/>
-          </a:prstGeom>
-          <a:noFill/>
-        </p:spPr>
-        <p:txBody>
-          <a:bodyPr wrap="square" lIns="0" rIns="0" tIns="0" bIns="0" anchor="ctr">
-            <a:spAutoFit/>
-          </a:bodyPr>
-          <a:lstStyle/>
-          <a:p>
-            <a:pPr algn="l">
-              <a:lnSpc>
-                <a:spcPts val="1150"/>
-              </a:lnSpc>
-              <a:spcAft>
-                <a:spcPts val="0"/>
-              </a:spcAft>
-            </a:pPr>
-            <a:r>
-              <a:rPr sz="1000" b="0" i="0">
-                <a:solidFill>
-                  <a:srgbClr val="141B2E"/>
-                </a:solidFill>
-                <a:latin typeface="Arial"/>
-              </a:rPr>
-              <a:t>Агрессивное сжатие</a:t>
-            </a:r>
-          </a:p>
-        </p:txBody>
-      </p:sp>
-      <p:sp>
-        <p:nvSpPr>
-          <p:cNvPr id="20" name="TextBox 19"/>
-          <p:cNvSpPr txBox="1"/>
-          <p:nvPr/>
-        </p:nvSpPr>
-        <p:spPr>
-          <a:xfrm>
-            <a:off x="2865890" y="5823279"/>
-            <a:ext cx="2611835" cy="310896"/>
-          </a:xfrm>
-          <a:prstGeom prst="rect">
-            <a:avLst/>
-          </a:prstGeom>
-          <a:noFill/>
-        </p:spPr>
-        <p:txBody>
-          <a:bodyPr wrap="square" lIns="0" rIns="0" tIns="0" bIns="0" anchor="ctr">
-            <a:spAutoFit/>
-          </a:bodyPr>
-          <a:lstStyle/>
-          <a:p>
-            <a:pPr algn="l">
-              <a:lnSpc>
-                <a:spcPts val="1150"/>
-              </a:lnSpc>
-              <a:spcAft>
-                <a:spcPts val="0"/>
-              </a:spcAft>
-            </a:pPr>
-            <a:r>
-              <a:rPr sz="1000" b="0" i="0">
-                <a:solidFill>
-                  <a:srgbClr val="141B2E"/>
-                </a:solidFill>
-                <a:latin typeface="Arial"/>
-              </a:rPr>
-              <a:t>низкое качество, &lt; ~1024 px</a:t>
-            </a:r>
-          </a:p>
-        </p:txBody>
-      </p:sp>
-      <p:sp>
-        <p:nvSpPr>
-          <p:cNvPr id="21" name="TextBox 20"/>
-          <p:cNvSpPr txBox="1"/>
-          <p:nvPr/>
-        </p:nvSpPr>
-        <p:spPr>
-          <a:xfrm>
-            <a:off x="5624030" y="5823279"/>
-            <a:ext cx="2839988" cy="310896"/>
-          </a:xfrm>
-          <a:prstGeom prst="rect">
-            <a:avLst/>
-          </a:prstGeom>
-          <a:noFill/>
-        </p:spPr>
-        <p:txBody>
-          <a:bodyPr wrap="square" lIns="0" rIns="0" tIns="0" bIns="0" anchor="ctr">
-            <a:spAutoFit/>
-          </a:bodyPr>
-          <a:lstStyle/>
-          <a:p>
-            <a:pPr algn="l">
-              <a:lnSpc>
-                <a:spcPts val="1150"/>
-              </a:lnSpc>
-              <a:spcAft>
-                <a:spcPts val="0"/>
-              </a:spcAft>
-            </a:pPr>
-            <a:r>
-              <a:rPr sz="1000" b="0" i="0">
-                <a:solidFill>
-                  <a:srgbClr val="141B2E"/>
-                </a:solidFill>
-                <a:latin typeface="Arial"/>
-              </a:rPr>
-              <a:t>ещё дешевле</a:t>
-            </a:r>
-          </a:p>
-        </p:txBody>
-      </p:sp>
-      <p:sp>
-        <p:nvSpPr>
-          <p:cNvPr id="22" name="TextBox 21"/>
-          <p:cNvSpPr txBox="1"/>
-          <p:nvPr/>
-        </p:nvSpPr>
-        <p:spPr>
-          <a:xfrm>
-            <a:off x="8610323" y="5823279"/>
-            <a:ext cx="2746524" cy="310896"/>
-          </a:xfrm>
-          <a:prstGeom prst="rect">
-            <a:avLst/>
-          </a:prstGeom>
-          <a:noFill/>
-        </p:spPr>
-        <p:txBody>
-          <a:bodyPr wrap="square" lIns="0" rIns="0" tIns="0" bIns="0" anchor="ctr">
-            <a:spAutoFit/>
-          </a:bodyPr>
-          <a:lstStyle/>
-          <a:p>
-            <a:pPr algn="l">
-              <a:lnSpc>
-                <a:spcPts val="1150"/>
-              </a:lnSpc>
-              <a:spcAft>
-                <a:spcPts val="0"/>
-              </a:spcAft>
-            </a:pPr>
-            <a:r>
-              <a:rPr sz="1000" b="0" i="0">
-                <a:solidFill>
-                  <a:srgbClr val="141B2E"/>
-                </a:solidFill>
-                <a:latin typeface="Arial"/>
-              </a:rPr>
-              <a:t>текст и детали не распознать</a:t>
-            </a:r>
-          </a:p>
-        </p:txBody>
-      </p:sp>
-      <p:sp>
-        <p:nvSpPr>
-          <p:cNvPr id="23" name="TextBox 22"/>
           <p:cNvSpPr txBox="1"/>
           <p:nvPr/>
         </p:nvSpPr>
@@ -41607,32 +41275,58 @@
                 </a:solidFill>
                 <a:latin typeface="Arial"/>
               </a:rPr>
-              <a:t>Что видит координатор при успешной отправке</a:t>
-            </a:r>
-          </a:p>
-        </p:txBody>
-      </p:sp>
-      <p:sp>
-        <p:nvSpPr>
-          <p:cNvPr id="3" name="Rounded Rectangle 2"/>
+              <a:t>Порядок проверки и вопрос сжатия</a:t>
+            </a:r>
+          </a:p>
+        </p:txBody>
+      </p:sp>
+      <p:pic>
+        <p:nvPicPr>
+          <p:cNvPr id="3" name="Picture 2" descr="k4-shema-szhatie.png"/>
+          <p:cNvPicPr>
+            <a:picLocks noChangeAspect="1"/>
+          </p:cNvPicPr>
+          <p:nvPr/>
+        </p:nvPicPr>
+        <p:blipFill>
+          <a:blip r:embed="rId2"/>
+          <a:stretch>
+            <a:fillRect/>
+          </a:stretch>
+        </p:blipFill>
+        <p:spPr>
+          <a:xfrm>
+            <a:off x="1799097" y="943356"/>
+            <a:ext cx="8590757" cy="3651071"/>
+          </a:xfrm>
+          <a:prstGeom prst="rect">
+            <a:avLst/>
+          </a:prstGeom>
+        </p:spPr>
+      </p:pic>
+      <p:sp>
+        <p:nvSpPr>
+          <p:cNvPr id="4" name="Rounded Rectangle 3"/>
           <p:cNvSpPr/>
           <p:nvPr/>
         </p:nvSpPr>
         <p:spPr>
           <a:xfrm>
-            <a:off x="502920" y="1918716"/>
-            <a:ext cx="82296" cy="1295400"/>
+            <a:off x="502920" y="4759019"/>
+            <a:ext cx="11183112" cy="1558036"/>
           </a:xfrm>
           <a:prstGeom prst="roundRect">
             <a:avLst>
-              <a:gd name="adj" fmla="val 50000"/>
+              <a:gd name="adj" fmla="val 19563"/>
             </a:avLst>
           </a:prstGeom>
           <a:solidFill>
-            <a:srgbClr val="F0AB00"/>
+            <a:srgbClr val="FFFFFF"/>
           </a:solidFill>
-          <a:ln>
-            <a:noFill/>
+          <a:ln w="17780">
+            <a:solidFill>
+              <a:srgbClr val="1C7293"/>
+            </a:solidFill>
           </a:ln>
           <a:effectLst/>
         </p:spPr>
@@ -41660,14 +41354,182 @@
       </p:sp>
       <p:sp>
         <p:nvSpPr>
-          <p:cNvPr id="4" name="TextBox 3"/>
-          <p:cNvSpPr txBox="1"/>
-          <p:nvPr/>
-        </p:nvSpPr>
-        <p:spPr>
-          <a:xfrm>
-            <a:off x="859536" y="2046732"/>
-            <a:ext cx="10643616" cy="1039368"/>
+          <p:cNvPr id="5" name="TextBox 4"/>
+          <p:cNvSpPr txBox="1"/>
+          <p:nvPr/>
+        </p:nvSpPr>
+        <p:spPr>
+          <a:xfrm>
+            <a:off x="685800" y="4941899"/>
+            <a:ext cx="2033786" cy="259587"/>
+          </a:xfrm>
+          <a:prstGeom prst="rect">
+            <a:avLst/>
+          </a:prstGeom>
+          <a:noFill/>
+        </p:spPr>
+        <p:txBody>
+          <a:bodyPr wrap="square" lIns="0" rIns="0" tIns="0" bIns="0" anchor="t">
+            <a:spAutoFit/>
+          </a:bodyPr>
+          <a:lstStyle/>
+          <a:p>
+            <a:pPr algn="l">
+              <a:lnSpc>
+                <a:spcPts val="1100"/>
+              </a:lnSpc>
+              <a:spcAft>
+                <a:spcPts val="0"/>
+              </a:spcAft>
+            </a:pPr>
+            <a:r>
+              <a:rPr sz="1000" b="1" i="0">
+                <a:solidFill>
+                  <a:srgbClr val="6B7685"/>
+                </a:solidFill>
+                <a:latin typeface="Arial"/>
+              </a:rPr>
+              <a:t>ДЕЙСТВИЕ</a:t>
+            </a:r>
+          </a:p>
+        </p:txBody>
+      </p:sp>
+      <p:sp>
+        <p:nvSpPr>
+          <p:cNvPr id="6" name="TextBox 5"/>
+          <p:cNvSpPr txBox="1"/>
+          <p:nvPr/>
+        </p:nvSpPr>
+        <p:spPr>
+          <a:xfrm>
+            <a:off x="2865890" y="4941899"/>
+            <a:ext cx="2611835" cy="259587"/>
+          </a:xfrm>
+          <a:prstGeom prst="rect">
+            <a:avLst/>
+          </a:prstGeom>
+          <a:noFill/>
+        </p:spPr>
+        <p:txBody>
+          <a:bodyPr wrap="square" lIns="0" rIns="0" tIns="0" bIns="0" anchor="t">
+            <a:spAutoFit/>
+          </a:bodyPr>
+          <a:lstStyle/>
+          <a:p>
+            <a:pPr algn="l">
+              <a:lnSpc>
+                <a:spcPts val="1100"/>
+              </a:lnSpc>
+              <a:spcAft>
+                <a:spcPts val="0"/>
+              </a:spcAft>
+            </a:pPr>
+            <a:r>
+              <a:rPr sz="1000" b="1" i="0">
+                <a:solidFill>
+                  <a:srgbClr val="6B7685"/>
+                </a:solidFill>
+                <a:latin typeface="Arial"/>
+              </a:rPr>
+              <a:t>КАК ДЕЛАЕТ</a:t>
+            </a:r>
+          </a:p>
+        </p:txBody>
+      </p:sp>
+      <p:sp>
+        <p:nvSpPr>
+          <p:cNvPr id="7" name="TextBox 6"/>
+          <p:cNvSpPr txBox="1"/>
+          <p:nvPr/>
+        </p:nvSpPr>
+        <p:spPr>
+          <a:xfrm>
+            <a:off x="5624030" y="4941899"/>
+            <a:ext cx="2839988" cy="259587"/>
+          </a:xfrm>
+          <a:prstGeom prst="rect">
+            <a:avLst/>
+          </a:prstGeom>
+          <a:noFill/>
+        </p:spPr>
+        <p:txBody>
+          <a:bodyPr wrap="square" lIns="0" rIns="0" tIns="0" bIns="0" anchor="t">
+            <a:spAutoFit/>
+          </a:bodyPr>
+          <a:lstStyle/>
+          <a:p>
+            <a:pPr algn="l">
+              <a:lnSpc>
+                <a:spcPts val="1100"/>
+              </a:lnSpc>
+              <a:spcAft>
+                <a:spcPts val="0"/>
+              </a:spcAft>
+            </a:pPr>
+            <a:r>
+              <a:rPr sz="1000" b="1" i="0">
+                <a:solidFill>
+                  <a:srgbClr val="6B7685"/>
+                </a:solidFill>
+                <a:latin typeface="Arial"/>
+              </a:rPr>
+              <a:t>ПРЕИМУЩЕСТВО</a:t>
+            </a:r>
+          </a:p>
+        </p:txBody>
+      </p:sp>
+      <p:sp>
+        <p:nvSpPr>
+          <p:cNvPr id="8" name="TextBox 7"/>
+          <p:cNvSpPr txBox="1"/>
+          <p:nvPr/>
+        </p:nvSpPr>
+        <p:spPr>
+          <a:xfrm>
+            <a:off x="8610323" y="4941899"/>
+            <a:ext cx="2746524" cy="259587"/>
+          </a:xfrm>
+          <a:prstGeom prst="rect">
+            <a:avLst/>
+          </a:prstGeom>
+          <a:noFill/>
+        </p:spPr>
+        <p:txBody>
+          <a:bodyPr wrap="square" lIns="0" rIns="0" tIns="0" bIns="0" anchor="t">
+            <a:spAutoFit/>
+          </a:bodyPr>
+          <a:lstStyle/>
+          <a:p>
+            <a:pPr algn="l">
+              <a:lnSpc>
+                <a:spcPts val="1100"/>
+              </a:lnSpc>
+              <a:spcAft>
+                <a:spcPts val="0"/>
+              </a:spcAft>
+            </a:pPr>
+            <a:r>
+              <a:rPr sz="1000" b="1" i="0">
+                <a:solidFill>
+                  <a:srgbClr val="6B7685"/>
+                </a:solidFill>
+                <a:latin typeface="Arial"/>
+              </a:rPr>
+              <a:t>НЕДОСТАТКИ</a:t>
+            </a:r>
+          </a:p>
+        </p:txBody>
+      </p:sp>
+      <p:sp>
+        <p:nvSpPr>
+          <p:cNvPr id="9" name="TextBox 8"/>
+          <p:cNvSpPr txBox="1"/>
+          <p:nvPr/>
+        </p:nvSpPr>
+        <p:spPr>
+          <a:xfrm>
+            <a:off x="685800" y="5201487"/>
+            <a:ext cx="2033786" cy="310896"/>
           </a:xfrm>
           <a:prstGeom prst="rect">
             <a:avLst/>
@@ -41682,118 +41544,195 @@
           <a:p>
             <a:pPr algn="l">
               <a:lnSpc>
-                <a:spcPts val="1860"/>
-              </a:lnSpc>
-              <a:spcAft>
-                <a:spcPts val="300"/>
-              </a:spcAft>
-            </a:pPr>
-            <a:r>
-              <a:rPr sz="1500" b="1" i="0">
-                <a:solidFill>
-                  <a:srgbClr val="141B2E"/>
-                </a:solidFill>
-                <a:latin typeface="Arial"/>
-              </a:rPr>
-              <a:t>Telegram, чат «Уведомления учебного центра».</a:t>
-            </a:r>
-          </a:p>
+                <a:spcPts val="1150"/>
+              </a:lnSpc>
+              <a:spcAft>
+                <a:spcPts val="0"/>
+              </a:spcAft>
+            </a:pPr>
+            <a:r>
+              <a:rPr sz="1000" b="0" i="0">
+                <a:solidFill>
+                  <a:srgbClr val="141B2E"/>
+                </a:solidFill>
+                <a:latin typeface="Arial"/>
+              </a:rPr>
+              <a:t>Без сжатия</a:t>
+            </a:r>
+          </a:p>
+        </p:txBody>
+      </p:sp>
+      <p:sp>
+        <p:nvSpPr>
+          <p:cNvPr id="10" name="TextBox 9"/>
+          <p:cNvSpPr txBox="1"/>
+          <p:nvPr/>
+        </p:nvSpPr>
+        <p:spPr>
+          <a:xfrm>
+            <a:off x="2865890" y="5201487"/>
+            <a:ext cx="2611835" cy="310896"/>
+          </a:xfrm>
+          <a:prstGeom prst="rect">
+            <a:avLst/>
+          </a:prstGeom>
+          <a:noFill/>
+        </p:spPr>
+        <p:txBody>
+          <a:bodyPr wrap="square" lIns="0" rIns="0" tIns="0" bIns="0" anchor="ctr">
+            <a:spAutoFit/>
+          </a:bodyPr>
+          <a:lstStyle/>
           <a:p>
             <a:pPr algn="l">
               <a:lnSpc>
-                <a:spcPts val="1860"/>
-              </a:lnSpc>
-              <a:spcAft>
-                <a:spcPts val="300"/>
-              </a:spcAft>
-            </a:pPr>
-            <a:r>
-              <a:rPr sz="1500" b="1" i="0">
-                <a:solidFill>
-                  <a:srgbClr val="141B2E"/>
-                </a:solidFill>
-                <a:latin typeface="Arial"/>
-              </a:rPr>
-              <a:t/>
-            </a:r>
-          </a:p>
+                <a:spcPts val="1150"/>
+              </a:lnSpc>
+              <a:spcAft>
+                <a:spcPts val="0"/>
+              </a:spcAft>
+            </a:pPr>
+            <a:r>
+              <a:rPr sz="1000" b="0" i="0">
+                <a:solidFill>
+                  <a:srgbClr val="141B2E"/>
+                </a:solidFill>
+                <a:latin typeface="Arial"/>
+              </a:rPr>
+              <a:t>как есть (4032×3024)</a:t>
+            </a:r>
+          </a:p>
+        </p:txBody>
+      </p:sp>
+      <p:sp>
+        <p:nvSpPr>
+          <p:cNvPr id="11" name="TextBox 10"/>
+          <p:cNvSpPr txBox="1"/>
+          <p:nvPr/>
+        </p:nvSpPr>
+        <p:spPr>
+          <a:xfrm>
+            <a:off x="5624030" y="5201487"/>
+            <a:ext cx="2839988" cy="310896"/>
+          </a:xfrm>
+          <a:prstGeom prst="rect">
+            <a:avLst/>
+          </a:prstGeom>
+          <a:noFill/>
+        </p:spPr>
+        <p:txBody>
+          <a:bodyPr wrap="square" lIns="0" rIns="0" tIns="0" bIns="0" anchor="ctr">
+            <a:spAutoFit/>
+          </a:bodyPr>
+          <a:lstStyle/>
           <a:p>
             <a:pPr algn="l">
               <a:lnSpc>
-                <a:spcPts val="1860"/>
-              </a:lnSpc>
-              <a:spcAft>
-                <a:spcPts val="300"/>
-              </a:spcAft>
-            </a:pPr>
-            <a:r>
-              <a:rPr sz="1500" b="1" i="0">
-                <a:solidFill>
-                  <a:srgbClr val="141B2E"/>
-                </a:solidFill>
-                <a:latin typeface="Arial"/>
-              </a:rPr>
-              <a:t>Фото-карточка, подписью к которой идёт текст уведомления: «Новая заявка от Марии: тема «курс», также упомянуто: оплата.»</a:t>
-            </a:r>
-          </a:p>
-        </p:txBody>
-      </p:sp>
-      <p:sp>
-        <p:nvSpPr>
-          <p:cNvPr id="5" name="Rounded Rectangle 4"/>
-          <p:cNvSpPr/>
-          <p:nvPr/>
-        </p:nvSpPr>
-        <p:spPr>
-          <a:xfrm>
-            <a:off x="502920" y="3881628"/>
-            <a:ext cx="82296" cy="982980"/>
-          </a:xfrm>
-          <a:prstGeom prst="roundRect">
-            <a:avLst>
-              <a:gd name="adj" fmla="val 50000"/>
-            </a:avLst>
-          </a:prstGeom>
-          <a:solidFill>
-            <a:srgbClr val="F0AB00"/>
-          </a:solidFill>
-          <a:ln>
-            <a:noFill/>
+                <a:spcPts val="1150"/>
+              </a:lnSpc>
+              <a:spcAft>
+                <a:spcPts val="0"/>
+              </a:spcAft>
+            </a:pPr>
+            <a:r>
+              <a:rPr sz="1000" b="0" i="0">
+                <a:solidFill>
+                  <a:srgbClr val="141B2E"/>
+                </a:solidFill>
+                <a:latin typeface="Arial"/>
+              </a:rPr>
+              <a:t>максимум деталей</a:t>
+            </a:r>
+          </a:p>
+        </p:txBody>
+      </p:sp>
+      <p:sp>
+        <p:nvSpPr>
+          <p:cNvPr id="12" name="TextBox 11"/>
+          <p:cNvSpPr txBox="1"/>
+          <p:nvPr/>
+        </p:nvSpPr>
+        <p:spPr>
+          <a:xfrm>
+            <a:off x="8610323" y="5201487"/>
+            <a:ext cx="2746524" cy="310896"/>
+          </a:xfrm>
+          <a:prstGeom prst="rect">
+            <a:avLst/>
+          </a:prstGeom>
+          <a:noFill/>
+        </p:spPr>
+        <p:txBody>
+          <a:bodyPr wrap="square" lIns="0" rIns="0" tIns="0" bIns="0" anchor="ctr">
+            <a:spAutoFit/>
+          </a:bodyPr>
+          <a:lstStyle/>
+          <a:p>
+            <a:pPr algn="l">
+              <a:lnSpc>
+                <a:spcPts val="1150"/>
+              </a:lnSpc>
+              <a:spcAft>
+                <a:spcPts val="0"/>
+              </a:spcAft>
+            </a:pPr>
+            <a:r>
+              <a:rPr sz="1000" b="0" i="0">
+                <a:solidFill>
+                  <a:srgbClr val="141B2E"/>
+                </a:solidFill>
+                <a:latin typeface="Arial"/>
+              </a:rPr>
+              <a:t>дорого — ≈1500 токенов</a:t>
+            </a:r>
+          </a:p>
+        </p:txBody>
+      </p:sp>
+      <p:cxnSp>
+        <p:nvCxnSpPr>
+          <p:cNvPr id="13" name="Connector 12"/>
+          <p:cNvCxnSpPr/>
+          <p:nvPr/>
+        </p:nvCxnSpPr>
+        <p:spPr>
+          <a:xfrm>
+            <a:off x="685800" y="5512383"/>
+            <a:ext cx="10817352" cy="0"/>
+          </a:xfrm>
+          <a:prstGeom prst="line">
+            <a:avLst/>
+          </a:prstGeom>
+          <a:ln w="9525">
+            <a:solidFill>
+              <a:srgbClr val="E5EAF0"/>
+            </a:solidFill>
           </a:ln>
-          <a:effectLst/>
         </p:spPr>
         <p:style>
-          <a:lnRef idx="1">
+          <a:lnRef idx="2">
             <a:schemeClr val="accent1"/>
           </a:lnRef>
-          <a:fillRef idx="3">
+          <a:fillRef idx="0">
             <a:schemeClr val="accent1"/>
           </a:fillRef>
-          <a:effectRef idx="2">
+          <a:effectRef idx="1">
             <a:schemeClr val="accent1"/>
           </a:effectRef>
           <a:fontRef idx="minor">
-            <a:schemeClr val="lt1"/>
+            <a:schemeClr val="tx1"/>
           </a:fontRef>
         </p:style>
-        <p:txBody>
-          <a:bodyPr rtlCol="0" anchor="ctr"/>
-          <a:lstStyle/>
-          <a:p>
-            <a:pPr algn="ctr"/>
-          </a:p>
-        </p:txBody>
-      </p:sp>
-      <p:sp>
-        <p:nvSpPr>
-          <p:cNvPr id="6" name="TextBox 5"/>
-          <p:cNvSpPr txBox="1"/>
-          <p:nvPr/>
-        </p:nvSpPr>
-        <p:spPr>
-          <a:xfrm>
-            <a:off x="859536" y="4009644"/>
-            <a:ext cx="10643616" cy="726948"/>
+      </p:cxnSp>
+      <p:sp>
+        <p:nvSpPr>
+          <p:cNvPr id="14" name="TextBox 13"/>
+          <p:cNvSpPr txBox="1"/>
+          <p:nvPr/>
+        </p:nvSpPr>
+        <p:spPr>
+          <a:xfrm>
+            <a:off x="685800" y="5512383"/>
+            <a:ext cx="2033786" cy="310896"/>
           </a:xfrm>
           <a:prstGeom prst="rect">
             <a:avLst/>
@@ -41808,27 +41747,356 @@
           <a:p>
             <a:pPr algn="l">
               <a:lnSpc>
-                <a:spcPts val="1860"/>
-              </a:lnSpc>
-              <a:spcAft>
-                <a:spcPts val="300"/>
-              </a:spcAft>
-            </a:pPr>
-            <a:r>
-              <a:rPr sz="1500" b="1" i="0">
-                <a:solidFill>
-                  <a:srgbClr val="141B2E"/>
-                </a:solidFill>
-                <a:latin typeface="Arial"/>
-              </a:rPr>
-              <a:t>Та же подпись, что в Кейсе 1 — текст уведомления здесь собирается той же формулой подстановки, только теперь он приходит не отдельным сообщением, а подписью к фотографии. Это успешный случай: файл укладывается в измеренную границу, и карточка доходит целиком.</a:t>
-            </a:r>
-          </a:p>
-        </p:txBody>
-      </p:sp>
-      <p:sp>
-        <p:nvSpPr>
-          <p:cNvPr id="7" name="TextBox 6"/>
+                <a:spcPts val="1150"/>
+              </a:lnSpc>
+              <a:spcAft>
+                <a:spcPts val="0"/>
+              </a:spcAft>
+            </a:pPr>
+            <a:r>
+              <a:rPr sz="1000" b="0" i="0">
+                <a:solidFill>
+                  <a:srgbClr val="141B2E"/>
+                </a:solidFill>
+                <a:latin typeface="Arial"/>
+              </a:rPr>
+              <a:t>Умеренное сжатие</a:t>
+            </a:r>
+          </a:p>
+        </p:txBody>
+      </p:sp>
+      <p:sp>
+        <p:nvSpPr>
+          <p:cNvPr id="15" name="TextBox 14"/>
+          <p:cNvSpPr txBox="1"/>
+          <p:nvPr/>
+        </p:nvSpPr>
+        <p:spPr>
+          <a:xfrm>
+            <a:off x="2865890" y="5512383"/>
+            <a:ext cx="2611835" cy="310896"/>
+          </a:xfrm>
+          <a:prstGeom prst="rect">
+            <a:avLst/>
+          </a:prstGeom>
+          <a:noFill/>
+        </p:spPr>
+        <p:txBody>
+          <a:bodyPr wrap="square" lIns="0" rIns="0" tIns="0" bIns="0" anchor="ctr">
+            <a:spAutoFit/>
+          </a:bodyPr>
+          <a:lstStyle/>
+          <a:p>
+            <a:pPr algn="l">
+              <a:lnSpc>
+                <a:spcPts val="1150"/>
+              </a:lnSpc>
+              <a:spcAft>
+                <a:spcPts val="0"/>
+              </a:spcAft>
+            </a:pPr>
+            <a:r>
+              <a:rPr sz="1000" b="0" i="0">
+                <a:solidFill>
+                  <a:srgbClr val="141B2E"/>
+                </a:solidFill>
+                <a:latin typeface="Arial"/>
+              </a:rPr>
+              <a:t>Q75–85, ≤1024 px</a:t>
+            </a:r>
+          </a:p>
+        </p:txBody>
+      </p:sp>
+      <p:sp>
+        <p:nvSpPr>
+          <p:cNvPr id="16" name="TextBox 15"/>
+          <p:cNvSpPr txBox="1"/>
+          <p:nvPr/>
+        </p:nvSpPr>
+        <p:spPr>
+          <a:xfrm>
+            <a:off x="5624030" y="5512383"/>
+            <a:ext cx="2839988" cy="310896"/>
+          </a:xfrm>
+          <a:prstGeom prst="rect">
+            <a:avLst/>
+          </a:prstGeom>
+          <a:noFill/>
+        </p:spPr>
+        <p:txBody>
+          <a:bodyPr wrap="square" lIns="0" rIns="0" tIns="0" bIns="0" anchor="ctr">
+            <a:spAutoFit/>
+          </a:bodyPr>
+          <a:lstStyle/>
+          <a:p>
+            <a:pPr algn="l">
+              <a:lnSpc>
+                <a:spcPts val="1150"/>
+              </a:lnSpc>
+              <a:spcAft>
+                <a:spcPts val="0"/>
+              </a:spcAft>
+            </a:pPr>
+            <a:r>
+              <a:rPr sz="1000" b="0" i="0">
+                <a:solidFill>
+                  <a:srgbClr val="141B2E"/>
+                </a:solidFill>
+                <a:latin typeface="Arial"/>
+              </a:rPr>
+              <a:t>≈300 токенов, впятеро дешевле</a:t>
+            </a:r>
+          </a:p>
+        </p:txBody>
+      </p:sp>
+      <p:sp>
+        <p:nvSpPr>
+          <p:cNvPr id="17" name="TextBox 16"/>
+          <p:cNvSpPr txBox="1"/>
+          <p:nvPr/>
+        </p:nvSpPr>
+        <p:spPr>
+          <a:xfrm>
+            <a:off x="8610323" y="5512383"/>
+            <a:ext cx="2746524" cy="310896"/>
+          </a:xfrm>
+          <a:prstGeom prst="rect">
+            <a:avLst/>
+          </a:prstGeom>
+          <a:noFill/>
+        </p:spPr>
+        <p:txBody>
+          <a:bodyPr wrap="square" lIns="0" rIns="0" tIns="0" bIns="0" anchor="ctr">
+            <a:spAutoFit/>
+          </a:bodyPr>
+          <a:lstStyle/>
+          <a:p>
+            <a:pPr algn="l">
+              <a:lnSpc>
+                <a:spcPts val="1150"/>
+              </a:lnSpc>
+              <a:spcAft>
+                <a:spcPts val="0"/>
+              </a:spcAft>
+            </a:pPr>
+            <a:r>
+              <a:rPr sz="1000" b="0" i="0">
+                <a:solidFill>
+                  <a:srgbClr val="141B2E"/>
+                </a:solidFill>
+                <a:latin typeface="Arial"/>
+              </a:rPr>
+              <a:t>режет мелкий текст у предела</a:t>
+            </a:r>
+          </a:p>
+        </p:txBody>
+      </p:sp>
+      <p:cxnSp>
+        <p:nvCxnSpPr>
+          <p:cNvPr id="18" name="Connector 17"/>
+          <p:cNvCxnSpPr/>
+          <p:nvPr/>
+        </p:nvCxnSpPr>
+        <p:spPr>
+          <a:xfrm>
+            <a:off x="685800" y="5823279"/>
+            <a:ext cx="10817352" cy="0"/>
+          </a:xfrm>
+          <a:prstGeom prst="line">
+            <a:avLst/>
+          </a:prstGeom>
+          <a:ln w="9525">
+            <a:solidFill>
+              <a:srgbClr val="E5EAF0"/>
+            </a:solidFill>
+          </a:ln>
+        </p:spPr>
+        <p:style>
+          <a:lnRef idx="2">
+            <a:schemeClr val="accent1"/>
+          </a:lnRef>
+          <a:fillRef idx="0">
+            <a:schemeClr val="accent1"/>
+          </a:fillRef>
+          <a:effectRef idx="1">
+            <a:schemeClr val="accent1"/>
+          </a:effectRef>
+          <a:fontRef idx="minor">
+            <a:schemeClr val="tx1"/>
+          </a:fontRef>
+        </p:style>
+      </p:cxnSp>
+      <p:sp>
+        <p:nvSpPr>
+          <p:cNvPr id="19" name="TextBox 18"/>
+          <p:cNvSpPr txBox="1"/>
+          <p:nvPr/>
+        </p:nvSpPr>
+        <p:spPr>
+          <a:xfrm>
+            <a:off x="685800" y="5823279"/>
+            <a:ext cx="2033786" cy="310896"/>
+          </a:xfrm>
+          <a:prstGeom prst="rect">
+            <a:avLst/>
+          </a:prstGeom>
+          <a:noFill/>
+        </p:spPr>
+        <p:txBody>
+          <a:bodyPr wrap="square" lIns="0" rIns="0" tIns="0" bIns="0" anchor="ctr">
+            <a:spAutoFit/>
+          </a:bodyPr>
+          <a:lstStyle/>
+          <a:p>
+            <a:pPr algn="l">
+              <a:lnSpc>
+                <a:spcPts val="1150"/>
+              </a:lnSpc>
+              <a:spcAft>
+                <a:spcPts val="0"/>
+              </a:spcAft>
+            </a:pPr>
+            <a:r>
+              <a:rPr sz="1000" b="0" i="0">
+                <a:solidFill>
+                  <a:srgbClr val="141B2E"/>
+                </a:solidFill>
+                <a:latin typeface="Arial"/>
+              </a:rPr>
+              <a:t>Агрессивное сжатие</a:t>
+            </a:r>
+          </a:p>
+        </p:txBody>
+      </p:sp>
+      <p:sp>
+        <p:nvSpPr>
+          <p:cNvPr id="20" name="TextBox 19"/>
+          <p:cNvSpPr txBox="1"/>
+          <p:nvPr/>
+        </p:nvSpPr>
+        <p:spPr>
+          <a:xfrm>
+            <a:off x="2865890" y="5823279"/>
+            <a:ext cx="2611835" cy="310896"/>
+          </a:xfrm>
+          <a:prstGeom prst="rect">
+            <a:avLst/>
+          </a:prstGeom>
+          <a:noFill/>
+        </p:spPr>
+        <p:txBody>
+          <a:bodyPr wrap="square" lIns="0" rIns="0" tIns="0" bIns="0" anchor="ctr">
+            <a:spAutoFit/>
+          </a:bodyPr>
+          <a:lstStyle/>
+          <a:p>
+            <a:pPr algn="l">
+              <a:lnSpc>
+                <a:spcPts val="1150"/>
+              </a:lnSpc>
+              <a:spcAft>
+                <a:spcPts val="0"/>
+              </a:spcAft>
+            </a:pPr>
+            <a:r>
+              <a:rPr sz="1000" b="0" i="0">
+                <a:solidFill>
+                  <a:srgbClr val="141B2E"/>
+                </a:solidFill>
+                <a:latin typeface="Arial"/>
+              </a:rPr>
+              <a:t>низкое качество, &lt; ~1024 px</a:t>
+            </a:r>
+          </a:p>
+        </p:txBody>
+      </p:sp>
+      <p:sp>
+        <p:nvSpPr>
+          <p:cNvPr id="21" name="TextBox 20"/>
+          <p:cNvSpPr txBox="1"/>
+          <p:nvPr/>
+        </p:nvSpPr>
+        <p:spPr>
+          <a:xfrm>
+            <a:off x="5624030" y="5823279"/>
+            <a:ext cx="2839988" cy="310896"/>
+          </a:xfrm>
+          <a:prstGeom prst="rect">
+            <a:avLst/>
+          </a:prstGeom>
+          <a:noFill/>
+        </p:spPr>
+        <p:txBody>
+          <a:bodyPr wrap="square" lIns="0" rIns="0" tIns="0" bIns="0" anchor="ctr">
+            <a:spAutoFit/>
+          </a:bodyPr>
+          <a:lstStyle/>
+          <a:p>
+            <a:pPr algn="l">
+              <a:lnSpc>
+                <a:spcPts val="1150"/>
+              </a:lnSpc>
+              <a:spcAft>
+                <a:spcPts val="0"/>
+              </a:spcAft>
+            </a:pPr>
+            <a:r>
+              <a:rPr sz="1000" b="0" i="0">
+                <a:solidFill>
+                  <a:srgbClr val="141B2E"/>
+                </a:solidFill>
+                <a:latin typeface="Arial"/>
+              </a:rPr>
+              <a:t>ещё дешевле</a:t>
+            </a:r>
+          </a:p>
+        </p:txBody>
+      </p:sp>
+      <p:sp>
+        <p:nvSpPr>
+          <p:cNvPr id="22" name="TextBox 21"/>
+          <p:cNvSpPr txBox="1"/>
+          <p:nvPr/>
+        </p:nvSpPr>
+        <p:spPr>
+          <a:xfrm>
+            <a:off x="8610323" y="5823279"/>
+            <a:ext cx="2746524" cy="310896"/>
+          </a:xfrm>
+          <a:prstGeom prst="rect">
+            <a:avLst/>
+          </a:prstGeom>
+          <a:noFill/>
+        </p:spPr>
+        <p:txBody>
+          <a:bodyPr wrap="square" lIns="0" rIns="0" tIns="0" bIns="0" anchor="ctr">
+            <a:spAutoFit/>
+          </a:bodyPr>
+          <a:lstStyle/>
+          <a:p>
+            <a:pPr algn="l">
+              <a:lnSpc>
+                <a:spcPts val="1150"/>
+              </a:lnSpc>
+              <a:spcAft>
+                <a:spcPts val="0"/>
+              </a:spcAft>
+            </a:pPr>
+            <a:r>
+              <a:rPr sz="1000" b="0" i="0">
+                <a:solidFill>
+                  <a:srgbClr val="141B2E"/>
+                </a:solidFill>
+                <a:latin typeface="Arial"/>
+              </a:rPr>
+              <a:t>текст и детали не распознать</a:t>
+            </a:r>
+          </a:p>
+        </p:txBody>
+      </p:sp>
+      <p:sp>
+        <p:nvSpPr>
+          <p:cNvPr id="23" name="TextBox 22"/>
           <p:cNvSpPr txBox="1"/>
           <p:nvPr/>
         </p:nvSpPr>
@@ -42387,7 +42655,7 @@
         <p:spPr>
           <a:xfrm>
             <a:off x="502920" y="310896"/>
-            <a:ext cx="11183112" cy="807720"/>
+            <a:ext cx="11183112" cy="431291"/>
           </a:xfrm>
           <a:prstGeom prst="rect">
             <a:avLst/>
@@ -42415,21 +42683,45 @@
                 </a:solidFill>
                 <a:latin typeface="Arial"/>
               </a:rPr>
-              <a:t>Контракт на бинарных данных и граница вводного уровня</a:t>
-            </a:r>
-          </a:p>
-        </p:txBody>
-      </p:sp>
-      <p:sp>
-        <p:nvSpPr>
-          <p:cNvPr id="3" name="Rounded Rectangle 2"/>
+              <a:t>Что видит координатор при успешной отправке</a:t>
+            </a:r>
+          </a:p>
+        </p:txBody>
+      </p:sp>
+      <p:pic>
+        <p:nvPicPr>
+          <p:cNvPr id="3" name="Picture 2" descr="tg-k4-kartochka-shiroko.png"/>
+          <p:cNvPicPr>
+            <a:picLocks noChangeAspect="1"/>
+          </p:cNvPicPr>
+          <p:nvPr/>
+        </p:nvPicPr>
+        <p:blipFill>
+          <a:blip r:embed="rId2"/>
+          <a:stretch>
+            <a:fillRect/>
+          </a:stretch>
+        </p:blipFill>
+        <p:spPr>
+          <a:xfrm>
+            <a:off x="1418459" y="1004316"/>
+            <a:ext cx="9352033" cy="3931920"/>
+          </a:xfrm>
+          <a:prstGeom prst="rect">
+            <a:avLst/>
+          </a:prstGeom>
+        </p:spPr>
+      </p:pic>
+      <p:sp>
+        <p:nvSpPr>
+          <p:cNvPr id="4" name="Rounded Rectangle 3"/>
           <p:cNvSpPr/>
           <p:nvPr/>
         </p:nvSpPr>
         <p:spPr>
           <a:xfrm>
-            <a:off x="502920" y="1746478"/>
-            <a:ext cx="82296" cy="1219200"/>
+            <a:off x="502920" y="5253228"/>
+            <a:ext cx="82296" cy="982980"/>
           </a:xfrm>
           <a:prstGeom prst="roundRect">
             <a:avLst>
@@ -42468,14 +42760,14 @@
       </p:sp>
       <p:sp>
         <p:nvSpPr>
-          <p:cNvPr id="4" name="TextBox 3"/>
-          <p:cNvSpPr txBox="1"/>
-          <p:nvPr/>
-        </p:nvSpPr>
-        <p:spPr>
-          <a:xfrm>
-            <a:off x="859536" y="1874494"/>
-            <a:ext cx="10643616" cy="963168"/>
+          <p:cNvPr id="5" name="TextBox 4"/>
+          <p:cNvSpPr txBox="1"/>
+          <p:nvPr/>
+        </p:nvSpPr>
+        <p:spPr>
+          <a:xfrm>
+            <a:off x="859536" y="5381244"/>
+            <a:ext cx="10643616" cy="726948"/>
           </a:xfrm>
           <a:prstGeom prst="rect">
             <a:avLst/>
@@ -42503,477 +42795,14 @@
                 </a:solidFill>
                 <a:latin typeface="Arial"/>
               </a:rPr>
-              <a:t>Бинарные данные в n8n — отдельная модель данных, не просто ещё одно значение поля.</a:t>
-            </a:r>
-            <a:r>
-              <a:rPr sz="1500" b="1" i="0">
-                <a:solidFill>
-                  <a:srgbClr val="141B2E"/>
-                </a:solidFill>
-                <a:latin typeface="Arial"/>
-              </a:rPr>
-              <a:t> Контракт между шагами, который в «Уведомлениях» рвался на тексте (узел не падал, результат тихо не тот), здесь рвётся на формате и размере — по той же причине: формально успешный прогон ничего не говорит о том, дошёл ли результат до получателя.</a:t>
-            </a:r>
-          </a:p>
-        </p:txBody>
-      </p:sp>
-      <p:sp>
-        <p:nvSpPr>
-          <p:cNvPr id="5" name="Rounded Rectangle 4"/>
-          <p:cNvSpPr/>
-          <p:nvPr/>
-        </p:nvSpPr>
-        <p:spPr>
-          <a:xfrm>
-            <a:off x="502920" y="3633190"/>
-            <a:ext cx="11183112" cy="2054415"/>
-          </a:xfrm>
-          <a:prstGeom prst="roundRect">
-            <a:avLst>
-              <a:gd name="adj" fmla="val 14836"/>
-            </a:avLst>
-          </a:prstGeom>
-          <a:solidFill>
-            <a:srgbClr val="FFFFFF"/>
-          </a:solidFill>
-          <a:ln w="17780">
-            <a:solidFill>
-              <a:srgbClr val="1C7293"/>
-            </a:solidFill>
-          </a:ln>
-          <a:effectLst/>
-        </p:spPr>
-        <p:style>
-          <a:lnRef idx="1">
-            <a:schemeClr val="accent1"/>
-          </a:lnRef>
-          <a:fillRef idx="3">
-            <a:schemeClr val="accent1"/>
-          </a:fillRef>
-          <a:effectRef idx="2">
-            <a:schemeClr val="accent1"/>
-          </a:effectRef>
-          <a:fontRef idx="minor">
-            <a:schemeClr val="lt1"/>
-          </a:fontRef>
-        </p:style>
-        <p:txBody>
-          <a:bodyPr rtlCol="0" anchor="ctr"/>
-          <a:lstStyle/>
-          <a:p>
-            <a:pPr algn="ctr"/>
+              <a:t>Тот же чат и тот же шаблон подписи, что в Кейсе 1, — только теперь текст приходит не отдельным сообщением, а подписью к фотографии. Это успешный случай: файл уложился в измеренную границу, и карточка дошла целиком.</a:t>
+            </a:r>
           </a:p>
         </p:txBody>
       </p:sp>
       <p:sp>
         <p:nvSpPr>
           <p:cNvPr id="6" name="TextBox 5"/>
-          <p:cNvSpPr txBox="1"/>
-          <p:nvPr/>
-        </p:nvSpPr>
-        <p:spPr>
-          <a:xfrm>
-            <a:off x="685800" y="3816070"/>
-            <a:ext cx="5131703" cy="282067"/>
-          </a:xfrm>
-          <a:prstGeom prst="rect">
-            <a:avLst/>
-          </a:prstGeom>
-          <a:noFill/>
-        </p:spPr>
-        <p:txBody>
-          <a:bodyPr wrap="square" lIns="0" rIns="0" tIns="0" bIns="0" anchor="t">
-            <a:spAutoFit/>
-          </a:bodyPr>
-          <a:lstStyle/>
-          <a:p>
-            <a:pPr algn="l">
-              <a:lnSpc>
-                <a:spcPts val="1265"/>
-              </a:lnSpc>
-              <a:spcAft>
-                <a:spcPts val="0"/>
-              </a:spcAft>
-            </a:pPr>
-            <a:r>
-              <a:rPr sz="1150" b="1" i="0">
-                <a:solidFill>
-                  <a:srgbClr val="6B7685"/>
-                </a:solidFill>
-                <a:latin typeface="Arial"/>
-              </a:rPr>
-              <a:t>НА ЭТОМ УРОВНЕ ДОСТАТОЧНО</a:t>
-            </a:r>
-          </a:p>
-        </p:txBody>
-      </p:sp>
-      <p:sp>
-        <p:nvSpPr>
-          <p:cNvPr id="7" name="TextBox 6"/>
-          <p:cNvSpPr txBox="1"/>
-          <p:nvPr/>
-        </p:nvSpPr>
-        <p:spPr>
-          <a:xfrm>
-            <a:off x="5963807" y="3816070"/>
-            <a:ext cx="5393040" cy="282067"/>
-          </a:xfrm>
-          <a:prstGeom prst="rect">
-            <a:avLst/>
-          </a:prstGeom>
-          <a:noFill/>
-        </p:spPr>
-        <p:txBody>
-          <a:bodyPr wrap="square" lIns="0" rIns="0" tIns="0" bIns="0" anchor="t">
-            <a:spAutoFit/>
-          </a:bodyPr>
-          <a:lstStyle/>
-          <a:p>
-            <a:pPr algn="l">
-              <a:lnSpc>
-                <a:spcPts val="1265"/>
-              </a:lnSpc>
-              <a:spcAft>
-                <a:spcPts val="0"/>
-              </a:spcAft>
-            </a:pPr>
-            <a:r>
-              <a:rPr sz="1150" b="1" i="0">
-                <a:solidFill>
-                  <a:srgbClr val="6B7685"/>
-                </a:solidFill>
-                <a:latin typeface="Arial"/>
-              </a:rPr>
-              <a:t>СЛЕДУЮЩИЙ УРОВЕНЬ — СЕМИНАР 10</a:t>
-            </a:r>
-          </a:p>
-        </p:txBody>
-      </p:sp>
-      <p:sp>
-        <p:nvSpPr>
-          <p:cNvPr id="8" name="TextBox 7"/>
-          <p:cNvSpPr txBox="1"/>
-          <p:nvPr/>
-        </p:nvSpPr>
-        <p:spPr>
-          <a:xfrm>
-            <a:off x="685800" y="4098137"/>
-            <a:ext cx="5131703" cy="347154"/>
-          </a:xfrm>
-          <a:prstGeom prst="rect">
-            <a:avLst/>
-          </a:prstGeom>
-          <a:noFill/>
-        </p:spPr>
-        <p:txBody>
-          <a:bodyPr wrap="square" lIns="0" rIns="0" tIns="0" bIns="0" anchor="ctr">
-            <a:spAutoFit/>
-          </a:bodyPr>
-          <a:lstStyle/>
-          <a:p>
-            <a:pPr algn="l">
-              <a:lnSpc>
-                <a:spcPts val="1437"/>
-              </a:lnSpc>
-              <a:spcAft>
-                <a:spcPts val="0"/>
-              </a:spcAft>
-            </a:pPr>
-            <a:r>
-              <a:rPr sz="1250" b="0" i="0">
-                <a:solidFill>
-                  <a:srgbClr val="141B2E"/>
-                </a:solidFill>
-                <a:latin typeface="Arial"/>
-              </a:rPr>
-              <a:t>один файл, один известный лимит, одна отправка</a:t>
-            </a:r>
-          </a:p>
-        </p:txBody>
-      </p:sp>
-      <p:sp>
-        <p:nvSpPr>
-          <p:cNvPr id="9" name="TextBox 8"/>
-          <p:cNvSpPr txBox="1"/>
-          <p:nvPr/>
-        </p:nvSpPr>
-        <p:spPr>
-          <a:xfrm>
-            <a:off x="5963807" y="4098137"/>
-            <a:ext cx="5393040" cy="347154"/>
-          </a:xfrm>
-          <a:prstGeom prst="rect">
-            <a:avLst/>
-          </a:prstGeom>
-          <a:noFill/>
-        </p:spPr>
-        <p:txBody>
-          <a:bodyPr wrap="square" lIns="0" rIns="0" tIns="0" bIns="0" anchor="ctr">
-            <a:spAutoFit/>
-          </a:bodyPr>
-          <a:lstStyle/>
-          <a:p>
-            <a:pPr algn="l">
-              <a:lnSpc>
-                <a:spcPts val="1437"/>
-              </a:lnSpc>
-              <a:spcAft>
-                <a:spcPts val="0"/>
-              </a:spcAft>
-            </a:pPr>
-            <a:r>
-              <a:rPr sz="1250" b="0" i="0">
-                <a:solidFill>
-                  <a:srgbClr val="141B2E"/>
-                </a:solidFill>
-                <a:latin typeface="Arial"/>
-              </a:rPr>
-              <a:t>хранение и поиск среди множества файлов</a:t>
-            </a:r>
-          </a:p>
-        </p:txBody>
-      </p:sp>
-      <p:cxnSp>
-        <p:nvCxnSpPr>
-          <p:cNvPr id="10" name="Connector 9"/>
-          <p:cNvCxnSpPr/>
-          <p:nvPr/>
-        </p:nvCxnSpPr>
-        <p:spPr>
-          <a:xfrm>
-            <a:off x="685800" y="4445292"/>
-            <a:ext cx="10817352" cy="0"/>
-          </a:xfrm>
-          <a:prstGeom prst="line">
-            <a:avLst/>
-          </a:prstGeom>
-          <a:ln w="9525">
-            <a:solidFill>
-              <a:srgbClr val="E5EAF0"/>
-            </a:solidFill>
-          </a:ln>
-        </p:spPr>
-        <p:style>
-          <a:lnRef idx="2">
-            <a:schemeClr val="accent1"/>
-          </a:lnRef>
-          <a:fillRef idx="0">
-            <a:schemeClr val="accent1"/>
-          </a:fillRef>
-          <a:effectRef idx="1">
-            <a:schemeClr val="accent1"/>
-          </a:effectRef>
-          <a:fontRef idx="minor">
-            <a:schemeClr val="tx1"/>
-          </a:fontRef>
-        </p:style>
-      </p:cxnSp>
-      <p:sp>
-        <p:nvSpPr>
-          <p:cNvPr id="11" name="TextBox 10"/>
-          <p:cNvSpPr txBox="1"/>
-          <p:nvPr/>
-        </p:nvSpPr>
-        <p:spPr>
-          <a:xfrm>
-            <a:off x="685800" y="4445292"/>
-            <a:ext cx="5131703" cy="529717"/>
-          </a:xfrm>
-          <a:prstGeom prst="rect">
-            <a:avLst/>
-          </a:prstGeom>
-          <a:noFill/>
-        </p:spPr>
-        <p:txBody>
-          <a:bodyPr wrap="square" lIns="0" rIns="0" tIns="0" bIns="0" anchor="ctr">
-            <a:spAutoFit/>
-          </a:bodyPr>
-          <a:lstStyle/>
-          <a:p>
-            <a:pPr algn="l">
-              <a:lnSpc>
-                <a:spcPts val="1437"/>
-              </a:lnSpc>
-              <a:spcAft>
-                <a:spcPts val="0"/>
-              </a:spcAft>
-            </a:pPr>
-            <a:r>
-              <a:rPr sz="1250" b="0" i="0">
-                <a:solidFill>
-                  <a:srgbClr val="141B2E"/>
-                </a:solidFill>
-                <a:latin typeface="Arial"/>
-              </a:rPr>
-              <a:t>проверка размера и формата перед отправкой</a:t>
-            </a:r>
-          </a:p>
-        </p:txBody>
-      </p:sp>
-      <p:sp>
-        <p:nvSpPr>
-          <p:cNvPr id="12" name="TextBox 11"/>
-          <p:cNvSpPr txBox="1"/>
-          <p:nvPr/>
-        </p:nvSpPr>
-        <p:spPr>
-          <a:xfrm>
-            <a:off x="5963807" y="4445292"/>
-            <a:ext cx="5393040" cy="529717"/>
-          </a:xfrm>
-          <a:prstGeom prst="rect">
-            <a:avLst/>
-          </a:prstGeom>
-          <a:noFill/>
-        </p:spPr>
-        <p:txBody>
-          <a:bodyPr wrap="square" lIns="0" rIns="0" tIns="0" bIns="0" anchor="ctr">
-            <a:spAutoFit/>
-          </a:bodyPr>
-          <a:lstStyle/>
-          <a:p>
-            <a:pPr algn="l">
-              <a:lnSpc>
-                <a:spcPts val="1437"/>
-              </a:lnSpc>
-              <a:spcAft>
-                <a:spcPts val="0"/>
-              </a:spcAft>
-            </a:pPr>
-            <a:r>
-              <a:rPr sz="1250" b="0" i="0">
-                <a:solidFill>
-                  <a:srgbClr val="141B2E"/>
-                </a:solidFill>
-                <a:latin typeface="Arial"/>
-              </a:rPr>
-              <a:t>обработка содержимого файла моделью (поиск по смыслу изображений)</a:t>
-            </a:r>
-          </a:p>
-        </p:txBody>
-      </p:sp>
-      <p:cxnSp>
-        <p:nvCxnSpPr>
-          <p:cNvPr id="13" name="Connector 12"/>
-          <p:cNvCxnSpPr/>
-          <p:nvPr/>
-        </p:nvCxnSpPr>
-        <p:spPr>
-          <a:xfrm>
-            <a:off x="685800" y="4975009"/>
-            <a:ext cx="10817352" cy="0"/>
-          </a:xfrm>
-          <a:prstGeom prst="line">
-            <a:avLst/>
-          </a:prstGeom>
-          <a:ln w="9525">
-            <a:solidFill>
-              <a:srgbClr val="E5EAF0"/>
-            </a:solidFill>
-          </a:ln>
-        </p:spPr>
-        <p:style>
-          <a:lnRef idx="2">
-            <a:schemeClr val="accent1"/>
-          </a:lnRef>
-          <a:fillRef idx="0">
-            <a:schemeClr val="accent1"/>
-          </a:fillRef>
-          <a:effectRef idx="1">
-            <a:schemeClr val="accent1"/>
-          </a:effectRef>
-          <a:fontRef idx="minor">
-            <a:schemeClr val="tx1"/>
-          </a:fontRef>
-        </p:style>
-      </p:cxnSp>
-      <p:sp>
-        <p:nvSpPr>
-          <p:cNvPr id="14" name="TextBox 13"/>
-          <p:cNvSpPr txBox="1"/>
-          <p:nvPr/>
-        </p:nvSpPr>
-        <p:spPr>
-          <a:xfrm>
-            <a:off x="685800" y="4975009"/>
-            <a:ext cx="5131703" cy="529717"/>
-          </a:xfrm>
-          <a:prstGeom prst="rect">
-            <a:avLst/>
-          </a:prstGeom>
-          <a:noFill/>
-        </p:spPr>
-        <p:txBody>
-          <a:bodyPr wrap="square" lIns="0" rIns="0" tIns="0" bIns="0" anchor="ctr">
-            <a:spAutoFit/>
-          </a:bodyPr>
-          <a:lstStyle/>
-          <a:p>
-            <a:pPr algn="l">
-              <a:lnSpc>
-                <a:spcPts val="1437"/>
-              </a:lnSpc>
-              <a:spcAft>
-                <a:spcPts val="0"/>
-              </a:spcAft>
-            </a:pPr>
-            <a:r>
-              <a:rPr sz="1250" b="0" i="0">
-                <a:solidFill>
-                  <a:srgbClr val="141B2E"/>
-                </a:solidFill>
-                <a:latin typeface="Arial"/>
-              </a:rPr>
-              <a:t>явное условие в цепочке на каждый шаг с бинарными данными</a:t>
-            </a:r>
-          </a:p>
-        </p:txBody>
-      </p:sp>
-      <p:sp>
-        <p:nvSpPr>
-          <p:cNvPr id="15" name="TextBox 14"/>
-          <p:cNvSpPr txBox="1"/>
-          <p:nvPr/>
-        </p:nvSpPr>
-        <p:spPr>
-          <a:xfrm>
-            <a:off x="5963807" y="4975009"/>
-            <a:ext cx="5393040" cy="529717"/>
-          </a:xfrm>
-          <a:prstGeom prst="rect">
-            <a:avLst/>
-          </a:prstGeom>
-          <a:noFill/>
-        </p:spPr>
-        <p:txBody>
-          <a:bodyPr wrap="square" lIns="0" rIns="0" tIns="0" bIns="0" anchor="ctr">
-            <a:spAutoFit/>
-          </a:bodyPr>
-          <a:lstStyle/>
-          <a:p>
-            <a:pPr algn="l">
-              <a:lnSpc>
-                <a:spcPts val="1437"/>
-              </a:lnSpc>
-              <a:spcAft>
-                <a:spcPts val="0"/>
-              </a:spcAft>
-            </a:pPr>
-            <a:r>
-              <a:rPr sz="1250" b="0" i="0">
-                <a:solidFill>
-                  <a:srgbClr val="141B2E"/>
-                </a:solidFill>
-                <a:latin typeface="Arial"/>
-              </a:rPr>
-              <a:t>векторное хранилище и индексация вложений</a:t>
-            </a:r>
-          </a:p>
-        </p:txBody>
-      </p:sp>
-      <p:sp>
-        <p:nvSpPr>
-          <p:cNvPr id="16" name="TextBox 15"/>
           <p:cNvSpPr txBox="1"/>
           <p:nvPr/>
         </p:nvSpPr>
@@ -43048,7 +42877,7 @@
         <p:spPr>
           <a:xfrm>
             <a:off x="502920" y="310896"/>
-            <a:ext cx="11183112" cy="431291"/>
+            <a:ext cx="11183112" cy="807720"/>
           </a:xfrm>
           <a:prstGeom prst="rect">
             <a:avLst/>
@@ -43076,7 +42905,7 @@
                 </a:solidFill>
                 <a:latin typeface="Arial"/>
               </a:rPr>
-              <a:t>Когда бинарные данные требуют отдельной заботы</a:t>
+              <a:t>Контракт на бинарных данных и граница вводного уровня</a:t>
             </a:r>
           </a:p>
         </p:txBody>
@@ -43089,426 +42918,8 @@
         </p:nvSpPr>
         <p:spPr>
           <a:xfrm>
-            <a:off x="502920" y="981235"/>
-            <a:ext cx="5454396" cy="1548892"/>
-          </a:xfrm>
-          <a:prstGeom prst="roundRect">
-            <a:avLst>
-              <a:gd name="adj" fmla="val 19678"/>
-            </a:avLst>
-          </a:prstGeom>
-          <a:solidFill>
-            <a:srgbClr val="F4F7FA"/>
-          </a:solidFill>
-          <a:ln w="15240">
-            <a:solidFill>
-              <a:srgbClr val="E5EAF0"/>
-            </a:solidFill>
-          </a:ln>
-          <a:effectLst/>
-        </p:spPr>
-        <p:style>
-          <a:lnRef idx="1">
-            <a:schemeClr val="accent1"/>
-          </a:lnRef>
-          <a:fillRef idx="3">
-            <a:schemeClr val="accent1"/>
-          </a:fillRef>
-          <a:effectRef idx="2">
-            <a:schemeClr val="accent1"/>
-          </a:effectRef>
-          <a:fontRef idx="minor">
-            <a:schemeClr val="lt1"/>
-          </a:fontRef>
-        </p:style>
-        <p:txBody>
-          <a:bodyPr rtlCol="0" anchor="ctr"/>
-          <a:lstStyle/>
-          <a:p>
-            <a:pPr algn="ctr"/>
-          </a:p>
-        </p:txBody>
-      </p:sp>
-      <p:sp>
-        <p:nvSpPr>
-          <p:cNvPr id="4" name="TextBox 3"/>
-          <p:cNvSpPr txBox="1"/>
-          <p:nvPr/>
-        </p:nvSpPr>
-        <p:spPr>
-          <a:xfrm>
-            <a:off x="685800" y="1090963"/>
-            <a:ext cx="5088636" cy="274320"/>
-          </a:xfrm>
-          <a:prstGeom prst="rect">
-            <a:avLst/>
-          </a:prstGeom>
-          <a:noFill/>
-        </p:spPr>
-        <p:txBody>
-          <a:bodyPr wrap="square" lIns="0" rIns="0" tIns="0" bIns="0" anchor="t">
-            <a:spAutoFit/>
-          </a:bodyPr>
-          <a:lstStyle/>
-          <a:p>
-            <a:pPr algn="l">
-              <a:lnSpc>
-                <a:spcPts val="1297"/>
-              </a:lnSpc>
-              <a:spcAft>
-                <a:spcPts val="0"/>
-              </a:spcAft>
-            </a:pPr>
-            <a:r>
-              <a:rPr sz="1100" b="1" i="0">
-                <a:solidFill>
-                  <a:srgbClr val="6B7685"/>
-                </a:solidFill>
-                <a:latin typeface="Arial"/>
-              </a:rPr>
-              <a:t>НУЖНО ВСЕГДА</a:t>
-            </a:r>
-          </a:p>
-        </p:txBody>
-      </p:sp>
-      <p:sp>
-        <p:nvSpPr>
-          <p:cNvPr id="5" name="TextBox 4"/>
-          <p:cNvSpPr txBox="1"/>
-          <p:nvPr/>
-        </p:nvSpPr>
-        <p:spPr>
-          <a:xfrm>
-            <a:off x="685800" y="1365283"/>
-            <a:ext cx="5088636" cy="490982"/>
-          </a:xfrm>
-          <a:prstGeom prst="rect">
-            <a:avLst/>
-          </a:prstGeom>
-          <a:noFill/>
-        </p:spPr>
-        <p:txBody>
-          <a:bodyPr wrap="square" lIns="0" rIns="0" tIns="0" bIns="0" anchor="ctr">
-            <a:spAutoFit/>
-          </a:bodyPr>
-          <a:lstStyle/>
-          <a:p>
-            <a:pPr algn="l">
-              <a:lnSpc>
-                <a:spcPts val="1356"/>
-              </a:lnSpc>
-              <a:spcAft>
-                <a:spcPts val="0"/>
-              </a:spcAft>
-            </a:pPr>
-            <a:r>
-              <a:rPr sz="1150" b="0" i="0">
-                <a:solidFill>
-                  <a:srgbClr val="141B2E"/>
-                </a:solidFill>
-                <a:latin typeface="Arial"/>
-              </a:rPr>
-              <a:t>проверка размера и формата перед отправкой любого файла или изображения в цепочке</a:t>
-            </a:r>
-          </a:p>
-        </p:txBody>
-      </p:sp>
-      <p:cxnSp>
-        <p:nvCxnSpPr>
-          <p:cNvPr id="6" name="Connector 5"/>
-          <p:cNvCxnSpPr/>
-          <p:nvPr/>
-        </p:nvCxnSpPr>
-        <p:spPr>
-          <a:xfrm>
-            <a:off x="685800" y="1856265"/>
-            <a:ext cx="5088636" cy="0"/>
-          </a:xfrm>
-          <a:prstGeom prst="line">
-            <a:avLst/>
-          </a:prstGeom>
-          <a:ln w="9525">
-            <a:solidFill>
-              <a:srgbClr val="E5EAF0"/>
-            </a:solidFill>
-          </a:ln>
-        </p:spPr>
-        <p:style>
-          <a:lnRef idx="2">
-            <a:schemeClr val="accent1"/>
-          </a:lnRef>
-          <a:fillRef idx="0">
-            <a:schemeClr val="accent1"/>
-          </a:fillRef>
-          <a:effectRef idx="1">
-            <a:schemeClr val="accent1"/>
-          </a:effectRef>
-          <a:fontRef idx="minor">
-            <a:schemeClr val="tx1"/>
-          </a:fontRef>
-        </p:style>
-      </p:cxnSp>
-      <p:sp>
-        <p:nvSpPr>
-          <p:cNvPr id="7" name="TextBox 6"/>
-          <p:cNvSpPr txBox="1"/>
-          <p:nvPr/>
-        </p:nvSpPr>
-        <p:spPr>
-          <a:xfrm>
-            <a:off x="685800" y="1856265"/>
-            <a:ext cx="5088636" cy="490982"/>
-          </a:xfrm>
-          <a:prstGeom prst="rect">
-            <a:avLst/>
-          </a:prstGeom>
-          <a:noFill/>
-        </p:spPr>
-        <p:txBody>
-          <a:bodyPr wrap="square" lIns="0" rIns="0" tIns="0" bIns="0" anchor="ctr">
-            <a:spAutoFit/>
-          </a:bodyPr>
-          <a:lstStyle/>
-          <a:p>
-            <a:pPr algn="l">
-              <a:lnSpc>
-                <a:spcPts val="1356"/>
-              </a:lnSpc>
-              <a:spcAft>
-                <a:spcPts val="0"/>
-              </a:spcAft>
-            </a:pPr>
-            <a:r>
-              <a:rPr sz="1150" b="0" i="0">
-                <a:solidFill>
-                  <a:srgbClr val="141B2E"/>
-                </a:solidFill>
-                <a:latin typeface="Arial"/>
-              </a:rPr>
-              <a:t>знание лимита канала доставки, а не только лимита самого оркестратора</a:t>
-            </a:r>
-          </a:p>
-        </p:txBody>
-      </p:sp>
-      <p:sp>
-        <p:nvSpPr>
-          <p:cNvPr id="8" name="Rounded Rectangle 7"/>
-          <p:cNvSpPr/>
-          <p:nvPr/>
-        </p:nvSpPr>
-        <p:spPr>
-          <a:xfrm>
-            <a:off x="6231636" y="981235"/>
-            <a:ext cx="5454396" cy="1548892"/>
-          </a:xfrm>
-          <a:prstGeom prst="roundRect">
-            <a:avLst>
-              <a:gd name="adj" fmla="val 19678"/>
-            </a:avLst>
-          </a:prstGeom>
-          <a:solidFill>
-            <a:srgbClr val="F4F7FA"/>
-          </a:solidFill>
-          <a:ln w="15240">
-            <a:solidFill>
-              <a:srgbClr val="E5EAF0"/>
-            </a:solidFill>
-          </a:ln>
-          <a:effectLst/>
-        </p:spPr>
-        <p:style>
-          <a:lnRef idx="1">
-            <a:schemeClr val="accent1"/>
-          </a:lnRef>
-          <a:fillRef idx="3">
-            <a:schemeClr val="accent1"/>
-          </a:fillRef>
-          <a:effectRef idx="2">
-            <a:schemeClr val="accent1"/>
-          </a:effectRef>
-          <a:fontRef idx="minor">
-            <a:schemeClr val="lt1"/>
-          </a:fontRef>
-        </p:style>
-        <p:txBody>
-          <a:bodyPr rtlCol="0" anchor="ctr"/>
-          <a:lstStyle/>
-          <a:p>
-            <a:pPr algn="ctr"/>
-          </a:p>
-        </p:txBody>
-      </p:sp>
-      <p:sp>
-        <p:nvSpPr>
-          <p:cNvPr id="9" name="TextBox 8"/>
-          <p:cNvSpPr txBox="1"/>
-          <p:nvPr/>
-        </p:nvSpPr>
-        <p:spPr>
-          <a:xfrm>
-            <a:off x="6414516" y="1090963"/>
-            <a:ext cx="5088636" cy="274320"/>
-          </a:xfrm>
-          <a:prstGeom prst="rect">
-            <a:avLst/>
-          </a:prstGeom>
-          <a:noFill/>
-        </p:spPr>
-        <p:txBody>
-          <a:bodyPr wrap="square" lIns="0" rIns="0" tIns="0" bIns="0" anchor="t">
-            <a:spAutoFit/>
-          </a:bodyPr>
-          <a:lstStyle/>
-          <a:p>
-            <a:pPr algn="l">
-              <a:lnSpc>
-                <a:spcPts val="1297"/>
-              </a:lnSpc>
-              <a:spcAft>
-                <a:spcPts val="0"/>
-              </a:spcAft>
-            </a:pPr>
-            <a:r>
-              <a:rPr sz="1100" b="1" i="0">
-                <a:solidFill>
-                  <a:srgbClr val="8A6200"/>
-                </a:solidFill>
-                <a:latin typeface="Arial"/>
-              </a:rPr>
-              <a:t>НЕ ТРЕБУЕТ ЭТОГО ЗАНЯТИЯ</a:t>
-            </a:r>
-          </a:p>
-        </p:txBody>
-      </p:sp>
-      <p:sp>
-        <p:nvSpPr>
-          <p:cNvPr id="10" name="TextBox 9"/>
-          <p:cNvSpPr txBox="1"/>
-          <p:nvPr/>
-        </p:nvSpPr>
-        <p:spPr>
-          <a:xfrm>
-            <a:off x="6414516" y="1365283"/>
-            <a:ext cx="5088636" cy="318642"/>
-          </a:xfrm>
-          <a:prstGeom prst="rect">
-            <a:avLst/>
-          </a:prstGeom>
-          <a:noFill/>
-        </p:spPr>
-        <p:txBody>
-          <a:bodyPr wrap="square" lIns="0" rIns="0" tIns="0" bIns="0" anchor="ctr">
-            <a:spAutoFit/>
-          </a:bodyPr>
-          <a:lstStyle/>
-          <a:p>
-            <a:pPr algn="l">
-              <a:lnSpc>
-                <a:spcPts val="1356"/>
-              </a:lnSpc>
-              <a:spcAft>
-                <a:spcPts val="0"/>
-              </a:spcAft>
-            </a:pPr>
-            <a:r>
-              <a:rPr sz="1150" b="0" i="0">
-                <a:solidFill>
-                  <a:srgbClr val="141B2E"/>
-                </a:solidFill>
-                <a:latin typeface="Arial"/>
-              </a:rPr>
-              <a:t>хранение множества файлов</a:t>
-            </a:r>
-          </a:p>
-        </p:txBody>
-      </p:sp>
-      <p:cxnSp>
-        <p:nvCxnSpPr>
-          <p:cNvPr id="11" name="Connector 10"/>
-          <p:cNvCxnSpPr/>
-          <p:nvPr/>
-        </p:nvCxnSpPr>
-        <p:spPr>
-          <a:xfrm>
-            <a:off x="6414516" y="1683926"/>
-            <a:ext cx="5088636" cy="0"/>
-          </a:xfrm>
-          <a:prstGeom prst="line">
-            <a:avLst/>
-          </a:prstGeom>
-          <a:ln w="9525">
-            <a:solidFill>
-              <a:srgbClr val="E5EAF0"/>
-            </a:solidFill>
-          </a:ln>
-        </p:spPr>
-        <p:style>
-          <a:lnRef idx="2">
-            <a:schemeClr val="accent1"/>
-          </a:lnRef>
-          <a:fillRef idx="0">
-            <a:schemeClr val="accent1"/>
-          </a:fillRef>
-          <a:effectRef idx="1">
-            <a:schemeClr val="accent1"/>
-          </a:effectRef>
-          <a:fontRef idx="minor">
-            <a:schemeClr val="tx1"/>
-          </a:fontRef>
-        </p:style>
-      </p:cxnSp>
-      <p:sp>
-        <p:nvSpPr>
-          <p:cNvPr id="12" name="TextBox 11"/>
-          <p:cNvSpPr txBox="1"/>
-          <p:nvPr/>
-        </p:nvSpPr>
-        <p:spPr>
-          <a:xfrm>
-            <a:off x="6414516" y="1683926"/>
-            <a:ext cx="5088636" cy="318642"/>
-          </a:xfrm>
-          <a:prstGeom prst="rect">
-            <a:avLst/>
-          </a:prstGeom>
-          <a:noFill/>
-        </p:spPr>
-        <p:txBody>
-          <a:bodyPr wrap="square" lIns="0" rIns="0" tIns="0" bIns="0" anchor="ctr">
-            <a:spAutoFit/>
-          </a:bodyPr>
-          <a:lstStyle/>
-          <a:p>
-            <a:pPr algn="l">
-              <a:lnSpc>
-                <a:spcPts val="1356"/>
-              </a:lnSpc>
-              <a:spcAft>
-                <a:spcPts val="0"/>
-              </a:spcAft>
-            </a:pPr>
-            <a:r>
-              <a:rPr sz="1150" b="0" i="0">
-                <a:solidFill>
-                  <a:srgbClr val="141B2E"/>
-                </a:solidFill>
-                <a:latin typeface="Arial"/>
-              </a:rPr>
-              <a:t>поиск среди вложений и обработка их содержимого моделью</a:t>
-            </a:r>
-          </a:p>
-        </p:txBody>
-      </p:sp>
-      <p:sp>
-        <p:nvSpPr>
-          <p:cNvPr id="13" name="Rounded Rectangle 12"/>
-          <p:cNvSpPr/>
-          <p:nvPr/>
-        </p:nvSpPr>
-        <p:spPr>
-          <a:xfrm>
-            <a:off x="502920" y="2789419"/>
-            <a:ext cx="82296" cy="982980"/>
+            <a:off x="502920" y="1746478"/>
+            <a:ext cx="82296" cy="1219200"/>
           </a:xfrm>
           <a:prstGeom prst="roundRect">
             <a:avLst>
@@ -43547,14 +42958,14 @@
       </p:sp>
       <p:sp>
         <p:nvSpPr>
-          <p:cNvPr id="14" name="TextBox 13"/>
-          <p:cNvSpPr txBox="1"/>
-          <p:nvPr/>
-        </p:nvSpPr>
-        <p:spPr>
-          <a:xfrm>
-            <a:off x="859536" y="2917435"/>
-            <a:ext cx="10643616" cy="726948"/>
+          <p:cNvPr id="4" name="TextBox 3"/>
+          <p:cNvSpPr txBox="1"/>
+          <p:nvPr/>
+        </p:nvSpPr>
+        <p:spPr>
+          <a:xfrm>
+            <a:off x="859536" y="1874494"/>
+            <a:ext cx="10643616" cy="963168"/>
           </a:xfrm>
           <a:prstGeom prst="rect">
             <a:avLst/>
@@ -43582,7 +42993,7 @@
                 </a:solidFill>
                 <a:latin typeface="Arial"/>
               </a:rPr>
-              <a:t>Четвёртая строка оси закрыта.</a:t>
+              <a:t>Бинарные данные в n8n — отдельная модель данных, не просто ещё одно значение поля.</a:t>
             </a:r>
             <a:r>
               <a:rPr sz="1500" b="1" i="0">
@@ -43591,33 +43002,33 @@
                 </a:solidFill>
                 <a:latin typeface="Arial"/>
               </a:rPr>
-              <a:t> Выглядело надёжным: картинка собралась и ушла в Telegram. Чем оказалось: до тех пор, пока помещается в лимит — большой файл уходит не полностью или не уходит вовсе, а прогон при этом остаётся зелёным.</a:t>
-            </a:r>
-          </a:p>
-        </p:txBody>
-      </p:sp>
-      <p:sp>
-        <p:nvSpPr>
-          <p:cNvPr id="15" name="Rounded Rectangle 14"/>
+              <a:t> Контракт между шагами, который в «Уведомлениях» рвался на тексте (узел не падал, результат тихо не тот), здесь рвётся на формате и размере — по той же причине: формально успешный прогон ничего не говорит о том, дошёл ли результат до получателя.</a:t>
+            </a:r>
+          </a:p>
+        </p:txBody>
+      </p:sp>
+      <p:sp>
+        <p:nvSpPr>
+          <p:cNvPr id="5" name="Rounded Rectangle 4"/>
           <p:cNvSpPr/>
           <p:nvPr/>
         </p:nvSpPr>
         <p:spPr>
           <a:xfrm>
-            <a:off x="502920" y="4031691"/>
-            <a:ext cx="11183112" cy="2239137"/>
+            <a:off x="502920" y="3633190"/>
+            <a:ext cx="11183112" cy="2054415"/>
           </a:xfrm>
           <a:prstGeom prst="roundRect">
             <a:avLst>
-              <a:gd name="adj" fmla="val 13612"/>
+              <a:gd name="adj" fmla="val 14836"/>
             </a:avLst>
           </a:prstGeom>
           <a:solidFill>
-            <a:srgbClr val="F4F7FA"/>
+            <a:srgbClr val="FFFFFF"/>
           </a:solidFill>
-          <a:ln w="15240">
+          <a:ln w="17780">
             <a:solidFill>
-              <a:srgbClr val="E5EAF0"/>
+              <a:srgbClr val="1C7293"/>
             </a:solidFill>
           </a:ln>
           <a:effectLst/>
@@ -43646,286 +43057,413 @@
       </p:sp>
       <p:sp>
         <p:nvSpPr>
+          <p:cNvPr id="6" name="TextBox 5"/>
+          <p:cNvSpPr txBox="1"/>
+          <p:nvPr/>
+        </p:nvSpPr>
+        <p:spPr>
+          <a:xfrm>
+            <a:off x="685800" y="3816070"/>
+            <a:ext cx="5131703" cy="282067"/>
+          </a:xfrm>
+          <a:prstGeom prst="rect">
+            <a:avLst/>
+          </a:prstGeom>
+          <a:noFill/>
+        </p:spPr>
+        <p:txBody>
+          <a:bodyPr wrap="square" lIns="0" rIns="0" tIns="0" bIns="0" anchor="t">
+            <a:spAutoFit/>
+          </a:bodyPr>
+          <a:lstStyle/>
+          <a:p>
+            <a:pPr algn="l">
+              <a:lnSpc>
+                <a:spcPts val="1265"/>
+              </a:lnSpc>
+              <a:spcAft>
+                <a:spcPts val="0"/>
+              </a:spcAft>
+            </a:pPr>
+            <a:r>
+              <a:rPr sz="1150" b="1" i="0">
+                <a:solidFill>
+                  <a:srgbClr val="6B7685"/>
+                </a:solidFill>
+                <a:latin typeface="Arial"/>
+              </a:rPr>
+              <a:t>НА ЭТОМ УРОВНЕ ДОСТАТОЧНО</a:t>
+            </a:r>
+          </a:p>
+        </p:txBody>
+      </p:sp>
+      <p:sp>
+        <p:nvSpPr>
+          <p:cNvPr id="7" name="TextBox 6"/>
+          <p:cNvSpPr txBox="1"/>
+          <p:nvPr/>
+        </p:nvSpPr>
+        <p:spPr>
+          <a:xfrm>
+            <a:off x="5963807" y="3816070"/>
+            <a:ext cx="5393040" cy="282067"/>
+          </a:xfrm>
+          <a:prstGeom prst="rect">
+            <a:avLst/>
+          </a:prstGeom>
+          <a:noFill/>
+        </p:spPr>
+        <p:txBody>
+          <a:bodyPr wrap="square" lIns="0" rIns="0" tIns="0" bIns="0" anchor="t">
+            <a:spAutoFit/>
+          </a:bodyPr>
+          <a:lstStyle/>
+          <a:p>
+            <a:pPr algn="l">
+              <a:lnSpc>
+                <a:spcPts val="1265"/>
+              </a:lnSpc>
+              <a:spcAft>
+                <a:spcPts val="0"/>
+              </a:spcAft>
+            </a:pPr>
+            <a:r>
+              <a:rPr sz="1150" b="1" i="0">
+                <a:solidFill>
+                  <a:srgbClr val="6B7685"/>
+                </a:solidFill>
+                <a:latin typeface="Arial"/>
+              </a:rPr>
+              <a:t>СЛЕДУЮЩИЙ УРОВЕНЬ — СЕМИНАР 10</a:t>
+            </a:r>
+          </a:p>
+        </p:txBody>
+      </p:sp>
+      <p:sp>
+        <p:nvSpPr>
+          <p:cNvPr id="8" name="TextBox 7"/>
+          <p:cNvSpPr txBox="1"/>
+          <p:nvPr/>
+        </p:nvSpPr>
+        <p:spPr>
+          <a:xfrm>
+            <a:off x="685800" y="4098137"/>
+            <a:ext cx="5131703" cy="347154"/>
+          </a:xfrm>
+          <a:prstGeom prst="rect">
+            <a:avLst/>
+          </a:prstGeom>
+          <a:noFill/>
+        </p:spPr>
+        <p:txBody>
+          <a:bodyPr wrap="square" lIns="0" rIns="0" tIns="0" bIns="0" anchor="ctr">
+            <a:spAutoFit/>
+          </a:bodyPr>
+          <a:lstStyle/>
+          <a:p>
+            <a:pPr algn="l">
+              <a:lnSpc>
+                <a:spcPts val="1437"/>
+              </a:lnSpc>
+              <a:spcAft>
+                <a:spcPts val="0"/>
+              </a:spcAft>
+            </a:pPr>
+            <a:r>
+              <a:rPr sz="1250" b="0" i="0">
+                <a:solidFill>
+                  <a:srgbClr val="141B2E"/>
+                </a:solidFill>
+                <a:latin typeface="Arial"/>
+              </a:rPr>
+              <a:t>один файл, один известный лимит, одна отправка</a:t>
+            </a:r>
+          </a:p>
+        </p:txBody>
+      </p:sp>
+      <p:sp>
+        <p:nvSpPr>
+          <p:cNvPr id="9" name="TextBox 8"/>
+          <p:cNvSpPr txBox="1"/>
+          <p:nvPr/>
+        </p:nvSpPr>
+        <p:spPr>
+          <a:xfrm>
+            <a:off x="5963807" y="4098137"/>
+            <a:ext cx="5393040" cy="347154"/>
+          </a:xfrm>
+          <a:prstGeom prst="rect">
+            <a:avLst/>
+          </a:prstGeom>
+          <a:noFill/>
+        </p:spPr>
+        <p:txBody>
+          <a:bodyPr wrap="square" lIns="0" rIns="0" tIns="0" bIns="0" anchor="ctr">
+            <a:spAutoFit/>
+          </a:bodyPr>
+          <a:lstStyle/>
+          <a:p>
+            <a:pPr algn="l">
+              <a:lnSpc>
+                <a:spcPts val="1437"/>
+              </a:lnSpc>
+              <a:spcAft>
+                <a:spcPts val="0"/>
+              </a:spcAft>
+            </a:pPr>
+            <a:r>
+              <a:rPr sz="1250" b="0" i="0">
+                <a:solidFill>
+                  <a:srgbClr val="141B2E"/>
+                </a:solidFill>
+                <a:latin typeface="Arial"/>
+              </a:rPr>
+              <a:t>хранение и поиск среди множества файлов</a:t>
+            </a:r>
+          </a:p>
+        </p:txBody>
+      </p:sp>
+      <p:cxnSp>
+        <p:nvCxnSpPr>
+          <p:cNvPr id="10" name="Connector 9"/>
+          <p:cNvCxnSpPr/>
+          <p:nvPr/>
+        </p:nvCxnSpPr>
+        <p:spPr>
+          <a:xfrm>
+            <a:off x="685800" y="4445292"/>
+            <a:ext cx="10817352" cy="0"/>
+          </a:xfrm>
+          <a:prstGeom prst="line">
+            <a:avLst/>
+          </a:prstGeom>
+          <a:ln w="9525">
+            <a:solidFill>
+              <a:srgbClr val="E5EAF0"/>
+            </a:solidFill>
+          </a:ln>
+        </p:spPr>
+        <p:style>
+          <a:lnRef idx="2">
+            <a:schemeClr val="accent1"/>
+          </a:lnRef>
+          <a:fillRef idx="0">
+            <a:schemeClr val="accent1"/>
+          </a:fillRef>
+          <a:effectRef idx="1">
+            <a:schemeClr val="accent1"/>
+          </a:effectRef>
+          <a:fontRef idx="minor">
+            <a:schemeClr val="tx1"/>
+          </a:fontRef>
+        </p:style>
+      </p:cxnSp>
+      <p:sp>
+        <p:nvSpPr>
+          <p:cNvPr id="11" name="TextBox 10"/>
+          <p:cNvSpPr txBox="1"/>
+          <p:nvPr/>
+        </p:nvSpPr>
+        <p:spPr>
+          <a:xfrm>
+            <a:off x="685800" y="4445292"/>
+            <a:ext cx="5131703" cy="529717"/>
+          </a:xfrm>
+          <a:prstGeom prst="rect">
+            <a:avLst/>
+          </a:prstGeom>
+          <a:noFill/>
+        </p:spPr>
+        <p:txBody>
+          <a:bodyPr wrap="square" lIns="0" rIns="0" tIns="0" bIns="0" anchor="ctr">
+            <a:spAutoFit/>
+          </a:bodyPr>
+          <a:lstStyle/>
+          <a:p>
+            <a:pPr algn="l">
+              <a:lnSpc>
+                <a:spcPts val="1437"/>
+              </a:lnSpc>
+              <a:spcAft>
+                <a:spcPts val="0"/>
+              </a:spcAft>
+            </a:pPr>
+            <a:r>
+              <a:rPr sz="1250" b="0" i="0">
+                <a:solidFill>
+                  <a:srgbClr val="141B2E"/>
+                </a:solidFill>
+                <a:latin typeface="Arial"/>
+              </a:rPr>
+              <a:t>проверка размера и формата перед отправкой</a:t>
+            </a:r>
+          </a:p>
+        </p:txBody>
+      </p:sp>
+      <p:sp>
+        <p:nvSpPr>
+          <p:cNvPr id="12" name="TextBox 11"/>
+          <p:cNvSpPr txBox="1"/>
+          <p:nvPr/>
+        </p:nvSpPr>
+        <p:spPr>
+          <a:xfrm>
+            <a:off x="5963807" y="4445292"/>
+            <a:ext cx="5393040" cy="529717"/>
+          </a:xfrm>
+          <a:prstGeom prst="rect">
+            <a:avLst/>
+          </a:prstGeom>
+          <a:noFill/>
+        </p:spPr>
+        <p:txBody>
+          <a:bodyPr wrap="square" lIns="0" rIns="0" tIns="0" bIns="0" anchor="ctr">
+            <a:spAutoFit/>
+          </a:bodyPr>
+          <a:lstStyle/>
+          <a:p>
+            <a:pPr algn="l">
+              <a:lnSpc>
+                <a:spcPts val="1437"/>
+              </a:lnSpc>
+              <a:spcAft>
+                <a:spcPts val="0"/>
+              </a:spcAft>
+            </a:pPr>
+            <a:r>
+              <a:rPr sz="1250" b="0" i="0">
+                <a:solidFill>
+                  <a:srgbClr val="141B2E"/>
+                </a:solidFill>
+                <a:latin typeface="Arial"/>
+              </a:rPr>
+              <a:t>обработка содержимого файла моделью (поиск по смыслу изображений)</a:t>
+            </a:r>
+          </a:p>
+        </p:txBody>
+      </p:sp>
+      <p:cxnSp>
+        <p:nvCxnSpPr>
+          <p:cNvPr id="13" name="Connector 12"/>
+          <p:cNvCxnSpPr/>
+          <p:nvPr/>
+        </p:nvCxnSpPr>
+        <p:spPr>
+          <a:xfrm>
+            <a:off x="685800" y="4975009"/>
+            <a:ext cx="10817352" cy="0"/>
+          </a:xfrm>
+          <a:prstGeom prst="line">
+            <a:avLst/>
+          </a:prstGeom>
+          <a:ln w="9525">
+            <a:solidFill>
+              <a:srgbClr val="E5EAF0"/>
+            </a:solidFill>
+          </a:ln>
+        </p:spPr>
+        <p:style>
+          <a:lnRef idx="2">
+            <a:schemeClr val="accent1"/>
+          </a:lnRef>
+          <a:fillRef idx="0">
+            <a:schemeClr val="accent1"/>
+          </a:fillRef>
+          <a:effectRef idx="1">
+            <a:schemeClr val="accent1"/>
+          </a:effectRef>
+          <a:fontRef idx="minor">
+            <a:schemeClr val="tx1"/>
+          </a:fontRef>
+        </p:style>
+      </p:cxnSp>
+      <p:sp>
+        <p:nvSpPr>
+          <p:cNvPr id="14" name="TextBox 13"/>
+          <p:cNvSpPr txBox="1"/>
+          <p:nvPr/>
+        </p:nvSpPr>
+        <p:spPr>
+          <a:xfrm>
+            <a:off x="685800" y="4975009"/>
+            <a:ext cx="5131703" cy="529717"/>
+          </a:xfrm>
+          <a:prstGeom prst="rect">
+            <a:avLst/>
+          </a:prstGeom>
+          <a:noFill/>
+        </p:spPr>
+        <p:txBody>
+          <a:bodyPr wrap="square" lIns="0" rIns="0" tIns="0" bIns="0" anchor="ctr">
+            <a:spAutoFit/>
+          </a:bodyPr>
+          <a:lstStyle/>
+          <a:p>
+            <a:pPr algn="l">
+              <a:lnSpc>
+                <a:spcPts val="1437"/>
+              </a:lnSpc>
+              <a:spcAft>
+                <a:spcPts val="0"/>
+              </a:spcAft>
+            </a:pPr>
+            <a:r>
+              <a:rPr sz="1250" b="0" i="0">
+                <a:solidFill>
+                  <a:srgbClr val="141B2E"/>
+                </a:solidFill>
+                <a:latin typeface="Arial"/>
+              </a:rPr>
+              <a:t>явное условие в цепочке на каждый шаг с бинарными данными</a:t>
+            </a:r>
+          </a:p>
+        </p:txBody>
+      </p:sp>
+      <p:sp>
+        <p:nvSpPr>
+          <p:cNvPr id="15" name="TextBox 14"/>
+          <p:cNvSpPr txBox="1"/>
+          <p:nvPr/>
+        </p:nvSpPr>
+        <p:spPr>
+          <a:xfrm>
+            <a:off x="5963807" y="4975009"/>
+            <a:ext cx="5393040" cy="529717"/>
+          </a:xfrm>
+          <a:prstGeom prst="rect">
+            <a:avLst/>
+          </a:prstGeom>
+          <a:noFill/>
+        </p:spPr>
+        <p:txBody>
+          <a:bodyPr wrap="square" lIns="0" rIns="0" tIns="0" bIns="0" anchor="ctr">
+            <a:spAutoFit/>
+          </a:bodyPr>
+          <a:lstStyle/>
+          <a:p>
+            <a:pPr algn="l">
+              <a:lnSpc>
+                <a:spcPts val="1437"/>
+              </a:lnSpc>
+              <a:spcAft>
+                <a:spcPts val="0"/>
+              </a:spcAft>
+            </a:pPr>
+            <a:r>
+              <a:rPr sz="1250" b="0" i="0">
+                <a:solidFill>
+                  <a:srgbClr val="141B2E"/>
+                </a:solidFill>
+                <a:latin typeface="Arial"/>
+              </a:rPr>
+              <a:t>векторное хранилище и индексация вложений</a:t>
+            </a:r>
+          </a:p>
+        </p:txBody>
+      </p:sp>
+      <p:sp>
+        <p:nvSpPr>
           <p:cNvPr id="16" name="TextBox 15"/>
-          <p:cNvSpPr txBox="1"/>
-          <p:nvPr/>
-        </p:nvSpPr>
-        <p:spPr>
-          <a:xfrm>
-            <a:off x="722376" y="4251147"/>
-            <a:ext cx="329184" cy="532638"/>
-          </a:xfrm>
-          <a:prstGeom prst="rect">
-            <a:avLst/>
-          </a:prstGeom>
-          <a:noFill/>
-        </p:spPr>
-        <p:txBody>
-          <a:bodyPr wrap="square" lIns="0" rIns="0" tIns="0" bIns="0" anchor="ctr">
-            <a:spAutoFit/>
-          </a:bodyPr>
-          <a:lstStyle/>
-          <a:p>
-            <a:pPr algn="l">
-              <a:lnSpc>
-                <a:spcPts val="1829"/>
-              </a:lnSpc>
-              <a:spcAft>
-                <a:spcPts val="0"/>
-              </a:spcAft>
-            </a:pPr>
-            <a:r>
-              <a:rPr sz="1550" b="1" i="0">
-                <a:solidFill>
-                  <a:srgbClr val="028090"/>
-                </a:solidFill>
-                <a:latin typeface="Arial"/>
-              </a:rPr>
-              <a:t>1</a:t>
-            </a:r>
-          </a:p>
-        </p:txBody>
-      </p:sp>
-      <p:sp>
-        <p:nvSpPr>
-          <p:cNvPr id="17" name="TextBox 16"/>
-          <p:cNvSpPr txBox="1"/>
-          <p:nvPr/>
-        </p:nvSpPr>
-        <p:spPr>
-          <a:xfrm>
-            <a:off x="1106424" y="4251147"/>
-            <a:ext cx="10360152" cy="532638"/>
-          </a:xfrm>
-          <a:prstGeom prst="rect">
-            <a:avLst/>
-          </a:prstGeom>
-          <a:noFill/>
-        </p:spPr>
-        <p:txBody>
-          <a:bodyPr wrap="square" lIns="0" rIns="0" tIns="0" bIns="0" anchor="ctr">
-            <a:spAutoFit/>
-          </a:bodyPr>
-          <a:lstStyle/>
-          <a:p>
-            <a:pPr algn="l">
-              <a:lnSpc>
-                <a:spcPts val="1593"/>
-              </a:lnSpc>
-              <a:spcAft>
-                <a:spcPts val="0"/>
-              </a:spcAft>
-            </a:pPr>
-            <a:r>
-              <a:rPr sz="1350" b="1" i="0">
-                <a:solidFill>
-                  <a:srgbClr val="141B2E"/>
-                </a:solidFill>
-                <a:latin typeface="Arial"/>
-              </a:rPr>
-              <a:t>Собственный лимит n8n по умолчанию — 16 МБ</a:t>
-            </a:r>
-            <a:r>
-              <a:rPr sz="1350" b="0" i="0">
-                <a:solidFill>
-                  <a:srgbClr val="141B2E"/>
-                </a:solidFill>
-                <a:latin typeface="Arial"/>
-              </a:rPr>
-              <a:t> на бинарные данные. Для фотографии с текстом этого обычно достаточно, но скан высокого разрешения или фото прямо с телефона — не всегда.</a:t>
-            </a:r>
-          </a:p>
-        </p:txBody>
-      </p:sp>
-      <p:sp>
-        <p:nvSpPr>
-          <p:cNvPr id="18" name="TextBox 17"/>
-          <p:cNvSpPr txBox="1"/>
-          <p:nvPr/>
-        </p:nvSpPr>
-        <p:spPr>
-          <a:xfrm>
-            <a:off x="722376" y="4783785"/>
-            <a:ext cx="329184" cy="734949"/>
-          </a:xfrm>
-          <a:prstGeom prst="rect">
-            <a:avLst/>
-          </a:prstGeom>
-          <a:noFill/>
-        </p:spPr>
-        <p:txBody>
-          <a:bodyPr wrap="square" lIns="0" rIns="0" tIns="0" bIns="0" anchor="ctr">
-            <a:spAutoFit/>
-          </a:bodyPr>
-          <a:lstStyle/>
-          <a:p>
-            <a:pPr algn="l">
-              <a:lnSpc>
-                <a:spcPts val="1829"/>
-              </a:lnSpc>
-              <a:spcAft>
-                <a:spcPts val="0"/>
-              </a:spcAft>
-            </a:pPr>
-            <a:r>
-              <a:rPr sz="1550" b="1" i="0">
-                <a:solidFill>
-                  <a:srgbClr val="028090"/>
-                </a:solidFill>
-                <a:latin typeface="Arial"/>
-              </a:rPr>
-              <a:t>2</a:t>
-            </a:r>
-          </a:p>
-        </p:txBody>
-      </p:sp>
-      <p:sp>
-        <p:nvSpPr>
-          <p:cNvPr id="19" name="TextBox 18"/>
-          <p:cNvSpPr txBox="1"/>
-          <p:nvPr/>
-        </p:nvSpPr>
-        <p:spPr>
-          <a:xfrm>
-            <a:off x="1106424" y="4783785"/>
-            <a:ext cx="10360152" cy="734949"/>
-          </a:xfrm>
-          <a:prstGeom prst="rect">
-            <a:avLst/>
-          </a:prstGeom>
-          <a:noFill/>
-        </p:spPr>
-        <p:txBody>
-          <a:bodyPr wrap="square" lIns="0" rIns="0" tIns="0" bIns="0" anchor="ctr">
-            <a:spAutoFit/>
-          </a:bodyPr>
-          <a:lstStyle/>
-          <a:p>
-            <a:pPr algn="l">
-              <a:lnSpc>
-                <a:spcPts val="1593"/>
-              </a:lnSpc>
-              <a:spcAft>
-                <a:spcPts val="0"/>
-              </a:spcAft>
-            </a:pPr>
-            <a:r>
-              <a:rPr sz="1350" b="1" i="0">
-                <a:solidFill>
-                  <a:srgbClr val="141B2E"/>
-                </a:solidFill>
-                <a:latin typeface="Arial"/>
-              </a:rPr>
-              <a:t>Лимиты Telegram — отдельный, более узкий потолок</a:t>
-            </a:r>
-            <a:r>
-              <a:rPr sz="1350" b="0" i="0">
-                <a:solidFill>
-                  <a:srgbClr val="141B2E"/>
-                </a:solidFill>
-                <a:latin typeface="Arial"/>
-              </a:rPr>
-              <a:t>, и они разные для фото и для документа. То, что прошло мимо лимита n8n, может всё равно не пройти мимо лимита канала доставки — два независимых порога, не один.</a:t>
-            </a:r>
-          </a:p>
-        </p:txBody>
-      </p:sp>
-      <p:sp>
-        <p:nvSpPr>
-          <p:cNvPr id="20" name="TextBox 19"/>
-          <p:cNvSpPr txBox="1"/>
-          <p:nvPr/>
-        </p:nvSpPr>
-        <p:spPr>
-          <a:xfrm>
-            <a:off x="722376" y="5518734"/>
-            <a:ext cx="329184" cy="532638"/>
-          </a:xfrm>
-          <a:prstGeom prst="rect">
-            <a:avLst/>
-          </a:prstGeom>
-          <a:noFill/>
-        </p:spPr>
-        <p:txBody>
-          <a:bodyPr wrap="square" lIns="0" rIns="0" tIns="0" bIns="0" anchor="ctr">
-            <a:spAutoFit/>
-          </a:bodyPr>
-          <a:lstStyle/>
-          <a:p>
-            <a:pPr algn="l">
-              <a:lnSpc>
-                <a:spcPts val="1829"/>
-              </a:lnSpc>
-              <a:spcAft>
-                <a:spcPts val="0"/>
-              </a:spcAft>
-            </a:pPr>
-            <a:r>
-              <a:rPr sz="1550" b="1" i="0">
-                <a:solidFill>
-                  <a:srgbClr val="028090"/>
-                </a:solidFill>
-                <a:latin typeface="Arial"/>
-              </a:rPr>
-              <a:t>3</a:t>
-            </a:r>
-          </a:p>
-        </p:txBody>
-      </p:sp>
-      <p:sp>
-        <p:nvSpPr>
-          <p:cNvPr id="21" name="TextBox 20"/>
-          <p:cNvSpPr txBox="1"/>
-          <p:nvPr/>
-        </p:nvSpPr>
-        <p:spPr>
-          <a:xfrm>
-            <a:off x="1106424" y="5518734"/>
-            <a:ext cx="10360152" cy="532638"/>
-          </a:xfrm>
-          <a:prstGeom prst="rect">
-            <a:avLst/>
-          </a:prstGeom>
-          <a:noFill/>
-        </p:spPr>
-        <p:txBody>
-          <a:bodyPr wrap="square" lIns="0" rIns="0" tIns="0" bIns="0" anchor="ctr">
-            <a:spAutoFit/>
-          </a:bodyPr>
-          <a:lstStyle/>
-          <a:p>
-            <a:pPr algn="l">
-              <a:lnSpc>
-                <a:spcPts val="1593"/>
-              </a:lnSpc>
-              <a:spcAft>
-                <a:spcPts val="0"/>
-              </a:spcAft>
-            </a:pPr>
-            <a:r>
-              <a:rPr sz="1350" b="1" i="0">
-                <a:solidFill>
-                  <a:srgbClr val="141B2E"/>
-                </a:solidFill>
-                <a:latin typeface="Arial"/>
-              </a:rPr>
-              <a:t>Ручной прогон с бинарными данными потребляет заметно больше памяти</a:t>
-            </a:r>
-            <a:r>
-              <a:rPr sz="1350" b="0" i="0">
-                <a:solidFill>
-                  <a:srgbClr val="141B2E"/>
-                </a:solidFill>
-                <a:latin typeface="Arial"/>
-              </a:rPr>
-              <a:t>, чем автоматический, — разница заметнее, чем на текстовых полях, и стоит иметь это в уме при отладке такого узла вживую.</a:t>
-            </a:r>
-          </a:p>
-        </p:txBody>
-      </p:sp>
-      <p:sp>
-        <p:nvSpPr>
-          <p:cNvPr id="22" name="TextBox 21"/>
           <p:cNvSpPr txBox="1"/>
           <p:nvPr/>
         </p:nvSpPr>
@@ -44028,7 +43566,7 @@
                 </a:solidFill>
                 <a:latin typeface="Arial"/>
               </a:rPr>
-              <a:t>Четыре строки оси: что оказалось</a:t>
+              <a:t>Когда бинарные данные требуют отдельной заботы</a:t>
             </a:r>
           </a:p>
         </p:txBody>
@@ -44041,20 +43579,20 @@
         </p:nvSpPr>
         <p:spPr>
           <a:xfrm>
-            <a:off x="502920" y="975199"/>
-            <a:ext cx="11183112" cy="3314382"/>
+            <a:off x="502920" y="981235"/>
+            <a:ext cx="5454396" cy="1548892"/>
           </a:xfrm>
           <a:prstGeom prst="roundRect">
             <a:avLst>
-              <a:gd name="adj" fmla="val 9196"/>
+              <a:gd name="adj" fmla="val 19678"/>
             </a:avLst>
           </a:prstGeom>
           <a:solidFill>
-            <a:srgbClr val="FFFFFF"/>
+            <a:srgbClr val="F4F7FA"/>
           </a:solidFill>
-          <a:ln w="17780">
+          <a:ln w="15240">
             <a:solidFill>
-              <a:srgbClr val="1C7293"/>
+              <a:srgbClr val="E5EAF0"/>
             </a:solidFill>
           </a:ln>
           <a:effectLst/>
@@ -44089,8 +43627,8 @@
         </p:nvSpPr>
         <p:spPr>
           <a:xfrm>
-            <a:off x="685800" y="1158079"/>
-            <a:ext cx="2522510" cy="282067"/>
+            <a:off x="685800" y="1090963"/>
+            <a:ext cx="5088636" cy="274320"/>
           </a:xfrm>
           <a:prstGeom prst="rect">
             <a:avLst/>
@@ -44105,20 +43643,20 @@
           <a:p>
             <a:pPr algn="l">
               <a:lnSpc>
-                <a:spcPts val="1265"/>
+                <a:spcPts val="1297"/>
               </a:lnSpc>
               <a:spcAft>
                 <a:spcPts val="0"/>
               </a:spcAft>
             </a:pPr>
             <a:r>
-              <a:rPr sz="1150" b="1" i="0">
+              <a:rPr sz="1100" b="1" i="0">
                 <a:solidFill>
                   <a:srgbClr val="6B7685"/>
                 </a:solidFill>
                 <a:latin typeface="Arial"/>
               </a:rPr>
-              <a:t>ВЫГЛЯДИТ НАДЁЖНЫМ</a:t>
+              <a:t>НУЖНО ВСЕГДА</a:t>
             </a:r>
           </a:p>
         </p:txBody>
@@ -44131,152 +43669,50 @@
         </p:nvSpPr>
         <p:spPr>
           <a:xfrm>
-            <a:off x="3354614" y="1158079"/>
-            <a:ext cx="8002233" cy="282067"/>
-          </a:xfrm>
-          <a:prstGeom prst="rect">
-            <a:avLst/>
-          </a:prstGeom>
-          <a:noFill/>
-        </p:spPr>
-        <p:txBody>
-          <a:bodyPr wrap="square" lIns="0" rIns="0" tIns="0" bIns="0" anchor="t">
+            <a:off x="685800" y="1365283"/>
+            <a:ext cx="5088636" cy="490982"/>
+          </a:xfrm>
+          <a:prstGeom prst="rect">
+            <a:avLst/>
+          </a:prstGeom>
+          <a:noFill/>
+        </p:spPr>
+        <p:txBody>
+          <a:bodyPr wrap="square" lIns="0" rIns="0" tIns="0" bIns="0" anchor="ctr">
             <a:spAutoFit/>
           </a:bodyPr>
           <a:lstStyle/>
           <a:p>
             <a:pPr algn="l">
               <a:lnSpc>
-                <a:spcPts val="1265"/>
+                <a:spcPts val="1356"/>
               </a:lnSpc>
               <a:spcAft>
                 <a:spcPts val="0"/>
               </a:spcAft>
             </a:pPr>
             <a:r>
-              <a:rPr sz="1150" b="1" i="0">
-                <a:solidFill>
-                  <a:srgbClr val="6B7685"/>
-                </a:solidFill>
-                <a:latin typeface="Arial"/>
-              </a:rPr>
-              <a:t>ЧЕМ ОКАЗАЛСЯ</a:t>
-            </a:r>
-          </a:p>
-        </p:txBody>
-      </p:sp>
-      <p:sp>
-        <p:nvSpPr>
-          <p:cNvPr id="6" name="TextBox 5"/>
-          <p:cNvSpPr txBox="1"/>
-          <p:nvPr/>
-        </p:nvSpPr>
-        <p:spPr>
-          <a:xfrm>
-            <a:off x="685800" y="1440146"/>
-            <a:ext cx="2522510" cy="712279"/>
-          </a:xfrm>
-          <a:prstGeom prst="rect">
-            <a:avLst/>
-          </a:prstGeom>
-          <a:noFill/>
-        </p:spPr>
-        <p:txBody>
-          <a:bodyPr wrap="square" lIns="0" rIns="0" tIns="0" bIns="0" anchor="ctr">
-            <a:spAutoFit/>
-          </a:bodyPr>
-          <a:lstStyle/>
-          <a:p>
-            <a:pPr algn="l">
-              <a:lnSpc>
-                <a:spcPts val="1437"/>
-              </a:lnSpc>
-              <a:spcAft>
-                <a:spcPts val="0"/>
-              </a:spcAft>
-            </a:pPr>
-            <a:r>
-              <a:rPr sz="1250" b="0" i="0">
-                <a:solidFill>
-                  <a:srgbClr val="141B2E"/>
-                </a:solidFill>
-                <a:latin typeface="Arial"/>
-              </a:rPr>
-              <a:t>сообщение ушло координатору, цепочка короче и дешевле без LLM</a:t>
-            </a:r>
-          </a:p>
-        </p:txBody>
-      </p:sp>
-      <p:sp>
-        <p:nvSpPr>
-          <p:cNvPr id="7" name="TextBox 6"/>
-          <p:cNvSpPr txBox="1"/>
-          <p:nvPr/>
-        </p:nvSpPr>
-        <p:spPr>
-          <a:xfrm>
-            <a:off x="3354614" y="1440146"/>
-            <a:ext cx="8002233" cy="712279"/>
-          </a:xfrm>
-          <a:prstGeom prst="rect">
-            <a:avLst/>
-          </a:prstGeom>
-          <a:noFill/>
-        </p:spPr>
-        <p:txBody>
-          <a:bodyPr wrap="square" lIns="0" rIns="0" tIns="0" bIns="0" anchor="ctr">
-            <a:spAutoFit/>
-          </a:bodyPr>
-          <a:lstStyle/>
-          <a:p>
-            <a:pPr algn="l">
-              <a:lnSpc>
-                <a:spcPts val="1437"/>
-              </a:lnSpc>
-              <a:spcAft>
-                <a:spcPts val="0"/>
-              </a:spcAft>
-            </a:pPr>
-            <a:r>
-              <a:rPr sz="1250" b="0" i="0">
-                <a:solidFill>
-                  <a:srgbClr val="141B2E"/>
-                </a:solidFill>
-                <a:latin typeface="Arial"/>
-              </a:rPr>
-              <a:t>LLM здесь был просто лишним шагом — то же самое сделал шаблон, без модели и без риска галлюцинации (</a:t>
-            </a:r>
-            <a:r>
-              <a:rPr sz="1250" b="1" i="0">
-                <a:solidFill>
-                  <a:srgbClr val="141B2E"/>
-                </a:solidFill>
-                <a:latin typeface="Arial"/>
-              </a:rPr>
-              <a:t>«Уведомления»</a:t>
-            </a:r>
-            <a:r>
-              <a:rPr sz="1250" b="0" i="0">
-                <a:solidFill>
-                  <a:srgbClr val="141B2E"/>
-                </a:solidFill>
-                <a:latin typeface="Arial"/>
-              </a:rPr>
-              <a:t>)</a:t>
+              <a:rPr sz="1150" b="0" i="0">
+                <a:solidFill>
+                  <a:srgbClr val="141B2E"/>
+                </a:solidFill>
+                <a:latin typeface="Arial"/>
+              </a:rPr>
+              <a:t>проверка размера и формата перед отправкой любого файла или изображения в цепочке</a:t>
             </a:r>
           </a:p>
         </p:txBody>
       </p:sp>
       <p:cxnSp>
         <p:nvCxnSpPr>
-          <p:cNvPr id="8" name="Connector 7"/>
+          <p:cNvPr id="6" name="Connector 5"/>
           <p:cNvCxnSpPr/>
           <p:nvPr/>
         </p:nvCxnSpPr>
         <p:spPr>
           <a:xfrm>
-            <a:off x="685800" y="2152425"/>
-            <a:ext cx="10817352" cy="0"/>
+            <a:off x="685800" y="1856265"/>
+            <a:ext cx="5088636" cy="0"/>
           </a:xfrm>
           <a:prstGeom prst="line">
             <a:avLst/>
@@ -44304,14 +43740,146 @@
       </p:cxnSp>
       <p:sp>
         <p:nvSpPr>
+          <p:cNvPr id="7" name="TextBox 6"/>
+          <p:cNvSpPr txBox="1"/>
+          <p:nvPr/>
+        </p:nvSpPr>
+        <p:spPr>
+          <a:xfrm>
+            <a:off x="685800" y="1856265"/>
+            <a:ext cx="5088636" cy="490982"/>
+          </a:xfrm>
+          <a:prstGeom prst="rect">
+            <a:avLst/>
+          </a:prstGeom>
+          <a:noFill/>
+        </p:spPr>
+        <p:txBody>
+          <a:bodyPr wrap="square" lIns="0" rIns="0" tIns="0" bIns="0" anchor="ctr">
+            <a:spAutoFit/>
+          </a:bodyPr>
+          <a:lstStyle/>
+          <a:p>
+            <a:pPr algn="l">
+              <a:lnSpc>
+                <a:spcPts val="1356"/>
+              </a:lnSpc>
+              <a:spcAft>
+                <a:spcPts val="0"/>
+              </a:spcAft>
+            </a:pPr>
+            <a:r>
+              <a:rPr sz="1150" b="0" i="0">
+                <a:solidFill>
+                  <a:srgbClr val="141B2E"/>
+                </a:solidFill>
+                <a:latin typeface="Arial"/>
+              </a:rPr>
+              <a:t>знание лимита канала доставки, а не только лимита самого оркестратора</a:t>
+            </a:r>
+          </a:p>
+        </p:txBody>
+      </p:sp>
+      <p:sp>
+        <p:nvSpPr>
+          <p:cNvPr id="8" name="Rounded Rectangle 7"/>
+          <p:cNvSpPr/>
+          <p:nvPr/>
+        </p:nvSpPr>
+        <p:spPr>
+          <a:xfrm>
+            <a:off x="6231636" y="981235"/>
+            <a:ext cx="5454396" cy="1548892"/>
+          </a:xfrm>
+          <a:prstGeom prst="roundRect">
+            <a:avLst>
+              <a:gd name="adj" fmla="val 19678"/>
+            </a:avLst>
+          </a:prstGeom>
+          <a:solidFill>
+            <a:srgbClr val="F4F7FA"/>
+          </a:solidFill>
+          <a:ln w="15240">
+            <a:solidFill>
+              <a:srgbClr val="E5EAF0"/>
+            </a:solidFill>
+          </a:ln>
+          <a:effectLst/>
+        </p:spPr>
+        <p:style>
+          <a:lnRef idx="1">
+            <a:schemeClr val="accent1"/>
+          </a:lnRef>
+          <a:fillRef idx="3">
+            <a:schemeClr val="accent1"/>
+          </a:fillRef>
+          <a:effectRef idx="2">
+            <a:schemeClr val="accent1"/>
+          </a:effectRef>
+          <a:fontRef idx="minor">
+            <a:schemeClr val="lt1"/>
+          </a:fontRef>
+        </p:style>
+        <p:txBody>
+          <a:bodyPr rtlCol="0" anchor="ctr"/>
+          <a:lstStyle/>
+          <a:p>
+            <a:pPr algn="ctr"/>
+          </a:p>
+        </p:txBody>
+      </p:sp>
+      <p:sp>
+        <p:nvSpPr>
           <p:cNvPr id="9" name="TextBox 8"/>
           <p:cNvSpPr txBox="1"/>
           <p:nvPr/>
         </p:nvSpPr>
         <p:spPr>
           <a:xfrm>
-            <a:off x="685800" y="2152425"/>
-            <a:ext cx="2522510" cy="712279"/>
+            <a:off x="6414516" y="1090963"/>
+            <a:ext cx="5088636" cy="274320"/>
+          </a:xfrm>
+          <a:prstGeom prst="rect">
+            <a:avLst/>
+          </a:prstGeom>
+          <a:noFill/>
+        </p:spPr>
+        <p:txBody>
+          <a:bodyPr wrap="square" lIns="0" rIns="0" tIns="0" bIns="0" anchor="t">
+            <a:spAutoFit/>
+          </a:bodyPr>
+          <a:lstStyle/>
+          <a:p>
+            <a:pPr algn="l">
+              <a:lnSpc>
+                <a:spcPts val="1297"/>
+              </a:lnSpc>
+              <a:spcAft>
+                <a:spcPts val="0"/>
+              </a:spcAft>
+            </a:pPr>
+            <a:r>
+              <a:rPr sz="1100" b="1" i="0">
+                <a:solidFill>
+                  <a:srgbClr val="8A6200"/>
+                </a:solidFill>
+                <a:latin typeface="Arial"/>
+              </a:rPr>
+              <a:t>НЕ ТРЕБУЕТ ЭТОГО ЗАНЯТИЯ</a:t>
+            </a:r>
+          </a:p>
+        </p:txBody>
+      </p:sp>
+      <p:sp>
+        <p:nvSpPr>
+          <p:cNvPr id="10" name="TextBox 9"/>
+          <p:cNvSpPr txBox="1"/>
+          <p:nvPr/>
+        </p:nvSpPr>
+        <p:spPr>
+          <a:xfrm>
+            <a:off x="6414516" y="1365283"/>
+            <a:ext cx="5088636" cy="318642"/>
           </a:xfrm>
           <a:prstGeom prst="rect">
             <a:avLst/>
@@ -44326,80 +43894,20 @@
           <a:p>
             <a:pPr algn="l">
               <a:lnSpc>
-                <a:spcPts val="1437"/>
+                <a:spcPts val="1356"/>
               </a:lnSpc>
               <a:spcAft>
                 <a:spcPts val="0"/>
               </a:spcAft>
             </a:pPr>
             <a:r>
-              <a:rPr sz="1250" b="0" i="0">
-                <a:solidFill>
-                  <a:srgbClr val="141B2E"/>
-                </a:solidFill>
-                <a:latin typeface="Arial"/>
-              </a:rPr>
-              <a:t>заявка про тот же вопрос пришла снова — обработали как новую</a:t>
-            </a:r>
-          </a:p>
-        </p:txBody>
-      </p:sp>
-      <p:sp>
-        <p:nvSpPr>
-          <p:cNvPr id="10" name="TextBox 9"/>
-          <p:cNvSpPr txBox="1"/>
-          <p:nvPr/>
-        </p:nvSpPr>
-        <p:spPr>
-          <a:xfrm>
-            <a:off x="3354614" y="2152425"/>
-            <a:ext cx="8002233" cy="712279"/>
-          </a:xfrm>
-          <a:prstGeom prst="rect">
-            <a:avLst/>
-          </a:prstGeom>
-          <a:noFill/>
-        </p:spPr>
-        <p:txBody>
-          <a:bodyPr wrap="square" lIns="0" rIns="0" tIns="0" bIns="0" anchor="ctr">
-            <a:spAutoFit/>
-          </a:bodyPr>
-          <a:lstStyle/>
-          <a:p>
-            <a:pPr algn="l">
-              <a:lnSpc>
-                <a:spcPts val="1437"/>
-              </a:lnSpc>
-              <a:spcAft>
-                <a:spcPts val="0"/>
-              </a:spcAft>
-            </a:pPr>
-            <a:r>
-              <a:rPr sz="1250" b="0" i="0">
-                <a:solidFill>
-                  <a:srgbClr val="141B2E"/>
-                </a:solidFill>
-                <a:latin typeface="Arial"/>
-              </a:rPr>
-              <a:t>без проверки на дубль каждое повторное обращение запускает цепочку с нуля; ни точное совпадение, ни похожесть по словам не решают это целиком — для переформулировки нужна проверка смыслом (</a:t>
-            </a:r>
-            <a:r>
-              <a:rPr sz="1250" b="1" i="0">
-                <a:solidFill>
-                  <a:srgbClr val="141B2E"/>
-                </a:solidFill>
-                <a:latin typeface="Arial"/>
-              </a:rPr>
-              <a:t>«Проверка на повтор»</a:t>
-            </a:r>
-            <a:r>
-              <a:rPr sz="1250" b="0" i="0">
-                <a:solidFill>
-                  <a:srgbClr val="141B2E"/>
-                </a:solidFill>
-                <a:latin typeface="Arial"/>
-              </a:rPr>
-              <a:t>)</a:t>
+              <a:rPr sz="1150" b="0" i="0">
+                <a:solidFill>
+                  <a:srgbClr val="141B2E"/>
+                </a:solidFill>
+                <a:latin typeface="Arial"/>
+              </a:rPr>
+              <a:t>хранение множества файлов</a:t>
             </a:r>
           </a:p>
         </p:txBody>
@@ -44412,8 +43920,8 @@
         </p:nvCxnSpPr>
         <p:spPr>
           <a:xfrm>
-            <a:off x="685800" y="2864705"/>
-            <a:ext cx="10817352" cy="0"/>
+            <a:off x="6414516" y="1683926"/>
+            <a:ext cx="5088636" cy="0"/>
           </a:xfrm>
           <a:prstGeom prst="line">
             <a:avLst/>
@@ -44447,8 +43955,8 @@
         </p:nvSpPr>
         <p:spPr>
           <a:xfrm>
-            <a:off x="685800" y="2864705"/>
-            <a:ext cx="2522510" cy="712279"/>
+            <a:off x="6414516" y="1683926"/>
+            <a:ext cx="5088636" cy="318642"/>
           </a:xfrm>
           <a:prstGeom prst="rect">
             <a:avLst/>
@@ -44463,244 +43971,45 @@
           <a:p>
             <a:pPr algn="l">
               <a:lnSpc>
-                <a:spcPts val="1437"/>
+                <a:spcPts val="1356"/>
               </a:lnSpc>
               <a:spcAft>
                 <a:spcPts val="0"/>
               </a:spcAft>
             </a:pPr>
             <a:r>
-              <a:rPr sz="1250" b="0" i="0">
-                <a:solidFill>
-                  <a:srgbClr val="141B2E"/>
-                </a:solidFill>
-                <a:latin typeface="Arial"/>
-              </a:rPr>
-              <a:t>в промте написано «не возвращай больше суммы X»</a:t>
-            </a:r>
-          </a:p>
-        </p:txBody>
-      </p:sp>
-      <p:sp>
-        <p:nvSpPr>
-          <p:cNvPr id="13" name="TextBox 12"/>
-          <p:cNvSpPr txBox="1"/>
-          <p:nvPr/>
-        </p:nvSpPr>
-        <p:spPr>
-          <a:xfrm>
-            <a:off x="3354614" y="2864705"/>
-            <a:ext cx="8002233" cy="712279"/>
-          </a:xfrm>
-          <a:prstGeom prst="rect">
-            <a:avLst/>
-          </a:prstGeom>
-          <a:noFill/>
-        </p:spPr>
-        <p:txBody>
-          <a:bodyPr wrap="square" lIns="0" rIns="0" tIns="0" bIns="0" anchor="ctr">
-            <a:spAutoFit/>
-          </a:bodyPr>
-          <a:lstStyle/>
-          <a:p>
-            <a:pPr algn="l">
-              <a:lnSpc>
-                <a:spcPts val="1437"/>
-              </a:lnSpc>
-              <a:spcAft>
-                <a:spcPts val="0"/>
-              </a:spcAft>
-            </a:pPr>
-            <a:r>
-              <a:rPr sz="1250" b="0" i="0">
-                <a:solidFill>
-                  <a:srgbClr val="141B2E"/>
-                </a:solidFill>
-                <a:latin typeface="Arial"/>
-              </a:rPr>
-              <a:t>решение оставалось вероятностным: модель обходила правило в измеренной доле прогонов, ровно на границе условия; алгоритмический гейт — никогда (</a:t>
-            </a:r>
-            <a:r>
-              <a:rPr sz="1250" b="1" i="0">
-                <a:solidFill>
-                  <a:srgbClr val="141B2E"/>
-                </a:solidFill>
-                <a:latin typeface="Arial"/>
-              </a:rPr>
-              <a:t>«Одобрение возврата»</a:t>
-            </a:r>
-            <a:r>
-              <a:rPr sz="1250" b="0" i="0">
-                <a:solidFill>
-                  <a:srgbClr val="141B2E"/>
-                </a:solidFill>
-                <a:latin typeface="Arial"/>
-              </a:rPr>
-              <a:t>, подтверждено на масштабе компании — Zillow)</a:t>
-            </a:r>
-          </a:p>
-        </p:txBody>
-      </p:sp>
-      <p:cxnSp>
-        <p:nvCxnSpPr>
-          <p:cNvPr id="14" name="Connector 13"/>
-          <p:cNvCxnSpPr/>
-          <p:nvPr/>
-        </p:nvCxnSpPr>
-        <p:spPr>
-          <a:xfrm>
-            <a:off x="685800" y="3576984"/>
-            <a:ext cx="10817352" cy="0"/>
-          </a:xfrm>
-          <a:prstGeom prst="line">
-            <a:avLst/>
-          </a:prstGeom>
-          <a:ln w="9525">
-            <a:solidFill>
-              <a:srgbClr val="E5EAF0"/>
-            </a:solidFill>
-          </a:ln>
-        </p:spPr>
-        <p:style>
-          <a:lnRef idx="2">
-            <a:schemeClr val="accent1"/>
-          </a:lnRef>
-          <a:fillRef idx="0">
-            <a:schemeClr val="accent1"/>
-          </a:fillRef>
-          <a:effectRef idx="1">
-            <a:schemeClr val="accent1"/>
-          </a:effectRef>
-          <a:fontRef idx="minor">
-            <a:schemeClr val="tx1"/>
-          </a:fontRef>
-        </p:style>
-      </p:cxnSp>
-      <p:sp>
-        <p:nvSpPr>
-          <p:cNvPr id="15" name="TextBox 14"/>
-          <p:cNvSpPr txBox="1"/>
-          <p:nvPr/>
-        </p:nvSpPr>
-        <p:spPr>
-          <a:xfrm>
-            <a:off x="685800" y="3576984"/>
-            <a:ext cx="2522510" cy="529717"/>
-          </a:xfrm>
-          <a:prstGeom prst="rect">
-            <a:avLst/>
-          </a:prstGeom>
-          <a:noFill/>
-        </p:spPr>
-        <p:txBody>
-          <a:bodyPr wrap="square" lIns="0" rIns="0" tIns="0" bIns="0" anchor="ctr">
-            <a:spAutoFit/>
-          </a:bodyPr>
-          <a:lstStyle/>
-          <a:p>
-            <a:pPr algn="l">
-              <a:lnSpc>
-                <a:spcPts val="1437"/>
-              </a:lnSpc>
-              <a:spcAft>
-                <a:spcPts val="0"/>
-              </a:spcAft>
-            </a:pPr>
-            <a:r>
-              <a:rPr sz="1250" b="0" i="0">
-                <a:solidFill>
-                  <a:srgbClr val="141B2E"/>
-                </a:solidFill>
-                <a:latin typeface="Arial"/>
-              </a:rPr>
-              <a:t>картинка собралась и ушла в Telegram</a:t>
-            </a:r>
-          </a:p>
-        </p:txBody>
-      </p:sp>
-      <p:sp>
-        <p:nvSpPr>
-          <p:cNvPr id="16" name="TextBox 15"/>
-          <p:cNvSpPr txBox="1"/>
-          <p:nvPr/>
-        </p:nvSpPr>
-        <p:spPr>
-          <a:xfrm>
-            <a:off x="3354614" y="3576984"/>
-            <a:ext cx="8002233" cy="529717"/>
-          </a:xfrm>
-          <a:prstGeom prst="rect">
-            <a:avLst/>
-          </a:prstGeom>
-          <a:noFill/>
-        </p:spPr>
-        <p:txBody>
-          <a:bodyPr wrap="square" lIns="0" rIns="0" tIns="0" bIns="0" anchor="ctr">
-            <a:spAutoFit/>
-          </a:bodyPr>
-          <a:lstStyle/>
-          <a:p>
-            <a:pPr algn="l">
-              <a:lnSpc>
-                <a:spcPts val="1437"/>
-              </a:lnSpc>
-              <a:spcAft>
-                <a:spcPts val="0"/>
-              </a:spcAft>
-            </a:pPr>
-            <a:r>
-              <a:rPr sz="1250" b="0" i="0">
-                <a:solidFill>
-                  <a:srgbClr val="141B2E"/>
-                </a:solidFill>
-                <a:latin typeface="Arial"/>
-              </a:rPr>
-              <a:t>до тех пор, пока помещается в лимит — большой файл уходит не полностью или не уходит вовсе, а прогон всё равно зелёный (</a:t>
-            </a:r>
-            <a:r>
-              <a:rPr sz="1250" b="1" i="0">
-                <a:solidFill>
-                  <a:srgbClr val="141B2E"/>
-                </a:solidFill>
-                <a:latin typeface="Arial"/>
-              </a:rPr>
-              <a:t>«Карточка в Telegram»</a:t>
-            </a:r>
-            <a:r>
-              <a:rPr sz="1250" b="0" i="0">
-                <a:solidFill>
-                  <a:srgbClr val="141B2E"/>
-                </a:solidFill>
-                <a:latin typeface="Arial"/>
-              </a:rPr>
-              <a:t>)</a:t>
-            </a:r>
-          </a:p>
-        </p:txBody>
-      </p:sp>
-      <p:sp>
-        <p:nvSpPr>
-          <p:cNvPr id="17" name="Rounded Rectangle 16"/>
+              <a:rPr sz="1150" b="0" i="0">
+                <a:solidFill>
+                  <a:srgbClr val="141B2E"/>
+                </a:solidFill>
+                <a:latin typeface="Arial"/>
+              </a:rPr>
+              <a:t>поиск среди вложений и обработка их содержимого моделью</a:t>
+            </a:r>
+          </a:p>
+        </p:txBody>
+      </p:sp>
+      <p:sp>
+        <p:nvSpPr>
+          <p:cNvPr id="13" name="Rounded Rectangle 12"/>
           <p:cNvSpPr/>
           <p:nvPr/>
         </p:nvSpPr>
         <p:spPr>
           <a:xfrm>
-            <a:off x="502920" y="4533781"/>
-            <a:ext cx="11183112" cy="678942"/>
+            <a:off x="502920" y="2789419"/>
+            <a:ext cx="82296" cy="982980"/>
           </a:xfrm>
           <a:prstGeom prst="roundRect">
             <a:avLst>
-              <a:gd name="adj" fmla="val 25000"/>
+              <a:gd name="adj" fmla="val 50000"/>
             </a:avLst>
           </a:prstGeom>
           <a:solidFill>
-            <a:srgbClr val="E0F1F2"/>
+            <a:srgbClr val="F0AB00"/>
           </a:solidFill>
-          <a:ln w="13970">
-            <a:solidFill>
-              <a:srgbClr val="028090"/>
-            </a:solidFill>
+          <a:ln>
+            <a:noFill/>
           </a:ln>
           <a:effectLst/>
         </p:spPr>
@@ -44728,25 +44037,78 @@
       </p:sp>
       <p:sp>
         <p:nvSpPr>
-          <p:cNvPr id="18" name="Rounded Rectangle 17"/>
+          <p:cNvPr id="14" name="TextBox 13"/>
+          <p:cNvSpPr txBox="1"/>
+          <p:nvPr/>
+        </p:nvSpPr>
+        <p:spPr>
+          <a:xfrm>
+            <a:off x="859536" y="2917435"/>
+            <a:ext cx="10643616" cy="726948"/>
+          </a:xfrm>
+          <a:prstGeom prst="rect">
+            <a:avLst/>
+          </a:prstGeom>
+          <a:noFill/>
+        </p:spPr>
+        <p:txBody>
+          <a:bodyPr wrap="square" lIns="0" rIns="0" tIns="0" bIns="0" anchor="ctr">
+            <a:spAutoFit/>
+          </a:bodyPr>
+          <a:lstStyle/>
+          <a:p>
+            <a:pPr algn="l">
+              <a:lnSpc>
+                <a:spcPts val="1860"/>
+              </a:lnSpc>
+              <a:spcAft>
+                <a:spcPts val="300"/>
+              </a:spcAft>
+            </a:pPr>
+            <a:r>
+              <a:rPr sz="1500" b="1" i="0">
+                <a:solidFill>
+                  <a:srgbClr val="141B2E"/>
+                </a:solidFill>
+                <a:latin typeface="Arial"/>
+              </a:rPr>
+              <a:t>Четвёртая строка оси закрыта.</a:t>
+            </a:r>
+            <a:r>
+              <a:rPr sz="1500" b="1" i="0">
+                <a:solidFill>
+                  <a:srgbClr val="141B2E"/>
+                </a:solidFill>
+                <a:latin typeface="Arial"/>
+              </a:rPr>
+              <a:t> Выглядело надёжным: картинка собралась и ушла в Telegram. Чем оказалось: до тех пор, пока помещается в лимит — большой файл уходит не полностью или не уходит вовсе, а прогон при этом остаётся зелёным.</a:t>
+            </a:r>
+          </a:p>
+        </p:txBody>
+      </p:sp>
+      <p:sp>
+        <p:nvSpPr>
+          <p:cNvPr id="15" name="Rounded Rectangle 14"/>
           <p:cNvSpPr/>
           <p:nvPr/>
         </p:nvSpPr>
         <p:spPr>
           <a:xfrm>
-            <a:off x="521208" y="4588645"/>
-            <a:ext cx="64008" cy="569214"/>
+            <a:off x="502920" y="4031691"/>
+            <a:ext cx="11183112" cy="2239137"/>
           </a:xfrm>
           <a:prstGeom prst="roundRect">
             <a:avLst>
-              <a:gd name="adj" fmla="val 50000"/>
+              <a:gd name="adj" fmla="val 13612"/>
             </a:avLst>
           </a:prstGeom>
           <a:solidFill>
-            <a:srgbClr val="028090"/>
+            <a:srgbClr val="F4F7FA"/>
           </a:solidFill>
-          <a:ln>
-            <a:noFill/>
+          <a:ln w="15240">
+            <a:solidFill>
+              <a:srgbClr val="E5EAF0"/>
+            </a:solidFill>
           </a:ln>
           <a:effectLst/>
         </p:spPr>
@@ -44774,14 +44136,149 @@
       </p:sp>
       <p:sp>
         <p:nvSpPr>
+          <p:cNvPr id="16" name="TextBox 15"/>
+          <p:cNvSpPr txBox="1"/>
+          <p:nvPr/>
+        </p:nvSpPr>
+        <p:spPr>
+          <a:xfrm>
+            <a:off x="722376" y="4251147"/>
+            <a:ext cx="329184" cy="532638"/>
+          </a:xfrm>
+          <a:prstGeom prst="rect">
+            <a:avLst/>
+          </a:prstGeom>
+          <a:noFill/>
+        </p:spPr>
+        <p:txBody>
+          <a:bodyPr wrap="square" lIns="0" rIns="0" tIns="0" bIns="0" anchor="ctr">
+            <a:spAutoFit/>
+          </a:bodyPr>
+          <a:lstStyle/>
+          <a:p>
+            <a:pPr algn="l">
+              <a:lnSpc>
+                <a:spcPts val="1829"/>
+              </a:lnSpc>
+              <a:spcAft>
+                <a:spcPts val="0"/>
+              </a:spcAft>
+            </a:pPr>
+            <a:r>
+              <a:rPr sz="1550" b="1" i="0">
+                <a:solidFill>
+                  <a:srgbClr val="028090"/>
+                </a:solidFill>
+                <a:latin typeface="Arial"/>
+              </a:rPr>
+              <a:t>1</a:t>
+            </a:r>
+          </a:p>
+        </p:txBody>
+      </p:sp>
+      <p:sp>
+        <p:nvSpPr>
+          <p:cNvPr id="17" name="TextBox 16"/>
+          <p:cNvSpPr txBox="1"/>
+          <p:nvPr/>
+        </p:nvSpPr>
+        <p:spPr>
+          <a:xfrm>
+            <a:off x="1106424" y="4251147"/>
+            <a:ext cx="10360152" cy="532638"/>
+          </a:xfrm>
+          <a:prstGeom prst="rect">
+            <a:avLst/>
+          </a:prstGeom>
+          <a:noFill/>
+        </p:spPr>
+        <p:txBody>
+          <a:bodyPr wrap="square" lIns="0" rIns="0" tIns="0" bIns="0" anchor="ctr">
+            <a:spAutoFit/>
+          </a:bodyPr>
+          <a:lstStyle/>
+          <a:p>
+            <a:pPr algn="l">
+              <a:lnSpc>
+                <a:spcPts val="1593"/>
+              </a:lnSpc>
+              <a:spcAft>
+                <a:spcPts val="0"/>
+              </a:spcAft>
+            </a:pPr>
+            <a:r>
+              <a:rPr sz="1350" b="1" i="0">
+                <a:solidFill>
+                  <a:srgbClr val="141B2E"/>
+                </a:solidFill>
+                <a:latin typeface="Arial"/>
+              </a:rPr>
+              <a:t>Собственный лимит n8n по умолчанию — 16 МБ</a:t>
+            </a:r>
+            <a:r>
+              <a:rPr sz="1350" b="0" i="0">
+                <a:solidFill>
+                  <a:srgbClr val="141B2E"/>
+                </a:solidFill>
+                <a:latin typeface="Arial"/>
+              </a:rPr>
+              <a:t> на бинарные данные. Для фотографии с текстом этого обычно достаточно, но скан высокого разрешения или фото прямо с телефона — не всегда.</a:t>
+            </a:r>
+          </a:p>
+        </p:txBody>
+      </p:sp>
+      <p:sp>
+        <p:nvSpPr>
+          <p:cNvPr id="18" name="TextBox 17"/>
+          <p:cNvSpPr txBox="1"/>
+          <p:nvPr/>
+        </p:nvSpPr>
+        <p:spPr>
+          <a:xfrm>
+            <a:off x="722376" y="4783785"/>
+            <a:ext cx="329184" cy="734949"/>
+          </a:xfrm>
+          <a:prstGeom prst="rect">
+            <a:avLst/>
+          </a:prstGeom>
+          <a:noFill/>
+        </p:spPr>
+        <p:txBody>
+          <a:bodyPr wrap="square" lIns="0" rIns="0" tIns="0" bIns="0" anchor="ctr">
+            <a:spAutoFit/>
+          </a:bodyPr>
+          <a:lstStyle/>
+          <a:p>
+            <a:pPr algn="l">
+              <a:lnSpc>
+                <a:spcPts val="1829"/>
+              </a:lnSpc>
+              <a:spcAft>
+                <a:spcPts val="0"/>
+              </a:spcAft>
+            </a:pPr>
+            <a:r>
+              <a:rPr sz="1550" b="1" i="0">
+                <a:solidFill>
+                  <a:srgbClr val="028090"/>
+                </a:solidFill>
+                <a:latin typeface="Arial"/>
+              </a:rPr>
+              <a:t>2</a:t>
+            </a:r>
+          </a:p>
+        </p:txBody>
+      </p:sp>
+      <p:sp>
+        <p:nvSpPr>
           <p:cNvPr id="19" name="TextBox 18"/>
           <p:cNvSpPr txBox="1"/>
           <p:nvPr/>
         </p:nvSpPr>
         <p:spPr>
           <a:xfrm>
-            <a:off x="804672" y="4670941"/>
-            <a:ext cx="10643616" cy="404621"/>
+            <a:off x="1106424" y="4783785"/>
+            <a:ext cx="10360152" cy="734949"/>
           </a:xfrm>
           <a:prstGeom prst="rect">
             <a:avLst/>
@@ -44799,7 +44296,7 @@
                 <a:spcPts val="1593"/>
               </a:lnSpc>
               <a:spcAft>
-                <a:spcPts val="300"/>
+                <a:spcPts val="0"/>
               </a:spcAft>
             </a:pPr>
             <a:r>
@@ -44809,7 +44306,7 @@
                 </a:solidFill>
                 <a:latin typeface="Arial"/>
               </a:rPr>
-              <a:t>Из четырёх новых шагов узел языковой модели пережил проверку в одном</a:t>
+              <a:t>Лимиты Telegram — отдельный, более узкий потолок</a:t>
             </a:r>
             <a:r>
               <a:rPr sz="1350" b="0" i="0">
@@ -44818,56 +44315,50 @@
                 </a:solidFill>
                 <a:latin typeface="Arial"/>
               </a:rPr>
-              <a:t> — в «Одобрении возврата», и там он только извлекает сумму: решает условие в коде.</a:t>
-            </a:r>
-          </a:p>
-        </p:txBody>
-      </p:sp>
-      <p:sp>
-        <p:nvSpPr>
-          <p:cNvPr id="20" name="Rounded Rectangle 19"/>
-          <p:cNvSpPr/>
-          <p:nvPr/>
-        </p:nvSpPr>
-        <p:spPr>
-          <a:xfrm>
-            <a:off x="502920" y="5456923"/>
-            <a:ext cx="11183112" cy="822960"/>
-          </a:xfrm>
-          <a:prstGeom prst="roundRect">
-            <a:avLst>
-              <a:gd name="adj" fmla="val 10000"/>
-            </a:avLst>
-          </a:prstGeom>
-          <a:solidFill>
-            <a:srgbClr val="FEF5E0"/>
-          </a:solidFill>
-          <a:ln w="19050">
-            <a:solidFill>
-              <a:srgbClr val="F0AB00"/>
-            </a:solidFill>
-          </a:ln>
-          <a:effectLst/>
-        </p:spPr>
-        <p:style>
-          <a:lnRef idx="1">
-            <a:schemeClr val="accent1"/>
-          </a:lnRef>
-          <a:fillRef idx="3">
-            <a:schemeClr val="accent1"/>
-          </a:fillRef>
-          <a:effectRef idx="2">
-            <a:schemeClr val="accent1"/>
-          </a:effectRef>
-          <a:fontRef idx="minor">
-            <a:schemeClr val="lt1"/>
-          </a:fontRef>
-        </p:style>
-        <p:txBody>
-          <a:bodyPr rtlCol="0" anchor="ctr"/>
-          <a:lstStyle/>
-          <a:p>
-            <a:pPr algn="ctr"/>
+              <a:t>, и они разные для фото и для документа. То, что прошло мимо лимита n8n, может всё равно не пройти мимо лимита канала доставки — два независимых порога, не один.</a:t>
+            </a:r>
+          </a:p>
+        </p:txBody>
+      </p:sp>
+      <p:sp>
+        <p:nvSpPr>
+          <p:cNvPr id="20" name="TextBox 19"/>
+          <p:cNvSpPr txBox="1"/>
+          <p:nvPr/>
+        </p:nvSpPr>
+        <p:spPr>
+          <a:xfrm>
+            <a:off x="722376" y="5518734"/>
+            <a:ext cx="329184" cy="532638"/>
+          </a:xfrm>
+          <a:prstGeom prst="rect">
+            <a:avLst/>
+          </a:prstGeom>
+          <a:noFill/>
+        </p:spPr>
+        <p:txBody>
+          <a:bodyPr wrap="square" lIns="0" rIns="0" tIns="0" bIns="0" anchor="ctr">
+            <a:spAutoFit/>
+          </a:bodyPr>
+          <a:lstStyle/>
+          <a:p>
+            <a:pPr algn="l">
+              <a:lnSpc>
+                <a:spcPts val="1829"/>
+              </a:lnSpc>
+              <a:spcAft>
+                <a:spcPts val="0"/>
+              </a:spcAft>
+            </a:pPr>
+            <a:r>
+              <a:rPr sz="1550" b="1" i="0">
+                <a:solidFill>
+                  <a:srgbClr val="028090"/>
+                </a:solidFill>
+                <a:latin typeface="Arial"/>
+              </a:rPr>
+              <a:t>3</a:t>
+            </a:r>
           </a:p>
         </p:txBody>
       </p:sp>
@@ -44879,8 +44370,8 @@
         </p:nvSpPr>
         <p:spPr>
           <a:xfrm>
-            <a:off x="722376" y="5584939"/>
-            <a:ext cx="10634472" cy="566928"/>
+            <a:off x="1106424" y="5518734"/>
+            <a:ext cx="10360152" cy="532638"/>
           </a:xfrm>
           <a:prstGeom prst="rect">
             <a:avLst/>
@@ -44893,22 +44384,31 @@
           </a:bodyPr>
           <a:lstStyle/>
           <a:p>
-            <a:pPr algn="ctr">
-              <a:lnSpc>
-                <a:spcPts val="2013"/>
-              </a:lnSpc>
-              <a:spcAft>
-                <a:spcPts val="300"/>
-              </a:spcAft>
-            </a:pPr>
-            <a:r>
-              <a:rPr sz="1650" b="1" i="0">
-                <a:solidFill>
-                  <a:srgbClr val="141B2E"/>
-                </a:solidFill>
-                <a:latin typeface="Arial"/>
-              </a:rPr>
-              <a:t>Где в цепочке решение принимает модель, а где должен — код, и что молчит, когда эту границу не назвали явно?</a:t>
+            <a:pPr algn="l">
+              <a:lnSpc>
+                <a:spcPts val="1593"/>
+              </a:lnSpc>
+              <a:spcAft>
+                <a:spcPts val="0"/>
+              </a:spcAft>
+            </a:pPr>
+            <a:r>
+              <a:rPr sz="1350" b="1" i="0">
+                <a:solidFill>
+                  <a:srgbClr val="141B2E"/>
+                </a:solidFill>
+                <a:latin typeface="Arial"/>
+              </a:rPr>
+              <a:t>Ручной прогон с бинарными данными потребляет заметно больше памяти</a:t>
+            </a:r>
+            <a:r>
+              <a:rPr sz="1350" b="0" i="0">
+                <a:solidFill>
+                  <a:srgbClr val="141B2E"/>
+                </a:solidFill>
+                <a:latin typeface="Arial"/>
+              </a:rPr>
+              <a:t>, чем автоматический, — разница заметнее, чем на текстовых полях, и стоит иметь это в уме при отладке такого узла вживую.</a:t>
             </a:r>
           </a:p>
         </p:txBody>
@@ -45018,7 +44518,7 @@
                 </a:solidFill>
                 <a:latin typeface="Arial"/>
               </a:rPr>
-              <a:t>Что уносим с занятия</a:t>
+              <a:t>Четыре строки оси: что оказалось</a:t>
             </a:r>
           </a:p>
         </p:txBody>
@@ -45031,12 +44531,12 @@
         </p:nvSpPr>
         <p:spPr>
           <a:xfrm>
-            <a:off x="502920" y="2063419"/>
-            <a:ext cx="11183112" cy="2584132"/>
+            <a:off x="502920" y="975199"/>
+            <a:ext cx="11183112" cy="3314382"/>
           </a:xfrm>
           <a:prstGeom prst="roundRect">
             <a:avLst>
-              <a:gd name="adj" fmla="val 11795"/>
+              <a:gd name="adj" fmla="val 9196"/>
             </a:avLst>
           </a:prstGeom>
           <a:solidFill>
@@ -45079,8 +44579,8 @@
         </p:nvSpPr>
         <p:spPr>
           <a:xfrm>
-            <a:off x="685800" y="2246299"/>
-            <a:ext cx="1014823" cy="282067"/>
+            <a:off x="685800" y="1158079"/>
+            <a:ext cx="2522510" cy="282067"/>
           </a:xfrm>
           <a:prstGeom prst="rect">
             <a:avLst/>
@@ -45108,7 +44608,7 @@
                 </a:solidFill>
                 <a:latin typeface="Arial"/>
               </a:rPr>
-              <a:t>ФАЙЛ</a:t>
+              <a:t>ВЫГЛЯДИТ НАДЁЖНЫМ</a:t>
             </a:r>
           </a:p>
         </p:txBody>
@@ -45121,8 +44621,8 @@
         </p:nvSpPr>
         <p:spPr>
           <a:xfrm>
-            <a:off x="1846927" y="2246299"/>
-            <a:ext cx="9509920" cy="282067"/>
+            <a:off x="3354614" y="1158079"/>
+            <a:ext cx="8002233" cy="282067"/>
           </a:xfrm>
           <a:prstGeom prst="rect">
             <a:avLst/>
@@ -45150,25 +44650,7 @@
                 </a:solidFill>
                 <a:latin typeface="Arial"/>
               </a:rPr>
-              <a:t>ПРОДОЛЖЕНИЕ </a:t>
-            </a:r>
-            <a:r>
-              <a:rPr sz="1150" b="1" i="0">
-                <a:solidFill>
-                  <a:srgbClr val="6B7685"/>
-                </a:solidFill>
-                <a:latin typeface="Consolas"/>
-              </a:rPr>
-              <a:t>STUDENT.JSON</a:t>
-            </a:r>
-            <a:r>
-              <a:rPr sz="1150" b="1" i="0">
-                <a:solidFill>
-                  <a:srgbClr val="6B7685"/>
-                </a:solidFill>
-                <a:latin typeface="Arial"/>
-              </a:rPr>
-              <a:t>, С КОТОРЫМ ВЫ ЗАКОНЧИЛИ ПРОШЛОЕ ЗАНЯТИЕ</a:t>
+              <a:t>ЧЕМ ОКАЗАЛСЯ</a:t>
             </a:r>
           </a:p>
         </p:txBody>
@@ -45181,8 +44663,8 @@
         </p:nvSpPr>
         <p:spPr>
           <a:xfrm>
-            <a:off x="685800" y="2528366"/>
-            <a:ext cx="1014823" cy="529717"/>
+            <a:off x="685800" y="1440146"/>
+            <a:ext cx="2522510" cy="712279"/>
           </a:xfrm>
           <a:prstGeom prst="rect">
             <a:avLst/>
@@ -45204,47 +44686,65 @@
               </a:spcAft>
             </a:pPr>
             <a:r>
+              <a:rPr sz="1250" b="0" i="0">
+                <a:solidFill>
+                  <a:srgbClr val="141B2E"/>
+                </a:solidFill>
+                <a:latin typeface="Arial"/>
+              </a:rPr>
+              <a:t>сообщение ушло координатору, цепочка короче и дешевле без LLM</a:t>
+            </a:r>
+          </a:p>
+        </p:txBody>
+      </p:sp>
+      <p:sp>
+        <p:nvSpPr>
+          <p:cNvPr id="7" name="TextBox 6"/>
+          <p:cNvSpPr txBox="1"/>
+          <p:nvPr/>
+        </p:nvSpPr>
+        <p:spPr>
+          <a:xfrm>
+            <a:off x="3354614" y="1440146"/>
+            <a:ext cx="8002233" cy="712279"/>
+          </a:xfrm>
+          <a:prstGeom prst="rect">
+            <a:avLst/>
+          </a:prstGeom>
+          <a:noFill/>
+        </p:spPr>
+        <p:txBody>
+          <a:bodyPr wrap="square" lIns="0" rIns="0" tIns="0" bIns="0" anchor="ctr">
+            <a:spAutoFit/>
+          </a:bodyPr>
+          <a:lstStyle/>
+          <a:p>
+            <a:pPr algn="l">
+              <a:lnSpc>
+                <a:spcPts val="1437"/>
+              </a:lnSpc>
+              <a:spcAft>
+                <a:spcPts val="0"/>
+              </a:spcAft>
+            </a:pPr>
+            <a:r>
+              <a:rPr sz="1250" b="0" i="0">
+                <a:solidFill>
+                  <a:srgbClr val="141B2E"/>
+                </a:solidFill>
+                <a:latin typeface="Arial"/>
+              </a:rPr>
+              <a:t>LLM здесь был просто лишним шагом — то же самое сделал шаблон, без модели и без риска галлюцинации (</a:t>
+            </a:r>
+            <a:r>
               <a:rPr sz="1250" b="1" i="0">
                 <a:solidFill>
                   <a:srgbClr val="141B2E"/>
                 </a:solidFill>
                 <a:latin typeface="Arial"/>
               </a:rPr>
-              <a:t>что добавилось</a:t>
-            </a:r>
-          </a:p>
-        </p:txBody>
-      </p:sp>
-      <p:sp>
-        <p:nvSpPr>
-          <p:cNvPr id="7" name="TextBox 6"/>
-          <p:cNvSpPr txBox="1"/>
-          <p:nvPr/>
-        </p:nvSpPr>
-        <p:spPr>
-          <a:xfrm>
-            <a:off x="1846927" y="2528366"/>
-            <a:ext cx="9509920" cy="529717"/>
-          </a:xfrm>
-          <a:prstGeom prst="rect">
-            <a:avLst/>
-          </a:prstGeom>
-          <a:noFill/>
-        </p:spPr>
-        <p:txBody>
-          <a:bodyPr wrap="square" lIns="0" rIns="0" tIns="0" bIns="0" anchor="ctr">
-            <a:spAutoFit/>
-          </a:bodyPr>
-          <a:lstStyle/>
-          <a:p>
-            <a:pPr algn="l">
-              <a:lnSpc>
-                <a:spcPts val="1437"/>
-              </a:lnSpc>
-              <a:spcAft>
-                <a:spcPts val="0"/>
-              </a:spcAft>
-            </a:pPr>
+              <a:t>«Уведомления»</a:t>
+            </a:r>
             <a:r>
               <a:rPr sz="1250" b="0" i="0">
                 <a:solidFill>
@@ -45252,7 +44752,7 @@
                 </a:solidFill>
                 <a:latin typeface="Arial"/>
               </a:rPr>
-              <a:t>уведомление координатору шаблоном, а не моделью · проверка на повтор в два уровня · решение о возврате условием в коде, а не правилом в тексте · доставка картинки с проверкой размера перед отправкой</a:t>
+              <a:t>)</a:t>
             </a:r>
           </a:p>
         </p:txBody>
@@ -45265,7 +44765,7 @@
         </p:nvCxnSpPr>
         <p:spPr>
           <a:xfrm>
-            <a:off x="685800" y="3058083"/>
+            <a:off x="685800" y="2152425"/>
             <a:ext cx="10817352" cy="0"/>
           </a:xfrm>
           <a:prstGeom prst="line">
@@ -45300,8 +44800,8 @@
         </p:nvSpPr>
         <p:spPr>
           <a:xfrm>
-            <a:off x="685800" y="3058083"/>
-            <a:ext cx="1014823" cy="529717"/>
+            <a:off x="685800" y="2152425"/>
+            <a:ext cx="2522510" cy="712279"/>
           </a:xfrm>
           <a:prstGeom prst="rect">
             <a:avLst/>
@@ -45323,47 +44823,65 @@
               </a:spcAft>
             </a:pPr>
             <a:r>
+              <a:rPr sz="1250" b="0" i="0">
+                <a:solidFill>
+                  <a:srgbClr val="141B2E"/>
+                </a:solidFill>
+                <a:latin typeface="Arial"/>
+              </a:rPr>
+              <a:t>заявка про тот же вопрос пришла снова — обработали как новую</a:t>
+            </a:r>
+          </a:p>
+        </p:txBody>
+      </p:sp>
+      <p:sp>
+        <p:nvSpPr>
+          <p:cNvPr id="10" name="TextBox 9"/>
+          <p:cNvSpPr txBox="1"/>
+          <p:nvPr/>
+        </p:nvSpPr>
+        <p:spPr>
+          <a:xfrm>
+            <a:off x="3354614" y="2152425"/>
+            <a:ext cx="8002233" cy="712279"/>
+          </a:xfrm>
+          <a:prstGeom prst="rect">
+            <a:avLst/>
+          </a:prstGeom>
+          <a:noFill/>
+        </p:spPr>
+        <p:txBody>
+          <a:bodyPr wrap="square" lIns="0" rIns="0" tIns="0" bIns="0" anchor="ctr">
+            <a:spAutoFit/>
+          </a:bodyPr>
+          <a:lstStyle/>
+          <a:p>
+            <a:pPr algn="l">
+              <a:lnSpc>
+                <a:spcPts val="1437"/>
+              </a:lnSpc>
+              <a:spcAft>
+                <a:spcPts val="0"/>
+              </a:spcAft>
+            </a:pPr>
+            <a:r>
+              <a:rPr sz="1250" b="0" i="0">
+                <a:solidFill>
+                  <a:srgbClr val="141B2E"/>
+                </a:solidFill>
+                <a:latin typeface="Arial"/>
+              </a:rPr>
+              <a:t>без проверки на дубль каждое повторное обращение запускает цепочку с нуля; ни точное совпадение, ни похожесть по словам не решают это целиком — для переформулировки нужна проверка смыслом (</a:t>
+            </a:r>
+            <a:r>
               <a:rPr sz="1250" b="1" i="0">
                 <a:solidFill>
                   <a:srgbClr val="141B2E"/>
                 </a:solidFill>
                 <a:latin typeface="Arial"/>
               </a:rPr>
-              <a:t>как поставить</a:t>
-            </a:r>
-          </a:p>
-        </p:txBody>
-      </p:sp>
-      <p:sp>
-        <p:nvSpPr>
-          <p:cNvPr id="10" name="TextBox 9"/>
-          <p:cNvSpPr txBox="1"/>
-          <p:nvPr/>
-        </p:nvSpPr>
-        <p:spPr>
-          <a:xfrm>
-            <a:off x="1846927" y="3058083"/>
-            <a:ext cx="9509920" cy="529717"/>
-          </a:xfrm>
-          <a:prstGeom prst="rect">
-            <a:avLst/>
-          </a:prstGeom>
-          <a:noFill/>
-        </p:spPr>
-        <p:txBody>
-          <a:bodyPr wrap="square" lIns="0" rIns="0" tIns="0" bIns="0" anchor="ctr">
-            <a:spAutoFit/>
-          </a:bodyPr>
-          <a:lstStyle/>
-          <a:p>
-            <a:pPr algn="l">
-              <a:lnSpc>
-                <a:spcPts val="1437"/>
-              </a:lnSpc>
-              <a:spcAft>
-                <a:spcPts val="0"/>
-              </a:spcAft>
-            </a:pPr>
+              <a:t>«Проверка на повтор»</a:t>
+            </a:r>
             <a:r>
               <a:rPr sz="1250" b="0" i="0">
                 <a:solidFill>
@@ -45371,7 +44889,7 @@
                 </a:solidFill>
                 <a:latin typeface="Arial"/>
               </a:rPr>
-              <a:t>тот же импорт, что и в прошлый раз: меню сценария → Import from File</a:t>
+              <a:t>)</a:t>
             </a:r>
           </a:p>
         </p:txBody>
@@ -45384,7 +44902,7 @@
         </p:nvCxnSpPr>
         <p:spPr>
           <a:xfrm>
-            <a:off x="685800" y="3587800"/>
+            <a:off x="685800" y="2864705"/>
             <a:ext cx="10817352" cy="0"/>
           </a:xfrm>
           <a:prstGeom prst="line">
@@ -45419,8 +44937,8 @@
         </p:nvSpPr>
         <p:spPr>
           <a:xfrm>
-            <a:off x="685800" y="3587800"/>
-            <a:ext cx="1014823" cy="347154"/>
+            <a:off x="685800" y="2864705"/>
+            <a:ext cx="2522510" cy="712279"/>
           </a:xfrm>
           <a:prstGeom prst="rect">
             <a:avLst/>
@@ -45442,47 +44960,65 @@
               </a:spcAft>
             </a:pPr>
             <a:r>
+              <a:rPr sz="1250" b="0" i="0">
+                <a:solidFill>
+                  <a:srgbClr val="141B2E"/>
+                </a:solidFill>
+                <a:latin typeface="Arial"/>
+              </a:rPr>
+              <a:t>в промте написано «не возвращай больше суммы X»</a:t>
+            </a:r>
+          </a:p>
+        </p:txBody>
+      </p:sp>
+      <p:sp>
+        <p:nvSpPr>
+          <p:cNvPr id="13" name="TextBox 12"/>
+          <p:cNvSpPr txBox="1"/>
+          <p:nvPr/>
+        </p:nvSpPr>
+        <p:spPr>
+          <a:xfrm>
+            <a:off x="3354614" y="2864705"/>
+            <a:ext cx="8002233" cy="712279"/>
+          </a:xfrm>
+          <a:prstGeom prst="rect">
+            <a:avLst/>
+          </a:prstGeom>
+          <a:noFill/>
+        </p:spPr>
+        <p:txBody>
+          <a:bodyPr wrap="square" lIns="0" rIns="0" tIns="0" bIns="0" anchor="ctr">
+            <a:spAutoFit/>
+          </a:bodyPr>
+          <a:lstStyle/>
+          <a:p>
+            <a:pPr algn="l">
+              <a:lnSpc>
+                <a:spcPts val="1437"/>
+              </a:lnSpc>
+              <a:spcAft>
+                <a:spcPts val="0"/>
+              </a:spcAft>
+            </a:pPr>
+            <a:r>
+              <a:rPr sz="1250" b="0" i="0">
+                <a:solidFill>
+                  <a:srgbClr val="141B2E"/>
+                </a:solidFill>
+                <a:latin typeface="Arial"/>
+              </a:rPr>
+              <a:t>решение оставалось вероятностным: модель обходила правило в измеренной доле прогонов, ровно на границе условия; алгоритмический гейт — никогда (</a:t>
+            </a:r>
+            <a:r>
               <a:rPr sz="1250" b="1" i="0">
                 <a:solidFill>
                   <a:srgbClr val="141B2E"/>
                 </a:solidFill>
                 <a:latin typeface="Arial"/>
               </a:rPr>
-              <a:t>что нужно</a:t>
-            </a:r>
-          </a:p>
-        </p:txBody>
-      </p:sp>
-      <p:sp>
-        <p:nvSpPr>
-          <p:cNvPr id="13" name="TextBox 12"/>
-          <p:cNvSpPr txBox="1"/>
-          <p:nvPr/>
-        </p:nvSpPr>
-        <p:spPr>
-          <a:xfrm>
-            <a:off x="1846927" y="3587800"/>
-            <a:ext cx="9509920" cy="347154"/>
-          </a:xfrm>
-          <a:prstGeom prst="rect">
-            <a:avLst/>
-          </a:prstGeom>
-          <a:noFill/>
-        </p:spPr>
-        <p:txBody>
-          <a:bodyPr wrap="square" lIns="0" rIns="0" tIns="0" bIns="0" anchor="ctr">
-            <a:spAutoFit/>
-          </a:bodyPr>
-          <a:lstStyle/>
-          <a:p>
-            <a:pPr algn="l">
-              <a:lnSpc>
-                <a:spcPts val="1437"/>
-              </a:lnSpc>
-              <a:spcAft>
-                <a:spcPts val="0"/>
-              </a:spcAft>
-            </a:pPr>
+              <a:t>«Одобрение возврата»</a:t>
+            </a:r>
             <a:r>
               <a:rPr sz="1250" b="0" i="0">
                 <a:solidFill>
@@ -45490,7 +45026,7 @@
                 </a:solidFill>
                 <a:latin typeface="Arial"/>
               </a:rPr>
-              <a:t>свой n8n и ключ провайдера модели, как и раньше, плюс бот и токен в Telegram для уведомления и картинки</a:t>
+              <a:t>, подтверждено на масштабе компании — Zillow)</a:t>
             </a:r>
           </a:p>
         </p:txBody>
@@ -45503,7 +45039,7 @@
         </p:nvCxnSpPr>
         <p:spPr>
           <a:xfrm>
-            <a:off x="685800" y="3934955"/>
+            <a:off x="685800" y="3576984"/>
             <a:ext cx="10817352" cy="0"/>
           </a:xfrm>
           <a:prstGeom prst="line">
@@ -45538,8 +45074,8 @@
         </p:nvSpPr>
         <p:spPr>
           <a:xfrm>
-            <a:off x="685800" y="3934955"/>
-            <a:ext cx="1014823" cy="529717"/>
+            <a:off x="685800" y="3576984"/>
+            <a:ext cx="2522510" cy="529717"/>
           </a:xfrm>
           <a:prstGeom prst="rect">
             <a:avLst/>
@@ -45561,27 +45097,181 @@
               </a:spcAft>
             </a:pPr>
             <a:r>
+              <a:rPr sz="1250" b="0" i="0">
+                <a:solidFill>
+                  <a:srgbClr val="141B2E"/>
+                </a:solidFill>
+                <a:latin typeface="Arial"/>
+              </a:rPr>
+              <a:t>картинка собралась и ушла в Telegram</a:t>
+            </a:r>
+          </a:p>
+        </p:txBody>
+      </p:sp>
+      <p:sp>
+        <p:nvSpPr>
+          <p:cNvPr id="16" name="TextBox 15"/>
+          <p:cNvSpPr txBox="1"/>
+          <p:nvPr/>
+        </p:nvSpPr>
+        <p:spPr>
+          <a:xfrm>
+            <a:off x="3354614" y="3576984"/>
+            <a:ext cx="8002233" cy="529717"/>
+          </a:xfrm>
+          <a:prstGeom prst="rect">
+            <a:avLst/>
+          </a:prstGeom>
+          <a:noFill/>
+        </p:spPr>
+        <p:txBody>
+          <a:bodyPr wrap="square" lIns="0" rIns="0" tIns="0" bIns="0" anchor="ctr">
+            <a:spAutoFit/>
+          </a:bodyPr>
+          <a:lstStyle/>
+          <a:p>
+            <a:pPr algn="l">
+              <a:lnSpc>
+                <a:spcPts val="1437"/>
+              </a:lnSpc>
+              <a:spcAft>
+                <a:spcPts val="0"/>
+              </a:spcAft>
+            </a:pPr>
+            <a:r>
+              <a:rPr sz="1250" b="0" i="0">
+                <a:solidFill>
+                  <a:srgbClr val="141B2E"/>
+                </a:solidFill>
+                <a:latin typeface="Arial"/>
+              </a:rPr>
+              <a:t>до тех пор, пока помещается в лимит — большой файл уходит не полностью или не уходит вовсе, а прогон всё равно зелёный (</a:t>
+            </a:r>
+            <a:r>
               <a:rPr sz="1250" b="1" i="0">
                 <a:solidFill>
                   <a:srgbClr val="141B2E"/>
                 </a:solidFill>
                 <a:latin typeface="Arial"/>
               </a:rPr>
-              <a:t>что делать</a:t>
-            </a:r>
-          </a:p>
-        </p:txBody>
-      </p:sp>
-      <p:sp>
-        <p:nvSpPr>
-          <p:cNvPr id="16" name="TextBox 15"/>
-          <p:cNvSpPr txBox="1"/>
-          <p:nvPr/>
-        </p:nvSpPr>
-        <p:spPr>
-          <a:xfrm>
-            <a:off x="1846927" y="3934955"/>
-            <a:ext cx="9509920" cy="529717"/>
+              <a:t>«Карточка в Telegram»</a:t>
+            </a:r>
+            <a:r>
+              <a:rPr sz="1250" b="0" i="0">
+                <a:solidFill>
+                  <a:srgbClr val="141B2E"/>
+                </a:solidFill>
+                <a:latin typeface="Arial"/>
+              </a:rPr>
+              <a:t>)</a:t>
+            </a:r>
+          </a:p>
+        </p:txBody>
+      </p:sp>
+      <p:sp>
+        <p:nvSpPr>
+          <p:cNvPr id="17" name="Rounded Rectangle 16"/>
+          <p:cNvSpPr/>
+          <p:nvPr/>
+        </p:nvSpPr>
+        <p:spPr>
+          <a:xfrm>
+            <a:off x="502920" y="4533781"/>
+            <a:ext cx="11183112" cy="678942"/>
+          </a:xfrm>
+          <a:prstGeom prst="roundRect">
+            <a:avLst>
+              <a:gd name="adj" fmla="val 25000"/>
+            </a:avLst>
+          </a:prstGeom>
+          <a:solidFill>
+            <a:srgbClr val="E0F1F2"/>
+          </a:solidFill>
+          <a:ln w="13970">
+            <a:solidFill>
+              <a:srgbClr val="028090"/>
+            </a:solidFill>
+          </a:ln>
+          <a:effectLst/>
+        </p:spPr>
+        <p:style>
+          <a:lnRef idx="1">
+            <a:schemeClr val="accent1"/>
+          </a:lnRef>
+          <a:fillRef idx="3">
+            <a:schemeClr val="accent1"/>
+          </a:fillRef>
+          <a:effectRef idx="2">
+            <a:schemeClr val="accent1"/>
+          </a:effectRef>
+          <a:fontRef idx="minor">
+            <a:schemeClr val="lt1"/>
+          </a:fontRef>
+        </p:style>
+        <p:txBody>
+          <a:bodyPr rtlCol="0" anchor="ctr"/>
+          <a:lstStyle/>
+          <a:p>
+            <a:pPr algn="ctr"/>
+          </a:p>
+        </p:txBody>
+      </p:sp>
+      <p:sp>
+        <p:nvSpPr>
+          <p:cNvPr id="18" name="Rounded Rectangle 17"/>
+          <p:cNvSpPr/>
+          <p:nvPr/>
+        </p:nvSpPr>
+        <p:spPr>
+          <a:xfrm>
+            <a:off x="521208" y="4588645"/>
+            <a:ext cx="64008" cy="569214"/>
+          </a:xfrm>
+          <a:prstGeom prst="roundRect">
+            <a:avLst>
+              <a:gd name="adj" fmla="val 50000"/>
+            </a:avLst>
+          </a:prstGeom>
+          <a:solidFill>
+            <a:srgbClr val="028090"/>
+          </a:solidFill>
+          <a:ln>
+            <a:noFill/>
+          </a:ln>
+          <a:effectLst/>
+        </p:spPr>
+        <p:style>
+          <a:lnRef idx="1">
+            <a:schemeClr val="accent1"/>
+          </a:lnRef>
+          <a:fillRef idx="3">
+            <a:schemeClr val="accent1"/>
+          </a:fillRef>
+          <a:effectRef idx="2">
+            <a:schemeClr val="accent1"/>
+          </a:effectRef>
+          <a:fontRef idx="minor">
+            <a:schemeClr val="lt1"/>
+          </a:fontRef>
+        </p:style>
+        <p:txBody>
+          <a:bodyPr rtlCol="0" anchor="ctr"/>
+          <a:lstStyle/>
+          <a:p>
+            <a:pPr algn="ctr"/>
+          </a:p>
+        </p:txBody>
+      </p:sp>
+      <p:sp>
+        <p:nvSpPr>
+          <p:cNvPr id="19" name="TextBox 18"/>
+          <p:cNvSpPr txBox="1"/>
+          <p:nvPr/>
+        </p:nvSpPr>
+        <p:spPr>
+          <a:xfrm>
+            <a:off x="804672" y="4670941"/>
+            <a:ext cx="10643616" cy="404621"/>
           </a:xfrm>
           <a:prstGeom prst="rect">
             <a:avLst/>
@@ -45596,27 +45286,126 @@
           <a:p>
             <a:pPr algn="l">
               <a:lnSpc>
-                <a:spcPts val="1437"/>
-              </a:lnSpc>
-              <a:spcAft>
-                <a:spcPts val="0"/>
-              </a:spcAft>
-            </a:pPr>
-            <a:r>
-              <a:rPr sz="1250" b="0" i="0">
-                <a:solidFill>
-                  <a:srgbClr val="141B2E"/>
-                </a:solidFill>
-                <a:latin typeface="Arial"/>
-              </a:rPr>
-              <a:t>прогнать несколько заявок, включая повтор и крупную картинку, и посмотреть, где какое из четырёх решений ведёт себя не так, как на экране</a:t>
-            </a:r>
-          </a:p>
-        </p:txBody>
-      </p:sp>
-      <p:sp>
-        <p:nvSpPr>
-          <p:cNvPr id="17" name="TextBox 16"/>
+                <a:spcPts val="1593"/>
+              </a:lnSpc>
+              <a:spcAft>
+                <a:spcPts val="300"/>
+              </a:spcAft>
+            </a:pPr>
+            <a:r>
+              <a:rPr sz="1350" b="1" i="0">
+                <a:solidFill>
+                  <a:srgbClr val="141B2E"/>
+                </a:solidFill>
+                <a:latin typeface="Arial"/>
+              </a:rPr>
+              <a:t>Из четырёх новых шагов узел языковой модели пережил проверку в одном</a:t>
+            </a:r>
+            <a:r>
+              <a:rPr sz="1350" b="0" i="0">
+                <a:solidFill>
+                  <a:srgbClr val="141B2E"/>
+                </a:solidFill>
+                <a:latin typeface="Arial"/>
+              </a:rPr>
+              <a:t> — в «Одобрении возврата», и там он только извлекает сумму: решает условие в коде.</a:t>
+            </a:r>
+          </a:p>
+        </p:txBody>
+      </p:sp>
+      <p:sp>
+        <p:nvSpPr>
+          <p:cNvPr id="20" name="Rounded Rectangle 19"/>
+          <p:cNvSpPr/>
+          <p:nvPr/>
+        </p:nvSpPr>
+        <p:spPr>
+          <a:xfrm>
+            <a:off x="502920" y="5456923"/>
+            <a:ext cx="11183112" cy="822960"/>
+          </a:xfrm>
+          <a:prstGeom prst="roundRect">
+            <a:avLst>
+              <a:gd name="adj" fmla="val 10000"/>
+            </a:avLst>
+          </a:prstGeom>
+          <a:solidFill>
+            <a:srgbClr val="FEF5E0"/>
+          </a:solidFill>
+          <a:ln w="19050">
+            <a:solidFill>
+              <a:srgbClr val="F0AB00"/>
+            </a:solidFill>
+          </a:ln>
+          <a:effectLst/>
+        </p:spPr>
+        <p:style>
+          <a:lnRef idx="1">
+            <a:schemeClr val="accent1"/>
+          </a:lnRef>
+          <a:fillRef idx="3">
+            <a:schemeClr val="accent1"/>
+          </a:fillRef>
+          <a:effectRef idx="2">
+            <a:schemeClr val="accent1"/>
+          </a:effectRef>
+          <a:fontRef idx="minor">
+            <a:schemeClr val="lt1"/>
+          </a:fontRef>
+        </p:style>
+        <p:txBody>
+          <a:bodyPr rtlCol="0" anchor="ctr"/>
+          <a:lstStyle/>
+          <a:p>
+            <a:pPr algn="ctr"/>
+          </a:p>
+        </p:txBody>
+      </p:sp>
+      <p:sp>
+        <p:nvSpPr>
+          <p:cNvPr id="21" name="TextBox 20"/>
+          <p:cNvSpPr txBox="1"/>
+          <p:nvPr/>
+        </p:nvSpPr>
+        <p:spPr>
+          <a:xfrm>
+            <a:off x="722376" y="5584939"/>
+            <a:ext cx="10634472" cy="566928"/>
+          </a:xfrm>
+          <a:prstGeom prst="rect">
+            <a:avLst/>
+          </a:prstGeom>
+          <a:noFill/>
+        </p:spPr>
+        <p:txBody>
+          <a:bodyPr wrap="square" lIns="0" rIns="0" tIns="0" bIns="0" anchor="ctr">
+            <a:spAutoFit/>
+          </a:bodyPr>
+          <a:lstStyle/>
+          <a:p>
+            <a:pPr algn="ctr">
+              <a:lnSpc>
+                <a:spcPts val="2013"/>
+              </a:lnSpc>
+              <a:spcAft>
+                <a:spcPts val="300"/>
+              </a:spcAft>
+            </a:pPr>
+            <a:r>
+              <a:rPr sz="1650" b="1" i="0">
+                <a:solidFill>
+                  <a:srgbClr val="141B2E"/>
+                </a:solidFill>
+                <a:latin typeface="Arial"/>
+              </a:rPr>
+              <a:t>Где в цепочке решение принимает модель, а где должен — код, и что молчит, когда эту границу не назвали явно?</a:t>
+            </a:r>
+          </a:p>
+        </p:txBody>
+      </p:sp>
+      <p:sp>
+        <p:nvSpPr>
+          <p:cNvPr id="22" name="TextBox 21"/>
           <p:cNvSpPr txBox="1"/>
           <p:nvPr/>
         </p:nvSpPr>
@@ -45719,6 +45508,707 @@
                 </a:solidFill>
                 <a:latin typeface="Arial"/>
               </a:rPr>
+              <a:t>Что уносим с занятия</a:t>
+            </a:r>
+          </a:p>
+        </p:txBody>
+      </p:sp>
+      <p:sp>
+        <p:nvSpPr>
+          <p:cNvPr id="3" name="Rounded Rectangle 2"/>
+          <p:cNvSpPr/>
+          <p:nvPr/>
+        </p:nvSpPr>
+        <p:spPr>
+          <a:xfrm>
+            <a:off x="502920" y="2063419"/>
+            <a:ext cx="11183112" cy="2584132"/>
+          </a:xfrm>
+          <a:prstGeom prst="roundRect">
+            <a:avLst>
+              <a:gd name="adj" fmla="val 11795"/>
+            </a:avLst>
+          </a:prstGeom>
+          <a:solidFill>
+            <a:srgbClr val="FFFFFF"/>
+          </a:solidFill>
+          <a:ln w="17780">
+            <a:solidFill>
+              <a:srgbClr val="1C7293"/>
+            </a:solidFill>
+          </a:ln>
+          <a:effectLst/>
+        </p:spPr>
+        <p:style>
+          <a:lnRef idx="1">
+            <a:schemeClr val="accent1"/>
+          </a:lnRef>
+          <a:fillRef idx="3">
+            <a:schemeClr val="accent1"/>
+          </a:fillRef>
+          <a:effectRef idx="2">
+            <a:schemeClr val="accent1"/>
+          </a:effectRef>
+          <a:fontRef idx="minor">
+            <a:schemeClr val="lt1"/>
+          </a:fontRef>
+        </p:style>
+        <p:txBody>
+          <a:bodyPr rtlCol="0" anchor="ctr"/>
+          <a:lstStyle/>
+          <a:p>
+            <a:pPr algn="ctr"/>
+          </a:p>
+        </p:txBody>
+      </p:sp>
+      <p:sp>
+        <p:nvSpPr>
+          <p:cNvPr id="4" name="TextBox 3"/>
+          <p:cNvSpPr txBox="1"/>
+          <p:nvPr/>
+        </p:nvSpPr>
+        <p:spPr>
+          <a:xfrm>
+            <a:off x="685800" y="2246299"/>
+            <a:ext cx="1014823" cy="282067"/>
+          </a:xfrm>
+          <a:prstGeom prst="rect">
+            <a:avLst/>
+          </a:prstGeom>
+          <a:noFill/>
+        </p:spPr>
+        <p:txBody>
+          <a:bodyPr wrap="square" lIns="0" rIns="0" tIns="0" bIns="0" anchor="t">
+            <a:spAutoFit/>
+          </a:bodyPr>
+          <a:lstStyle/>
+          <a:p>
+            <a:pPr algn="l">
+              <a:lnSpc>
+                <a:spcPts val="1265"/>
+              </a:lnSpc>
+              <a:spcAft>
+                <a:spcPts val="0"/>
+              </a:spcAft>
+            </a:pPr>
+            <a:r>
+              <a:rPr sz="1150" b="1" i="0">
+                <a:solidFill>
+                  <a:srgbClr val="6B7685"/>
+                </a:solidFill>
+                <a:latin typeface="Arial"/>
+              </a:rPr>
+              <a:t>ФАЙЛ</a:t>
+            </a:r>
+          </a:p>
+        </p:txBody>
+      </p:sp>
+      <p:sp>
+        <p:nvSpPr>
+          <p:cNvPr id="5" name="TextBox 4"/>
+          <p:cNvSpPr txBox="1"/>
+          <p:nvPr/>
+        </p:nvSpPr>
+        <p:spPr>
+          <a:xfrm>
+            <a:off x="1846927" y="2246299"/>
+            <a:ext cx="9509920" cy="282067"/>
+          </a:xfrm>
+          <a:prstGeom prst="rect">
+            <a:avLst/>
+          </a:prstGeom>
+          <a:noFill/>
+        </p:spPr>
+        <p:txBody>
+          <a:bodyPr wrap="square" lIns="0" rIns="0" tIns="0" bIns="0" anchor="t">
+            <a:spAutoFit/>
+          </a:bodyPr>
+          <a:lstStyle/>
+          <a:p>
+            <a:pPr algn="l">
+              <a:lnSpc>
+                <a:spcPts val="1265"/>
+              </a:lnSpc>
+              <a:spcAft>
+                <a:spcPts val="0"/>
+              </a:spcAft>
+            </a:pPr>
+            <a:r>
+              <a:rPr sz="1150" b="1" i="0">
+                <a:solidFill>
+                  <a:srgbClr val="6B7685"/>
+                </a:solidFill>
+                <a:latin typeface="Arial"/>
+              </a:rPr>
+              <a:t>ПРОДОЛЖЕНИЕ </a:t>
+            </a:r>
+            <a:r>
+              <a:rPr sz="1150" b="1" i="0">
+                <a:solidFill>
+                  <a:srgbClr val="6B7685"/>
+                </a:solidFill>
+                <a:latin typeface="Consolas"/>
+              </a:rPr>
+              <a:t>STUDENT.JSON</a:t>
+            </a:r>
+            <a:r>
+              <a:rPr sz="1150" b="1" i="0">
+                <a:solidFill>
+                  <a:srgbClr val="6B7685"/>
+                </a:solidFill>
+                <a:latin typeface="Arial"/>
+              </a:rPr>
+              <a:t>, С КОТОРЫМ ВЫ ЗАКОНЧИЛИ ПРОШЛОЕ ЗАНЯТИЕ</a:t>
+            </a:r>
+          </a:p>
+        </p:txBody>
+      </p:sp>
+      <p:sp>
+        <p:nvSpPr>
+          <p:cNvPr id="6" name="TextBox 5"/>
+          <p:cNvSpPr txBox="1"/>
+          <p:nvPr/>
+        </p:nvSpPr>
+        <p:spPr>
+          <a:xfrm>
+            <a:off x="685800" y="2528366"/>
+            <a:ext cx="1014823" cy="529717"/>
+          </a:xfrm>
+          <a:prstGeom prst="rect">
+            <a:avLst/>
+          </a:prstGeom>
+          <a:noFill/>
+        </p:spPr>
+        <p:txBody>
+          <a:bodyPr wrap="square" lIns="0" rIns="0" tIns="0" bIns="0" anchor="ctr">
+            <a:spAutoFit/>
+          </a:bodyPr>
+          <a:lstStyle/>
+          <a:p>
+            <a:pPr algn="l">
+              <a:lnSpc>
+                <a:spcPts val="1437"/>
+              </a:lnSpc>
+              <a:spcAft>
+                <a:spcPts val="0"/>
+              </a:spcAft>
+            </a:pPr>
+            <a:r>
+              <a:rPr sz="1250" b="1" i="0">
+                <a:solidFill>
+                  <a:srgbClr val="141B2E"/>
+                </a:solidFill>
+                <a:latin typeface="Arial"/>
+              </a:rPr>
+              <a:t>что добавилось</a:t>
+            </a:r>
+          </a:p>
+        </p:txBody>
+      </p:sp>
+      <p:sp>
+        <p:nvSpPr>
+          <p:cNvPr id="7" name="TextBox 6"/>
+          <p:cNvSpPr txBox="1"/>
+          <p:nvPr/>
+        </p:nvSpPr>
+        <p:spPr>
+          <a:xfrm>
+            <a:off x="1846927" y="2528366"/>
+            <a:ext cx="9509920" cy="529717"/>
+          </a:xfrm>
+          <a:prstGeom prst="rect">
+            <a:avLst/>
+          </a:prstGeom>
+          <a:noFill/>
+        </p:spPr>
+        <p:txBody>
+          <a:bodyPr wrap="square" lIns="0" rIns="0" tIns="0" bIns="0" anchor="ctr">
+            <a:spAutoFit/>
+          </a:bodyPr>
+          <a:lstStyle/>
+          <a:p>
+            <a:pPr algn="l">
+              <a:lnSpc>
+                <a:spcPts val="1437"/>
+              </a:lnSpc>
+              <a:spcAft>
+                <a:spcPts val="0"/>
+              </a:spcAft>
+            </a:pPr>
+            <a:r>
+              <a:rPr sz="1250" b="0" i="0">
+                <a:solidFill>
+                  <a:srgbClr val="141B2E"/>
+                </a:solidFill>
+                <a:latin typeface="Arial"/>
+              </a:rPr>
+              <a:t>уведомление координатору шаблоном, а не моделью · проверка на повтор в два уровня · решение о возврате условием в коде, а не правилом в тексте · доставка картинки с проверкой размера перед отправкой</a:t>
+            </a:r>
+          </a:p>
+        </p:txBody>
+      </p:sp>
+      <p:cxnSp>
+        <p:nvCxnSpPr>
+          <p:cNvPr id="8" name="Connector 7"/>
+          <p:cNvCxnSpPr/>
+          <p:nvPr/>
+        </p:nvCxnSpPr>
+        <p:spPr>
+          <a:xfrm>
+            <a:off x="685800" y="3058083"/>
+            <a:ext cx="10817352" cy="0"/>
+          </a:xfrm>
+          <a:prstGeom prst="line">
+            <a:avLst/>
+          </a:prstGeom>
+          <a:ln w="9525">
+            <a:solidFill>
+              <a:srgbClr val="E5EAF0"/>
+            </a:solidFill>
+          </a:ln>
+        </p:spPr>
+        <p:style>
+          <a:lnRef idx="2">
+            <a:schemeClr val="accent1"/>
+          </a:lnRef>
+          <a:fillRef idx="0">
+            <a:schemeClr val="accent1"/>
+          </a:fillRef>
+          <a:effectRef idx="1">
+            <a:schemeClr val="accent1"/>
+          </a:effectRef>
+          <a:fontRef idx="minor">
+            <a:schemeClr val="tx1"/>
+          </a:fontRef>
+        </p:style>
+      </p:cxnSp>
+      <p:sp>
+        <p:nvSpPr>
+          <p:cNvPr id="9" name="TextBox 8"/>
+          <p:cNvSpPr txBox="1"/>
+          <p:nvPr/>
+        </p:nvSpPr>
+        <p:spPr>
+          <a:xfrm>
+            <a:off x="685800" y="3058083"/>
+            <a:ext cx="1014823" cy="529717"/>
+          </a:xfrm>
+          <a:prstGeom prst="rect">
+            <a:avLst/>
+          </a:prstGeom>
+          <a:noFill/>
+        </p:spPr>
+        <p:txBody>
+          <a:bodyPr wrap="square" lIns="0" rIns="0" tIns="0" bIns="0" anchor="ctr">
+            <a:spAutoFit/>
+          </a:bodyPr>
+          <a:lstStyle/>
+          <a:p>
+            <a:pPr algn="l">
+              <a:lnSpc>
+                <a:spcPts val="1437"/>
+              </a:lnSpc>
+              <a:spcAft>
+                <a:spcPts val="0"/>
+              </a:spcAft>
+            </a:pPr>
+            <a:r>
+              <a:rPr sz="1250" b="1" i="0">
+                <a:solidFill>
+                  <a:srgbClr val="141B2E"/>
+                </a:solidFill>
+                <a:latin typeface="Arial"/>
+              </a:rPr>
+              <a:t>как поставить</a:t>
+            </a:r>
+          </a:p>
+        </p:txBody>
+      </p:sp>
+      <p:sp>
+        <p:nvSpPr>
+          <p:cNvPr id="10" name="TextBox 9"/>
+          <p:cNvSpPr txBox="1"/>
+          <p:nvPr/>
+        </p:nvSpPr>
+        <p:spPr>
+          <a:xfrm>
+            <a:off x="1846927" y="3058083"/>
+            <a:ext cx="9509920" cy="529717"/>
+          </a:xfrm>
+          <a:prstGeom prst="rect">
+            <a:avLst/>
+          </a:prstGeom>
+          <a:noFill/>
+        </p:spPr>
+        <p:txBody>
+          <a:bodyPr wrap="square" lIns="0" rIns="0" tIns="0" bIns="0" anchor="ctr">
+            <a:spAutoFit/>
+          </a:bodyPr>
+          <a:lstStyle/>
+          <a:p>
+            <a:pPr algn="l">
+              <a:lnSpc>
+                <a:spcPts val="1437"/>
+              </a:lnSpc>
+              <a:spcAft>
+                <a:spcPts val="0"/>
+              </a:spcAft>
+            </a:pPr>
+            <a:r>
+              <a:rPr sz="1250" b="0" i="0">
+                <a:solidFill>
+                  <a:srgbClr val="141B2E"/>
+                </a:solidFill>
+                <a:latin typeface="Arial"/>
+              </a:rPr>
+              <a:t>тот же импорт, что и в прошлый раз: меню сценария → Import from File</a:t>
+            </a:r>
+          </a:p>
+        </p:txBody>
+      </p:sp>
+      <p:cxnSp>
+        <p:nvCxnSpPr>
+          <p:cNvPr id="11" name="Connector 10"/>
+          <p:cNvCxnSpPr/>
+          <p:nvPr/>
+        </p:nvCxnSpPr>
+        <p:spPr>
+          <a:xfrm>
+            <a:off x="685800" y="3587800"/>
+            <a:ext cx="10817352" cy="0"/>
+          </a:xfrm>
+          <a:prstGeom prst="line">
+            <a:avLst/>
+          </a:prstGeom>
+          <a:ln w="9525">
+            <a:solidFill>
+              <a:srgbClr val="E5EAF0"/>
+            </a:solidFill>
+          </a:ln>
+        </p:spPr>
+        <p:style>
+          <a:lnRef idx="2">
+            <a:schemeClr val="accent1"/>
+          </a:lnRef>
+          <a:fillRef idx="0">
+            <a:schemeClr val="accent1"/>
+          </a:fillRef>
+          <a:effectRef idx="1">
+            <a:schemeClr val="accent1"/>
+          </a:effectRef>
+          <a:fontRef idx="minor">
+            <a:schemeClr val="tx1"/>
+          </a:fontRef>
+        </p:style>
+      </p:cxnSp>
+      <p:sp>
+        <p:nvSpPr>
+          <p:cNvPr id="12" name="TextBox 11"/>
+          <p:cNvSpPr txBox="1"/>
+          <p:nvPr/>
+        </p:nvSpPr>
+        <p:spPr>
+          <a:xfrm>
+            <a:off x="685800" y="3587800"/>
+            <a:ext cx="1014823" cy="347154"/>
+          </a:xfrm>
+          <a:prstGeom prst="rect">
+            <a:avLst/>
+          </a:prstGeom>
+          <a:noFill/>
+        </p:spPr>
+        <p:txBody>
+          <a:bodyPr wrap="square" lIns="0" rIns="0" tIns="0" bIns="0" anchor="ctr">
+            <a:spAutoFit/>
+          </a:bodyPr>
+          <a:lstStyle/>
+          <a:p>
+            <a:pPr algn="l">
+              <a:lnSpc>
+                <a:spcPts val="1437"/>
+              </a:lnSpc>
+              <a:spcAft>
+                <a:spcPts val="0"/>
+              </a:spcAft>
+            </a:pPr>
+            <a:r>
+              <a:rPr sz="1250" b="1" i="0">
+                <a:solidFill>
+                  <a:srgbClr val="141B2E"/>
+                </a:solidFill>
+                <a:latin typeface="Arial"/>
+              </a:rPr>
+              <a:t>что нужно</a:t>
+            </a:r>
+          </a:p>
+        </p:txBody>
+      </p:sp>
+      <p:sp>
+        <p:nvSpPr>
+          <p:cNvPr id="13" name="TextBox 12"/>
+          <p:cNvSpPr txBox="1"/>
+          <p:nvPr/>
+        </p:nvSpPr>
+        <p:spPr>
+          <a:xfrm>
+            <a:off x="1846927" y="3587800"/>
+            <a:ext cx="9509920" cy="347154"/>
+          </a:xfrm>
+          <a:prstGeom prst="rect">
+            <a:avLst/>
+          </a:prstGeom>
+          <a:noFill/>
+        </p:spPr>
+        <p:txBody>
+          <a:bodyPr wrap="square" lIns="0" rIns="0" tIns="0" bIns="0" anchor="ctr">
+            <a:spAutoFit/>
+          </a:bodyPr>
+          <a:lstStyle/>
+          <a:p>
+            <a:pPr algn="l">
+              <a:lnSpc>
+                <a:spcPts val="1437"/>
+              </a:lnSpc>
+              <a:spcAft>
+                <a:spcPts val="0"/>
+              </a:spcAft>
+            </a:pPr>
+            <a:r>
+              <a:rPr sz="1250" b="0" i="0">
+                <a:solidFill>
+                  <a:srgbClr val="141B2E"/>
+                </a:solidFill>
+                <a:latin typeface="Arial"/>
+              </a:rPr>
+              <a:t>свой n8n и ключ провайдера модели, как и раньше, плюс бот и токен в Telegram для уведомления и картинки</a:t>
+            </a:r>
+          </a:p>
+        </p:txBody>
+      </p:sp>
+      <p:cxnSp>
+        <p:nvCxnSpPr>
+          <p:cNvPr id="14" name="Connector 13"/>
+          <p:cNvCxnSpPr/>
+          <p:nvPr/>
+        </p:nvCxnSpPr>
+        <p:spPr>
+          <a:xfrm>
+            <a:off x="685800" y="3934955"/>
+            <a:ext cx="10817352" cy="0"/>
+          </a:xfrm>
+          <a:prstGeom prst="line">
+            <a:avLst/>
+          </a:prstGeom>
+          <a:ln w="9525">
+            <a:solidFill>
+              <a:srgbClr val="E5EAF0"/>
+            </a:solidFill>
+          </a:ln>
+        </p:spPr>
+        <p:style>
+          <a:lnRef idx="2">
+            <a:schemeClr val="accent1"/>
+          </a:lnRef>
+          <a:fillRef idx="0">
+            <a:schemeClr val="accent1"/>
+          </a:fillRef>
+          <a:effectRef idx="1">
+            <a:schemeClr val="accent1"/>
+          </a:effectRef>
+          <a:fontRef idx="minor">
+            <a:schemeClr val="tx1"/>
+          </a:fontRef>
+        </p:style>
+      </p:cxnSp>
+      <p:sp>
+        <p:nvSpPr>
+          <p:cNvPr id="15" name="TextBox 14"/>
+          <p:cNvSpPr txBox="1"/>
+          <p:nvPr/>
+        </p:nvSpPr>
+        <p:spPr>
+          <a:xfrm>
+            <a:off x="685800" y="3934955"/>
+            <a:ext cx="1014823" cy="529717"/>
+          </a:xfrm>
+          <a:prstGeom prst="rect">
+            <a:avLst/>
+          </a:prstGeom>
+          <a:noFill/>
+        </p:spPr>
+        <p:txBody>
+          <a:bodyPr wrap="square" lIns="0" rIns="0" tIns="0" bIns="0" anchor="ctr">
+            <a:spAutoFit/>
+          </a:bodyPr>
+          <a:lstStyle/>
+          <a:p>
+            <a:pPr algn="l">
+              <a:lnSpc>
+                <a:spcPts val="1437"/>
+              </a:lnSpc>
+              <a:spcAft>
+                <a:spcPts val="0"/>
+              </a:spcAft>
+            </a:pPr>
+            <a:r>
+              <a:rPr sz="1250" b="1" i="0">
+                <a:solidFill>
+                  <a:srgbClr val="141B2E"/>
+                </a:solidFill>
+                <a:latin typeface="Arial"/>
+              </a:rPr>
+              <a:t>что делать</a:t>
+            </a:r>
+          </a:p>
+        </p:txBody>
+      </p:sp>
+      <p:sp>
+        <p:nvSpPr>
+          <p:cNvPr id="16" name="TextBox 15"/>
+          <p:cNvSpPr txBox="1"/>
+          <p:nvPr/>
+        </p:nvSpPr>
+        <p:spPr>
+          <a:xfrm>
+            <a:off x="1846927" y="3934955"/>
+            <a:ext cx="9509920" cy="529717"/>
+          </a:xfrm>
+          <a:prstGeom prst="rect">
+            <a:avLst/>
+          </a:prstGeom>
+          <a:noFill/>
+        </p:spPr>
+        <p:txBody>
+          <a:bodyPr wrap="square" lIns="0" rIns="0" tIns="0" bIns="0" anchor="ctr">
+            <a:spAutoFit/>
+          </a:bodyPr>
+          <a:lstStyle/>
+          <a:p>
+            <a:pPr algn="l">
+              <a:lnSpc>
+                <a:spcPts val="1437"/>
+              </a:lnSpc>
+              <a:spcAft>
+                <a:spcPts val="0"/>
+              </a:spcAft>
+            </a:pPr>
+            <a:r>
+              <a:rPr sz="1250" b="0" i="0">
+                <a:solidFill>
+                  <a:srgbClr val="141B2E"/>
+                </a:solidFill>
+                <a:latin typeface="Arial"/>
+              </a:rPr>
+              <a:t>прогнать несколько заявок, включая повтор и крупную картинку, и посмотреть, где какое из четырёх решений ведёт себя не так, как на экране</a:t>
+            </a:r>
+          </a:p>
+        </p:txBody>
+      </p:sp>
+      <p:sp>
+        <p:nvSpPr>
+          <p:cNvPr id="17" name="TextBox 16"/>
+          <p:cNvSpPr txBox="1"/>
+          <p:nvPr/>
+        </p:nvSpPr>
+        <p:spPr>
+          <a:xfrm>
+            <a:off x="10957255" y="6437376"/>
+            <a:ext cx="914400" cy="274320"/>
+          </a:xfrm>
+          <a:prstGeom prst="rect">
+            <a:avLst/>
+          </a:prstGeom>
+          <a:noFill/>
+        </p:spPr>
+        <p:txBody>
+          <a:bodyPr wrap="square" lIns="0" rIns="0" tIns="0" bIns="0" anchor="t">
+            <a:spAutoFit/>
+          </a:bodyPr>
+          <a:lstStyle/>
+          <a:p>
+            <a:pPr algn="r">
+              <a:lnSpc>
+                <a:spcPts val="1238"/>
+              </a:lnSpc>
+              <a:spcAft>
+                <a:spcPts val="0"/>
+              </a:spcAft>
+            </a:pPr>
+            <a:r>
+              <a:rPr sz="1050" b="0" i="0">
+                <a:solidFill>
+                  <a:srgbClr val="6B7685"/>
+                </a:solidFill>
+                <a:latin typeface="Arial"/>
+              </a:rPr>
+              <a:t>64</a:t>
+            </a:r>
+          </a:p>
+        </p:txBody>
+      </p:sp>
+    </p:spTree>
+  </p:cSld>
+  <p:clrMapOvr>
+    <a:masterClrMapping/>
+  </p:clrMapOvr>
+</p:sld>
+</file>
+
+<file path=ppt/slides/slide65.xml><?xml version="1.0" encoding="utf-8"?>
+<p:sld xmlns:a="http://schemas.openxmlformats.org/drawingml/2006/main" xmlns:p="http://schemas.openxmlformats.org/presentationml/2006/main" xmlns:r="http://schemas.openxmlformats.org/officeDocument/2006/relationships">
+  <p:cSld>
+    <p:bg>
+      <p:bgPr>
+        <a:solidFill>
+          <a:srgbClr val="FFFFFF"/>
+        </a:solidFill>
+        <a:effectLst/>
+      </p:bgPr>
+    </p:bg>
+    <p:spTree>
+      <p:nvGrpSpPr>
+        <p:cNvPr id="1" name=""/>
+        <p:cNvGrpSpPr/>
+        <p:nvPr/>
+      </p:nvGrpSpPr>
+      <p:grpSpPr/>
+      <p:sp>
+        <p:nvSpPr>
+          <p:cNvPr id="2" name="TextBox 1"/>
+          <p:cNvSpPr txBox="1"/>
+          <p:nvPr/>
+        </p:nvSpPr>
+        <p:spPr>
+          <a:xfrm>
+            <a:off x="502920" y="310896"/>
+            <a:ext cx="11183112" cy="431291"/>
+          </a:xfrm>
+          <a:prstGeom prst="rect">
+            <a:avLst/>
+          </a:prstGeom>
+          <a:noFill/>
+        </p:spPr>
+        <p:txBody>
+          <a:bodyPr wrap="square" lIns="0" rIns="0" tIns="0" bIns="0" anchor="t">
+            <a:spAutoFit/>
+          </a:bodyPr>
+          <a:lstStyle/>
+          <a:p>
+            <a:pPr algn="l">
+              <a:lnSpc>
+                <a:spcPts val="2963"/>
+              </a:lnSpc>
+              <a:spcAft>
+                <a:spcPts val="0"/>
+              </a:spcAft>
+            </a:pPr>
+            <a:r>
+              <a:rPr sz="2600" b="1" i="0">
+                <a:solidFill>
+                  <a:srgbClr val="141B2E"/>
+                </a:solidFill>
+                <a:latin typeface="Arial"/>
+              </a:rPr>
               <a:t>Что дальше</a:t>
             </a:r>
           </a:p>
@@ -45882,7 +46372,7 @@
                 </a:solidFill>
                 <a:latin typeface="Arial"/>
               </a:rPr>
-              <a:t>64</a:t>
+              <a:t>65</a:t>
             </a:r>
           </a:p>
         </p:txBody>
